--- a/formations/output/biostat-module-3-associations.pptx
+++ b/formations/output/biostat-module-3-associations.pptx
@@ -4326,7 +4326,7 @@
         <p:spPr>
           <a:xfrm>
             <a:off x="640080" y="1828800"/>
-            <a:ext cx="10972800" cy="1280160"/>
+            <a:ext cx="10972800" cy="914400"/>
           </a:xfrm>
           <a:prstGeom prst="rect">
             <a:avLst/>
@@ -4353,7 +4353,7 @@
                 <a:ea typeface="Calibri" pitchFamily="34" charset="-122"/>
                 <a:cs typeface="Calibri" pitchFamily="34" charset="-120"/>
               </a:rPr>
-              <a:t>Une fois ton modèle posé, le jury va te demander : est-il bon ? Trois indicateurs à rapporter — discrimination (AUC), calibration (Hosmer-Lemeshow), explication (R² de McFadden ou Nagelkerke).</a:t>
+              <a:t>Une fois ton modèle posé, le jury va demander : est-il bon ? Trois indicateurs — discrimination (AUC), calibration (Hosmer-Lemeshow), explication (R² de McFadden ou Nagelkerke).</a:t>
             </a:r>
             <a:endParaRPr lang="en-US" sz="1300" dirty="0"/>
           </a:p>
@@ -4367,12 +4367,12 @@
         </p:nvSpPr>
         <p:spPr>
           <a:xfrm>
-            <a:off x="640080" y="3246120"/>
-            <a:ext cx="5486400" cy="2606040"/>
+            <a:off x="640080" y="2926080"/>
+            <a:ext cx="3931920" cy="2926080"/>
           </a:xfrm>
           <a:prstGeom prst="roundRect">
             <a:avLst>
-              <a:gd name="adj" fmla="val 1754"/>
+              <a:gd name="adj" fmla="val 1563"/>
             </a:avLst>
           </a:prstGeom>
           <a:solidFill>
@@ -4394,7 +4394,7 @@
         </p:nvSpPr>
         <p:spPr>
           <a:xfrm>
-            <a:off x="777240" y="3355848"/>
+            <a:off x="777240" y="3035808"/>
             <a:ext cx="365760" cy="256032"/>
           </a:xfrm>
           <a:prstGeom prst="roundRect">
@@ -4416,7 +4416,7 @@
         </p:nvSpPr>
         <p:spPr>
           <a:xfrm>
-            <a:off x="777240" y="3355848"/>
+            <a:off x="777240" y="3035808"/>
             <a:ext cx="365760" cy="256032"/>
           </a:xfrm>
           <a:prstGeom prst="rect">
@@ -4455,8 +4455,8 @@
         </p:nvSpPr>
         <p:spPr>
           <a:xfrm>
-            <a:off x="822960" y="3703320"/>
-            <a:ext cx="5212080" cy="2057400"/>
+            <a:off x="822960" y="3383280"/>
+            <a:ext cx="3657600" cy="2377440"/>
           </a:xfrm>
           <a:prstGeom prst="rect">
             <a:avLst/>
@@ -4483,7 +4483,7 @@
                 <a:ea typeface="Consolas" pitchFamily="34" charset="-122"/>
                 <a:cs typeface="Consolas" pitchFamily="34" charset="-120"/>
               </a:rPr>
-              <a:t># Discrimination : aire sous ROC</a:t>
+              <a:t># Discrimination</a:t>
             </a:r>
             <a:endParaRPr lang="en-US" sz="1050" dirty="0"/>
           </a:p>
@@ -4523,7 +4523,7 @@
                 <a:ea typeface="Consolas" pitchFamily="34" charset="-122"/>
                 <a:cs typeface="Consolas" pitchFamily="34" charset="-120"/>
               </a:rPr>
-              <a:t>proba &lt;- predict(modele, type = "response")</a:t>
+              <a:t>proba &lt;- predict(modele,</a:t>
             </a:r>
             <a:endParaRPr lang="en-US" sz="1050" dirty="0"/>
           </a:p>
@@ -4543,6 +4543,26 @@
                 <a:ea typeface="Consolas" pitchFamily="34" charset="-122"/>
                 <a:cs typeface="Consolas" pitchFamily="34" charset="-120"/>
               </a:rPr>
+              <a:t>                  type = "response")</a:t>
+            </a:r>
+            <a:endParaRPr lang="en-US" sz="1050" dirty="0"/>
+          </a:p>
+          <a:p>
+            <a:pPr indent="0" marL="0">
+              <a:lnSpc>
+                <a:spcPct val="140000"/>
+              </a:lnSpc>
+              <a:buNone/>
+            </a:pPr>
+            <a:r>
+              <a:rPr lang="en-US" sz="1050" dirty="0">
+                <a:solidFill>
+                  <a:srgbClr val="E8EAED"/>
+                </a:solidFill>
+                <a:latin typeface="Consolas" pitchFamily="34" charset="0"/>
+                <a:ea typeface="Consolas" pitchFamily="34" charset="-122"/>
+                <a:cs typeface="Consolas" pitchFamily="34" charset="-120"/>
+              </a:rPr>
               <a:t>auc(donnees$maladie, proba)</a:t>
             </a:r>
             <a:endParaRPr lang="en-US" sz="1050" dirty="0"/>
@@ -4554,6 +4574,17 @@
               </a:lnSpc>
               <a:buNone/>
             </a:pPr>
+            <a:r>
+              <a:rPr lang="en-US" sz="1050" dirty="0">
+                <a:solidFill>
+                  <a:srgbClr val="E8EAED"/>
+                </a:solidFill>
+                <a:latin typeface="Consolas" pitchFamily="34" charset="0"/>
+                <a:ea typeface="Consolas" pitchFamily="34" charset="-122"/>
+                <a:cs typeface="Consolas" pitchFamily="34" charset="-120"/>
+              </a:rPr>
+              <a:t>roc_obj &lt;- roc(donnees$maladie,</a:t>
+            </a:r>
             <a:endParaRPr lang="en-US" sz="1050" dirty="0"/>
           </a:p>
           <a:p>
@@ -4572,7 +4603,7 @@
                 <a:ea typeface="Consolas" pitchFamily="34" charset="-122"/>
                 <a:cs typeface="Consolas" pitchFamily="34" charset="-120"/>
               </a:rPr>
-              <a:t># Calibration : Hosmer-Lemeshow</a:t>
+              <a:t>               proba)</a:t>
             </a:r>
             <a:endParaRPr lang="en-US" sz="1050" dirty="0"/>
           </a:p>
@@ -4592,6 +4623,55 @@
                 <a:ea typeface="Consolas" pitchFamily="34" charset="-122"/>
                 <a:cs typeface="Consolas" pitchFamily="34" charset="-120"/>
               </a:rPr>
+              <a:t>plot(roc_obj)</a:t>
+            </a:r>
+            <a:endParaRPr lang="en-US" sz="1050" dirty="0"/>
+          </a:p>
+          <a:p>
+            <a:pPr indent="0" marL="0">
+              <a:lnSpc>
+                <a:spcPct val="140000"/>
+              </a:lnSpc>
+              <a:buNone/>
+            </a:pPr>
+            <a:endParaRPr lang="en-US" sz="1050" dirty="0"/>
+          </a:p>
+          <a:p>
+            <a:pPr indent="0" marL="0">
+              <a:lnSpc>
+                <a:spcPct val="140000"/>
+              </a:lnSpc>
+              <a:buNone/>
+            </a:pPr>
+            <a:r>
+              <a:rPr lang="en-US" sz="1050" dirty="0">
+                <a:solidFill>
+                  <a:srgbClr val="E8EAED"/>
+                </a:solidFill>
+                <a:latin typeface="Consolas" pitchFamily="34" charset="0"/>
+                <a:ea typeface="Consolas" pitchFamily="34" charset="-122"/>
+                <a:cs typeface="Consolas" pitchFamily="34" charset="-120"/>
+              </a:rPr>
+              <a:t># Calibration</a:t>
+            </a:r>
+            <a:endParaRPr lang="en-US" sz="1050" dirty="0"/>
+          </a:p>
+          <a:p>
+            <a:pPr indent="0" marL="0">
+              <a:lnSpc>
+                <a:spcPct val="140000"/>
+              </a:lnSpc>
+              <a:buNone/>
+            </a:pPr>
+            <a:r>
+              <a:rPr lang="en-US" sz="1050" dirty="0">
+                <a:solidFill>
+                  <a:srgbClr val="E8EAED"/>
+                </a:solidFill>
+                <a:latin typeface="Consolas" pitchFamily="34" charset="0"/>
+                <a:ea typeface="Consolas" pitchFamily="34" charset="-122"/>
+                <a:cs typeface="Consolas" pitchFamily="34" charset="-120"/>
+              </a:rPr>
               <a:t>library(ResourceSelection)</a:t>
             </a:r>
             <a:endParaRPr lang="en-US" sz="1050" dirty="0"/>
@@ -4612,7 +4692,7 @@
                 <a:ea typeface="Consolas" pitchFamily="34" charset="-122"/>
                 <a:cs typeface="Consolas" pitchFamily="34" charset="-120"/>
               </a:rPr>
-              <a:t>hoslem.test(donnees$maladie, proba, g = 10)</a:t>
+              <a:t>hoslem.test(donnees$maladie,</a:t>
             </a:r>
             <a:endParaRPr lang="en-US" sz="1050" dirty="0"/>
           </a:p>
@@ -4623,15 +4703,6 @@
               </a:lnSpc>
               <a:buNone/>
             </a:pPr>
-            <a:endParaRPr lang="en-US" sz="1050" dirty="0"/>
-          </a:p>
-          <a:p>
-            <a:pPr indent="0" marL="0">
-              <a:lnSpc>
-                <a:spcPct val="140000"/>
-              </a:lnSpc>
-              <a:buNone/>
-            </a:pPr>
             <a:r>
               <a:rPr lang="en-US" sz="1050" dirty="0">
                 <a:solidFill>
@@ -4641,47 +4712,7 @@
                 <a:ea typeface="Consolas" pitchFamily="34" charset="-122"/>
                 <a:cs typeface="Consolas" pitchFamily="34" charset="-120"/>
               </a:rPr>
-              <a:t># Pseudo-R²</a:t>
-            </a:r>
-            <a:endParaRPr lang="en-US" sz="1050" dirty="0"/>
-          </a:p>
-          <a:p>
-            <a:pPr indent="0" marL="0">
-              <a:lnSpc>
-                <a:spcPct val="140000"/>
-              </a:lnSpc>
-              <a:buNone/>
-            </a:pPr>
-            <a:r>
-              <a:rPr lang="en-US" sz="1050" dirty="0">
-                <a:solidFill>
-                  <a:srgbClr val="E8EAED"/>
-                </a:solidFill>
-                <a:latin typeface="Consolas" pitchFamily="34" charset="0"/>
-                <a:ea typeface="Consolas" pitchFamily="34" charset="-122"/>
-                <a:cs typeface="Consolas" pitchFamily="34" charset="-120"/>
-              </a:rPr>
-              <a:t>library(DescTools)</a:t>
-            </a:r>
-            <a:endParaRPr lang="en-US" sz="1050" dirty="0"/>
-          </a:p>
-          <a:p>
-            <a:pPr indent="0" marL="0">
-              <a:lnSpc>
-                <a:spcPct val="140000"/>
-              </a:lnSpc>
-              <a:buNone/>
-            </a:pPr>
-            <a:r>
-              <a:rPr lang="en-US" sz="1050" dirty="0">
-                <a:solidFill>
-                  <a:srgbClr val="E8EAED"/>
-                </a:solidFill>
-                <a:latin typeface="Consolas" pitchFamily="34" charset="0"/>
-                <a:ea typeface="Consolas" pitchFamily="34" charset="-122"/>
-                <a:cs typeface="Consolas" pitchFamily="34" charset="-120"/>
-              </a:rPr>
-              <a:t>PseudoR2(modele, which = "Nagelkerke")</a:t>
+              <a:t>            proba, g = 10)</a:t>
             </a:r>
             <a:endParaRPr lang="en-US" sz="1050" dirty="0"/>
           </a:p>
@@ -4695,12 +4726,12 @@
         </p:nvSpPr>
         <p:spPr>
           <a:xfrm>
-            <a:off x="6400800" y="3246120"/>
-            <a:ext cx="5330952" cy="2606040"/>
+            <a:off x="4709160" y="2926080"/>
+            <a:ext cx="2560320" cy="2926080"/>
           </a:xfrm>
           <a:prstGeom prst="roundRect">
             <a:avLst>
-              <a:gd name="adj" fmla="val 1754"/>
+              <a:gd name="adj" fmla="val 1786"/>
             </a:avLst>
           </a:prstGeom>
           <a:solidFill>
@@ -4722,7 +4753,7 @@
         </p:nvSpPr>
         <p:spPr>
           <a:xfrm>
-            <a:off x="6537960" y="3337560"/>
+            <a:off x="4846320" y="3017520"/>
             <a:ext cx="914400" cy="228600"/>
           </a:xfrm>
           <a:prstGeom prst="rect">
@@ -4761,8 +4792,8 @@
         </p:nvSpPr>
         <p:spPr>
           <a:xfrm>
-            <a:off x="6583680" y="3611880"/>
-            <a:ext cx="5056632" cy="2148840"/>
+            <a:off x="4892040" y="3291840"/>
+            <a:ext cx="2286000" cy="2468880"/>
           </a:xfrm>
           <a:prstGeom prst="rect">
             <a:avLst/>
@@ -4789,7 +4820,7 @@
                 <a:ea typeface="Consolas" pitchFamily="34" charset="-122"/>
                 <a:cs typeface="Consolas" pitchFamily="34" charset="-120"/>
               </a:rPr>
-              <a:t>AUC: 0.782</a:t>
+              <a:t>AUC = 0.782</a:t>
             </a:r>
             <a:endParaRPr lang="en-US" sz="1050" dirty="0"/>
           </a:p>
@@ -4809,7 +4840,7 @@
                 <a:ea typeface="Consolas" pitchFamily="34" charset="-122"/>
                 <a:cs typeface="Consolas" pitchFamily="34" charset="-120"/>
               </a:rPr>
-              <a:t>(95% CI: 0.71 — 0.85)</a:t>
+              <a:t>IC95%</a:t>
             </a:r>
             <a:endParaRPr lang="en-US" sz="1050" dirty="0"/>
           </a:p>
@@ -4829,7 +4860,7 @@
                 <a:ea typeface="Consolas" pitchFamily="34" charset="-122"/>
                 <a:cs typeface="Consolas" pitchFamily="34" charset="-120"/>
               </a:rPr>
-              <a:t>→ Discrimination correcte</a:t>
+              <a:t>[0.71, 0.85]</a:t>
             </a:r>
             <a:endParaRPr lang="en-US" sz="1050" dirty="0"/>
           </a:p>
@@ -4849,7 +4880,7 @@
                 <a:ea typeface="Consolas" pitchFamily="34" charset="-122"/>
                 <a:cs typeface="Consolas" pitchFamily="34" charset="-120"/>
               </a:rPr>
-              <a:t>  (&gt; 0.7 acceptable, &gt; 0.8 bon)</a:t>
+              <a:t>→ discrimination</a:t>
             </a:r>
             <a:endParaRPr lang="en-US" sz="1050" dirty="0"/>
           </a:p>
@@ -4860,6 +4891,17 @@
               </a:lnSpc>
               <a:buNone/>
             </a:pPr>
+            <a:r>
+              <a:rPr lang="en-US" sz="1050" dirty="0">
+                <a:solidFill>
+                  <a:srgbClr val="FFFFFF"/>
+                </a:solidFill>
+                <a:latin typeface="Consolas" pitchFamily="34" charset="0"/>
+                <a:ea typeface="Consolas" pitchFamily="34" charset="-122"/>
+                <a:cs typeface="Consolas" pitchFamily="34" charset="-120"/>
+              </a:rPr>
+              <a:t>  correcte.</a:t>
+            </a:r>
             <a:endParaRPr lang="en-US" sz="1050" dirty="0"/>
           </a:p>
           <a:p>
@@ -4869,6 +4911,15 @@
               </a:lnSpc>
               <a:buNone/>
             </a:pPr>
+            <a:endParaRPr lang="en-US" sz="1050" dirty="0"/>
+          </a:p>
+          <a:p>
+            <a:pPr indent="0" marL="0">
+              <a:lnSpc>
+                <a:spcPct val="130000"/>
+              </a:lnSpc>
+              <a:buNone/>
+            </a:pPr>
             <a:r>
               <a:rPr lang="en-US" sz="1050" dirty="0">
                 <a:solidFill>
@@ -4878,7 +4929,7 @@
                 <a:ea typeface="Consolas" pitchFamily="34" charset="-122"/>
                 <a:cs typeface="Consolas" pitchFamily="34" charset="-120"/>
               </a:rPr>
-              <a:t>Hosmer-Lemeshow X² = 8.4</a:t>
+              <a:t>HL X² = 8.4</a:t>
             </a:r>
             <a:endParaRPr lang="en-US" sz="1050" dirty="0"/>
           </a:p>
@@ -4898,7 +4949,7 @@
                 <a:ea typeface="Consolas" pitchFamily="34" charset="-122"/>
                 <a:cs typeface="Consolas" pitchFamily="34" charset="-120"/>
               </a:rPr>
-              <a:t>df = 8, p = 0.39</a:t>
+              <a:t>p = 0.39</a:t>
             </a:r>
             <a:endParaRPr lang="en-US" sz="1050" dirty="0"/>
           </a:p>
@@ -4918,7 +4969,7 @@
                 <a:ea typeface="Consolas" pitchFamily="34" charset="-122"/>
                 <a:cs typeface="Consolas" pitchFamily="34" charset="-120"/>
               </a:rPr>
-              <a:t>→ p &gt; 0.05 = calibration OK</a:t>
+              <a:t>→ calibration OK</a:t>
             </a:r>
             <a:endParaRPr lang="en-US" sz="1050" dirty="0"/>
           </a:p>
@@ -4938,44 +4989,564 @@
                 <a:ea typeface="Consolas" pitchFamily="34" charset="-122"/>
                 <a:cs typeface="Consolas" pitchFamily="34" charset="-120"/>
               </a:rPr>
-              <a:t>  (paradoxalement, p élevé = bon)</a:t>
-            </a:r>
-            <a:endParaRPr lang="en-US" sz="1050" dirty="0"/>
-          </a:p>
-          <a:p>
-            <a:pPr indent="0" marL="0">
-              <a:lnSpc>
-                <a:spcPct val="130000"/>
-              </a:lnSpc>
-              <a:buNone/>
-            </a:pPr>
-            <a:endParaRPr lang="en-US" sz="1050" dirty="0"/>
-          </a:p>
-          <a:p>
-            <a:pPr indent="0" marL="0">
-              <a:lnSpc>
-                <a:spcPct val="130000"/>
-              </a:lnSpc>
-              <a:buNone/>
-            </a:pPr>
-            <a:r>
-              <a:rPr lang="en-US" sz="1050" dirty="0">
-                <a:solidFill>
-                  <a:srgbClr val="FFFFFF"/>
-                </a:solidFill>
-                <a:latin typeface="Consolas" pitchFamily="34" charset="0"/>
-                <a:ea typeface="Consolas" pitchFamily="34" charset="-122"/>
-                <a:cs typeface="Consolas" pitchFamily="34" charset="-120"/>
-              </a:rPr>
-              <a:t>Nagelkerke R² = 0.31</a:t>
-            </a:r>
-            <a:endParaRPr lang="en-US" sz="1050" dirty="0"/>
-          </a:p>
-        </p:txBody>
-      </p:sp>
-      <p:sp>
-        <p:nvSpPr>
-          <p:cNvPr id="14" name="Text 12"/>
+              <a:t>  (p &gt; 0.05 = bon).</a:t>
+            </a:r>
+            <a:endParaRPr lang="en-US" sz="1050" dirty="0"/>
+          </a:p>
+        </p:txBody>
+      </p:sp>
+      <p:sp>
+        <p:nvSpPr>
+          <p:cNvPr id="14" name="Shape 12"/>
+          <p:cNvSpPr/>
+          <p:nvPr/>
+        </p:nvSpPr>
+        <p:spPr>
+          <a:xfrm>
+            <a:off x="7406640" y="2926080"/>
+            <a:ext cx="4325112" cy="2926080"/>
+          </a:xfrm>
+          <a:prstGeom prst="rect">
+            <a:avLst/>
+          </a:prstGeom>
+          <a:solidFill>
+            <a:srgbClr val="FFFFFF"/>
+          </a:solidFill>
+          <a:ln w="6350">
+            <a:solidFill>
+              <a:srgbClr val="D6CFB8"/>
+            </a:solidFill>
+            <a:prstDash val="solid"/>
+          </a:ln>
+        </p:spPr>
+      </p:sp>
+      <p:sp>
+        <p:nvSpPr>
+          <p:cNvPr id="15" name="Text 13"/>
+          <p:cNvSpPr/>
+          <p:nvPr/>
+        </p:nvSpPr>
+        <p:spPr>
+          <a:xfrm>
+            <a:off x="7498080" y="2962656"/>
+            <a:ext cx="4142232" cy="228600"/>
+          </a:xfrm>
+          <a:prstGeom prst="rect">
+            <a:avLst/>
+          </a:prstGeom>
+          <a:noFill/>
+          <a:ln/>
+        </p:spPr>
+        <p:txBody>
+          <a:bodyPr wrap="square" rtlCol="0" anchor="ctr"/>
+          <a:lstStyle/>
+          <a:p>
+            <a:pPr algn="ctr" indent="0" marL="0">
+              <a:buNone/>
+            </a:pPr>
+            <a:r>
+              <a:rPr lang="en-US" sz="900" b="1" dirty="0">
+                <a:solidFill>
+                  <a:srgbClr val="15233F"/>
+                </a:solidFill>
+                <a:latin typeface="Calibri" pitchFamily="34" charset="0"/>
+                <a:ea typeface="Calibri" pitchFamily="34" charset="-122"/>
+                <a:cs typeface="Calibri" pitchFamily="34" charset="-120"/>
+              </a:rPr>
+              <a:t>Courbe ROC · modèle logistique</a:t>
+            </a:r>
+            <a:endParaRPr lang="en-US" sz="900" dirty="0"/>
+          </a:p>
+        </p:txBody>
+      </p:sp>
+      <p:sp>
+        <p:nvSpPr>
+          <p:cNvPr id="16" name="Shape 14"/>
+          <p:cNvSpPr/>
+          <p:nvPr/>
+        </p:nvSpPr>
+        <p:spPr>
+          <a:xfrm>
+            <a:off x="7818120" y="5486400"/>
+            <a:ext cx="3776472" cy="0"/>
+          </a:xfrm>
+          <a:prstGeom prst="line">
+            <a:avLst/>
+          </a:prstGeom>
+          <a:noFill/>
+          <a:ln w="9525">
+            <a:solidFill>
+              <a:srgbClr val="0E1729"/>
+            </a:solidFill>
+            <a:prstDash val="solid"/>
+          </a:ln>
+        </p:spPr>
+      </p:sp>
+      <p:sp>
+        <p:nvSpPr>
+          <p:cNvPr id="17" name="Shape 15"/>
+          <p:cNvSpPr/>
+          <p:nvPr/>
+        </p:nvSpPr>
+        <p:spPr>
+          <a:xfrm>
+            <a:off x="7818120" y="3246120"/>
+            <a:ext cx="0" cy="2240280"/>
+          </a:xfrm>
+          <a:prstGeom prst="line">
+            <a:avLst/>
+          </a:prstGeom>
+          <a:noFill/>
+          <a:ln w="9525">
+            <a:solidFill>
+              <a:srgbClr val="0E1729"/>
+            </a:solidFill>
+            <a:prstDash val="solid"/>
+          </a:ln>
+        </p:spPr>
+      </p:sp>
+      <p:sp>
+        <p:nvSpPr>
+          <p:cNvPr id="18" name="Text 16"/>
+          <p:cNvSpPr/>
+          <p:nvPr/>
+        </p:nvSpPr>
+        <p:spPr>
+          <a:xfrm>
+            <a:off x="7818120" y="5577840"/>
+            <a:ext cx="3776472" cy="201168"/>
+          </a:xfrm>
+          <a:prstGeom prst="rect">
+            <a:avLst/>
+          </a:prstGeom>
+          <a:noFill/>
+          <a:ln/>
+        </p:spPr>
+        <p:txBody>
+          <a:bodyPr wrap="square" rtlCol="0" anchor="ctr"/>
+          <a:lstStyle/>
+          <a:p>
+            <a:pPr algn="ctr" indent="0" marL="0">
+              <a:buNone/>
+            </a:pPr>
+            <a:r>
+              <a:rPr lang="en-US" sz="800" i="1" dirty="0">
+                <a:solidFill>
+                  <a:srgbClr val="6B7280"/>
+                </a:solidFill>
+                <a:latin typeface="Calibri" pitchFamily="34" charset="0"/>
+                <a:ea typeface="Calibri" pitchFamily="34" charset="-122"/>
+                <a:cs typeface="Calibri" pitchFamily="34" charset="-120"/>
+              </a:rPr>
+              <a:t>1 − Spécificité</a:t>
+            </a:r>
+            <a:endParaRPr lang="en-US" sz="800" dirty="0"/>
+          </a:p>
+        </p:txBody>
+      </p:sp>
+      <p:sp>
+        <p:nvSpPr>
+          <p:cNvPr id="19" name="Text 17"/>
+          <p:cNvSpPr/>
+          <p:nvPr/>
+        </p:nvSpPr>
+        <p:spPr>
+          <a:xfrm rot="-5400000">
+            <a:off x="7424928" y="3246120"/>
+            <a:ext cx="365760" cy="2240280"/>
+          </a:xfrm>
+          <a:prstGeom prst="rect">
+            <a:avLst/>
+          </a:prstGeom>
+          <a:noFill/>
+          <a:ln/>
+        </p:spPr>
+        <p:txBody>
+          <a:bodyPr wrap="square" rtlCol="0" anchor="ctr"/>
+          <a:lstStyle/>
+          <a:p>
+            <a:pPr algn="l" indent="0" marL="0">
+              <a:buNone/>
+            </a:pPr>
+            <a:r>
+              <a:rPr lang="en-US" sz="800" i="1" dirty="0">
+                <a:solidFill>
+                  <a:srgbClr val="6B7280"/>
+                </a:solidFill>
+                <a:latin typeface="Calibri" pitchFamily="34" charset="0"/>
+                <a:ea typeface="Calibri" pitchFamily="34" charset="-122"/>
+                <a:cs typeface="Calibri" pitchFamily="34" charset="-120"/>
+              </a:rPr>
+              <a:t>Sensibilité</a:t>
+            </a:r>
+            <a:endParaRPr lang="en-US" sz="800" dirty="0"/>
+          </a:p>
+        </p:txBody>
+      </p:sp>
+      <p:sp>
+        <p:nvSpPr>
+          <p:cNvPr id="20" name="Shape 18"/>
+          <p:cNvSpPr/>
+          <p:nvPr/>
+        </p:nvSpPr>
+        <p:spPr>
+          <a:xfrm>
+            <a:off x="7818120" y="5486400"/>
+            <a:ext cx="3776472" cy="-2240280"/>
+          </a:xfrm>
+          <a:prstGeom prst="line">
+            <a:avLst/>
+          </a:prstGeom>
+          <a:noFill/>
+          <a:ln w="9525">
+            <a:solidFill>
+              <a:srgbClr val="6B7280"/>
+            </a:solidFill>
+            <a:prstDash val="dash"/>
+          </a:ln>
+        </p:spPr>
+      </p:sp>
+      <p:sp>
+        <p:nvSpPr>
+          <p:cNvPr id="21" name="Shape 19"/>
+          <p:cNvSpPr/>
+          <p:nvPr/>
+        </p:nvSpPr>
+        <p:spPr>
+          <a:xfrm>
+            <a:off x="7818120" y="5486400"/>
+            <a:ext cx="151059" cy="-403250"/>
+          </a:xfrm>
+          <a:prstGeom prst="line">
+            <a:avLst/>
+          </a:prstGeom>
+          <a:noFill/>
+          <a:ln w="25400">
+            <a:solidFill>
+              <a:srgbClr val="F09042"/>
+            </a:solidFill>
+            <a:prstDash val="solid"/>
+          </a:ln>
+        </p:spPr>
+      </p:sp>
+      <p:sp>
+        <p:nvSpPr>
+          <p:cNvPr id="22" name="Shape 20"/>
+          <p:cNvSpPr/>
+          <p:nvPr/>
+        </p:nvSpPr>
+        <p:spPr>
+          <a:xfrm>
+            <a:off x="7969179" y="5083150"/>
+            <a:ext cx="151059" cy="-313639"/>
+          </a:xfrm>
+          <a:prstGeom prst="line">
+            <a:avLst/>
+          </a:prstGeom>
+          <a:noFill/>
+          <a:ln w="25400">
+            <a:solidFill>
+              <a:srgbClr val="F09042"/>
+            </a:solidFill>
+            <a:prstDash val="solid"/>
+          </a:ln>
+        </p:spPr>
+      </p:sp>
+      <p:sp>
+        <p:nvSpPr>
+          <p:cNvPr id="23" name="Shape 21"/>
+          <p:cNvSpPr/>
+          <p:nvPr/>
+        </p:nvSpPr>
+        <p:spPr>
+          <a:xfrm>
+            <a:off x="8120238" y="4769510"/>
+            <a:ext cx="151059" cy="-291236"/>
+          </a:xfrm>
+          <a:prstGeom prst="line">
+            <a:avLst/>
+          </a:prstGeom>
+          <a:noFill/>
+          <a:ln w="25400">
+            <a:solidFill>
+              <a:srgbClr val="F09042"/>
+            </a:solidFill>
+            <a:prstDash val="solid"/>
+          </a:ln>
+        </p:spPr>
+      </p:sp>
+      <p:sp>
+        <p:nvSpPr>
+          <p:cNvPr id="24" name="Shape 22"/>
+          <p:cNvSpPr/>
+          <p:nvPr/>
+        </p:nvSpPr>
+        <p:spPr>
+          <a:xfrm>
+            <a:off x="8271297" y="4478274"/>
+            <a:ext cx="226588" cy="-291236"/>
+          </a:xfrm>
+          <a:prstGeom prst="line">
+            <a:avLst/>
+          </a:prstGeom>
+          <a:noFill/>
+          <a:ln w="25400">
+            <a:solidFill>
+              <a:srgbClr val="F09042"/>
+            </a:solidFill>
+            <a:prstDash val="solid"/>
+          </a:ln>
+        </p:spPr>
+      </p:sp>
+      <p:sp>
+        <p:nvSpPr>
+          <p:cNvPr id="25" name="Shape 23"/>
+          <p:cNvSpPr/>
+          <p:nvPr/>
+        </p:nvSpPr>
+        <p:spPr>
+          <a:xfrm>
+            <a:off x="8497885" y="4187038"/>
+            <a:ext cx="264353" cy="-224028"/>
+          </a:xfrm>
+          <a:prstGeom prst="line">
+            <a:avLst/>
+          </a:prstGeom>
+          <a:noFill/>
+          <a:ln w="25400">
+            <a:solidFill>
+              <a:srgbClr val="F09042"/>
+            </a:solidFill>
+            <a:prstDash val="solid"/>
+          </a:ln>
+        </p:spPr>
+      </p:sp>
+      <p:sp>
+        <p:nvSpPr>
+          <p:cNvPr id="26" name="Shape 24"/>
+          <p:cNvSpPr/>
+          <p:nvPr/>
+        </p:nvSpPr>
+        <p:spPr>
+          <a:xfrm>
+            <a:off x="8762238" y="3963010"/>
+            <a:ext cx="302118" cy="-179222"/>
+          </a:xfrm>
+          <a:prstGeom prst="line">
+            <a:avLst/>
+          </a:prstGeom>
+          <a:noFill/>
+          <a:ln w="25400">
+            <a:solidFill>
+              <a:srgbClr val="F09042"/>
+            </a:solidFill>
+            <a:prstDash val="solid"/>
+          </a:ln>
+        </p:spPr>
+      </p:sp>
+      <p:sp>
+        <p:nvSpPr>
+          <p:cNvPr id="27" name="Shape 25"/>
+          <p:cNvSpPr/>
+          <p:nvPr/>
+        </p:nvSpPr>
+        <p:spPr>
+          <a:xfrm>
+            <a:off x="9064356" y="3783787"/>
+            <a:ext cx="339882" cy="-134417"/>
+          </a:xfrm>
+          <a:prstGeom prst="line">
+            <a:avLst/>
+          </a:prstGeom>
+          <a:noFill/>
+          <a:ln w="25400">
+            <a:solidFill>
+              <a:srgbClr val="F09042"/>
+            </a:solidFill>
+            <a:prstDash val="solid"/>
+          </a:ln>
+        </p:spPr>
+      </p:sp>
+      <p:sp>
+        <p:nvSpPr>
+          <p:cNvPr id="28" name="Shape 26"/>
+          <p:cNvSpPr/>
+          <p:nvPr/>
+        </p:nvSpPr>
+        <p:spPr>
+          <a:xfrm>
+            <a:off x="9404238" y="3649370"/>
+            <a:ext cx="377647" cy="-112014"/>
+          </a:xfrm>
+          <a:prstGeom prst="line">
+            <a:avLst/>
+          </a:prstGeom>
+          <a:noFill/>
+          <a:ln w="25400">
+            <a:solidFill>
+              <a:srgbClr val="F09042"/>
+            </a:solidFill>
+            <a:prstDash val="solid"/>
+          </a:ln>
+        </p:spPr>
+      </p:sp>
+      <p:sp>
+        <p:nvSpPr>
+          <p:cNvPr id="29" name="Shape 27"/>
+          <p:cNvSpPr/>
+          <p:nvPr/>
+        </p:nvSpPr>
+        <p:spPr>
+          <a:xfrm>
+            <a:off x="9781885" y="3537356"/>
+            <a:ext cx="377647" cy="-89611"/>
+          </a:xfrm>
+          <a:prstGeom prst="line">
+            <a:avLst/>
+          </a:prstGeom>
+          <a:noFill/>
+          <a:ln w="25400">
+            <a:solidFill>
+              <a:srgbClr val="F09042"/>
+            </a:solidFill>
+            <a:prstDash val="solid"/>
+          </a:ln>
+        </p:spPr>
+      </p:sp>
+      <p:sp>
+        <p:nvSpPr>
+          <p:cNvPr id="30" name="Shape 28"/>
+          <p:cNvSpPr/>
+          <p:nvPr/>
+        </p:nvSpPr>
+        <p:spPr>
+          <a:xfrm>
+            <a:off x="10159533" y="3447745"/>
+            <a:ext cx="377647" cy="-67208"/>
+          </a:xfrm>
+          <a:prstGeom prst="line">
+            <a:avLst/>
+          </a:prstGeom>
+          <a:noFill/>
+          <a:ln w="25400">
+            <a:solidFill>
+              <a:srgbClr val="F09042"/>
+            </a:solidFill>
+            <a:prstDash val="solid"/>
+          </a:ln>
+        </p:spPr>
+      </p:sp>
+      <p:sp>
+        <p:nvSpPr>
+          <p:cNvPr id="31" name="Shape 29"/>
+          <p:cNvSpPr/>
+          <p:nvPr/>
+        </p:nvSpPr>
+        <p:spPr>
+          <a:xfrm>
+            <a:off x="10537180" y="3380537"/>
+            <a:ext cx="377647" cy="-44806"/>
+          </a:xfrm>
+          <a:prstGeom prst="line">
+            <a:avLst/>
+          </a:prstGeom>
+          <a:noFill/>
+          <a:ln w="25400">
+            <a:solidFill>
+              <a:srgbClr val="F09042"/>
+            </a:solidFill>
+            <a:prstDash val="solid"/>
+          </a:ln>
+        </p:spPr>
+      </p:sp>
+      <p:sp>
+        <p:nvSpPr>
+          <p:cNvPr id="32" name="Shape 30"/>
+          <p:cNvSpPr/>
+          <p:nvPr/>
+        </p:nvSpPr>
+        <p:spPr>
+          <a:xfrm>
+            <a:off x="10914827" y="3335731"/>
+            <a:ext cx="302118" cy="-44806"/>
+          </a:xfrm>
+          <a:prstGeom prst="line">
+            <a:avLst/>
+          </a:prstGeom>
+          <a:noFill/>
+          <a:ln w="25400">
+            <a:solidFill>
+              <a:srgbClr val="F09042"/>
+            </a:solidFill>
+            <a:prstDash val="solid"/>
+          </a:ln>
+        </p:spPr>
+      </p:sp>
+      <p:sp>
+        <p:nvSpPr>
+          <p:cNvPr id="33" name="Shape 31"/>
+          <p:cNvSpPr/>
+          <p:nvPr/>
+        </p:nvSpPr>
+        <p:spPr>
+          <a:xfrm>
+            <a:off x="11216945" y="3290926"/>
+            <a:ext cx="377647" cy="-44806"/>
+          </a:xfrm>
+          <a:prstGeom prst="line">
+            <a:avLst/>
+          </a:prstGeom>
+          <a:noFill/>
+          <a:ln w="25400">
+            <a:solidFill>
+              <a:srgbClr val="F09042"/>
+            </a:solidFill>
+            <a:prstDash val="solid"/>
+          </a:ln>
+        </p:spPr>
+      </p:sp>
+      <p:sp>
+        <p:nvSpPr>
+          <p:cNvPr id="34" name="Text 32"/>
+          <p:cNvSpPr/>
+          <p:nvPr/>
+        </p:nvSpPr>
+        <p:spPr>
+          <a:xfrm>
+            <a:off x="9895180" y="4478274"/>
+            <a:ext cx="1510589" cy="274320"/>
+          </a:xfrm>
+          <a:prstGeom prst="rect">
+            <a:avLst/>
+          </a:prstGeom>
+          <a:noFill/>
+          <a:ln/>
+        </p:spPr>
+        <p:txBody>
+          <a:bodyPr wrap="square" rtlCol="0" anchor="ctr"/>
+          <a:lstStyle/>
+          <a:p>
+            <a:pPr algn="ctr" indent="0" marL="0">
+              <a:buNone/>
+            </a:pPr>
+            <a:r>
+              <a:rPr lang="en-US" sz="1100" b="1" dirty="0">
+                <a:solidFill>
+                  <a:srgbClr val="F09042"/>
+                </a:solidFill>
+                <a:latin typeface="Calibri" pitchFamily="34" charset="0"/>
+                <a:ea typeface="Calibri" pitchFamily="34" charset="-122"/>
+                <a:cs typeface="Calibri" pitchFamily="34" charset="-120"/>
+              </a:rPr>
+              <a:t>AUC = 0.78</a:t>
+            </a:r>
+            <a:endParaRPr lang="en-US" sz="1100" dirty="0"/>
+          </a:p>
+        </p:txBody>
+      </p:sp>
+      <p:sp>
+        <p:nvSpPr>
+          <p:cNvPr id="35" name="Text 33"/>
           <p:cNvSpPr/>
           <p:nvPr/>
         </p:nvSpPr>
@@ -9851,7 +10422,7 @@
         <p:spPr>
           <a:xfrm>
             <a:off x="640080" y="1828800"/>
-            <a:ext cx="10972800" cy="1280160"/>
+            <a:ext cx="10972800" cy="914400"/>
           </a:xfrm>
           <a:prstGeom prst="rect">
             <a:avLst/>
@@ -9878,7 +10449,7 @@
                 <a:ea typeface="Calibri" pitchFamily="34" charset="-122"/>
                 <a:cs typeface="Calibri" pitchFamily="34" charset="-120"/>
               </a:rPr>
-              <a:t>Pearson mesure une relation linéaire entre deux variables continues normales. Spearman mesure une relation monotone, sur les rangs — robuste aux données non-normales et aux valeurs extrêmes. Aucun des deux ne dit que X cause Y.</a:t>
+              <a:t>Pearson mesure une relation linéaire entre deux continues normales. Spearman mesure une relation monotone sur les rangs — robuste aux données non-normales et aux valeurs extrêmes. Aucun des deux ne dit que X cause Y.</a:t>
             </a:r>
             <a:endParaRPr lang="en-US" sz="1300" dirty="0"/>
           </a:p>
@@ -9892,12 +10463,12 @@
         </p:nvSpPr>
         <p:spPr>
           <a:xfrm>
-            <a:off x="640080" y="3246120"/>
-            <a:ext cx="5486400" cy="2606040"/>
+            <a:off x="640080" y="2926080"/>
+            <a:ext cx="3931920" cy="2926080"/>
           </a:xfrm>
           <a:prstGeom prst="roundRect">
             <a:avLst>
-              <a:gd name="adj" fmla="val 1754"/>
+              <a:gd name="adj" fmla="val 1563"/>
             </a:avLst>
           </a:prstGeom>
           <a:solidFill>
@@ -9919,7 +10490,7 @@
         </p:nvSpPr>
         <p:spPr>
           <a:xfrm>
-            <a:off x="777240" y="3355848"/>
+            <a:off x="777240" y="3035808"/>
             <a:ext cx="365760" cy="256032"/>
           </a:xfrm>
           <a:prstGeom prst="roundRect">
@@ -9941,7 +10512,7 @@
         </p:nvSpPr>
         <p:spPr>
           <a:xfrm>
-            <a:off x="777240" y="3355848"/>
+            <a:off x="777240" y="3035808"/>
             <a:ext cx="365760" cy="256032"/>
           </a:xfrm>
           <a:prstGeom prst="rect">
@@ -9980,8 +10551,8 @@
         </p:nvSpPr>
         <p:spPr>
           <a:xfrm>
-            <a:off x="822960" y="3703320"/>
-            <a:ext cx="5212080" cy="2057400"/>
+            <a:off x="822960" y="3383280"/>
+            <a:ext cx="3657600" cy="2377440"/>
           </a:xfrm>
           <a:prstGeom prst="rect">
             <a:avLst/>
@@ -10008,7 +10579,7 @@
                 <a:ea typeface="Consolas" pitchFamily="34" charset="-122"/>
                 <a:cs typeface="Consolas" pitchFamily="34" charset="-120"/>
               </a:rPr>
-              <a:t># Pearson (linéaire, normales)</a:t>
+              <a:t># Pearson (linéaire,</a:t>
             </a:r>
             <a:endParaRPr lang="en-US" sz="1050" dirty="0"/>
           </a:p>
@@ -10028,6 +10599,26 @@
                 <a:ea typeface="Consolas" pitchFamily="34" charset="-122"/>
                 <a:cs typeface="Consolas" pitchFamily="34" charset="-120"/>
               </a:rPr>
+              <a:t># normales)</a:t>
+            </a:r>
+            <a:endParaRPr lang="en-US" sz="1050" dirty="0"/>
+          </a:p>
+          <a:p>
+            <a:pPr indent="0" marL="0">
+              <a:lnSpc>
+                <a:spcPct val="140000"/>
+              </a:lnSpc>
+              <a:buNone/>
+            </a:pPr>
+            <a:r>
+              <a:rPr lang="en-US" sz="1050" dirty="0">
+                <a:solidFill>
+                  <a:srgbClr val="E8EAED"/>
+                </a:solidFill>
+                <a:latin typeface="Consolas" pitchFamily="34" charset="0"/>
+                <a:ea typeface="Consolas" pitchFamily="34" charset="-122"/>
+                <a:cs typeface="Consolas" pitchFamily="34" charset="-120"/>
+              </a:rPr>
               <a:t>cor.test(donnees$age,</a:t>
             </a:r>
             <a:endParaRPr lang="en-US" sz="1050" dirty="0"/>
@@ -10097,7 +10688,7 @@
                 <a:ea typeface="Consolas" pitchFamily="34" charset="-122"/>
                 <a:cs typeface="Consolas" pitchFamily="34" charset="-120"/>
               </a:rPr>
-              <a:t># Spearman (rangs, non-normales</a:t>
+              <a:t># Spearman (rangs,</a:t>
             </a:r>
             <a:endParaRPr lang="en-US" sz="1050" dirty="0"/>
           </a:p>
@@ -10117,7 +10708,7 @@
                 <a:ea typeface="Consolas" pitchFamily="34" charset="-122"/>
                 <a:cs typeface="Consolas" pitchFamily="34" charset="-120"/>
               </a:rPr>
-              <a:t># ou relation monotone)</a:t>
+              <a:t># non-normales)</a:t>
             </a:r>
             <a:endParaRPr lang="en-US" sz="1050" dirty="0"/>
           </a:p>
@@ -10191,12 +10782,12 @@
         </p:nvSpPr>
         <p:spPr>
           <a:xfrm>
-            <a:off x="6400800" y="3246120"/>
-            <a:ext cx="5330952" cy="2606040"/>
+            <a:off x="4709160" y="2926080"/>
+            <a:ext cx="2560320" cy="2926080"/>
           </a:xfrm>
           <a:prstGeom prst="roundRect">
             <a:avLst>
-              <a:gd name="adj" fmla="val 1754"/>
+              <a:gd name="adj" fmla="val 1786"/>
             </a:avLst>
           </a:prstGeom>
           <a:solidFill>
@@ -10218,7 +10809,7 @@
         </p:nvSpPr>
         <p:spPr>
           <a:xfrm>
-            <a:off x="6537960" y="3337560"/>
+            <a:off x="4846320" y="3017520"/>
             <a:ext cx="914400" cy="228600"/>
           </a:xfrm>
           <a:prstGeom prst="rect">
@@ -10257,8 +10848,8 @@
         </p:nvSpPr>
         <p:spPr>
           <a:xfrm>
-            <a:off x="6583680" y="3611880"/>
-            <a:ext cx="5056632" cy="2148840"/>
+            <a:off x="4892040" y="3291840"/>
+            <a:ext cx="2286000" cy="2468880"/>
           </a:xfrm>
           <a:prstGeom prst="rect">
             <a:avLst/>
@@ -10285,7 +10876,7 @@
                 <a:ea typeface="Consolas" pitchFamily="34" charset="-122"/>
                 <a:cs typeface="Consolas" pitchFamily="34" charset="-120"/>
               </a:rPr>
-              <a:t>Pearson's product-moment</a:t>
+              <a:t>Pearson</a:t>
             </a:r>
             <a:endParaRPr lang="en-US" sz="1050" dirty="0"/>
           </a:p>
@@ -10305,7 +10896,7 @@
                 <a:ea typeface="Consolas" pitchFamily="34" charset="-122"/>
                 <a:cs typeface="Consolas" pitchFamily="34" charset="-120"/>
               </a:rPr>
-              <a:t>   correlation</a:t>
+              <a:t>r = 0.49</a:t>
             </a:r>
             <a:endParaRPr lang="en-US" sz="1050" dirty="0"/>
           </a:p>
@@ -10325,7 +10916,7 @@
                 <a:ea typeface="Consolas" pitchFamily="34" charset="-122"/>
                 <a:cs typeface="Consolas" pitchFamily="34" charset="-120"/>
               </a:rPr>
-              <a:t>t = 4.21, df = 58</a:t>
+              <a:t>IC95%</a:t>
             </a:r>
             <a:endParaRPr lang="en-US" sz="1050" dirty="0"/>
           </a:p>
@@ -10345,7 +10936,7 @@
                 <a:ea typeface="Consolas" pitchFamily="34" charset="-122"/>
                 <a:cs typeface="Consolas" pitchFamily="34" charset="-120"/>
               </a:rPr>
-              <a:t>p-value = 8.7e-05</a:t>
+              <a:t>[0.30, 0.65]</a:t>
             </a:r>
             <a:endParaRPr lang="en-US" sz="1050" dirty="0"/>
           </a:p>
@@ -10365,7 +10956,7 @@
                 <a:ea typeface="Consolas" pitchFamily="34" charset="-122"/>
                 <a:cs typeface="Consolas" pitchFamily="34" charset="-120"/>
               </a:rPr>
-              <a:t>IC95% [0.30, 0.65]</a:t>
+              <a:t>p = 8.7e-05</a:t>
             </a:r>
             <a:endParaRPr lang="en-US" sz="1050" dirty="0"/>
           </a:p>
@@ -10376,6 +10967,15 @@
               </a:lnSpc>
               <a:buNone/>
             </a:pPr>
+            <a:endParaRPr lang="en-US" sz="1050" dirty="0"/>
+          </a:p>
+          <a:p>
+            <a:pPr indent="0" marL="0">
+              <a:lnSpc>
+                <a:spcPct val="130000"/>
+              </a:lnSpc>
+              <a:buNone/>
+            </a:pPr>
             <a:r>
               <a:rPr lang="en-US" sz="1050" dirty="0">
                 <a:solidFill>
@@ -10385,7 +10985,7 @@
                 <a:ea typeface="Consolas" pitchFamily="34" charset="-122"/>
                 <a:cs typeface="Consolas" pitchFamily="34" charset="-120"/>
               </a:rPr>
-              <a:t>r = 0.49</a:t>
+              <a:t>Spearman</a:t>
             </a:r>
             <a:endParaRPr lang="en-US" sz="1050" dirty="0"/>
           </a:p>
@@ -10396,6 +10996,17 @@
               </a:lnSpc>
               <a:buNone/>
             </a:pPr>
+            <a:r>
+              <a:rPr lang="en-US" sz="1050" dirty="0">
+                <a:solidFill>
+                  <a:srgbClr val="FFFFFF"/>
+                </a:solidFill>
+                <a:latin typeface="Consolas" pitchFamily="34" charset="0"/>
+                <a:ea typeface="Consolas" pitchFamily="34" charset="-122"/>
+                <a:cs typeface="Consolas" pitchFamily="34" charset="-120"/>
+              </a:rPr>
+              <a:t>rho = 0.46</a:t>
+            </a:r>
             <a:endParaRPr lang="en-US" sz="1050" dirty="0"/>
           </a:p>
           <a:p>
@@ -10414,64 +11025,666 @@
                 <a:ea typeface="Consolas" pitchFamily="34" charset="-122"/>
                 <a:cs typeface="Consolas" pitchFamily="34" charset="-120"/>
               </a:rPr>
-              <a:t>Spearman's rank correlation</a:t>
-            </a:r>
-            <a:endParaRPr lang="en-US" sz="1050" dirty="0"/>
-          </a:p>
-          <a:p>
-            <a:pPr indent="0" marL="0">
-              <a:lnSpc>
-                <a:spcPct val="130000"/>
-              </a:lnSpc>
-              <a:buNone/>
-            </a:pPr>
-            <a:r>
-              <a:rPr lang="en-US" sz="1050" dirty="0">
-                <a:solidFill>
-                  <a:srgbClr val="FFFFFF"/>
-                </a:solidFill>
-                <a:latin typeface="Consolas" pitchFamily="34" charset="0"/>
-                <a:ea typeface="Consolas" pitchFamily="34" charset="-122"/>
-                <a:cs typeface="Consolas" pitchFamily="34" charset="-120"/>
-              </a:rPr>
-              <a:t>rho = 0.46, p = 0.0002</a:t>
-            </a:r>
-            <a:endParaRPr lang="en-US" sz="1050" dirty="0"/>
-          </a:p>
-          <a:p>
-            <a:pPr indent="0" marL="0">
-              <a:lnSpc>
-                <a:spcPct val="130000"/>
-              </a:lnSpc>
-              <a:buNone/>
-            </a:pPr>
-            <a:endParaRPr lang="en-US" sz="1050" dirty="0"/>
-          </a:p>
-          <a:p>
-            <a:pPr indent="0" marL="0">
-              <a:lnSpc>
-                <a:spcPct val="130000"/>
-              </a:lnSpc>
-              <a:buNone/>
-            </a:pPr>
-            <a:r>
-              <a:rPr lang="en-US" sz="1050" dirty="0">
-                <a:solidFill>
-                  <a:srgbClr val="FFFFFF"/>
-                </a:solidFill>
-                <a:latin typeface="Consolas" pitchFamily="34" charset="0"/>
-                <a:ea typeface="Consolas" pitchFamily="34" charset="-122"/>
-                <a:cs typeface="Consolas" pitchFamily="34" charset="-120"/>
-              </a:rPr>
-              <a:t>→ Lien modéré et significatif.</a:t>
-            </a:r>
-            <a:endParaRPr lang="en-US" sz="1050" dirty="0"/>
-          </a:p>
-        </p:txBody>
-      </p:sp>
-      <p:sp>
-        <p:nvSpPr>
-          <p:cNvPr id="14" name="Text 12"/>
+              <a:t>p = 0.0002</a:t>
+            </a:r>
+            <a:endParaRPr lang="en-US" sz="1050" dirty="0"/>
+          </a:p>
+        </p:txBody>
+      </p:sp>
+      <p:sp>
+        <p:nvSpPr>
+          <p:cNvPr id="14" name="Shape 12"/>
+          <p:cNvSpPr/>
+          <p:nvPr/>
+        </p:nvSpPr>
+        <p:spPr>
+          <a:xfrm>
+            <a:off x="7406640" y="2926080"/>
+            <a:ext cx="4325112" cy="2926080"/>
+          </a:xfrm>
+          <a:prstGeom prst="rect">
+            <a:avLst/>
+          </a:prstGeom>
+          <a:solidFill>
+            <a:srgbClr val="FFFFFF"/>
+          </a:solidFill>
+          <a:ln w="6350">
+            <a:solidFill>
+              <a:srgbClr val="D6CFB8"/>
+            </a:solidFill>
+            <a:prstDash val="solid"/>
+          </a:ln>
+        </p:spPr>
+      </p:sp>
+      <p:sp>
+        <p:nvSpPr>
+          <p:cNvPr id="15" name="Text 13"/>
+          <p:cNvSpPr/>
+          <p:nvPr/>
+        </p:nvSpPr>
+        <p:spPr>
+          <a:xfrm>
+            <a:off x="7498080" y="2962656"/>
+            <a:ext cx="4142232" cy="228600"/>
+          </a:xfrm>
+          <a:prstGeom prst="rect">
+            <a:avLst/>
+          </a:prstGeom>
+          <a:noFill/>
+          <a:ln/>
+        </p:spPr>
+        <p:txBody>
+          <a:bodyPr wrap="square" rtlCol="0" anchor="ctr"/>
+          <a:lstStyle/>
+          <a:p>
+            <a:pPr algn="ctr" indent="0" marL="0">
+              <a:buNone/>
+            </a:pPr>
+            <a:r>
+              <a:rPr lang="en-US" sz="900" b="1" dirty="0">
+                <a:solidFill>
+                  <a:srgbClr val="15233F"/>
+                </a:solidFill>
+                <a:latin typeface="Calibri" pitchFamily="34" charset="0"/>
+                <a:ea typeface="Calibri" pitchFamily="34" charset="-122"/>
+                <a:cs typeface="Calibri" pitchFamily="34" charset="-120"/>
+              </a:rPr>
+              <a:t>HbA1c en fonction de l'âge · r = 0.49</a:t>
+            </a:r>
+            <a:endParaRPr lang="en-US" sz="900" dirty="0"/>
+          </a:p>
+        </p:txBody>
+      </p:sp>
+      <p:sp>
+        <p:nvSpPr>
+          <p:cNvPr id="16" name="Shape 14"/>
+          <p:cNvSpPr/>
+          <p:nvPr/>
+        </p:nvSpPr>
+        <p:spPr>
+          <a:xfrm>
+            <a:off x="7818120" y="5486400"/>
+            <a:ext cx="3776472" cy="0"/>
+          </a:xfrm>
+          <a:prstGeom prst="line">
+            <a:avLst/>
+          </a:prstGeom>
+          <a:noFill/>
+          <a:ln w="9525">
+            <a:solidFill>
+              <a:srgbClr val="0E1729"/>
+            </a:solidFill>
+            <a:prstDash val="solid"/>
+          </a:ln>
+        </p:spPr>
+      </p:sp>
+      <p:sp>
+        <p:nvSpPr>
+          <p:cNvPr id="17" name="Shape 15"/>
+          <p:cNvSpPr/>
+          <p:nvPr/>
+        </p:nvSpPr>
+        <p:spPr>
+          <a:xfrm>
+            <a:off x="7818120" y="3246120"/>
+            <a:ext cx="0" cy="2240280"/>
+          </a:xfrm>
+          <a:prstGeom prst="line">
+            <a:avLst/>
+          </a:prstGeom>
+          <a:noFill/>
+          <a:ln w="9525">
+            <a:solidFill>
+              <a:srgbClr val="0E1729"/>
+            </a:solidFill>
+            <a:prstDash val="solid"/>
+          </a:ln>
+        </p:spPr>
+      </p:sp>
+      <p:sp>
+        <p:nvSpPr>
+          <p:cNvPr id="18" name="Text 16"/>
+          <p:cNvSpPr/>
+          <p:nvPr/>
+        </p:nvSpPr>
+        <p:spPr>
+          <a:xfrm>
+            <a:off x="7818120" y="5577840"/>
+            <a:ext cx="3776472" cy="201168"/>
+          </a:xfrm>
+          <a:prstGeom prst="rect">
+            <a:avLst/>
+          </a:prstGeom>
+          <a:noFill/>
+          <a:ln/>
+        </p:spPr>
+        <p:txBody>
+          <a:bodyPr wrap="square" rtlCol="0" anchor="ctr"/>
+          <a:lstStyle/>
+          <a:p>
+            <a:pPr algn="ctr" indent="0" marL="0">
+              <a:buNone/>
+            </a:pPr>
+            <a:r>
+              <a:rPr lang="en-US" sz="800" i="1" dirty="0">
+                <a:solidFill>
+                  <a:srgbClr val="6B7280"/>
+                </a:solidFill>
+                <a:latin typeface="Calibri" pitchFamily="34" charset="0"/>
+                <a:ea typeface="Calibri" pitchFamily="34" charset="-122"/>
+                <a:cs typeface="Calibri" pitchFamily="34" charset="-120"/>
+              </a:rPr>
+              <a:t>Variable X</a:t>
+            </a:r>
+            <a:endParaRPr lang="en-US" sz="800" dirty="0"/>
+          </a:p>
+        </p:txBody>
+      </p:sp>
+      <p:sp>
+        <p:nvSpPr>
+          <p:cNvPr id="19" name="Text 17"/>
+          <p:cNvSpPr/>
+          <p:nvPr/>
+        </p:nvSpPr>
+        <p:spPr>
+          <a:xfrm rot="-5400000">
+            <a:off x="7424928" y="3246120"/>
+            <a:ext cx="365760" cy="2240280"/>
+          </a:xfrm>
+          <a:prstGeom prst="rect">
+            <a:avLst/>
+          </a:prstGeom>
+          <a:noFill/>
+          <a:ln/>
+        </p:spPr>
+        <p:txBody>
+          <a:bodyPr wrap="square" rtlCol="0" anchor="ctr"/>
+          <a:lstStyle/>
+          <a:p>
+            <a:pPr algn="l" indent="0" marL="0">
+              <a:buNone/>
+            </a:pPr>
+            <a:r>
+              <a:rPr lang="en-US" sz="800" i="1" dirty="0">
+                <a:solidFill>
+                  <a:srgbClr val="6B7280"/>
+                </a:solidFill>
+                <a:latin typeface="Calibri" pitchFamily="34" charset="0"/>
+                <a:ea typeface="Calibri" pitchFamily="34" charset="-122"/>
+                <a:cs typeface="Calibri" pitchFamily="34" charset="-120"/>
+              </a:rPr>
+              <a:t>Variable Y</a:t>
+            </a:r>
+            <a:endParaRPr lang="en-US" sz="800" dirty="0"/>
+          </a:p>
+        </p:txBody>
+      </p:sp>
+      <p:sp>
+        <p:nvSpPr>
+          <p:cNvPr id="20" name="Shape 18"/>
+          <p:cNvSpPr/>
+          <p:nvPr/>
+        </p:nvSpPr>
+        <p:spPr>
+          <a:xfrm>
+            <a:off x="7869659" y="5407304"/>
+            <a:ext cx="68580" cy="68580"/>
+          </a:xfrm>
+          <a:prstGeom prst="ellipse">
+            <a:avLst/>
+          </a:prstGeom>
+          <a:solidFill>
+            <a:srgbClr val="0E1729"/>
+          </a:solidFill>
+          <a:ln/>
+        </p:spPr>
+      </p:sp>
+      <p:sp>
+        <p:nvSpPr>
+          <p:cNvPr id="21" name="Shape 19"/>
+          <p:cNvSpPr/>
+          <p:nvPr/>
+        </p:nvSpPr>
+        <p:spPr>
+          <a:xfrm>
+            <a:off x="8041317" y="4849625"/>
+            <a:ext cx="68580" cy="68580"/>
+          </a:xfrm>
+          <a:prstGeom prst="ellipse">
+            <a:avLst/>
+          </a:prstGeom>
+          <a:solidFill>
+            <a:srgbClr val="0E1729"/>
+          </a:solidFill>
+          <a:ln/>
+        </p:spPr>
+      </p:sp>
+      <p:sp>
+        <p:nvSpPr>
+          <p:cNvPr id="22" name="Shape 20"/>
+          <p:cNvSpPr/>
+          <p:nvPr/>
+        </p:nvSpPr>
+        <p:spPr>
+          <a:xfrm>
+            <a:off x="8212975" y="5243142"/>
+            <a:ext cx="68580" cy="68580"/>
+          </a:xfrm>
+          <a:prstGeom prst="ellipse">
+            <a:avLst/>
+          </a:prstGeom>
+          <a:solidFill>
+            <a:srgbClr val="0E1729"/>
+          </a:solidFill>
+          <a:ln/>
+        </p:spPr>
+      </p:sp>
+      <p:sp>
+        <p:nvSpPr>
+          <p:cNvPr id="23" name="Shape 21"/>
+          <p:cNvSpPr/>
+          <p:nvPr/>
+        </p:nvSpPr>
+        <p:spPr>
+          <a:xfrm>
+            <a:off x="8384632" y="4902486"/>
+            <a:ext cx="68580" cy="68580"/>
+          </a:xfrm>
+          <a:prstGeom prst="ellipse">
+            <a:avLst/>
+          </a:prstGeom>
+          <a:solidFill>
+            <a:srgbClr val="0E1729"/>
+          </a:solidFill>
+          <a:ln/>
+        </p:spPr>
+      </p:sp>
+      <p:sp>
+        <p:nvSpPr>
+          <p:cNvPr id="24" name="Shape 22"/>
+          <p:cNvSpPr/>
+          <p:nvPr/>
+        </p:nvSpPr>
+        <p:spPr>
+          <a:xfrm>
+            <a:off x="8556290" y="4930398"/>
+            <a:ext cx="68580" cy="68580"/>
+          </a:xfrm>
+          <a:prstGeom prst="ellipse">
+            <a:avLst/>
+          </a:prstGeom>
+          <a:solidFill>
+            <a:srgbClr val="0E1729"/>
+          </a:solidFill>
+          <a:ln/>
+        </p:spPr>
+      </p:sp>
+      <p:sp>
+        <p:nvSpPr>
+          <p:cNvPr id="25" name="Shape 23"/>
+          <p:cNvSpPr/>
+          <p:nvPr/>
+        </p:nvSpPr>
+        <p:spPr>
+          <a:xfrm>
+            <a:off x="8727948" y="4816240"/>
+            <a:ext cx="68580" cy="68580"/>
+          </a:xfrm>
+          <a:prstGeom prst="ellipse">
+            <a:avLst/>
+          </a:prstGeom>
+          <a:solidFill>
+            <a:srgbClr val="0E1729"/>
+          </a:solidFill>
+          <a:ln/>
+        </p:spPr>
+      </p:sp>
+      <p:sp>
+        <p:nvSpPr>
+          <p:cNvPr id="26" name="Shape 24"/>
+          <p:cNvSpPr/>
+          <p:nvPr/>
+        </p:nvSpPr>
+        <p:spPr>
+          <a:xfrm>
+            <a:off x="8899606" y="4652153"/>
+            <a:ext cx="68580" cy="68580"/>
+          </a:xfrm>
+          <a:prstGeom prst="ellipse">
+            <a:avLst/>
+          </a:prstGeom>
+          <a:solidFill>
+            <a:srgbClr val="0E1729"/>
+          </a:solidFill>
+          <a:ln/>
+        </p:spPr>
+      </p:sp>
+      <p:sp>
+        <p:nvSpPr>
+          <p:cNvPr id="27" name="Shape 25"/>
+          <p:cNvSpPr/>
+          <p:nvPr/>
+        </p:nvSpPr>
+        <p:spPr>
+          <a:xfrm>
+            <a:off x="9071264" y="4828471"/>
+            <a:ext cx="68580" cy="68580"/>
+          </a:xfrm>
+          <a:prstGeom prst="ellipse">
+            <a:avLst/>
+          </a:prstGeom>
+          <a:solidFill>
+            <a:srgbClr val="0E1729"/>
+          </a:solidFill>
+          <a:ln/>
+        </p:spPr>
+      </p:sp>
+      <p:sp>
+        <p:nvSpPr>
+          <p:cNvPr id="28" name="Shape 26"/>
+          <p:cNvSpPr/>
+          <p:nvPr/>
+        </p:nvSpPr>
+        <p:spPr>
+          <a:xfrm>
+            <a:off x="9242921" y="4669264"/>
+            <a:ext cx="68580" cy="68580"/>
+          </a:xfrm>
+          <a:prstGeom prst="ellipse">
+            <a:avLst/>
+          </a:prstGeom>
+          <a:solidFill>
+            <a:srgbClr val="0E1729"/>
+          </a:solidFill>
+          <a:ln/>
+        </p:spPr>
+      </p:sp>
+      <p:sp>
+        <p:nvSpPr>
+          <p:cNvPr id="29" name="Shape 27"/>
+          <p:cNvSpPr/>
+          <p:nvPr/>
+        </p:nvSpPr>
+        <p:spPr>
+          <a:xfrm>
+            <a:off x="9414579" y="4484796"/>
+            <a:ext cx="68580" cy="68580"/>
+          </a:xfrm>
+          <a:prstGeom prst="ellipse">
+            <a:avLst/>
+          </a:prstGeom>
+          <a:solidFill>
+            <a:srgbClr val="0E1729"/>
+          </a:solidFill>
+          <a:ln/>
+        </p:spPr>
+      </p:sp>
+      <p:sp>
+        <p:nvSpPr>
+          <p:cNvPr id="30" name="Shape 28"/>
+          <p:cNvSpPr/>
+          <p:nvPr/>
+        </p:nvSpPr>
+        <p:spPr>
+          <a:xfrm>
+            <a:off x="9586237" y="4181302"/>
+            <a:ext cx="68580" cy="68580"/>
+          </a:xfrm>
+          <a:prstGeom prst="ellipse">
+            <a:avLst/>
+          </a:prstGeom>
+          <a:solidFill>
+            <a:srgbClr val="0E1729"/>
+          </a:solidFill>
+          <a:ln/>
+        </p:spPr>
+      </p:sp>
+      <p:sp>
+        <p:nvSpPr>
+          <p:cNvPr id="31" name="Shape 29"/>
+          <p:cNvSpPr/>
+          <p:nvPr/>
+        </p:nvSpPr>
+        <p:spPr>
+          <a:xfrm>
+            <a:off x="9757895" y="4190844"/>
+            <a:ext cx="68580" cy="68580"/>
+          </a:xfrm>
+          <a:prstGeom prst="ellipse">
+            <a:avLst/>
+          </a:prstGeom>
+          <a:solidFill>
+            <a:srgbClr val="0E1729"/>
+          </a:solidFill>
+          <a:ln/>
+        </p:spPr>
+      </p:sp>
+      <p:sp>
+        <p:nvSpPr>
+          <p:cNvPr id="32" name="Shape 30"/>
+          <p:cNvSpPr/>
+          <p:nvPr/>
+        </p:nvSpPr>
+        <p:spPr>
+          <a:xfrm>
+            <a:off x="9929553" y="4464824"/>
+            <a:ext cx="68580" cy="68580"/>
+          </a:xfrm>
+          <a:prstGeom prst="ellipse">
+            <a:avLst/>
+          </a:prstGeom>
+          <a:solidFill>
+            <a:srgbClr val="0E1729"/>
+          </a:solidFill>
+          <a:ln/>
+        </p:spPr>
+      </p:sp>
+      <p:sp>
+        <p:nvSpPr>
+          <p:cNvPr id="33" name="Shape 31"/>
+          <p:cNvSpPr/>
+          <p:nvPr/>
+        </p:nvSpPr>
+        <p:spPr>
+          <a:xfrm>
+            <a:off x="10101211" y="3954737"/>
+            <a:ext cx="68580" cy="68580"/>
+          </a:xfrm>
+          <a:prstGeom prst="ellipse">
+            <a:avLst/>
+          </a:prstGeom>
+          <a:solidFill>
+            <a:srgbClr val="0E1729"/>
+          </a:solidFill>
+          <a:ln/>
+        </p:spPr>
+      </p:sp>
+      <p:sp>
+        <p:nvSpPr>
+          <p:cNvPr id="34" name="Shape 32"/>
+          <p:cNvSpPr/>
+          <p:nvPr/>
+        </p:nvSpPr>
+        <p:spPr>
+          <a:xfrm>
+            <a:off x="10272868" y="3979776"/>
+            <a:ext cx="68580" cy="68580"/>
+          </a:xfrm>
+          <a:prstGeom prst="ellipse">
+            <a:avLst/>
+          </a:prstGeom>
+          <a:solidFill>
+            <a:srgbClr val="0E1729"/>
+          </a:solidFill>
+          <a:ln/>
+        </p:spPr>
+      </p:sp>
+      <p:sp>
+        <p:nvSpPr>
+          <p:cNvPr id="35" name="Shape 33"/>
+          <p:cNvSpPr/>
+          <p:nvPr/>
+        </p:nvSpPr>
+        <p:spPr>
+          <a:xfrm>
+            <a:off x="10444526" y="4109694"/>
+            <a:ext cx="68580" cy="68580"/>
+          </a:xfrm>
+          <a:prstGeom prst="ellipse">
+            <a:avLst/>
+          </a:prstGeom>
+          <a:solidFill>
+            <a:srgbClr val="0E1729"/>
+          </a:solidFill>
+          <a:ln/>
+        </p:spPr>
+      </p:sp>
+      <p:sp>
+        <p:nvSpPr>
+          <p:cNvPr id="36" name="Shape 34"/>
+          <p:cNvSpPr/>
+          <p:nvPr/>
+        </p:nvSpPr>
+        <p:spPr>
+          <a:xfrm>
+            <a:off x="10616184" y="3777611"/>
+            <a:ext cx="68580" cy="68580"/>
+          </a:xfrm>
+          <a:prstGeom prst="ellipse">
+            <a:avLst/>
+          </a:prstGeom>
+          <a:solidFill>
+            <a:srgbClr val="0E1729"/>
+          </a:solidFill>
+          <a:ln/>
+        </p:spPr>
+      </p:sp>
+      <p:sp>
+        <p:nvSpPr>
+          <p:cNvPr id="37" name="Shape 35"/>
+          <p:cNvSpPr/>
+          <p:nvPr/>
+        </p:nvSpPr>
+        <p:spPr>
+          <a:xfrm>
+            <a:off x="10787842" y="3971229"/>
+            <a:ext cx="68580" cy="68580"/>
+          </a:xfrm>
+          <a:prstGeom prst="ellipse">
+            <a:avLst/>
+          </a:prstGeom>
+          <a:solidFill>
+            <a:srgbClr val="0E1729"/>
+          </a:solidFill>
+          <a:ln/>
+        </p:spPr>
+      </p:sp>
+      <p:sp>
+        <p:nvSpPr>
+          <p:cNvPr id="38" name="Shape 36"/>
+          <p:cNvSpPr/>
+          <p:nvPr/>
+        </p:nvSpPr>
+        <p:spPr>
+          <a:xfrm>
+            <a:off x="10959500" y="3787042"/>
+            <a:ext cx="68580" cy="68580"/>
+          </a:xfrm>
+          <a:prstGeom prst="ellipse">
+            <a:avLst/>
+          </a:prstGeom>
+          <a:solidFill>
+            <a:srgbClr val="0E1729"/>
+          </a:solidFill>
+          <a:ln/>
+        </p:spPr>
+      </p:sp>
+      <p:sp>
+        <p:nvSpPr>
+          <p:cNvPr id="39" name="Shape 37"/>
+          <p:cNvSpPr/>
+          <p:nvPr/>
+        </p:nvSpPr>
+        <p:spPr>
+          <a:xfrm>
+            <a:off x="11131157" y="3888643"/>
+            <a:ext cx="68580" cy="68580"/>
+          </a:xfrm>
+          <a:prstGeom prst="ellipse">
+            <a:avLst/>
+          </a:prstGeom>
+          <a:solidFill>
+            <a:srgbClr val="0E1729"/>
+          </a:solidFill>
+          <a:ln/>
+        </p:spPr>
+      </p:sp>
+      <p:sp>
+        <p:nvSpPr>
+          <p:cNvPr id="40" name="Shape 38"/>
+          <p:cNvSpPr/>
+          <p:nvPr/>
+        </p:nvSpPr>
+        <p:spPr>
+          <a:xfrm>
+            <a:off x="11302815" y="3582007"/>
+            <a:ext cx="68580" cy="68580"/>
+          </a:xfrm>
+          <a:prstGeom prst="ellipse">
+            <a:avLst/>
+          </a:prstGeom>
+          <a:solidFill>
+            <a:srgbClr val="0E1729"/>
+          </a:solidFill>
+          <a:ln/>
+        </p:spPr>
+      </p:sp>
+      <p:sp>
+        <p:nvSpPr>
+          <p:cNvPr id="41" name="Shape 39"/>
+          <p:cNvSpPr/>
+          <p:nvPr/>
+        </p:nvSpPr>
+        <p:spPr>
+          <a:xfrm>
+            <a:off x="11474473" y="3620595"/>
+            <a:ext cx="68580" cy="68580"/>
+          </a:xfrm>
+          <a:prstGeom prst="ellipse">
+            <a:avLst/>
+          </a:prstGeom>
+          <a:solidFill>
+            <a:srgbClr val="0E1729"/>
+          </a:solidFill>
+          <a:ln/>
+        </p:spPr>
+      </p:sp>
+      <p:sp>
+        <p:nvSpPr>
+          <p:cNvPr id="42" name="Shape 40"/>
+          <p:cNvSpPr/>
+          <p:nvPr/>
+        </p:nvSpPr>
+        <p:spPr>
+          <a:xfrm>
+            <a:off x="7818120" y="5217566"/>
+            <a:ext cx="3776472" cy="-1568196"/>
+          </a:xfrm>
+          <a:prstGeom prst="line">
+            <a:avLst/>
+          </a:prstGeom>
+          <a:noFill/>
+          <a:ln w="19050">
+            <a:solidFill>
+              <a:srgbClr val="F09042"/>
+            </a:solidFill>
+            <a:prstDash val="solid"/>
+          </a:ln>
+        </p:spPr>
+      </p:sp>
+      <p:sp>
+        <p:nvSpPr>
+          <p:cNvPr id="43" name="Text 41"/>
           <p:cNvSpPr/>
           <p:nvPr/>
         </p:nvSpPr>
@@ -10708,7 +11921,7 @@
         <p:spPr>
           <a:xfrm>
             <a:off x="640080" y="1828800"/>
-            <a:ext cx="10972800" cy="1280160"/>
+            <a:ext cx="10972800" cy="914400"/>
           </a:xfrm>
           <a:prstGeom prst="rect">
             <a:avLst/>
@@ -10735,7 +11948,7 @@
                 <a:ea typeface="Calibri" pitchFamily="34" charset="-122"/>
                 <a:cs typeface="Calibri" pitchFamily="34" charset="-120"/>
               </a:rPr>
-              <a:t>Modélise Y comme fonction linéaire de X. Le coefficient β₁ se lit : « pour 1 unité d'augmentation de X, Y change de β₁ unités, en moyenne ». Le R² indique la part de variance de Y expliquée par X.</a:t>
+              <a:t>Modélise Y comme fonction linéaire de X. β₁ se lit : « pour 1 unité d'augmentation de X, Y change de β₁ unités, en moyenne ». R² indique la part de variance de Y expliquée par X.</a:t>
             </a:r>
             <a:endParaRPr lang="en-US" sz="1300" dirty="0"/>
           </a:p>
@@ -10749,12 +11962,12 @@
         </p:nvSpPr>
         <p:spPr>
           <a:xfrm>
-            <a:off x="640080" y="3246120"/>
-            <a:ext cx="5486400" cy="2606040"/>
+            <a:off x="640080" y="2926080"/>
+            <a:ext cx="3931920" cy="2926080"/>
           </a:xfrm>
           <a:prstGeom prst="roundRect">
             <a:avLst>
-              <a:gd name="adj" fmla="val 1754"/>
+              <a:gd name="adj" fmla="val 1563"/>
             </a:avLst>
           </a:prstGeom>
           <a:solidFill>
@@ -10776,7 +11989,7 @@
         </p:nvSpPr>
         <p:spPr>
           <a:xfrm>
-            <a:off x="777240" y="3355848"/>
+            <a:off x="777240" y="3035808"/>
             <a:ext cx="365760" cy="256032"/>
           </a:xfrm>
           <a:prstGeom prst="roundRect">
@@ -10798,7 +12011,7 @@
         </p:nvSpPr>
         <p:spPr>
           <a:xfrm>
-            <a:off x="777240" y="3355848"/>
+            <a:off x="777240" y="3035808"/>
             <a:ext cx="365760" cy="256032"/>
           </a:xfrm>
           <a:prstGeom prst="rect">
@@ -10837,8 +12050,8 @@
         </p:nvSpPr>
         <p:spPr>
           <a:xfrm>
-            <a:off x="822960" y="3703320"/>
-            <a:ext cx="5212080" cy="2057400"/>
+            <a:off x="822960" y="3383280"/>
+            <a:ext cx="3657600" cy="2377440"/>
           </a:xfrm>
           <a:prstGeom prst="rect">
             <a:avLst/>
@@ -10865,7 +12078,7 @@
                 <a:ea typeface="Consolas" pitchFamily="34" charset="-122"/>
                 <a:cs typeface="Consolas" pitchFamily="34" charset="-120"/>
               </a:rPr>
-              <a:t># Régression linéaire simple</a:t>
+              <a:t># Régression simple</a:t>
             </a:r>
             <a:endParaRPr lang="en-US" sz="1050" dirty="0"/>
           </a:p>
@@ -10885,7 +12098,7 @@
                 <a:ea typeface="Consolas" pitchFamily="34" charset="-122"/>
                 <a:cs typeface="Consolas" pitchFamily="34" charset="-120"/>
               </a:rPr>
-              <a:t>modele &lt;- lm(hba1c ~ age,</a:t>
+              <a:t>modele &lt;- lm(</a:t>
             </a:r>
             <a:endParaRPr lang="en-US" sz="1050" dirty="0"/>
           </a:p>
@@ -10905,7 +12118,7 @@
                 <a:ea typeface="Consolas" pitchFamily="34" charset="-122"/>
                 <a:cs typeface="Consolas" pitchFamily="34" charset="-120"/>
               </a:rPr>
-              <a:t>             data = donnees)</a:t>
+              <a:t>  hba1c ~ age,</a:t>
             </a:r>
             <a:endParaRPr lang="en-US" sz="1050" dirty="0"/>
           </a:p>
@@ -10925,6 +12138,35 @@
                 <a:ea typeface="Consolas" pitchFamily="34" charset="-122"/>
                 <a:cs typeface="Consolas" pitchFamily="34" charset="-120"/>
               </a:rPr>
+              <a:t>  data = donnees)</a:t>
+            </a:r>
+            <a:endParaRPr lang="en-US" sz="1050" dirty="0"/>
+          </a:p>
+          <a:p>
+            <a:pPr indent="0" marL="0">
+              <a:lnSpc>
+                <a:spcPct val="140000"/>
+              </a:lnSpc>
+              <a:buNone/>
+            </a:pPr>
+            <a:endParaRPr lang="en-US" sz="1050" dirty="0"/>
+          </a:p>
+          <a:p>
+            <a:pPr indent="0" marL="0">
+              <a:lnSpc>
+                <a:spcPct val="140000"/>
+              </a:lnSpc>
+              <a:buNone/>
+            </a:pPr>
+            <a:r>
+              <a:rPr lang="en-US" sz="1050" dirty="0">
+                <a:solidFill>
+                  <a:srgbClr val="E8EAED"/>
+                </a:solidFill>
+                <a:latin typeface="Consolas" pitchFamily="34" charset="0"/>
+                <a:ea typeface="Consolas" pitchFamily="34" charset="-122"/>
+                <a:cs typeface="Consolas" pitchFamily="34" charset="-120"/>
+              </a:rPr>
               <a:t>summary(modele)</a:t>
             </a:r>
             <a:endParaRPr lang="en-US" sz="1050" dirty="0"/>
@@ -10954,7 +12196,7 @@
                 <a:ea typeface="Consolas" pitchFamily="34" charset="-122"/>
                 <a:cs typeface="Consolas" pitchFamily="34" charset="-120"/>
               </a:rPr>
-              <a:t># Vérifs visuelles</a:t>
+              <a:t># Diagnostics</a:t>
             </a:r>
             <a:endParaRPr lang="en-US" sz="1050" dirty="0"/>
           </a:p>
@@ -11008,12 +12250,12 @@
         </p:nvSpPr>
         <p:spPr>
           <a:xfrm>
-            <a:off x="6400800" y="3246120"/>
-            <a:ext cx="5330952" cy="2606040"/>
+            <a:off x="4709160" y="2926080"/>
+            <a:ext cx="2560320" cy="2926080"/>
           </a:xfrm>
           <a:prstGeom prst="roundRect">
             <a:avLst>
-              <a:gd name="adj" fmla="val 1754"/>
+              <a:gd name="adj" fmla="val 1786"/>
             </a:avLst>
           </a:prstGeom>
           <a:solidFill>
@@ -11035,7 +12277,7 @@
         </p:nvSpPr>
         <p:spPr>
           <a:xfrm>
-            <a:off x="6537960" y="3337560"/>
+            <a:off x="4846320" y="3017520"/>
             <a:ext cx="914400" cy="228600"/>
           </a:xfrm>
           <a:prstGeom prst="rect">
@@ -11074,8 +12316,8 @@
         </p:nvSpPr>
         <p:spPr>
           <a:xfrm>
-            <a:off x="6583680" y="3611880"/>
-            <a:ext cx="5056632" cy="2148840"/>
+            <a:off x="4892040" y="3291840"/>
+            <a:ext cx="2286000" cy="2468880"/>
           </a:xfrm>
           <a:prstGeom prst="rect">
             <a:avLst/>
@@ -11102,7 +12344,7 @@
                 <a:ea typeface="Consolas" pitchFamily="34" charset="-122"/>
                 <a:cs typeface="Consolas" pitchFamily="34" charset="-120"/>
               </a:rPr>
-              <a:t>Coefficients:</a:t>
+              <a:t>Coefficients</a:t>
             </a:r>
             <a:endParaRPr lang="en-US" sz="1050" dirty="0"/>
           </a:p>
@@ -11122,7 +12364,7 @@
                 <a:ea typeface="Consolas" pitchFamily="34" charset="-122"/>
                 <a:cs typeface="Consolas" pitchFamily="34" charset="-120"/>
               </a:rPr>
-              <a:t>            Estimate  Std.Err  t   Pr(&gt;|t|)</a:t>
+              <a:t>(Intercept) 4.21</a:t>
             </a:r>
             <a:endParaRPr lang="en-US" sz="1050" dirty="0"/>
           </a:p>
@@ -11142,7 +12384,7 @@
                 <a:ea typeface="Consolas" pitchFamily="34" charset="-122"/>
                 <a:cs typeface="Consolas" pitchFamily="34" charset="-120"/>
               </a:rPr>
-              <a:t>(Intercept)  4.21     0.65    6.5  3e-08</a:t>
+              <a:t>  Pr &lt;3e-08</a:t>
             </a:r>
             <a:endParaRPr lang="en-US" sz="1050" dirty="0"/>
           </a:p>
@@ -11162,7 +12404,7 @@
                 <a:ea typeface="Consolas" pitchFamily="34" charset="-122"/>
                 <a:cs typeface="Consolas" pitchFamily="34" charset="-120"/>
               </a:rPr>
-              <a:t>age          0.052    0.011   4.7  1e-05</a:t>
+              <a:t>age         0.052</a:t>
             </a:r>
             <a:endParaRPr lang="en-US" sz="1050" dirty="0"/>
           </a:p>
@@ -11173,6 +12415,17 @@
               </a:lnSpc>
               <a:buNone/>
             </a:pPr>
+            <a:r>
+              <a:rPr lang="en-US" sz="1050" dirty="0">
+                <a:solidFill>
+                  <a:srgbClr val="FFFFFF"/>
+                </a:solidFill>
+                <a:latin typeface="Consolas" pitchFamily="34" charset="0"/>
+                <a:ea typeface="Consolas" pitchFamily="34" charset="-122"/>
+                <a:cs typeface="Consolas" pitchFamily="34" charset="-120"/>
+              </a:rPr>
+              <a:t>  Pr &lt;1e-05</a:t>
+            </a:r>
             <a:endParaRPr lang="en-US" sz="1050" dirty="0"/>
           </a:p>
           <a:p>
@@ -11182,6 +12435,15 @@
               </a:lnSpc>
               <a:buNone/>
             </a:pPr>
+            <a:endParaRPr lang="en-US" sz="1050" dirty="0"/>
+          </a:p>
+          <a:p>
+            <a:pPr indent="0" marL="0">
+              <a:lnSpc>
+                <a:spcPct val="130000"/>
+              </a:lnSpc>
+              <a:buNone/>
+            </a:pPr>
             <a:r>
               <a:rPr lang="en-US" sz="1050" dirty="0">
                 <a:solidFill>
@@ -11191,7 +12453,7 @@
                 <a:ea typeface="Consolas" pitchFamily="34" charset="-122"/>
                 <a:cs typeface="Consolas" pitchFamily="34" charset="-120"/>
               </a:rPr>
-              <a:t>Multiple R² = 0.27</a:t>
+              <a:t>R² = 0.27</a:t>
             </a:r>
             <a:endParaRPr lang="en-US" sz="1050" dirty="0"/>
           </a:p>
@@ -11211,64 +12473,666 @@
                 <a:ea typeface="Consolas" pitchFamily="34" charset="-122"/>
                 <a:cs typeface="Consolas" pitchFamily="34" charset="-120"/>
               </a:rPr>
-              <a:t>F-statistic = 22.1, p = 1e-05</a:t>
-            </a:r>
-            <a:endParaRPr lang="en-US" sz="1050" dirty="0"/>
-          </a:p>
-          <a:p>
-            <a:pPr indent="0" marL="0">
-              <a:lnSpc>
-                <a:spcPct val="130000"/>
-              </a:lnSpc>
-              <a:buNone/>
-            </a:pPr>
-            <a:endParaRPr lang="en-US" sz="1050" dirty="0"/>
-          </a:p>
-          <a:p>
-            <a:pPr indent="0" marL="0">
-              <a:lnSpc>
-                <a:spcPct val="130000"/>
-              </a:lnSpc>
-              <a:buNone/>
-            </a:pPr>
-            <a:r>
-              <a:rPr lang="en-US" sz="1050" dirty="0">
-                <a:solidFill>
-                  <a:srgbClr val="FFFFFF"/>
-                </a:solidFill>
-                <a:latin typeface="Consolas" pitchFamily="34" charset="0"/>
-                <a:ea typeface="Consolas" pitchFamily="34" charset="-122"/>
-                <a:cs typeface="Consolas" pitchFamily="34" charset="-120"/>
-              </a:rPr>
-              <a:t>→ Chaque année d'âge ajoute en</a:t>
-            </a:r>
-            <a:endParaRPr lang="en-US" sz="1050" dirty="0"/>
-          </a:p>
-          <a:p>
-            <a:pPr indent="0" marL="0">
-              <a:lnSpc>
-                <a:spcPct val="130000"/>
-              </a:lnSpc>
-              <a:buNone/>
-            </a:pPr>
-            <a:r>
-              <a:rPr lang="en-US" sz="1050" dirty="0">
-                <a:solidFill>
-                  <a:srgbClr val="FFFFFF"/>
-                </a:solidFill>
-                <a:latin typeface="Consolas" pitchFamily="34" charset="0"/>
-                <a:ea typeface="Consolas" pitchFamily="34" charset="-122"/>
-                <a:cs typeface="Consolas" pitchFamily="34" charset="-120"/>
-              </a:rPr>
-              <a:t>  moyenne 0,052 % d'HbA1c.</a:t>
-            </a:r>
-            <a:endParaRPr lang="en-US" sz="1050" dirty="0"/>
-          </a:p>
-        </p:txBody>
-      </p:sp>
-      <p:sp>
-        <p:nvSpPr>
-          <p:cNvPr id="14" name="Text 12"/>
+              <a:t>F p &lt; 1e-05</a:t>
+            </a:r>
+            <a:endParaRPr lang="en-US" sz="1050" dirty="0"/>
+          </a:p>
+        </p:txBody>
+      </p:sp>
+      <p:sp>
+        <p:nvSpPr>
+          <p:cNvPr id="14" name="Shape 12"/>
+          <p:cNvSpPr/>
+          <p:nvPr/>
+        </p:nvSpPr>
+        <p:spPr>
+          <a:xfrm>
+            <a:off x="7406640" y="2926080"/>
+            <a:ext cx="4325112" cy="2926080"/>
+          </a:xfrm>
+          <a:prstGeom prst="rect">
+            <a:avLst/>
+          </a:prstGeom>
+          <a:solidFill>
+            <a:srgbClr val="FFFFFF"/>
+          </a:solidFill>
+          <a:ln w="6350">
+            <a:solidFill>
+              <a:srgbClr val="D6CFB8"/>
+            </a:solidFill>
+            <a:prstDash val="solid"/>
+          </a:ln>
+        </p:spPr>
+      </p:sp>
+      <p:sp>
+        <p:nvSpPr>
+          <p:cNvPr id="15" name="Text 13"/>
+          <p:cNvSpPr/>
+          <p:nvPr/>
+        </p:nvSpPr>
+        <p:spPr>
+          <a:xfrm>
+            <a:off x="7498080" y="2962656"/>
+            <a:ext cx="4142232" cy="228600"/>
+          </a:xfrm>
+          <a:prstGeom prst="rect">
+            <a:avLst/>
+          </a:prstGeom>
+          <a:noFill/>
+          <a:ln/>
+        </p:spPr>
+        <p:txBody>
+          <a:bodyPr wrap="square" rtlCol="0" anchor="ctr"/>
+          <a:lstStyle/>
+          <a:p>
+            <a:pPr algn="ctr" indent="0" marL="0">
+              <a:buNone/>
+            </a:pPr>
+            <a:r>
+              <a:rPr lang="en-US" sz="900" b="1" dirty="0">
+                <a:solidFill>
+                  <a:srgbClr val="15233F"/>
+                </a:solidFill>
+                <a:latin typeface="Calibri" pitchFamily="34" charset="0"/>
+                <a:ea typeface="Calibri" pitchFamily="34" charset="-122"/>
+                <a:cs typeface="Calibri" pitchFamily="34" charset="-120"/>
+              </a:rPr>
+              <a:t>Y = 4.21 + 0.052·âge · R² = 0.27</a:t>
+            </a:r>
+            <a:endParaRPr lang="en-US" sz="900" dirty="0"/>
+          </a:p>
+        </p:txBody>
+      </p:sp>
+      <p:sp>
+        <p:nvSpPr>
+          <p:cNvPr id="16" name="Shape 14"/>
+          <p:cNvSpPr/>
+          <p:nvPr/>
+        </p:nvSpPr>
+        <p:spPr>
+          <a:xfrm>
+            <a:off x="7818120" y="5486400"/>
+            <a:ext cx="3776472" cy="0"/>
+          </a:xfrm>
+          <a:prstGeom prst="line">
+            <a:avLst/>
+          </a:prstGeom>
+          <a:noFill/>
+          <a:ln w="9525">
+            <a:solidFill>
+              <a:srgbClr val="0E1729"/>
+            </a:solidFill>
+            <a:prstDash val="solid"/>
+          </a:ln>
+        </p:spPr>
+      </p:sp>
+      <p:sp>
+        <p:nvSpPr>
+          <p:cNvPr id="17" name="Shape 15"/>
+          <p:cNvSpPr/>
+          <p:nvPr/>
+        </p:nvSpPr>
+        <p:spPr>
+          <a:xfrm>
+            <a:off x="7818120" y="3246120"/>
+            <a:ext cx="0" cy="2240280"/>
+          </a:xfrm>
+          <a:prstGeom prst="line">
+            <a:avLst/>
+          </a:prstGeom>
+          <a:noFill/>
+          <a:ln w="9525">
+            <a:solidFill>
+              <a:srgbClr val="0E1729"/>
+            </a:solidFill>
+            <a:prstDash val="solid"/>
+          </a:ln>
+        </p:spPr>
+      </p:sp>
+      <p:sp>
+        <p:nvSpPr>
+          <p:cNvPr id="18" name="Text 16"/>
+          <p:cNvSpPr/>
+          <p:nvPr/>
+        </p:nvSpPr>
+        <p:spPr>
+          <a:xfrm>
+            <a:off x="7818120" y="5577840"/>
+            <a:ext cx="3776472" cy="201168"/>
+          </a:xfrm>
+          <a:prstGeom prst="rect">
+            <a:avLst/>
+          </a:prstGeom>
+          <a:noFill/>
+          <a:ln/>
+        </p:spPr>
+        <p:txBody>
+          <a:bodyPr wrap="square" rtlCol="0" anchor="ctr"/>
+          <a:lstStyle/>
+          <a:p>
+            <a:pPr algn="ctr" indent="0" marL="0">
+              <a:buNone/>
+            </a:pPr>
+            <a:r>
+              <a:rPr lang="en-US" sz="800" i="1" dirty="0">
+                <a:solidFill>
+                  <a:srgbClr val="6B7280"/>
+                </a:solidFill>
+                <a:latin typeface="Calibri" pitchFamily="34" charset="0"/>
+                <a:ea typeface="Calibri" pitchFamily="34" charset="-122"/>
+                <a:cs typeface="Calibri" pitchFamily="34" charset="-120"/>
+              </a:rPr>
+              <a:t>Variable X</a:t>
+            </a:r>
+            <a:endParaRPr lang="en-US" sz="800" dirty="0"/>
+          </a:p>
+        </p:txBody>
+      </p:sp>
+      <p:sp>
+        <p:nvSpPr>
+          <p:cNvPr id="19" name="Text 17"/>
+          <p:cNvSpPr/>
+          <p:nvPr/>
+        </p:nvSpPr>
+        <p:spPr>
+          <a:xfrm rot="-5400000">
+            <a:off x="7424928" y="3246120"/>
+            <a:ext cx="365760" cy="2240280"/>
+          </a:xfrm>
+          <a:prstGeom prst="rect">
+            <a:avLst/>
+          </a:prstGeom>
+          <a:noFill/>
+          <a:ln/>
+        </p:spPr>
+        <p:txBody>
+          <a:bodyPr wrap="square" rtlCol="0" anchor="ctr"/>
+          <a:lstStyle/>
+          <a:p>
+            <a:pPr algn="l" indent="0" marL="0">
+              <a:buNone/>
+            </a:pPr>
+            <a:r>
+              <a:rPr lang="en-US" sz="800" i="1" dirty="0">
+                <a:solidFill>
+                  <a:srgbClr val="6B7280"/>
+                </a:solidFill>
+                <a:latin typeface="Calibri" pitchFamily="34" charset="0"/>
+                <a:ea typeface="Calibri" pitchFamily="34" charset="-122"/>
+                <a:cs typeface="Calibri" pitchFamily="34" charset="-120"/>
+              </a:rPr>
+              <a:t>Variable Y</a:t>
+            </a:r>
+            <a:endParaRPr lang="en-US" sz="800" dirty="0"/>
+          </a:p>
+        </p:txBody>
+      </p:sp>
+      <p:sp>
+        <p:nvSpPr>
+          <p:cNvPr id="20" name="Shape 18"/>
+          <p:cNvSpPr/>
+          <p:nvPr/>
+        </p:nvSpPr>
+        <p:spPr>
+          <a:xfrm>
+            <a:off x="7869659" y="5312093"/>
+            <a:ext cx="68580" cy="68580"/>
+          </a:xfrm>
+          <a:prstGeom prst="ellipse">
+            <a:avLst/>
+          </a:prstGeom>
+          <a:solidFill>
+            <a:srgbClr val="0E1729"/>
+          </a:solidFill>
+          <a:ln/>
+        </p:spPr>
+      </p:sp>
+      <p:sp>
+        <p:nvSpPr>
+          <p:cNvPr id="21" name="Shape 19"/>
+          <p:cNvSpPr/>
+          <p:nvPr/>
+        </p:nvSpPr>
+        <p:spPr>
+          <a:xfrm>
+            <a:off x="8041317" y="4843117"/>
+            <a:ext cx="68580" cy="68580"/>
+          </a:xfrm>
+          <a:prstGeom prst="ellipse">
+            <a:avLst/>
+          </a:prstGeom>
+          <a:solidFill>
+            <a:srgbClr val="0E1729"/>
+          </a:solidFill>
+          <a:ln/>
+        </p:spPr>
+      </p:sp>
+      <p:sp>
+        <p:nvSpPr>
+          <p:cNvPr id="22" name="Shape 20"/>
+          <p:cNvSpPr/>
+          <p:nvPr/>
+        </p:nvSpPr>
+        <p:spPr>
+          <a:xfrm>
+            <a:off x="8212975" y="5174442"/>
+            <a:ext cx="68580" cy="68580"/>
+          </a:xfrm>
+          <a:prstGeom prst="ellipse">
+            <a:avLst/>
+          </a:prstGeom>
+          <a:solidFill>
+            <a:srgbClr val="0E1729"/>
+          </a:solidFill>
+          <a:ln/>
+        </p:spPr>
+      </p:sp>
+      <p:sp>
+        <p:nvSpPr>
+          <p:cNvPr id="23" name="Shape 21"/>
+          <p:cNvSpPr/>
+          <p:nvPr/>
+        </p:nvSpPr>
+        <p:spPr>
+          <a:xfrm>
+            <a:off x="8384632" y="4893957"/>
+            <a:ext cx="68580" cy="68580"/>
+          </a:xfrm>
+          <a:prstGeom prst="ellipse">
+            <a:avLst/>
+          </a:prstGeom>
+          <a:solidFill>
+            <a:srgbClr val="0E1729"/>
+          </a:solidFill>
+          <a:ln/>
+        </p:spPr>
+      </p:sp>
+      <p:sp>
+        <p:nvSpPr>
+          <p:cNvPr id="24" name="Shape 22"/>
+          <p:cNvSpPr/>
+          <p:nvPr/>
+        </p:nvSpPr>
+        <p:spPr>
+          <a:xfrm>
+            <a:off x="8556290" y="4920611"/>
+            <a:ext cx="68580" cy="68580"/>
+          </a:xfrm>
+          <a:prstGeom prst="ellipse">
+            <a:avLst/>
+          </a:prstGeom>
+          <a:solidFill>
+            <a:srgbClr val="0E1729"/>
+          </a:solidFill>
+          <a:ln/>
+        </p:spPr>
+      </p:sp>
+      <p:sp>
+        <p:nvSpPr>
+          <p:cNvPr id="25" name="Shape 23"/>
+          <p:cNvSpPr/>
+          <p:nvPr/>
+        </p:nvSpPr>
+        <p:spPr>
+          <a:xfrm>
+            <a:off x="8727948" y="4828873"/>
+            <a:ext cx="68580" cy="68580"/>
+          </a:xfrm>
+          <a:prstGeom prst="ellipse">
+            <a:avLst/>
+          </a:prstGeom>
+          <a:solidFill>
+            <a:srgbClr val="0E1729"/>
+          </a:solidFill>
+          <a:ln/>
+        </p:spPr>
+      </p:sp>
+      <p:sp>
+        <p:nvSpPr>
+          <p:cNvPr id="26" name="Shape 24"/>
+          <p:cNvSpPr/>
+          <p:nvPr/>
+        </p:nvSpPr>
+        <p:spPr>
+          <a:xfrm>
+            <a:off x="8899606" y="4695529"/>
+            <a:ext cx="68580" cy="68580"/>
+          </a:xfrm>
+          <a:prstGeom prst="ellipse">
+            <a:avLst/>
+          </a:prstGeom>
+          <a:solidFill>
+            <a:srgbClr val="0E1729"/>
+          </a:solidFill>
+          <a:ln/>
+        </p:spPr>
+      </p:sp>
+      <p:sp>
+        <p:nvSpPr>
+          <p:cNvPr id="27" name="Shape 25"/>
+          <p:cNvSpPr/>
+          <p:nvPr/>
+        </p:nvSpPr>
+        <p:spPr>
+          <a:xfrm>
+            <a:off x="9071264" y="4845854"/>
+            <a:ext cx="68580" cy="68580"/>
+          </a:xfrm>
+          <a:prstGeom prst="ellipse">
+            <a:avLst/>
+          </a:prstGeom>
+          <a:solidFill>
+            <a:srgbClr val="0E1729"/>
+          </a:solidFill>
+          <a:ln/>
+        </p:spPr>
+      </p:sp>
+      <p:sp>
+        <p:nvSpPr>
+          <p:cNvPr id="28" name="Shape 26"/>
+          <p:cNvSpPr/>
+          <p:nvPr/>
+        </p:nvSpPr>
+        <p:spPr>
+          <a:xfrm>
+            <a:off x="9242921" y="4716576"/>
+            <a:ext cx="68580" cy="68580"/>
+          </a:xfrm>
+          <a:prstGeom prst="ellipse">
+            <a:avLst/>
+          </a:prstGeom>
+          <a:solidFill>
+            <a:srgbClr val="0E1729"/>
+          </a:solidFill>
+          <a:ln/>
+        </p:spPr>
+      </p:sp>
+      <p:sp>
+        <p:nvSpPr>
+          <p:cNvPr id="29" name="Shape 27"/>
+          <p:cNvSpPr/>
+          <p:nvPr/>
+        </p:nvSpPr>
+        <p:spPr>
+          <a:xfrm>
+            <a:off x="9414579" y="4566247"/>
+            <a:ext cx="68580" cy="68580"/>
+          </a:xfrm>
+          <a:prstGeom prst="ellipse">
+            <a:avLst/>
+          </a:prstGeom>
+          <a:solidFill>
+            <a:srgbClr val="0E1729"/>
+          </a:solidFill>
+          <a:ln/>
+        </p:spPr>
+      </p:sp>
+      <p:sp>
+        <p:nvSpPr>
+          <p:cNvPr id="30" name="Shape 28"/>
+          <p:cNvSpPr/>
+          <p:nvPr/>
+        </p:nvSpPr>
+        <p:spPr>
+          <a:xfrm>
+            <a:off x="9586237" y="4316731"/>
+            <a:ext cx="68580" cy="68580"/>
+          </a:xfrm>
+          <a:prstGeom prst="ellipse">
+            <a:avLst/>
+          </a:prstGeom>
+          <a:solidFill>
+            <a:srgbClr val="0E1729"/>
+          </a:solidFill>
+          <a:ln/>
+        </p:spPr>
+      </p:sp>
+      <p:sp>
+        <p:nvSpPr>
+          <p:cNvPr id="31" name="Shape 29"/>
+          <p:cNvSpPr/>
+          <p:nvPr/>
+        </p:nvSpPr>
+        <p:spPr>
+          <a:xfrm>
+            <a:off x="9757895" y="4328077"/>
+            <a:ext cx="68580" cy="68580"/>
+          </a:xfrm>
+          <a:prstGeom prst="ellipse">
+            <a:avLst/>
+          </a:prstGeom>
+          <a:solidFill>
+            <a:srgbClr val="0E1729"/>
+          </a:solidFill>
+          <a:ln/>
+        </p:spPr>
+      </p:sp>
+      <p:sp>
+        <p:nvSpPr>
+          <p:cNvPr id="32" name="Shape 30"/>
+          <p:cNvSpPr/>
+          <p:nvPr/>
+        </p:nvSpPr>
+        <p:spPr>
+          <a:xfrm>
+            <a:off x="9929553" y="4559787"/>
+            <a:ext cx="68580" cy="68580"/>
+          </a:xfrm>
+          <a:prstGeom prst="ellipse">
+            <a:avLst/>
+          </a:prstGeom>
+          <a:solidFill>
+            <a:srgbClr val="0E1729"/>
+          </a:solidFill>
+          <a:ln/>
+        </p:spPr>
+      </p:sp>
+      <p:sp>
+        <p:nvSpPr>
+          <p:cNvPr id="33" name="Shape 31"/>
+          <p:cNvSpPr/>
+          <p:nvPr/>
+        </p:nvSpPr>
+        <p:spPr>
+          <a:xfrm>
+            <a:off x="10101211" y="4138109"/>
+            <a:ext cx="68580" cy="68580"/>
+          </a:xfrm>
+          <a:prstGeom prst="ellipse">
+            <a:avLst/>
+          </a:prstGeom>
+          <a:solidFill>
+            <a:srgbClr val="0E1729"/>
+          </a:solidFill>
+          <a:ln/>
+        </p:spPr>
+      </p:sp>
+      <p:sp>
+        <p:nvSpPr>
+          <p:cNvPr id="34" name="Shape 32"/>
+          <p:cNvSpPr/>
+          <p:nvPr/>
+        </p:nvSpPr>
+        <p:spPr>
+          <a:xfrm>
+            <a:off x="10272868" y="4162370"/>
+            <a:ext cx="68580" cy="68580"/>
+          </a:xfrm>
+          <a:prstGeom prst="ellipse">
+            <a:avLst/>
+          </a:prstGeom>
+          <a:solidFill>
+            <a:srgbClr val="0E1729"/>
+          </a:solidFill>
+          <a:ln/>
+        </p:spPr>
+      </p:sp>
+      <p:sp>
+        <p:nvSpPr>
+          <p:cNvPr id="35" name="Shape 33"/>
+          <p:cNvSpPr/>
+          <p:nvPr/>
+        </p:nvSpPr>
+        <p:spPr>
+          <a:xfrm>
+            <a:off x="10444526" y="4274029"/>
+            <a:ext cx="68580" cy="68580"/>
+          </a:xfrm>
+          <a:prstGeom prst="ellipse">
+            <a:avLst/>
+          </a:prstGeom>
+          <a:solidFill>
+            <a:srgbClr val="0E1729"/>
+          </a:solidFill>
+          <a:ln/>
+        </p:spPr>
+      </p:sp>
+      <p:sp>
+        <p:nvSpPr>
+          <p:cNvPr id="36" name="Shape 34"/>
+          <p:cNvSpPr/>
+          <p:nvPr/>
+        </p:nvSpPr>
+        <p:spPr>
+          <a:xfrm>
+            <a:off x="10616184" y="4000687"/>
+            <a:ext cx="68580" cy="68580"/>
+          </a:xfrm>
+          <a:prstGeom prst="ellipse">
+            <a:avLst/>
+          </a:prstGeom>
+          <a:solidFill>
+            <a:srgbClr val="0E1729"/>
+          </a:solidFill>
+          <a:ln/>
+        </p:spPr>
+      </p:sp>
+      <p:sp>
+        <p:nvSpPr>
+          <p:cNvPr id="37" name="Shape 35"/>
+          <p:cNvSpPr/>
+          <p:nvPr/>
+        </p:nvSpPr>
+        <p:spPr>
+          <a:xfrm>
+            <a:off x="10787842" y="4165430"/>
+            <a:ext cx="68580" cy="68580"/>
+          </a:xfrm>
+          <a:prstGeom prst="ellipse">
+            <a:avLst/>
+          </a:prstGeom>
+          <a:solidFill>
+            <a:srgbClr val="0E1729"/>
+          </a:solidFill>
+          <a:ln/>
+        </p:spPr>
+      </p:sp>
+      <p:sp>
+        <p:nvSpPr>
+          <p:cNvPr id="38" name="Shape 36"/>
+          <p:cNvSpPr/>
+          <p:nvPr/>
+        </p:nvSpPr>
+        <p:spPr>
+          <a:xfrm>
+            <a:off x="10959500" y="4015335"/>
+            <a:ext cx="68580" cy="68580"/>
+          </a:xfrm>
+          <a:prstGeom prst="ellipse">
+            <a:avLst/>
+          </a:prstGeom>
+          <a:solidFill>
+            <a:srgbClr val="0E1729"/>
+          </a:solidFill>
+          <a:ln/>
+        </p:spPr>
+      </p:sp>
+      <p:sp>
+        <p:nvSpPr>
+          <p:cNvPr id="39" name="Shape 37"/>
+          <p:cNvSpPr/>
+          <p:nvPr/>
+        </p:nvSpPr>
+        <p:spPr>
+          <a:xfrm>
+            <a:off x="11131157" y="4103397"/>
+            <a:ext cx="68580" cy="68580"/>
+          </a:xfrm>
+          <a:prstGeom prst="ellipse">
+            <a:avLst/>
+          </a:prstGeom>
+          <a:solidFill>
+            <a:srgbClr val="0E1729"/>
+          </a:solidFill>
+          <a:ln/>
+        </p:spPr>
+      </p:sp>
+      <p:sp>
+        <p:nvSpPr>
+          <p:cNvPr id="40" name="Shape 38"/>
+          <p:cNvSpPr/>
+          <p:nvPr/>
+        </p:nvSpPr>
+        <p:spPr>
+          <a:xfrm>
+            <a:off x="11302815" y="3851261"/>
+            <a:ext cx="68580" cy="68580"/>
+          </a:xfrm>
+          <a:prstGeom prst="ellipse">
+            <a:avLst/>
+          </a:prstGeom>
+          <a:solidFill>
+            <a:srgbClr val="0E1729"/>
+          </a:solidFill>
+          <a:ln/>
+        </p:spPr>
+      </p:sp>
+      <p:sp>
+        <p:nvSpPr>
+          <p:cNvPr id="41" name="Shape 39"/>
+          <p:cNvSpPr/>
+          <p:nvPr/>
+        </p:nvSpPr>
+        <p:spPr>
+          <a:xfrm>
+            <a:off x="11474473" y="3886813"/>
+            <a:ext cx="68580" cy="68580"/>
+          </a:xfrm>
+          <a:prstGeom prst="ellipse">
+            <a:avLst/>
+          </a:prstGeom>
+          <a:solidFill>
+            <a:srgbClr val="0E1729"/>
+          </a:solidFill>
+          <a:ln/>
+        </p:spPr>
+      </p:sp>
+      <p:sp>
+        <p:nvSpPr>
+          <p:cNvPr id="42" name="Shape 40"/>
+          <p:cNvSpPr/>
+          <p:nvPr/>
+        </p:nvSpPr>
+        <p:spPr>
+          <a:xfrm>
+            <a:off x="7818120" y="5150358"/>
+            <a:ext cx="3776472" cy="-1232154"/>
+          </a:xfrm>
+          <a:prstGeom prst="line">
+            <a:avLst/>
+          </a:prstGeom>
+          <a:noFill/>
+          <a:ln w="19050">
+            <a:solidFill>
+              <a:srgbClr val="F09042"/>
+            </a:solidFill>
+            <a:prstDash val="solid"/>
+          </a:ln>
+        </p:spPr>
+      </p:sp>
+      <p:sp>
+        <p:nvSpPr>
+          <p:cNvPr id="43" name="Text 41"/>
           <p:cNvSpPr/>
           <p:nvPr/>
         </p:nvSpPr>

--- a/formations/output/biostat-module-3-associations.pptx
+++ b/formations/output/biostat-module-3-associations.pptx
@@ -2607,7 +2607,7 @@
         <p:spPr>
           <a:xfrm>
             <a:off x="640080" y="1828800"/>
-            <a:ext cx="10972800" cy="1280160"/>
+            <a:ext cx="10972800" cy="1097280"/>
           </a:xfrm>
           <a:prstGeom prst="rect">
             <a:avLst/>
@@ -2634,7 +2634,7 @@
                 <a:ea typeface="Calibri" pitchFamily="34" charset="-122"/>
                 <a:cs typeface="Calibri" pitchFamily="34" charset="-120"/>
               </a:rPr>
-              <a:t>En épidémiologie, on cherche presque toujours à mesurer l'effet d'une exposition AJUSTÉ pour des facteurs de confusion (âge, sexe, comorbidités). C'est exactement ce que fait la logistique multivariée. Le résultat = aOR (adjusted Odds Ratio).</a:t>
+              <a:t>En épidémiologie, on cherche presque toujours à mesurer l'effet d'une exposition AJUSTÉ pour des facteurs de confusion (âge, sexe, comorbidités). Le résultat = aOR (adjusted Odds Ratio).</a:t>
             </a:r>
             <a:endParaRPr lang="en-US" sz="1300" dirty="0"/>
           </a:p>
@@ -2648,12 +2648,12 @@
         </p:nvSpPr>
         <p:spPr>
           <a:xfrm>
-            <a:off x="640080" y="3246120"/>
-            <a:ext cx="5486400" cy="2606040"/>
+            <a:off x="640080" y="3108960"/>
+            <a:ext cx="5029200" cy="2926080"/>
           </a:xfrm>
           <a:prstGeom prst="roundRect">
             <a:avLst>
-              <a:gd name="adj" fmla="val 1754"/>
+              <a:gd name="adj" fmla="val 1563"/>
             </a:avLst>
           </a:prstGeom>
           <a:solidFill>
@@ -2675,7 +2675,7 @@
         </p:nvSpPr>
         <p:spPr>
           <a:xfrm>
-            <a:off x="777240" y="3355848"/>
+            <a:off x="777240" y="3218688"/>
             <a:ext cx="365760" cy="256032"/>
           </a:xfrm>
           <a:prstGeom prst="roundRect">
@@ -2697,7 +2697,7 @@
         </p:nvSpPr>
         <p:spPr>
           <a:xfrm>
-            <a:off x="777240" y="3355848"/>
+            <a:off x="777240" y="3218688"/>
             <a:ext cx="365760" cy="256032"/>
           </a:xfrm>
           <a:prstGeom prst="rect">
@@ -2736,8 +2736,8 @@
         </p:nvSpPr>
         <p:spPr>
           <a:xfrm>
-            <a:off x="822960" y="3703320"/>
-            <a:ext cx="5212080" cy="2057400"/>
+            <a:off x="822960" y="3566160"/>
+            <a:ext cx="4754880" cy="2377440"/>
           </a:xfrm>
           <a:prstGeom prst="rect">
             <a:avLst/>
@@ -2804,7 +2804,7 @@
                 <a:ea typeface="Consolas" pitchFamily="34" charset="-122"/>
                 <a:cs typeface="Consolas" pitchFamily="34" charset="-120"/>
               </a:rPr>
-              <a:t>  maladie ~ exposition + age + sexe + tabac,</a:t>
+              <a:t>  maladie ~ exposition +</a:t>
             </a:r>
             <a:endParaRPr lang="en-US" sz="1050" dirty="0"/>
           </a:p>
@@ -2824,7 +2824,7 @@
                 <a:ea typeface="Consolas" pitchFamily="34" charset="-122"/>
                 <a:cs typeface="Consolas" pitchFamily="34" charset="-120"/>
               </a:rPr>
-              <a:t>  data = donnees,</a:t>
+              <a:t>            age + sexe + tabac,</a:t>
             </a:r>
             <a:endParaRPr lang="en-US" sz="1050" dirty="0"/>
           </a:p>
@@ -2844,7 +2844,7 @@
                 <a:ea typeface="Consolas" pitchFamily="34" charset="-122"/>
                 <a:cs typeface="Consolas" pitchFamily="34" charset="-120"/>
               </a:rPr>
-              <a:t>  family = binomial</a:t>
+              <a:t>  data = donnees,</a:t>
             </a:r>
             <a:endParaRPr lang="en-US" sz="1050" dirty="0"/>
           </a:p>
@@ -2864,7 +2864,7 @@
                 <a:ea typeface="Consolas" pitchFamily="34" charset="-122"/>
                 <a:cs typeface="Consolas" pitchFamily="34" charset="-120"/>
               </a:rPr>
-              <a:t>)</a:t>
+              <a:t>  family = binomial)</a:t>
             </a:r>
             <a:endParaRPr lang="en-US" sz="1050" dirty="0"/>
           </a:p>
@@ -2893,7 +2893,7 @@
                 <a:ea typeface="Consolas" pitchFamily="34" charset="-122"/>
                 <a:cs typeface="Consolas" pitchFamily="34" charset="-120"/>
               </a:rPr>
-              <a:t># Tableau d'OR ajustés</a:t>
+              <a:t>library(broom)</a:t>
             </a:r>
             <a:endParaRPr lang="en-US" sz="1050" dirty="0"/>
           </a:p>
@@ -2913,7 +2913,7 @@
                 <a:ea typeface="Consolas" pitchFamily="34" charset="-122"/>
                 <a:cs typeface="Consolas" pitchFamily="34" charset="-120"/>
               </a:rPr>
-              <a:t>library(broom)</a:t>
+              <a:t>tidy(modele, exponentiate = TRUE,</a:t>
             </a:r>
             <a:endParaRPr lang="en-US" sz="1050" dirty="0"/>
           </a:p>
@@ -2933,30 +2933,10 @@
                 <a:ea typeface="Consolas" pitchFamily="34" charset="-122"/>
                 <a:cs typeface="Consolas" pitchFamily="34" charset="-120"/>
               </a:rPr>
-              <a:t>tidy(modele, exponentiate = TRUE,</a:t>
+              <a:t>     conf.int = TRUE)</a:t>
             </a:r>
             <a:endParaRPr lang="en-US" sz="1050" dirty="0"/>
           </a:p>
-          <a:p>
-            <a:pPr indent="0" marL="0">
-              <a:lnSpc>
-                <a:spcPct val="140000"/>
-              </a:lnSpc>
-              <a:buNone/>
-            </a:pPr>
-            <a:r>
-              <a:rPr lang="en-US" sz="1050" dirty="0">
-                <a:solidFill>
-                  <a:srgbClr val="E8EAED"/>
-                </a:solidFill>
-                <a:latin typeface="Consolas" pitchFamily="34" charset="0"/>
-                <a:ea typeface="Consolas" pitchFamily="34" charset="-122"/>
-                <a:cs typeface="Consolas" pitchFamily="34" charset="-120"/>
-              </a:rPr>
-              <a:t>     conf.int = TRUE)</a:t>
-            </a:r>
-            <a:endParaRPr lang="en-US" sz="1050" dirty="0"/>
-          </a:p>
         </p:txBody>
       </p:sp>
       <p:sp>
@@ -2967,18 +2947,78 @@
         </p:nvSpPr>
         <p:spPr>
           <a:xfrm>
-            <a:off x="6400800" y="3246120"/>
-            <a:ext cx="5330952" cy="2606040"/>
-          </a:xfrm>
-          <a:prstGeom prst="roundRect">
-            <a:avLst>
-              <a:gd name="adj" fmla="val 1754"/>
-            </a:avLst>
+            <a:off x="5852160" y="3108960"/>
+            <a:ext cx="5879592" cy="2926080"/>
+          </a:xfrm>
+          <a:prstGeom prst="rect">
+            <a:avLst/>
           </a:prstGeom>
           <a:solidFill>
-            <a:srgbClr val="1A2541"/>
+            <a:srgbClr val="FFFFFF"/>
           </a:solidFill>
           <a:ln w="6350">
+            <a:solidFill>
+              <a:srgbClr val="D6CFB8"/>
+            </a:solidFill>
+            <a:prstDash val="solid"/>
+          </a:ln>
+        </p:spPr>
+      </p:sp>
+      <p:sp>
+        <p:nvSpPr>
+          <p:cNvPr id="12" name="Text 10"/>
+          <p:cNvSpPr/>
+          <p:nvPr/>
+        </p:nvSpPr>
+        <p:spPr>
+          <a:xfrm>
+            <a:off x="5943600" y="3154680"/>
+            <a:ext cx="5696712" cy="228600"/>
+          </a:xfrm>
+          <a:prstGeom prst="rect">
+            <a:avLst/>
+          </a:prstGeom>
+          <a:noFill/>
+          <a:ln/>
+        </p:spPr>
+        <p:txBody>
+          <a:bodyPr wrap="square" rtlCol="0" anchor="ctr"/>
+          <a:lstStyle/>
+          <a:p>
+            <a:pPr algn="ctr" indent="0" marL="0">
+              <a:buNone/>
+            </a:pPr>
+            <a:r>
+              <a:rPr lang="en-US" sz="900" b="1" dirty="0">
+                <a:solidFill>
+                  <a:srgbClr val="15233F"/>
+                </a:solidFill>
+                <a:latin typeface="Calibri" pitchFamily="34" charset="0"/>
+                <a:ea typeface="Calibri" pitchFamily="34" charset="-122"/>
+                <a:cs typeface="Calibri" pitchFamily="34" charset="-120"/>
+              </a:rPr>
+              <a:t>aOR ajustés · IC95%</a:t>
+            </a:r>
+            <a:endParaRPr lang="en-US" sz="900" dirty="0"/>
+          </a:p>
+        </p:txBody>
+      </p:sp>
+      <p:sp>
+        <p:nvSpPr>
+          <p:cNvPr id="13" name="Shape 11"/>
+          <p:cNvSpPr/>
+          <p:nvPr/>
+        </p:nvSpPr>
+        <p:spPr>
+          <a:xfrm>
+            <a:off x="8134811" y="3429000"/>
+            <a:ext cx="0" cy="2240280"/>
+          </a:xfrm>
+          <a:prstGeom prst="line">
+            <a:avLst/>
+          </a:prstGeom>
+          <a:noFill/>
+          <a:ln w="12700">
             <a:solidFill>
               <a:srgbClr val="6B7280"/>
             </a:solidFill>
@@ -2988,14 +3028,14 @@
       </p:sp>
       <p:sp>
         <p:nvSpPr>
-          <p:cNvPr id="12" name="Text 10"/>
-          <p:cNvSpPr/>
-          <p:nvPr/>
-        </p:nvSpPr>
-        <p:spPr>
-          <a:xfrm>
-            <a:off x="6537960" y="3337560"/>
-            <a:ext cx="914400" cy="228600"/>
+          <p:cNvPr id="14" name="Text 12"/>
+          <p:cNvSpPr/>
+          <p:nvPr/>
+        </p:nvSpPr>
+        <p:spPr>
+          <a:xfrm>
+            <a:off x="5943600" y="3544443"/>
+            <a:ext cx="1371600" cy="329184"/>
           </a:xfrm>
           <a:prstGeom prst="rect">
             <a:avLst/>
@@ -3011,241 +3051,119 @@
               <a:buNone/>
             </a:pPr>
             <a:r>
-              <a:rPr lang="en-US" sz="900" b="1" spc="300" kern="0" dirty="0">
-                <a:solidFill>
-                  <a:srgbClr val="C9CFDC"/>
+              <a:rPr lang="en-US" sz="1000" b="1" dirty="0">
+                <a:solidFill>
+                  <a:srgbClr val="15233F"/>
                 </a:solidFill>
                 <a:latin typeface="Calibri" pitchFamily="34" charset="0"/>
                 <a:ea typeface="Calibri" pitchFamily="34" charset="-122"/>
                 <a:cs typeface="Calibri" pitchFamily="34" charset="-120"/>
               </a:rPr>
-              <a:t>SORTIE</a:t>
-            </a:r>
-            <a:endParaRPr lang="en-US" sz="900" dirty="0"/>
-          </a:p>
-        </p:txBody>
-      </p:sp>
-      <p:sp>
-        <p:nvSpPr>
-          <p:cNvPr id="13" name="Text 11"/>
-          <p:cNvSpPr/>
-          <p:nvPr/>
-        </p:nvSpPr>
-        <p:spPr>
-          <a:xfrm>
-            <a:off x="6583680" y="3611880"/>
-            <a:ext cx="5056632" cy="2148840"/>
-          </a:xfrm>
-          <a:prstGeom prst="rect">
-            <a:avLst/>
-          </a:prstGeom>
-          <a:noFill/>
-          <a:ln/>
-        </p:spPr>
-        <p:txBody>
-          <a:bodyPr wrap="square" rtlCol="0" anchor="t"/>
-          <a:lstStyle/>
-          <a:p>
-            <a:pPr indent="0" marL="0">
-              <a:lnSpc>
-                <a:spcPct val="130000"/>
-              </a:lnSpc>
-              <a:buNone/>
-            </a:pPr>
-            <a:r>
-              <a:rPr lang="en-US" sz="1050" dirty="0">
-                <a:solidFill>
-                  <a:srgbClr val="FFFFFF"/>
-                </a:solidFill>
-                <a:latin typeface="Consolas" pitchFamily="34" charset="0"/>
-                <a:ea typeface="Consolas" pitchFamily="34" charset="-122"/>
-                <a:cs typeface="Consolas" pitchFamily="34" charset="-120"/>
-              </a:rPr>
-              <a:t>term       estimate  conf.low conf.high  p.value</a:t>
-            </a:r>
-            <a:endParaRPr lang="en-US" sz="1050" dirty="0"/>
-          </a:p>
-          <a:p>
-            <a:pPr indent="0" marL="0">
-              <a:lnSpc>
-                <a:spcPct val="130000"/>
-              </a:lnSpc>
-              <a:buNone/>
-            </a:pPr>
-            <a:r>
-              <a:rPr lang="en-US" sz="1050" dirty="0">
-                <a:solidFill>
-                  <a:srgbClr val="FFFFFF"/>
-                </a:solidFill>
-                <a:latin typeface="Consolas" pitchFamily="34" charset="0"/>
-                <a:ea typeface="Consolas" pitchFamily="34" charset="-122"/>
-                <a:cs typeface="Consolas" pitchFamily="34" charset="-120"/>
-              </a:rPr>
-              <a:t>exposition  2.45      1.51     3.97       0.0003</a:t>
-            </a:r>
-            <a:endParaRPr lang="en-US" sz="1050" dirty="0"/>
-          </a:p>
-          <a:p>
-            <a:pPr indent="0" marL="0">
-              <a:lnSpc>
-                <a:spcPct val="130000"/>
-              </a:lnSpc>
-              <a:buNone/>
-            </a:pPr>
-            <a:r>
-              <a:rPr lang="en-US" sz="1050" dirty="0">
-                <a:solidFill>
-                  <a:srgbClr val="FFFFFF"/>
-                </a:solidFill>
-                <a:latin typeface="Consolas" pitchFamily="34" charset="0"/>
-                <a:ea typeface="Consolas" pitchFamily="34" charset="-122"/>
-                <a:cs typeface="Consolas" pitchFamily="34" charset="-120"/>
-              </a:rPr>
-              <a:t>age         1.04      1.02     1.06       0.001</a:t>
-            </a:r>
-            <a:endParaRPr lang="en-US" sz="1050" dirty="0"/>
-          </a:p>
-          <a:p>
-            <a:pPr indent="0" marL="0">
-              <a:lnSpc>
-                <a:spcPct val="130000"/>
-              </a:lnSpc>
-              <a:buNone/>
-            </a:pPr>
-            <a:r>
-              <a:rPr lang="en-US" sz="1050" dirty="0">
-                <a:solidFill>
-                  <a:srgbClr val="FFFFFF"/>
-                </a:solidFill>
-                <a:latin typeface="Consolas" pitchFamily="34" charset="0"/>
-                <a:ea typeface="Consolas" pitchFamily="34" charset="-122"/>
-                <a:cs typeface="Consolas" pitchFamily="34" charset="-120"/>
-              </a:rPr>
-              <a:t>sexeF       0.78      0.51     1.18       0.24</a:t>
-            </a:r>
-            <a:endParaRPr lang="en-US" sz="1050" dirty="0"/>
-          </a:p>
-          <a:p>
-            <a:pPr indent="0" marL="0">
-              <a:lnSpc>
-                <a:spcPct val="130000"/>
-              </a:lnSpc>
-              <a:buNone/>
-            </a:pPr>
-            <a:r>
-              <a:rPr lang="en-US" sz="1050" dirty="0">
-                <a:solidFill>
-                  <a:srgbClr val="FFFFFF"/>
-                </a:solidFill>
-                <a:latin typeface="Consolas" pitchFamily="34" charset="0"/>
-                <a:ea typeface="Consolas" pitchFamily="34" charset="-122"/>
-                <a:cs typeface="Consolas" pitchFamily="34" charset="-120"/>
-              </a:rPr>
-              <a:t>tabac       3.12      1.95     5.02       &lt;0.001</a:t>
-            </a:r>
-            <a:endParaRPr lang="en-US" sz="1050" dirty="0"/>
-          </a:p>
-          <a:p>
-            <a:pPr indent="0" marL="0">
-              <a:lnSpc>
-                <a:spcPct val="130000"/>
-              </a:lnSpc>
-              <a:buNone/>
-            </a:pPr>
-            <a:endParaRPr lang="en-US" sz="1050" dirty="0"/>
-          </a:p>
-          <a:p>
-            <a:pPr indent="0" marL="0">
-              <a:lnSpc>
-                <a:spcPct val="130000"/>
-              </a:lnSpc>
-              <a:buNone/>
-            </a:pPr>
-            <a:r>
-              <a:rPr lang="en-US" sz="1050" dirty="0">
-                <a:solidFill>
-                  <a:srgbClr val="FFFFFF"/>
-                </a:solidFill>
-                <a:latin typeface="Consolas" pitchFamily="34" charset="0"/>
-                <a:ea typeface="Consolas" pitchFamily="34" charset="-122"/>
-                <a:cs typeface="Consolas" pitchFamily="34" charset="-120"/>
-              </a:rPr>
-              <a:t>→ aOR exposition = 2.45</a:t>
-            </a:r>
-            <a:endParaRPr lang="en-US" sz="1050" dirty="0"/>
-          </a:p>
-          <a:p>
-            <a:pPr indent="0" marL="0">
-              <a:lnSpc>
-                <a:spcPct val="130000"/>
-              </a:lnSpc>
-              <a:buNone/>
-            </a:pPr>
-            <a:r>
-              <a:rPr lang="en-US" sz="1050" dirty="0">
-                <a:solidFill>
-                  <a:srgbClr val="FFFFFF"/>
-                </a:solidFill>
-                <a:latin typeface="Consolas" pitchFamily="34" charset="0"/>
-                <a:ea typeface="Consolas" pitchFamily="34" charset="-122"/>
-                <a:cs typeface="Consolas" pitchFamily="34" charset="-120"/>
-              </a:rPr>
-              <a:t>  (1.51 — 3.97), p = 0.0003.</a:t>
-            </a:r>
-            <a:endParaRPr lang="en-US" sz="1050" dirty="0"/>
-          </a:p>
-          <a:p>
-            <a:pPr indent="0" marL="0">
-              <a:lnSpc>
-                <a:spcPct val="130000"/>
-              </a:lnSpc>
-              <a:buNone/>
-            </a:pPr>
-            <a:r>
-              <a:rPr lang="en-US" sz="1050" dirty="0">
-                <a:solidFill>
-                  <a:srgbClr val="FFFFFF"/>
-                </a:solidFill>
-                <a:latin typeface="Consolas" pitchFamily="34" charset="0"/>
-                <a:ea typeface="Consolas" pitchFamily="34" charset="-122"/>
-                <a:cs typeface="Consolas" pitchFamily="34" charset="-120"/>
-              </a:rPr>
-              <a:t>→ Tabac est aussi un facteur</a:t>
-            </a:r>
-            <a:endParaRPr lang="en-US" sz="1050" dirty="0"/>
-          </a:p>
-          <a:p>
-            <a:pPr indent="0" marL="0">
-              <a:lnSpc>
-                <a:spcPct val="130000"/>
-              </a:lnSpc>
-              <a:buNone/>
-            </a:pPr>
-            <a:r>
-              <a:rPr lang="en-US" sz="1050" dirty="0">
-                <a:solidFill>
-                  <a:srgbClr val="FFFFFF"/>
-                </a:solidFill>
-                <a:latin typeface="Consolas" pitchFamily="34" charset="0"/>
-                <a:ea typeface="Consolas" pitchFamily="34" charset="-122"/>
-                <a:cs typeface="Consolas" pitchFamily="34" charset="-120"/>
-              </a:rPr>
-              <a:t>  fort, indépendamment.</a:t>
-            </a:r>
-            <a:endParaRPr lang="en-US" sz="1050" dirty="0"/>
-          </a:p>
-        </p:txBody>
-      </p:sp>
-      <p:sp>
-        <p:nvSpPr>
-          <p:cNvPr id="14" name="Text 12"/>
-          <p:cNvSpPr/>
-          <p:nvPr/>
-        </p:nvSpPr>
-        <p:spPr>
-          <a:xfrm>
-            <a:off x="640080" y="5989320"/>
-            <a:ext cx="10972800" cy="365760"/>
+              <a:t>exposition</a:t>
+            </a:r>
+            <a:endParaRPr lang="en-US" sz="1000" dirty="0"/>
+          </a:p>
+        </p:txBody>
+      </p:sp>
+      <p:sp>
+        <p:nvSpPr>
+          <p:cNvPr id="15" name="Shape 13"/>
+          <p:cNvSpPr/>
+          <p:nvPr/>
+        </p:nvSpPr>
+        <p:spPr>
+          <a:xfrm>
+            <a:off x="8529463" y="3709035"/>
+            <a:ext cx="1903615" cy="0"/>
+          </a:xfrm>
+          <a:prstGeom prst="line">
+            <a:avLst/>
+          </a:prstGeom>
+          <a:noFill/>
+          <a:ln w="19050">
+            <a:solidFill>
+              <a:srgbClr val="F09042"/>
+            </a:solidFill>
+            <a:prstDash val="solid"/>
+          </a:ln>
+        </p:spPr>
+      </p:sp>
+      <p:sp>
+        <p:nvSpPr>
+          <p:cNvPr id="16" name="Shape 14"/>
+          <p:cNvSpPr/>
+          <p:nvPr/>
+        </p:nvSpPr>
+        <p:spPr>
+          <a:xfrm>
+            <a:off x="8529463" y="3654171"/>
+            <a:ext cx="0" cy="109728"/>
+          </a:xfrm>
+          <a:prstGeom prst="line">
+            <a:avLst/>
+          </a:prstGeom>
+          <a:noFill/>
+          <a:ln w="19050">
+            <a:solidFill>
+              <a:srgbClr val="F09042"/>
+            </a:solidFill>
+            <a:prstDash val="solid"/>
+          </a:ln>
+        </p:spPr>
+      </p:sp>
+      <p:sp>
+        <p:nvSpPr>
+          <p:cNvPr id="17" name="Shape 15"/>
+          <p:cNvSpPr/>
+          <p:nvPr/>
+        </p:nvSpPr>
+        <p:spPr>
+          <a:xfrm>
+            <a:off x="10433078" y="3654171"/>
+            <a:ext cx="0" cy="109728"/>
+          </a:xfrm>
+          <a:prstGeom prst="line">
+            <a:avLst/>
+          </a:prstGeom>
+          <a:noFill/>
+          <a:ln w="19050">
+            <a:solidFill>
+              <a:srgbClr val="F09042"/>
+            </a:solidFill>
+            <a:prstDash val="solid"/>
+          </a:ln>
+        </p:spPr>
+      </p:sp>
+      <p:sp>
+        <p:nvSpPr>
+          <p:cNvPr id="18" name="Shape 16"/>
+          <p:cNvSpPr/>
+          <p:nvPr/>
+        </p:nvSpPr>
+        <p:spPr>
+          <a:xfrm>
+            <a:off x="9192852" y="3645027"/>
+            <a:ext cx="128016" cy="128016"/>
+          </a:xfrm>
+          <a:prstGeom prst="rect">
+            <a:avLst/>
+          </a:prstGeom>
+          <a:solidFill>
+            <a:srgbClr val="F09042"/>
+          </a:solidFill>
+          <a:ln/>
+        </p:spPr>
+      </p:sp>
+      <p:sp>
+        <p:nvSpPr>
+          <p:cNvPr id="19" name="Text 17"/>
+          <p:cNvSpPr/>
+          <p:nvPr/>
+        </p:nvSpPr>
+        <p:spPr>
+          <a:xfrm>
+            <a:off x="5943600" y="4104513"/>
+            <a:ext cx="1371600" cy="329184"/>
           </a:xfrm>
           <a:prstGeom prst="rect">
             <a:avLst/>
@@ -3257,19 +3175,504 @@
           <a:bodyPr wrap="square" rtlCol="0" anchor="ctr"/>
           <a:lstStyle/>
           <a:p>
-            <a:pPr algn="ctr" indent="0" marL="0">
-              <a:buNone/>
-            </a:pPr>
-            <a:r>
-              <a:rPr lang="en-US" sz="1100" i="1" dirty="0">
-                <a:solidFill>
-                  <a:srgbClr val="6B7280"/>
+            <a:pPr indent="0" marL="0">
+              <a:buNone/>
+            </a:pPr>
+            <a:r>
+              <a:rPr lang="en-US" sz="1000" b="1" dirty="0">
+                <a:solidFill>
+                  <a:srgbClr val="15233F"/>
                 </a:solidFill>
                 <a:latin typeface="Calibri" pitchFamily="34" charset="0"/>
                 <a:ea typeface="Calibri" pitchFamily="34" charset="-122"/>
                 <a:cs typeface="Calibri" pitchFamily="34" charset="-120"/>
               </a:rPr>
-              <a:t>Règle de 10 (rule of ten events per variable) : pour une régression logistique stable, il faut au moins 10 « événements » par variable explicative. Sinon, surajustement (overfitting).</a:t>
+              <a:t>âge</a:t>
+            </a:r>
+            <a:endParaRPr lang="en-US" sz="1000" dirty="0"/>
+          </a:p>
+        </p:txBody>
+      </p:sp>
+      <p:sp>
+        <p:nvSpPr>
+          <p:cNvPr id="20" name="Shape 18"/>
+          <p:cNvSpPr/>
+          <p:nvPr/>
+        </p:nvSpPr>
+        <p:spPr>
+          <a:xfrm>
+            <a:off x="8150288" y="4269105"/>
+            <a:ext cx="30953" cy="0"/>
+          </a:xfrm>
+          <a:prstGeom prst="line">
+            <a:avLst/>
+          </a:prstGeom>
+          <a:noFill/>
+          <a:ln w="19050">
+            <a:solidFill>
+              <a:srgbClr val="0E1729"/>
+            </a:solidFill>
+            <a:prstDash val="solid"/>
+          </a:ln>
+        </p:spPr>
+      </p:sp>
+      <p:sp>
+        <p:nvSpPr>
+          <p:cNvPr id="21" name="Shape 19"/>
+          <p:cNvSpPr/>
+          <p:nvPr/>
+        </p:nvSpPr>
+        <p:spPr>
+          <a:xfrm>
+            <a:off x="8150288" y="4214241"/>
+            <a:ext cx="0" cy="109728"/>
+          </a:xfrm>
+          <a:prstGeom prst="line">
+            <a:avLst/>
+          </a:prstGeom>
+          <a:noFill/>
+          <a:ln w="19050">
+            <a:solidFill>
+              <a:srgbClr val="0E1729"/>
+            </a:solidFill>
+            <a:prstDash val="solid"/>
+          </a:ln>
+        </p:spPr>
+      </p:sp>
+      <p:sp>
+        <p:nvSpPr>
+          <p:cNvPr id="22" name="Shape 20"/>
+          <p:cNvSpPr/>
+          <p:nvPr/>
+        </p:nvSpPr>
+        <p:spPr>
+          <a:xfrm>
+            <a:off x="8181241" y="4214241"/>
+            <a:ext cx="0" cy="109728"/>
+          </a:xfrm>
+          <a:prstGeom prst="line">
+            <a:avLst/>
+          </a:prstGeom>
+          <a:noFill/>
+          <a:ln w="19050">
+            <a:solidFill>
+              <a:srgbClr val="0E1729"/>
+            </a:solidFill>
+            <a:prstDash val="solid"/>
+          </a:ln>
+        </p:spPr>
+      </p:sp>
+      <p:sp>
+        <p:nvSpPr>
+          <p:cNvPr id="23" name="Shape 21"/>
+          <p:cNvSpPr/>
+          <p:nvPr/>
+        </p:nvSpPr>
+        <p:spPr>
+          <a:xfrm>
+            <a:off x="8101756" y="4205097"/>
+            <a:ext cx="128016" cy="128016"/>
+          </a:xfrm>
+          <a:prstGeom prst="rect">
+            <a:avLst/>
+          </a:prstGeom>
+          <a:solidFill>
+            <a:srgbClr val="0E1729"/>
+          </a:solidFill>
+          <a:ln/>
+        </p:spPr>
+      </p:sp>
+      <p:sp>
+        <p:nvSpPr>
+          <p:cNvPr id="24" name="Text 22"/>
+          <p:cNvSpPr/>
+          <p:nvPr/>
+        </p:nvSpPr>
+        <p:spPr>
+          <a:xfrm>
+            <a:off x="5943600" y="4664583"/>
+            <a:ext cx="1371600" cy="329184"/>
+          </a:xfrm>
+          <a:prstGeom prst="rect">
+            <a:avLst/>
+          </a:prstGeom>
+          <a:noFill/>
+          <a:ln/>
+        </p:spPr>
+        <p:txBody>
+          <a:bodyPr wrap="square" rtlCol="0" anchor="ctr"/>
+          <a:lstStyle/>
+          <a:p>
+            <a:pPr indent="0" marL="0">
+              <a:buNone/>
+            </a:pPr>
+            <a:r>
+              <a:rPr lang="en-US" sz="1000" b="1" dirty="0">
+                <a:solidFill>
+                  <a:srgbClr val="15233F"/>
+                </a:solidFill>
+                <a:latin typeface="Calibri" pitchFamily="34" charset="0"/>
+                <a:ea typeface="Calibri" pitchFamily="34" charset="-122"/>
+                <a:cs typeface="Calibri" pitchFamily="34" charset="-120"/>
+              </a:rPr>
+              <a:t>sexe F</a:t>
+            </a:r>
+            <a:endParaRPr lang="en-US" sz="1000" dirty="0"/>
+          </a:p>
+        </p:txBody>
+      </p:sp>
+      <p:sp>
+        <p:nvSpPr>
+          <p:cNvPr id="25" name="Shape 23"/>
+          <p:cNvSpPr/>
+          <p:nvPr/>
+        </p:nvSpPr>
+        <p:spPr>
+          <a:xfrm>
+            <a:off x="7755636" y="4829175"/>
+            <a:ext cx="518464" cy="0"/>
+          </a:xfrm>
+          <a:prstGeom prst="line">
+            <a:avLst/>
+          </a:prstGeom>
+          <a:noFill/>
+          <a:ln w="19050">
+            <a:solidFill>
+              <a:srgbClr val="0E1729"/>
+            </a:solidFill>
+            <a:prstDash val="solid"/>
+          </a:ln>
+        </p:spPr>
+      </p:sp>
+      <p:sp>
+        <p:nvSpPr>
+          <p:cNvPr id="26" name="Shape 24"/>
+          <p:cNvSpPr/>
+          <p:nvPr/>
+        </p:nvSpPr>
+        <p:spPr>
+          <a:xfrm>
+            <a:off x="7755636" y="4774311"/>
+            <a:ext cx="0" cy="109728"/>
+          </a:xfrm>
+          <a:prstGeom prst="line">
+            <a:avLst/>
+          </a:prstGeom>
+          <a:noFill/>
+          <a:ln w="19050">
+            <a:solidFill>
+              <a:srgbClr val="0E1729"/>
+            </a:solidFill>
+            <a:prstDash val="solid"/>
+          </a:ln>
+        </p:spPr>
+      </p:sp>
+      <p:sp>
+        <p:nvSpPr>
+          <p:cNvPr id="27" name="Shape 25"/>
+          <p:cNvSpPr/>
+          <p:nvPr/>
+        </p:nvSpPr>
+        <p:spPr>
+          <a:xfrm>
+            <a:off x="8274100" y="4774311"/>
+            <a:ext cx="0" cy="109728"/>
+          </a:xfrm>
+          <a:prstGeom prst="line">
+            <a:avLst/>
+          </a:prstGeom>
+          <a:noFill/>
+          <a:ln w="19050">
+            <a:solidFill>
+              <a:srgbClr val="0E1729"/>
+            </a:solidFill>
+            <a:prstDash val="solid"/>
+          </a:ln>
+        </p:spPr>
+      </p:sp>
+      <p:sp>
+        <p:nvSpPr>
+          <p:cNvPr id="28" name="Shape 26"/>
+          <p:cNvSpPr/>
+          <p:nvPr/>
+        </p:nvSpPr>
+        <p:spPr>
+          <a:xfrm>
+            <a:off x="7900561" y="4765167"/>
+            <a:ext cx="128016" cy="128016"/>
+          </a:xfrm>
+          <a:prstGeom prst="rect">
+            <a:avLst/>
+          </a:prstGeom>
+          <a:solidFill>
+            <a:srgbClr val="0E1729"/>
+          </a:solidFill>
+          <a:ln/>
+        </p:spPr>
+      </p:sp>
+      <p:sp>
+        <p:nvSpPr>
+          <p:cNvPr id="29" name="Text 27"/>
+          <p:cNvSpPr/>
+          <p:nvPr/>
+        </p:nvSpPr>
+        <p:spPr>
+          <a:xfrm>
+            <a:off x="5943600" y="5224653"/>
+            <a:ext cx="1371600" cy="329184"/>
+          </a:xfrm>
+          <a:prstGeom prst="rect">
+            <a:avLst/>
+          </a:prstGeom>
+          <a:noFill/>
+          <a:ln/>
+        </p:spPr>
+        <p:txBody>
+          <a:bodyPr wrap="square" rtlCol="0" anchor="ctr"/>
+          <a:lstStyle/>
+          <a:p>
+            <a:pPr indent="0" marL="0">
+              <a:buNone/>
+            </a:pPr>
+            <a:r>
+              <a:rPr lang="en-US" sz="1000" b="1" dirty="0">
+                <a:solidFill>
+                  <a:srgbClr val="15233F"/>
+                </a:solidFill>
+                <a:latin typeface="Calibri" pitchFamily="34" charset="0"/>
+                <a:ea typeface="Calibri" pitchFamily="34" charset="-122"/>
+                <a:cs typeface="Calibri" pitchFamily="34" charset="-120"/>
+              </a:rPr>
+              <a:t>tabac</a:t>
+            </a:r>
+            <a:endParaRPr lang="en-US" sz="1000" dirty="0"/>
+          </a:p>
+        </p:txBody>
+      </p:sp>
+      <p:sp>
+        <p:nvSpPr>
+          <p:cNvPr id="30" name="Shape 28"/>
+          <p:cNvSpPr/>
+          <p:nvPr/>
+        </p:nvSpPr>
+        <p:spPr>
+          <a:xfrm>
+            <a:off x="8869947" y="5389245"/>
+            <a:ext cx="2375649" cy="0"/>
+          </a:xfrm>
+          <a:prstGeom prst="line">
+            <a:avLst/>
+          </a:prstGeom>
+          <a:noFill/>
+          <a:ln w="19050">
+            <a:solidFill>
+              <a:srgbClr val="F09042"/>
+            </a:solidFill>
+            <a:prstDash val="solid"/>
+          </a:ln>
+        </p:spPr>
+      </p:sp>
+      <p:sp>
+        <p:nvSpPr>
+          <p:cNvPr id="31" name="Shape 29"/>
+          <p:cNvSpPr/>
+          <p:nvPr/>
+        </p:nvSpPr>
+        <p:spPr>
+          <a:xfrm>
+            <a:off x="8869947" y="5334381"/>
+            <a:ext cx="0" cy="109728"/>
+          </a:xfrm>
+          <a:prstGeom prst="line">
+            <a:avLst/>
+          </a:prstGeom>
+          <a:noFill/>
+          <a:ln w="19050">
+            <a:solidFill>
+              <a:srgbClr val="F09042"/>
+            </a:solidFill>
+            <a:prstDash val="solid"/>
+          </a:ln>
+        </p:spPr>
+      </p:sp>
+      <p:sp>
+        <p:nvSpPr>
+          <p:cNvPr id="32" name="Shape 30"/>
+          <p:cNvSpPr/>
+          <p:nvPr/>
+        </p:nvSpPr>
+        <p:spPr>
+          <a:xfrm>
+            <a:off x="11245596" y="5334381"/>
+            <a:ext cx="0" cy="109728"/>
+          </a:xfrm>
+          <a:prstGeom prst="line">
+            <a:avLst/>
+          </a:prstGeom>
+          <a:noFill/>
+          <a:ln w="19050">
+            <a:solidFill>
+              <a:srgbClr val="F09042"/>
+            </a:solidFill>
+            <a:prstDash val="solid"/>
+          </a:ln>
+        </p:spPr>
+      </p:sp>
+      <p:sp>
+        <p:nvSpPr>
+          <p:cNvPr id="33" name="Shape 31"/>
+          <p:cNvSpPr/>
+          <p:nvPr/>
+        </p:nvSpPr>
+        <p:spPr>
+          <a:xfrm>
+            <a:off x="9711317" y="5325237"/>
+            <a:ext cx="128016" cy="128016"/>
+          </a:xfrm>
+          <a:prstGeom prst="rect">
+            <a:avLst/>
+          </a:prstGeom>
+          <a:solidFill>
+            <a:srgbClr val="F09042"/>
+          </a:solidFill>
+          <a:ln/>
+        </p:spPr>
+      </p:sp>
+      <p:sp>
+        <p:nvSpPr>
+          <p:cNvPr id="34" name="Shape 32"/>
+          <p:cNvSpPr/>
+          <p:nvPr/>
+        </p:nvSpPr>
+        <p:spPr>
+          <a:xfrm>
+            <a:off x="7406640" y="5715000"/>
+            <a:ext cx="4187952" cy="0"/>
+          </a:xfrm>
+          <a:prstGeom prst="line">
+            <a:avLst/>
+          </a:prstGeom>
+          <a:noFill/>
+          <a:ln w="6350">
+            <a:solidFill>
+              <a:srgbClr val="0E1729"/>
+            </a:solidFill>
+            <a:prstDash val="solid"/>
+          </a:ln>
+        </p:spPr>
+      </p:sp>
+      <p:sp>
+        <p:nvSpPr>
+          <p:cNvPr id="35" name="Text 33"/>
+          <p:cNvSpPr/>
+          <p:nvPr/>
+        </p:nvSpPr>
+        <p:spPr>
+          <a:xfrm>
+            <a:off x="7951931" y="5760720"/>
+            <a:ext cx="365760" cy="182880"/>
+          </a:xfrm>
+          <a:prstGeom prst="rect">
+            <a:avLst/>
+          </a:prstGeom>
+          <a:noFill/>
+          <a:ln/>
+        </p:spPr>
+        <p:txBody>
+          <a:bodyPr wrap="square" rtlCol="0" anchor="ctr"/>
+          <a:lstStyle/>
+          <a:p>
+            <a:pPr algn="ctr" indent="0" marL="0">
+              <a:buNone/>
+            </a:pPr>
+            <a:r>
+              <a:rPr lang="en-US" sz="800" dirty="0">
+                <a:solidFill>
+                  <a:srgbClr val="6B7280"/>
+                </a:solidFill>
+                <a:latin typeface="Calibri" pitchFamily="34" charset="0"/>
+                <a:ea typeface="Calibri" pitchFamily="34" charset="-122"/>
+                <a:cs typeface="Calibri" pitchFamily="34" charset="-120"/>
+              </a:rPr>
+              <a:t>1</a:t>
+            </a:r>
+            <a:endParaRPr lang="en-US" sz="800" dirty="0"/>
+          </a:p>
+        </p:txBody>
+      </p:sp>
+      <p:sp>
+        <p:nvSpPr>
+          <p:cNvPr id="36" name="Text 34"/>
+          <p:cNvSpPr/>
+          <p:nvPr/>
+        </p:nvSpPr>
+        <p:spPr>
+          <a:xfrm>
+            <a:off x="7406640" y="5897880"/>
+            <a:ext cx="4187952" cy="182880"/>
+          </a:xfrm>
+          <a:prstGeom prst="rect">
+            <a:avLst/>
+          </a:prstGeom>
+          <a:noFill/>
+          <a:ln/>
+        </p:spPr>
+        <p:txBody>
+          <a:bodyPr wrap="square" rtlCol="0" anchor="ctr"/>
+          <a:lstStyle/>
+          <a:p>
+            <a:pPr algn="ctr" indent="0" marL="0">
+              <a:buNone/>
+            </a:pPr>
+            <a:r>
+              <a:rPr lang="en-US" sz="800" i="1" dirty="0">
+                <a:solidFill>
+                  <a:srgbClr val="6B7280"/>
+                </a:solidFill>
+                <a:latin typeface="Calibri" pitchFamily="34" charset="0"/>
+                <a:ea typeface="Calibri" pitchFamily="34" charset="-122"/>
+                <a:cs typeface="Calibri" pitchFamily="34" charset="-120"/>
+              </a:rPr>
+              <a:t>Odds Ratio ajusté</a:t>
+            </a:r>
+            <a:endParaRPr lang="en-US" sz="800" dirty="0"/>
+          </a:p>
+        </p:txBody>
+      </p:sp>
+      <p:sp>
+        <p:nvSpPr>
+          <p:cNvPr id="37" name="Text 35"/>
+          <p:cNvSpPr/>
+          <p:nvPr/>
+        </p:nvSpPr>
+        <p:spPr>
+          <a:xfrm>
+            <a:off x="640080" y="6126480"/>
+            <a:ext cx="10972800" cy="320040"/>
+          </a:xfrm>
+          <a:prstGeom prst="rect">
+            <a:avLst/>
+          </a:prstGeom>
+          <a:noFill/>
+          <a:ln/>
+        </p:spPr>
+        <p:txBody>
+          <a:bodyPr wrap="square" rtlCol="0" anchor="ctr"/>
+          <a:lstStyle/>
+          <a:p>
+            <a:pPr algn="ctr" indent="0" marL="0">
+              <a:buNone/>
+            </a:pPr>
+            <a:r>
+              <a:rPr lang="en-US" sz="1100" i="1" dirty="0">
+                <a:solidFill>
+                  <a:srgbClr val="6B7280"/>
+                </a:solidFill>
+                <a:latin typeface="Calibri" pitchFamily="34" charset="0"/>
+                <a:ea typeface="Calibri" pitchFamily="34" charset="-122"/>
+                <a:cs typeface="Calibri" pitchFamily="34" charset="-120"/>
+              </a:rPr>
+              <a:t>Règle de 10 : pour une logistique stable, il faut au moins 10 « événements » par variable explicative. Sinon, surajustement (overfitting).</a:t>
             </a:r>
             <a:endParaRPr lang="en-US" sz="1100" dirty="0"/>
           </a:p>
@@ -5768,7 +6171,7 @@
                 <a:ea typeface="Calibri" pitchFamily="34" charset="-122"/>
                 <a:cs typeface="Calibri" pitchFamily="34" charset="-120"/>
               </a:rPr>
-              <a:t>Cancer du col, exposition HPV, ajustement.</a:t>
+              <a:t>Cancer du col, exposition HPV, ajustement complet.</a:t>
             </a:r>
             <a:endParaRPr lang="en-US" sz="2800" dirty="0"/>
           </a:p>
@@ -5810,7 +6213,7 @@
                 <a:ea typeface="Calibri" pitchFamily="34" charset="-122"/>
                 <a:cs typeface="Calibri" pitchFamily="34" charset="-120"/>
               </a:rPr>
-              <a:t>Étude cas-témoin : 200 cas (cancer du col), 400 témoins. Exposition principale = HPV. Facteurs de confusion à contrôler : âge, parité, tabac, statut socioéconomique. Voilà le workflow complet attendu.</a:t>
+              <a:t>200 cas, 400 témoins. Exposition principale = HPV. Facteurs de confusion : âge, parité, tabac, statut socioéconomique. Voici le tableau final aOR — exactement ce qu'on attend dans une thèse.</a:t>
             </a:r>
             <a:endParaRPr lang="en-US" sz="1300" dirty="0"/>
           </a:p>
@@ -5824,12 +6227,12 @@
         </p:nvSpPr>
         <p:spPr>
           <a:xfrm>
-            <a:off x="640080" y="2834640"/>
-            <a:ext cx="6858000" cy="3429000"/>
+            <a:off x="640080" y="2926080"/>
+            <a:ext cx="4846320" cy="3108960"/>
           </a:xfrm>
           <a:prstGeom prst="roundRect">
             <a:avLst>
-              <a:gd name="adj" fmla="val 1333"/>
+              <a:gd name="adj" fmla="val 1471"/>
             </a:avLst>
           </a:prstGeom>
           <a:solidFill>
@@ -5851,7 +6254,7 @@
         </p:nvSpPr>
         <p:spPr>
           <a:xfrm>
-            <a:off x="777240" y="2944368"/>
+            <a:off x="777240" y="3035808"/>
             <a:ext cx="365760" cy="256032"/>
           </a:xfrm>
           <a:prstGeom prst="roundRect">
@@ -5873,7 +6276,7 @@
         </p:nvSpPr>
         <p:spPr>
           <a:xfrm>
-            <a:off x="777240" y="2944368"/>
+            <a:off x="777240" y="3035808"/>
             <a:ext cx="365760" cy="256032"/>
           </a:xfrm>
           <a:prstGeom prst="rect">
@@ -5912,8 +6315,8 @@
         </p:nvSpPr>
         <p:spPr>
           <a:xfrm>
-            <a:off x="822960" y="3291840"/>
-            <a:ext cx="6583680" cy="2880360"/>
+            <a:off x="822960" y="3383280"/>
+            <a:ext cx="4572000" cy="2560320"/>
           </a:xfrm>
           <a:prstGeom prst="rect">
             <a:avLst/>
@@ -5940,7 +6343,7 @@
                 <a:ea typeface="Consolas" pitchFamily="34" charset="-122"/>
                 <a:cs typeface="Consolas" pitchFamily="34" charset="-120"/>
               </a:rPr>
-              <a:t># 1. Modèle univarié (HPV seul)</a:t>
+              <a:t># Modèle ajusté</a:t>
             </a:r>
             <a:endParaRPr lang="en-US" sz="1050" dirty="0"/>
           </a:p>
@@ -5960,7 +6363,7 @@
                 <a:ea typeface="Consolas" pitchFamily="34" charset="-122"/>
                 <a:cs typeface="Consolas" pitchFamily="34" charset="-120"/>
               </a:rPr>
-              <a:t>mod_univ &lt;- glm(</a:t>
+              <a:t>mod_aj &lt;- glm(</a:t>
             </a:r>
             <a:endParaRPr lang="en-US" sz="1050" dirty="0"/>
           </a:p>
@@ -5980,7 +6383,7 @@
                 <a:ea typeface="Consolas" pitchFamily="34" charset="-122"/>
                 <a:cs typeface="Consolas" pitchFamily="34" charset="-120"/>
               </a:rPr>
-              <a:t>  cas ~ hpv,</a:t>
+              <a:t>  cas ~ hpv + age + parite</a:t>
             </a:r>
             <a:endParaRPr lang="en-US" sz="1050" dirty="0"/>
           </a:p>
@@ -6000,7 +6403,7 @@
                 <a:ea typeface="Consolas" pitchFamily="34" charset="-122"/>
                 <a:cs typeface="Consolas" pitchFamily="34" charset="-120"/>
               </a:rPr>
-              <a:t>  data = donnees,</a:t>
+              <a:t>        + tabac + ses,</a:t>
             </a:r>
             <a:endParaRPr lang="en-US" sz="1050" dirty="0"/>
           </a:p>
@@ -6020,7 +6423,7 @@
                 <a:ea typeface="Consolas" pitchFamily="34" charset="-122"/>
                 <a:cs typeface="Consolas" pitchFamily="34" charset="-120"/>
               </a:rPr>
-              <a:t>  family = binomial</a:t>
+              <a:t>  data = donnees,</a:t>
             </a:r>
             <a:endParaRPr lang="en-US" sz="1050" dirty="0"/>
           </a:p>
@@ -6040,7 +6443,7 @@
                 <a:ea typeface="Consolas" pitchFamily="34" charset="-122"/>
                 <a:cs typeface="Consolas" pitchFamily="34" charset="-120"/>
               </a:rPr>
-              <a:t>)</a:t>
+              <a:t>  family = binomial)</a:t>
             </a:r>
             <a:endParaRPr lang="en-US" sz="1050" dirty="0"/>
           </a:p>
@@ -6069,7 +6472,7 @@
                 <a:ea typeface="Consolas" pitchFamily="34" charset="-122"/>
                 <a:cs typeface="Consolas" pitchFamily="34" charset="-120"/>
               </a:rPr>
-              <a:t># 2. Modèle ajusté</a:t>
+              <a:t>library(broom)</a:t>
             </a:r>
             <a:endParaRPr lang="en-US" sz="1050" dirty="0"/>
           </a:p>
@@ -6089,7 +6492,7 @@
                 <a:ea typeface="Consolas" pitchFamily="34" charset="-122"/>
                 <a:cs typeface="Consolas" pitchFamily="34" charset="-120"/>
               </a:rPr>
-              <a:t>mod_aj &lt;- glm(</a:t>
+              <a:t>tidy(mod_aj,</a:t>
             </a:r>
             <a:endParaRPr lang="en-US" sz="1050" dirty="0"/>
           </a:p>
@@ -6109,7 +6512,7 @@
                 <a:ea typeface="Consolas" pitchFamily="34" charset="-122"/>
                 <a:cs typeface="Consolas" pitchFamily="34" charset="-120"/>
               </a:rPr>
-              <a:t>  cas ~ hpv + age + parite + tabac + ses,</a:t>
+              <a:t>     exponentiate = TRUE,</a:t>
             </a:r>
             <a:endParaRPr lang="en-US" sz="1050" dirty="0"/>
           </a:p>
@@ -6129,228 +6532,10 @@
                 <a:ea typeface="Consolas" pitchFamily="34" charset="-122"/>
                 <a:cs typeface="Consolas" pitchFamily="34" charset="-120"/>
               </a:rPr>
-              <a:t>  data = donnees,</a:t>
+              <a:t>     conf.int = TRUE)</a:t>
             </a:r>
             <a:endParaRPr lang="en-US" sz="1050" dirty="0"/>
           </a:p>
-          <a:p>
-            <a:pPr indent="0" marL="0">
-              <a:lnSpc>
-                <a:spcPct val="140000"/>
-              </a:lnSpc>
-              <a:buNone/>
-            </a:pPr>
-            <a:r>
-              <a:rPr lang="en-US" sz="1050" dirty="0">
-                <a:solidFill>
-                  <a:srgbClr val="E8EAED"/>
-                </a:solidFill>
-                <a:latin typeface="Consolas" pitchFamily="34" charset="0"/>
-                <a:ea typeface="Consolas" pitchFamily="34" charset="-122"/>
-                <a:cs typeface="Consolas" pitchFamily="34" charset="-120"/>
-              </a:rPr>
-              <a:t>  family = binomial</a:t>
-            </a:r>
-            <a:endParaRPr lang="en-US" sz="1050" dirty="0"/>
-          </a:p>
-          <a:p>
-            <a:pPr indent="0" marL="0">
-              <a:lnSpc>
-                <a:spcPct val="140000"/>
-              </a:lnSpc>
-              <a:buNone/>
-            </a:pPr>
-            <a:r>
-              <a:rPr lang="en-US" sz="1050" dirty="0">
-                <a:solidFill>
-                  <a:srgbClr val="E8EAED"/>
-                </a:solidFill>
-                <a:latin typeface="Consolas" pitchFamily="34" charset="0"/>
-                <a:ea typeface="Consolas" pitchFamily="34" charset="-122"/>
-                <a:cs typeface="Consolas" pitchFamily="34" charset="-120"/>
-              </a:rPr>
-              <a:t>)</a:t>
-            </a:r>
-            <a:endParaRPr lang="en-US" sz="1050" dirty="0"/>
-          </a:p>
-          <a:p>
-            <a:pPr indent="0" marL="0">
-              <a:lnSpc>
-                <a:spcPct val="140000"/>
-              </a:lnSpc>
-              <a:buNone/>
-            </a:pPr>
-            <a:endParaRPr lang="en-US" sz="1050" dirty="0"/>
-          </a:p>
-          <a:p>
-            <a:pPr indent="0" marL="0">
-              <a:lnSpc>
-                <a:spcPct val="140000"/>
-              </a:lnSpc>
-              <a:buNone/>
-            </a:pPr>
-            <a:r>
-              <a:rPr lang="en-US" sz="1050" dirty="0">
-                <a:solidFill>
-                  <a:srgbClr val="E8EAED"/>
-                </a:solidFill>
-                <a:latin typeface="Consolas" pitchFamily="34" charset="0"/>
-                <a:ea typeface="Consolas" pitchFamily="34" charset="-122"/>
-                <a:cs typeface="Consolas" pitchFamily="34" charset="-120"/>
-              </a:rPr>
-              <a:t># 3. Tableau final aOR</a:t>
-            </a:r>
-            <a:endParaRPr lang="en-US" sz="1050" dirty="0"/>
-          </a:p>
-          <a:p>
-            <a:pPr indent="0" marL="0">
-              <a:lnSpc>
-                <a:spcPct val="140000"/>
-              </a:lnSpc>
-              <a:buNone/>
-            </a:pPr>
-            <a:r>
-              <a:rPr lang="en-US" sz="1050" dirty="0">
-                <a:solidFill>
-                  <a:srgbClr val="E8EAED"/>
-                </a:solidFill>
-                <a:latin typeface="Consolas" pitchFamily="34" charset="0"/>
-                <a:ea typeface="Consolas" pitchFamily="34" charset="-122"/>
-                <a:cs typeface="Consolas" pitchFamily="34" charset="-120"/>
-              </a:rPr>
-              <a:t>library(broom)</a:t>
-            </a:r>
-            <a:endParaRPr lang="en-US" sz="1050" dirty="0"/>
-          </a:p>
-          <a:p>
-            <a:pPr indent="0" marL="0">
-              <a:lnSpc>
-                <a:spcPct val="140000"/>
-              </a:lnSpc>
-              <a:buNone/>
-            </a:pPr>
-            <a:r>
-              <a:rPr lang="en-US" sz="1050" dirty="0">
-                <a:solidFill>
-                  <a:srgbClr val="E8EAED"/>
-                </a:solidFill>
-                <a:latin typeface="Consolas" pitchFamily="34" charset="0"/>
-                <a:ea typeface="Consolas" pitchFamily="34" charset="-122"/>
-                <a:cs typeface="Consolas" pitchFamily="34" charset="-120"/>
-              </a:rPr>
-              <a:t>tidy(mod_aj, exponentiate = TRUE,</a:t>
-            </a:r>
-            <a:endParaRPr lang="en-US" sz="1050" dirty="0"/>
-          </a:p>
-          <a:p>
-            <a:pPr indent="0" marL="0">
-              <a:lnSpc>
-                <a:spcPct val="140000"/>
-              </a:lnSpc>
-              <a:buNone/>
-            </a:pPr>
-            <a:r>
-              <a:rPr lang="en-US" sz="1050" dirty="0">
-                <a:solidFill>
-                  <a:srgbClr val="E8EAED"/>
-                </a:solidFill>
-                <a:latin typeface="Consolas" pitchFamily="34" charset="0"/>
-                <a:ea typeface="Consolas" pitchFamily="34" charset="-122"/>
-                <a:cs typeface="Consolas" pitchFamily="34" charset="-120"/>
-              </a:rPr>
-              <a:t>     conf.int = TRUE)</a:t>
-            </a:r>
-            <a:endParaRPr lang="en-US" sz="1050" dirty="0"/>
-          </a:p>
-          <a:p>
-            <a:pPr indent="0" marL="0">
-              <a:lnSpc>
-                <a:spcPct val="140000"/>
-              </a:lnSpc>
-              <a:buNone/>
-            </a:pPr>
-            <a:endParaRPr lang="en-US" sz="1050" dirty="0"/>
-          </a:p>
-          <a:p>
-            <a:pPr indent="0" marL="0">
-              <a:lnSpc>
-                <a:spcPct val="140000"/>
-              </a:lnSpc>
-              <a:buNone/>
-            </a:pPr>
-            <a:r>
-              <a:rPr lang="en-US" sz="1050" dirty="0">
-                <a:solidFill>
-                  <a:srgbClr val="E8EAED"/>
-                </a:solidFill>
-                <a:latin typeface="Consolas" pitchFamily="34" charset="0"/>
-                <a:ea typeface="Consolas" pitchFamily="34" charset="-122"/>
-                <a:cs typeface="Consolas" pitchFamily="34" charset="-120"/>
-              </a:rPr>
-              <a:t># 4. Vérifs : VIF + AUC + HL</a:t>
-            </a:r>
-            <a:endParaRPr lang="en-US" sz="1050" dirty="0"/>
-          </a:p>
-          <a:p>
-            <a:pPr indent="0" marL="0">
-              <a:lnSpc>
-                <a:spcPct val="140000"/>
-              </a:lnSpc>
-              <a:buNone/>
-            </a:pPr>
-            <a:r>
-              <a:rPr lang="en-US" sz="1050" dirty="0">
-                <a:solidFill>
-                  <a:srgbClr val="E8EAED"/>
-                </a:solidFill>
-                <a:latin typeface="Consolas" pitchFamily="34" charset="0"/>
-                <a:ea typeface="Consolas" pitchFamily="34" charset="-122"/>
-                <a:cs typeface="Consolas" pitchFamily="34" charset="-120"/>
-              </a:rPr>
-              <a:t>library(car); vif(mod_aj)</a:t>
-            </a:r>
-            <a:endParaRPr lang="en-US" sz="1050" dirty="0"/>
-          </a:p>
-          <a:p>
-            <a:pPr indent="0" marL="0">
-              <a:lnSpc>
-                <a:spcPct val="140000"/>
-              </a:lnSpc>
-              <a:buNone/>
-            </a:pPr>
-            <a:r>
-              <a:rPr lang="en-US" sz="1050" dirty="0">
-                <a:solidFill>
-                  <a:srgbClr val="E8EAED"/>
-                </a:solidFill>
-                <a:latin typeface="Consolas" pitchFamily="34" charset="0"/>
-                <a:ea typeface="Consolas" pitchFamily="34" charset="-122"/>
-                <a:cs typeface="Consolas" pitchFamily="34" charset="-120"/>
-              </a:rPr>
-              <a:t>library(pROC); auc(donnees$cas,</a:t>
-            </a:r>
-            <a:endParaRPr lang="en-US" sz="1050" dirty="0"/>
-          </a:p>
-          <a:p>
-            <a:pPr indent="0" marL="0">
-              <a:lnSpc>
-                <a:spcPct val="140000"/>
-              </a:lnSpc>
-              <a:buNone/>
-            </a:pPr>
-            <a:r>
-              <a:rPr lang="en-US" sz="1050" dirty="0">
-                <a:solidFill>
-                  <a:srgbClr val="E8EAED"/>
-                </a:solidFill>
-                <a:latin typeface="Consolas" pitchFamily="34" charset="0"/>
-                <a:ea typeface="Consolas" pitchFamily="34" charset="-122"/>
-                <a:cs typeface="Consolas" pitchFamily="34" charset="-120"/>
-              </a:rPr>
-              <a:t>  predict(mod_aj, type = "response"))</a:t>
-            </a:r>
-            <a:endParaRPr lang="en-US" sz="1050" dirty="0"/>
-          </a:p>
         </p:txBody>
       </p:sp>
       <p:sp>
@@ -6361,13 +6546,334 @@
         </p:nvSpPr>
         <p:spPr>
           <a:xfrm>
-            <a:off x="7680960" y="2834640"/>
-            <a:ext cx="4050792" cy="3429000"/>
-          </a:xfrm>
-          <a:prstGeom prst="roundRect">
-            <a:avLst>
-              <a:gd name="adj" fmla="val 2667"/>
-            </a:avLst>
+            <a:off x="5669280" y="2926080"/>
+            <a:ext cx="6062472" cy="3108960"/>
+          </a:xfrm>
+          <a:prstGeom prst="rect">
+            <a:avLst/>
+          </a:prstGeom>
+          <a:solidFill>
+            <a:srgbClr val="FFFFFF"/>
+          </a:solidFill>
+          <a:ln w="6350">
+            <a:solidFill>
+              <a:srgbClr val="D6CFB8"/>
+            </a:solidFill>
+            <a:prstDash val="solid"/>
+          </a:ln>
+        </p:spPr>
+      </p:sp>
+      <p:sp>
+        <p:nvSpPr>
+          <p:cNvPr id="12" name="Text 10"/>
+          <p:cNvSpPr/>
+          <p:nvPr/>
+        </p:nvSpPr>
+        <p:spPr>
+          <a:xfrm>
+            <a:off x="5760720" y="2971800"/>
+            <a:ext cx="5879592" cy="228600"/>
+          </a:xfrm>
+          <a:prstGeom prst="rect">
+            <a:avLst/>
+          </a:prstGeom>
+          <a:noFill/>
+          <a:ln/>
+        </p:spPr>
+        <p:txBody>
+          <a:bodyPr wrap="square" rtlCol="0" anchor="ctr"/>
+          <a:lstStyle/>
+          <a:p>
+            <a:pPr algn="ctr" indent="0" marL="0">
+              <a:buNone/>
+            </a:pPr>
+            <a:r>
+              <a:rPr lang="en-US" sz="900" b="1" dirty="0">
+                <a:solidFill>
+                  <a:srgbClr val="15233F"/>
+                </a:solidFill>
+                <a:latin typeface="Calibri" pitchFamily="34" charset="0"/>
+                <a:ea typeface="Calibri" pitchFamily="34" charset="-122"/>
+                <a:cs typeface="Calibri" pitchFamily="34" charset="-120"/>
+              </a:rPr>
+              <a:t>aOR · facteurs de risque cancer du col</a:t>
+            </a:r>
+            <a:endParaRPr lang="en-US" sz="900" dirty="0"/>
+          </a:p>
+        </p:txBody>
+      </p:sp>
+      <p:sp>
+        <p:nvSpPr>
+          <p:cNvPr id="13" name="Shape 11"/>
+          <p:cNvSpPr/>
+          <p:nvPr/>
+        </p:nvSpPr>
+        <p:spPr>
+          <a:xfrm>
+            <a:off x="7607066" y="3246120"/>
+            <a:ext cx="0" cy="2423160"/>
+          </a:xfrm>
+          <a:prstGeom prst="line">
+            <a:avLst/>
+          </a:prstGeom>
+          <a:noFill/>
+          <a:ln w="12700">
+            <a:solidFill>
+              <a:srgbClr val="6B7280"/>
+            </a:solidFill>
+            <a:prstDash val="dash"/>
+          </a:ln>
+        </p:spPr>
+      </p:sp>
+      <p:sp>
+        <p:nvSpPr>
+          <p:cNvPr id="14" name="Text 12"/>
+          <p:cNvSpPr/>
+          <p:nvPr/>
+        </p:nvSpPr>
+        <p:spPr>
+          <a:xfrm>
+            <a:off x="5760720" y="3323844"/>
+            <a:ext cx="1371600" cy="329184"/>
+          </a:xfrm>
+          <a:prstGeom prst="rect">
+            <a:avLst/>
+          </a:prstGeom>
+          <a:noFill/>
+          <a:ln/>
+        </p:spPr>
+        <p:txBody>
+          <a:bodyPr wrap="square" rtlCol="0" anchor="ctr"/>
+          <a:lstStyle/>
+          <a:p>
+            <a:pPr indent="0" marL="0">
+              <a:buNone/>
+            </a:pPr>
+            <a:r>
+              <a:rPr lang="en-US" sz="1000" b="1" dirty="0">
+                <a:solidFill>
+                  <a:srgbClr val="15233F"/>
+                </a:solidFill>
+                <a:latin typeface="Calibri" pitchFamily="34" charset="0"/>
+                <a:ea typeface="Calibri" pitchFamily="34" charset="-122"/>
+                <a:cs typeface="Calibri" pitchFamily="34" charset="-120"/>
+              </a:rPr>
+              <a:t>HPV</a:t>
+            </a:r>
+            <a:endParaRPr lang="en-US" sz="1000" dirty="0"/>
+          </a:p>
+        </p:txBody>
+      </p:sp>
+      <p:sp>
+        <p:nvSpPr>
+          <p:cNvPr id="15" name="Shape 13"/>
+          <p:cNvSpPr/>
+          <p:nvPr/>
+        </p:nvSpPr>
+        <p:spPr>
+          <a:xfrm>
+            <a:off x="8713123" y="3488436"/>
+            <a:ext cx="2517233" cy="0"/>
+          </a:xfrm>
+          <a:prstGeom prst="line">
+            <a:avLst/>
+          </a:prstGeom>
+          <a:noFill/>
+          <a:ln w="19050">
+            <a:solidFill>
+              <a:srgbClr val="F09042"/>
+            </a:solidFill>
+            <a:prstDash val="solid"/>
+          </a:ln>
+        </p:spPr>
+      </p:sp>
+      <p:sp>
+        <p:nvSpPr>
+          <p:cNvPr id="16" name="Shape 14"/>
+          <p:cNvSpPr/>
+          <p:nvPr/>
+        </p:nvSpPr>
+        <p:spPr>
+          <a:xfrm>
+            <a:off x="8713123" y="3433572"/>
+            <a:ext cx="0" cy="109728"/>
+          </a:xfrm>
+          <a:prstGeom prst="line">
+            <a:avLst/>
+          </a:prstGeom>
+          <a:noFill/>
+          <a:ln w="19050">
+            <a:solidFill>
+              <a:srgbClr val="F09042"/>
+            </a:solidFill>
+            <a:prstDash val="solid"/>
+          </a:ln>
+        </p:spPr>
+      </p:sp>
+      <p:sp>
+        <p:nvSpPr>
+          <p:cNvPr id="17" name="Shape 15"/>
+          <p:cNvSpPr/>
+          <p:nvPr/>
+        </p:nvSpPr>
+        <p:spPr>
+          <a:xfrm>
+            <a:off x="11230356" y="3433572"/>
+            <a:ext cx="0" cy="109728"/>
+          </a:xfrm>
+          <a:prstGeom prst="line">
+            <a:avLst/>
+          </a:prstGeom>
+          <a:noFill/>
+          <a:ln w="19050">
+            <a:solidFill>
+              <a:srgbClr val="F09042"/>
+            </a:solidFill>
+            <a:prstDash val="solid"/>
+          </a:ln>
+        </p:spPr>
+      </p:sp>
+      <p:sp>
+        <p:nvSpPr>
+          <p:cNvPr id="18" name="Shape 16"/>
+          <p:cNvSpPr/>
+          <p:nvPr/>
+        </p:nvSpPr>
+        <p:spPr>
+          <a:xfrm>
+            <a:off x="9602612" y="3424428"/>
+            <a:ext cx="128016" cy="128016"/>
+          </a:xfrm>
+          <a:prstGeom prst="rect">
+            <a:avLst/>
+          </a:prstGeom>
+          <a:solidFill>
+            <a:srgbClr val="F09042"/>
+          </a:solidFill>
+          <a:ln/>
+        </p:spPr>
+      </p:sp>
+      <p:sp>
+        <p:nvSpPr>
+          <p:cNvPr id="19" name="Text 17"/>
+          <p:cNvSpPr/>
+          <p:nvPr/>
+        </p:nvSpPr>
+        <p:spPr>
+          <a:xfrm>
+            <a:off x="5760720" y="3808476"/>
+            <a:ext cx="1371600" cy="329184"/>
+          </a:xfrm>
+          <a:prstGeom prst="rect">
+            <a:avLst/>
+          </a:prstGeom>
+          <a:noFill/>
+          <a:ln/>
+        </p:spPr>
+        <p:txBody>
+          <a:bodyPr wrap="square" rtlCol="0" anchor="ctr"/>
+          <a:lstStyle/>
+          <a:p>
+            <a:pPr indent="0" marL="0">
+              <a:buNone/>
+            </a:pPr>
+            <a:r>
+              <a:rPr lang="en-US" sz="1000" b="1" dirty="0">
+                <a:solidFill>
+                  <a:srgbClr val="15233F"/>
+                </a:solidFill>
+                <a:latin typeface="Calibri" pitchFamily="34" charset="0"/>
+                <a:ea typeface="Calibri" pitchFamily="34" charset="-122"/>
+                <a:cs typeface="Calibri" pitchFamily="34" charset="-120"/>
+              </a:rPr>
+              <a:t>âge</a:t>
+            </a:r>
+            <a:endParaRPr lang="en-US" sz="1000" dirty="0"/>
+          </a:p>
+        </p:txBody>
+      </p:sp>
+      <p:sp>
+        <p:nvSpPr>
+          <p:cNvPr id="20" name="Shape 18"/>
+          <p:cNvSpPr/>
+          <p:nvPr/>
+        </p:nvSpPr>
+        <p:spPr>
+          <a:xfrm>
+            <a:off x="7610880" y="3973068"/>
+            <a:ext cx="15256" cy="0"/>
+          </a:xfrm>
+          <a:prstGeom prst="line">
+            <a:avLst/>
+          </a:prstGeom>
+          <a:noFill/>
+          <a:ln w="19050">
+            <a:solidFill>
+              <a:srgbClr val="0E1729"/>
+            </a:solidFill>
+            <a:prstDash val="solid"/>
+          </a:ln>
+        </p:spPr>
+      </p:sp>
+      <p:sp>
+        <p:nvSpPr>
+          <p:cNvPr id="21" name="Shape 19"/>
+          <p:cNvSpPr/>
+          <p:nvPr/>
+        </p:nvSpPr>
+        <p:spPr>
+          <a:xfrm>
+            <a:off x="7610880" y="3918204"/>
+            <a:ext cx="0" cy="109728"/>
+          </a:xfrm>
+          <a:prstGeom prst="line">
+            <a:avLst/>
+          </a:prstGeom>
+          <a:noFill/>
+          <a:ln w="19050">
+            <a:solidFill>
+              <a:srgbClr val="0E1729"/>
+            </a:solidFill>
+            <a:prstDash val="solid"/>
+          </a:ln>
+        </p:spPr>
+      </p:sp>
+      <p:sp>
+        <p:nvSpPr>
+          <p:cNvPr id="22" name="Shape 20"/>
+          <p:cNvSpPr/>
+          <p:nvPr/>
+        </p:nvSpPr>
+        <p:spPr>
+          <a:xfrm>
+            <a:off x="7626136" y="3918204"/>
+            <a:ext cx="0" cy="109728"/>
+          </a:xfrm>
+          <a:prstGeom prst="line">
+            <a:avLst/>
+          </a:prstGeom>
+          <a:noFill/>
+          <a:ln w="19050">
+            <a:solidFill>
+              <a:srgbClr val="0E1729"/>
+            </a:solidFill>
+            <a:prstDash val="solid"/>
+          </a:ln>
+        </p:spPr>
+      </p:sp>
+      <p:sp>
+        <p:nvSpPr>
+          <p:cNvPr id="23" name="Shape 21"/>
+          <p:cNvSpPr/>
+          <p:nvPr/>
+        </p:nvSpPr>
+        <p:spPr>
+          <a:xfrm>
+            <a:off x="7554500" y="3909060"/>
+            <a:ext cx="128016" cy="128016"/>
+          </a:xfrm>
+          <a:prstGeom prst="rect">
+            <a:avLst/>
           </a:prstGeom>
           <a:solidFill>
             <a:srgbClr val="0E1729"/>
@@ -6377,14 +6883,14 @@
       </p:sp>
       <p:sp>
         <p:nvSpPr>
-          <p:cNvPr id="12" name="Text 10"/>
-          <p:cNvSpPr/>
-          <p:nvPr/>
-        </p:nvSpPr>
-        <p:spPr>
-          <a:xfrm>
-            <a:off x="7863840" y="2971800"/>
-            <a:ext cx="3749040" cy="320040"/>
+          <p:cNvPr id="24" name="Text 22"/>
+          <p:cNvSpPr/>
+          <p:nvPr/>
+        </p:nvSpPr>
+        <p:spPr>
+          <a:xfrm>
+            <a:off x="5760720" y="4293108"/>
+            <a:ext cx="1371600" cy="329184"/>
           </a:xfrm>
           <a:prstGeom prst="rect">
             <a:avLst/>
@@ -6400,30 +6906,119 @@
               <a:buNone/>
             </a:pPr>
             <a:r>
-              <a:rPr lang="en-US" sz="1100" b="1" spc="300" kern="0" dirty="0">
-                <a:solidFill>
-                  <a:srgbClr val="F09042"/>
+              <a:rPr lang="en-US" sz="1000" b="1" dirty="0">
+                <a:solidFill>
+                  <a:srgbClr val="15233F"/>
                 </a:solidFill>
                 <a:latin typeface="Calibri" pitchFamily="34" charset="0"/>
                 <a:ea typeface="Calibri" pitchFamily="34" charset="-122"/>
                 <a:cs typeface="Calibri" pitchFamily="34" charset="-120"/>
               </a:rPr>
-              <a:t>TABLEAU FINAL</a:t>
-            </a:r>
-            <a:endParaRPr lang="en-US" sz="1100" dirty="0"/>
-          </a:p>
-        </p:txBody>
-      </p:sp>
-      <p:sp>
-        <p:nvSpPr>
-          <p:cNvPr id="13" name="Text 11"/>
-          <p:cNvSpPr/>
-          <p:nvPr/>
-        </p:nvSpPr>
-        <p:spPr>
-          <a:xfrm>
-            <a:off x="7863840" y="3337560"/>
-            <a:ext cx="3749040" cy="1554480"/>
+              <a:t>parité</a:t>
+            </a:r>
+            <a:endParaRPr lang="en-US" sz="1000" dirty="0"/>
+          </a:p>
+        </p:txBody>
+      </p:sp>
+      <p:sp>
+        <p:nvSpPr>
+          <p:cNvPr id="25" name="Shape 23"/>
+          <p:cNvSpPr/>
+          <p:nvPr/>
+        </p:nvSpPr>
+        <p:spPr>
+          <a:xfrm>
+            <a:off x="7683346" y="4457700"/>
+            <a:ext cx="629308" cy="0"/>
+          </a:xfrm>
+          <a:prstGeom prst="line">
+            <a:avLst/>
+          </a:prstGeom>
+          <a:noFill/>
+          <a:ln w="19050">
+            <a:solidFill>
+              <a:srgbClr val="0E1729"/>
+            </a:solidFill>
+            <a:prstDash val="solid"/>
+          </a:ln>
+        </p:spPr>
+      </p:sp>
+      <p:sp>
+        <p:nvSpPr>
+          <p:cNvPr id="26" name="Shape 24"/>
+          <p:cNvSpPr/>
+          <p:nvPr/>
+        </p:nvSpPr>
+        <p:spPr>
+          <a:xfrm>
+            <a:off x="7683346" y="4402836"/>
+            <a:ext cx="0" cy="109728"/>
+          </a:xfrm>
+          <a:prstGeom prst="line">
+            <a:avLst/>
+          </a:prstGeom>
+          <a:noFill/>
+          <a:ln w="19050">
+            <a:solidFill>
+              <a:srgbClr val="0E1729"/>
+            </a:solidFill>
+            <a:prstDash val="solid"/>
+          </a:ln>
+        </p:spPr>
+      </p:sp>
+      <p:sp>
+        <p:nvSpPr>
+          <p:cNvPr id="27" name="Shape 25"/>
+          <p:cNvSpPr/>
+          <p:nvPr/>
+        </p:nvSpPr>
+        <p:spPr>
+          <a:xfrm>
+            <a:off x="8312654" y="4402836"/>
+            <a:ext cx="0" cy="109728"/>
+          </a:xfrm>
+          <a:prstGeom prst="line">
+            <a:avLst/>
+          </a:prstGeom>
+          <a:noFill/>
+          <a:ln w="19050">
+            <a:solidFill>
+              <a:srgbClr val="0E1729"/>
+            </a:solidFill>
+            <a:prstDash val="solid"/>
+          </a:ln>
+        </p:spPr>
+      </p:sp>
+      <p:sp>
+        <p:nvSpPr>
+          <p:cNvPr id="28" name="Shape 26"/>
+          <p:cNvSpPr/>
+          <p:nvPr/>
+        </p:nvSpPr>
+        <p:spPr>
+          <a:xfrm>
+            <a:off x="7867247" y="4393692"/>
+            <a:ext cx="128016" cy="128016"/>
+          </a:xfrm>
+          <a:prstGeom prst="rect">
+            <a:avLst/>
+          </a:prstGeom>
+          <a:solidFill>
+            <a:srgbClr val="0E1729"/>
+          </a:solidFill>
+          <a:ln/>
+        </p:spPr>
+      </p:sp>
+      <p:sp>
+        <p:nvSpPr>
+          <p:cNvPr id="29" name="Text 27"/>
+          <p:cNvSpPr/>
+          <p:nvPr/>
+        </p:nvSpPr>
+        <p:spPr>
+          <a:xfrm>
+            <a:off x="5760720" y="4777740"/>
+            <a:ext cx="1371600" cy="329184"/>
           </a:xfrm>
           <a:prstGeom prst="rect">
             <a:avLst/>
@@ -6436,253 +7031,377 @@
           <a:lstStyle/>
           <a:p>
             <a:pPr indent="0" marL="0">
-              <a:lnSpc>
-                <a:spcPct val="140000"/>
-              </a:lnSpc>
-              <a:buNone/>
-            </a:pPr>
-            <a:r>
-              <a:rPr lang="en-US" sz="1100" dirty="0">
-                <a:solidFill>
-                  <a:srgbClr val="FFFFFF"/>
+              <a:buNone/>
+            </a:pPr>
+            <a:r>
+              <a:rPr lang="en-US" sz="1000" b="1" dirty="0">
+                <a:solidFill>
+                  <a:srgbClr val="15233F"/>
                 </a:solidFill>
                 <a:latin typeface="Calibri" pitchFamily="34" charset="0"/>
                 <a:ea typeface="Calibri" pitchFamily="34" charset="-122"/>
                 <a:cs typeface="Calibri" pitchFamily="34" charset="-120"/>
               </a:rPr>
-              <a:t>OR univarié HPV = 8,3</a:t>
-            </a:r>
-            <a:endParaRPr lang="en-US" sz="1100" dirty="0"/>
-          </a:p>
-          <a:p>
-            <a:pPr indent="0" marL="0">
-              <a:lnSpc>
-                <a:spcPct val="140000"/>
-              </a:lnSpc>
-              <a:buNone/>
-            </a:pPr>
-            <a:r>
-              <a:rPr lang="en-US" sz="1100" dirty="0">
-                <a:solidFill>
-                  <a:srgbClr val="FFFFFF"/>
+              <a:t>tabac</a:t>
+            </a:r>
+            <a:endParaRPr lang="en-US" sz="1000" dirty="0"/>
+          </a:p>
+        </p:txBody>
+      </p:sp>
+      <p:sp>
+        <p:nvSpPr>
+          <p:cNvPr id="30" name="Shape 28"/>
+          <p:cNvSpPr/>
+          <p:nvPr/>
+        </p:nvSpPr>
+        <p:spPr>
+          <a:xfrm>
+            <a:off x="7587996" y="4942332"/>
+            <a:ext cx="450051" cy="0"/>
+          </a:xfrm>
+          <a:prstGeom prst="line">
+            <a:avLst/>
+          </a:prstGeom>
+          <a:noFill/>
+          <a:ln w="19050">
+            <a:solidFill>
+              <a:srgbClr val="0E1729"/>
+            </a:solidFill>
+            <a:prstDash val="solid"/>
+          </a:ln>
+        </p:spPr>
+      </p:sp>
+      <p:sp>
+        <p:nvSpPr>
+          <p:cNvPr id="31" name="Shape 29"/>
+          <p:cNvSpPr/>
+          <p:nvPr/>
+        </p:nvSpPr>
+        <p:spPr>
+          <a:xfrm>
+            <a:off x="7587996" y="4887468"/>
+            <a:ext cx="0" cy="109728"/>
+          </a:xfrm>
+          <a:prstGeom prst="line">
+            <a:avLst/>
+          </a:prstGeom>
+          <a:noFill/>
+          <a:ln w="19050">
+            <a:solidFill>
+              <a:srgbClr val="0E1729"/>
+            </a:solidFill>
+            <a:prstDash val="solid"/>
+          </a:ln>
+        </p:spPr>
+      </p:sp>
+      <p:sp>
+        <p:nvSpPr>
+          <p:cNvPr id="32" name="Shape 30"/>
+          <p:cNvSpPr/>
+          <p:nvPr/>
+        </p:nvSpPr>
+        <p:spPr>
+          <a:xfrm>
+            <a:off x="8038047" y="4887468"/>
+            <a:ext cx="0" cy="109728"/>
+          </a:xfrm>
+          <a:prstGeom prst="line">
+            <a:avLst/>
+          </a:prstGeom>
+          <a:noFill/>
+          <a:ln w="19050">
+            <a:solidFill>
+              <a:srgbClr val="0E1729"/>
+            </a:solidFill>
+            <a:prstDash val="solid"/>
+          </a:ln>
+        </p:spPr>
+      </p:sp>
+      <p:sp>
+        <p:nvSpPr>
+          <p:cNvPr id="33" name="Shape 31"/>
+          <p:cNvSpPr/>
+          <p:nvPr/>
+        </p:nvSpPr>
+        <p:spPr>
+          <a:xfrm>
+            <a:off x="7703246" y="4878324"/>
+            <a:ext cx="128016" cy="128016"/>
+          </a:xfrm>
+          <a:prstGeom prst="rect">
+            <a:avLst/>
+          </a:prstGeom>
+          <a:solidFill>
+            <a:srgbClr val="0E1729"/>
+          </a:solidFill>
+          <a:ln/>
+        </p:spPr>
+      </p:sp>
+      <p:sp>
+        <p:nvSpPr>
+          <p:cNvPr id="34" name="Text 32"/>
+          <p:cNvSpPr/>
+          <p:nvPr/>
+        </p:nvSpPr>
+        <p:spPr>
+          <a:xfrm>
+            <a:off x="5760720" y="5262372"/>
+            <a:ext cx="1371600" cy="329184"/>
+          </a:xfrm>
+          <a:prstGeom prst="rect">
+            <a:avLst/>
+          </a:prstGeom>
+          <a:noFill/>
+          <a:ln/>
+        </p:spPr>
+        <p:txBody>
+          <a:bodyPr wrap="square" rtlCol="0" anchor="ctr"/>
+          <a:lstStyle/>
+          <a:p>
+            <a:pPr indent="0" marL="0">
+              <a:buNone/>
+            </a:pPr>
+            <a:r>
+              <a:rPr lang="en-US" sz="1000" b="1" dirty="0">
+                <a:solidFill>
+                  <a:srgbClr val="15233F"/>
                 </a:solidFill>
                 <a:latin typeface="Calibri" pitchFamily="34" charset="0"/>
                 <a:ea typeface="Calibri" pitchFamily="34" charset="-122"/>
                 <a:cs typeface="Calibri" pitchFamily="34" charset="-120"/>
               </a:rPr>
-              <a:t>IC95% [5,2 ; 13,2]</a:t>
-            </a:r>
-            <a:endParaRPr lang="en-US" sz="1100" dirty="0"/>
-          </a:p>
-          <a:p>
-            <a:pPr indent="0" marL="0">
-              <a:lnSpc>
-                <a:spcPct val="140000"/>
-              </a:lnSpc>
-              <a:buNone/>
-            </a:pPr>
-            <a:endParaRPr lang="en-US" sz="1100" dirty="0"/>
-          </a:p>
-          <a:p>
-            <a:pPr indent="0" marL="0">
-              <a:lnSpc>
-                <a:spcPct val="140000"/>
-              </a:lnSpc>
-              <a:buNone/>
-            </a:pPr>
-            <a:r>
-              <a:rPr lang="en-US" sz="1100" dirty="0">
-                <a:solidFill>
-                  <a:srgbClr val="FFFFFF"/>
+              <a:t>SES bas</a:t>
+            </a:r>
+            <a:endParaRPr lang="en-US" sz="1000" dirty="0"/>
+          </a:p>
+        </p:txBody>
+      </p:sp>
+      <p:sp>
+        <p:nvSpPr>
+          <p:cNvPr id="35" name="Shape 33"/>
+          <p:cNvSpPr/>
+          <p:nvPr/>
+        </p:nvSpPr>
+        <p:spPr>
+          <a:xfrm>
+            <a:off x="7626136" y="5426964"/>
+            <a:ext cx="587354" cy="0"/>
+          </a:xfrm>
+          <a:prstGeom prst="line">
+            <a:avLst/>
+          </a:prstGeom>
+          <a:noFill/>
+          <a:ln w="19050">
+            <a:solidFill>
+              <a:srgbClr val="0E1729"/>
+            </a:solidFill>
+            <a:prstDash val="solid"/>
+          </a:ln>
+        </p:spPr>
+      </p:sp>
+      <p:sp>
+        <p:nvSpPr>
+          <p:cNvPr id="36" name="Shape 34"/>
+          <p:cNvSpPr/>
+          <p:nvPr/>
+        </p:nvSpPr>
+        <p:spPr>
+          <a:xfrm>
+            <a:off x="7626136" y="5372100"/>
+            <a:ext cx="0" cy="109728"/>
+          </a:xfrm>
+          <a:prstGeom prst="line">
+            <a:avLst/>
+          </a:prstGeom>
+          <a:noFill/>
+          <a:ln w="19050">
+            <a:solidFill>
+              <a:srgbClr val="0E1729"/>
+            </a:solidFill>
+            <a:prstDash val="solid"/>
+          </a:ln>
+        </p:spPr>
+      </p:sp>
+      <p:sp>
+        <p:nvSpPr>
+          <p:cNvPr id="37" name="Shape 35"/>
+          <p:cNvSpPr/>
+          <p:nvPr/>
+        </p:nvSpPr>
+        <p:spPr>
+          <a:xfrm>
+            <a:off x="8213490" y="5372100"/>
+            <a:ext cx="0" cy="109728"/>
+          </a:xfrm>
+          <a:prstGeom prst="line">
+            <a:avLst/>
+          </a:prstGeom>
+          <a:noFill/>
+          <a:ln w="19050">
+            <a:solidFill>
+              <a:srgbClr val="0E1729"/>
+            </a:solidFill>
+            <a:prstDash val="solid"/>
+          </a:ln>
+        </p:spPr>
+      </p:sp>
+      <p:sp>
+        <p:nvSpPr>
+          <p:cNvPr id="38" name="Shape 36"/>
+          <p:cNvSpPr/>
+          <p:nvPr/>
+        </p:nvSpPr>
+        <p:spPr>
+          <a:xfrm>
+            <a:off x="7790967" y="5362956"/>
+            <a:ext cx="128016" cy="128016"/>
+          </a:xfrm>
+          <a:prstGeom prst="rect">
+            <a:avLst/>
+          </a:prstGeom>
+          <a:solidFill>
+            <a:srgbClr val="0E1729"/>
+          </a:solidFill>
+          <a:ln/>
+        </p:spPr>
+      </p:sp>
+      <p:sp>
+        <p:nvSpPr>
+          <p:cNvPr id="39" name="Shape 37"/>
+          <p:cNvSpPr/>
+          <p:nvPr/>
+        </p:nvSpPr>
+        <p:spPr>
+          <a:xfrm>
+            <a:off x="7223760" y="5715000"/>
+            <a:ext cx="4370832" cy="0"/>
+          </a:xfrm>
+          <a:prstGeom prst="line">
+            <a:avLst/>
+          </a:prstGeom>
+          <a:noFill/>
+          <a:ln w="6350">
+            <a:solidFill>
+              <a:srgbClr val="0E1729"/>
+            </a:solidFill>
+            <a:prstDash val="solid"/>
+          </a:ln>
+        </p:spPr>
+      </p:sp>
+      <p:sp>
+        <p:nvSpPr>
+          <p:cNvPr id="40" name="Text 38"/>
+          <p:cNvSpPr/>
+          <p:nvPr/>
+        </p:nvSpPr>
+        <p:spPr>
+          <a:xfrm>
+            <a:off x="7424186" y="5760720"/>
+            <a:ext cx="365760" cy="182880"/>
+          </a:xfrm>
+          <a:prstGeom prst="rect">
+            <a:avLst/>
+          </a:prstGeom>
+          <a:noFill/>
+          <a:ln/>
+        </p:spPr>
+        <p:txBody>
+          <a:bodyPr wrap="square" rtlCol="0" anchor="ctr"/>
+          <a:lstStyle/>
+          <a:p>
+            <a:pPr algn="ctr" indent="0" marL="0">
+              <a:buNone/>
+            </a:pPr>
+            <a:r>
+              <a:rPr lang="en-US" sz="800" dirty="0">
+                <a:solidFill>
+                  <a:srgbClr val="6B7280"/>
                 </a:solidFill>
                 <a:latin typeface="Calibri" pitchFamily="34" charset="0"/>
                 <a:ea typeface="Calibri" pitchFamily="34" charset="-122"/>
                 <a:cs typeface="Calibri" pitchFamily="34" charset="-120"/>
               </a:rPr>
-              <a:t>aOR ajusté HPV = 6,4</a:t>
-            </a:r>
-            <a:endParaRPr lang="en-US" sz="1100" dirty="0"/>
-          </a:p>
-          <a:p>
-            <a:pPr indent="0" marL="0">
-              <a:lnSpc>
-                <a:spcPct val="140000"/>
-              </a:lnSpc>
-              <a:buNone/>
-            </a:pPr>
-            <a:r>
-              <a:rPr lang="en-US" sz="1100" dirty="0">
-                <a:solidFill>
-                  <a:srgbClr val="FFFFFF"/>
+              <a:t>1</a:t>
+            </a:r>
+            <a:endParaRPr lang="en-US" sz="800" dirty="0"/>
+          </a:p>
+        </p:txBody>
+      </p:sp>
+      <p:sp>
+        <p:nvSpPr>
+          <p:cNvPr id="41" name="Text 39"/>
+          <p:cNvSpPr/>
+          <p:nvPr/>
+        </p:nvSpPr>
+        <p:spPr>
+          <a:xfrm>
+            <a:off x="7223760" y="5897880"/>
+            <a:ext cx="4370832" cy="182880"/>
+          </a:xfrm>
+          <a:prstGeom prst="rect">
+            <a:avLst/>
+          </a:prstGeom>
+          <a:noFill/>
+          <a:ln/>
+        </p:spPr>
+        <p:txBody>
+          <a:bodyPr wrap="square" rtlCol="0" anchor="ctr"/>
+          <a:lstStyle/>
+          <a:p>
+            <a:pPr algn="ctr" indent="0" marL="0">
+              <a:buNone/>
+            </a:pPr>
+            <a:r>
+              <a:rPr lang="en-US" sz="800" i="1" dirty="0">
+                <a:solidFill>
+                  <a:srgbClr val="6B7280"/>
                 </a:solidFill>
                 <a:latin typeface="Calibri" pitchFamily="34" charset="0"/>
                 <a:ea typeface="Calibri" pitchFamily="34" charset="-122"/>
                 <a:cs typeface="Calibri" pitchFamily="34" charset="-120"/>
               </a:rPr>
-              <a:t>IC95% [3,9 ; 10,5]</a:t>
-            </a:r>
-            <a:endParaRPr lang="en-US" sz="1100" dirty="0"/>
-          </a:p>
-          <a:p>
-            <a:pPr indent="0" marL="0">
-              <a:lnSpc>
-                <a:spcPct val="140000"/>
-              </a:lnSpc>
-              <a:buNone/>
-            </a:pPr>
-            <a:r>
-              <a:rPr lang="en-US" sz="1100" dirty="0">
-                <a:solidFill>
-                  <a:srgbClr val="FFFFFF"/>
+              <a:t>Odds Ratio ajusté</a:t>
+            </a:r>
+            <a:endParaRPr lang="en-US" sz="800" dirty="0"/>
+          </a:p>
+        </p:txBody>
+      </p:sp>
+      <p:sp>
+        <p:nvSpPr>
+          <p:cNvPr id="42" name="Text 40"/>
+          <p:cNvSpPr/>
+          <p:nvPr/>
+        </p:nvSpPr>
+        <p:spPr>
+          <a:xfrm>
+            <a:off x="640080" y="6080760"/>
+            <a:ext cx="10972800" cy="320040"/>
+          </a:xfrm>
+          <a:prstGeom prst="rect">
+            <a:avLst/>
+          </a:prstGeom>
+          <a:noFill/>
+          <a:ln/>
+        </p:spPr>
+        <p:txBody>
+          <a:bodyPr wrap="square" rtlCol="0" anchor="ctr"/>
+          <a:lstStyle/>
+          <a:p>
+            <a:pPr algn="ctr" indent="0" marL="0">
+              <a:buNone/>
+            </a:pPr>
+            <a:r>
+              <a:rPr lang="en-US" sz="1100" i="1" dirty="0">
+                <a:solidFill>
+                  <a:srgbClr val="6B7280"/>
                 </a:solidFill>
                 <a:latin typeface="Calibri" pitchFamily="34" charset="0"/>
                 <a:ea typeface="Calibri" pitchFamily="34" charset="-122"/>
                 <a:cs typeface="Calibri" pitchFamily="34" charset="-120"/>
               </a:rPr>
-              <a:t>p &lt; 0,001</a:t>
+              <a:t>Conclusion : HPV reste le facteur de risque dominant, même après ajustement. aOR = 6,4 (IC95% [3,9 ; 10,5]).</a:t>
             </a:r>
             <a:endParaRPr lang="en-US" sz="1100" dirty="0"/>
-          </a:p>
-        </p:txBody>
-      </p:sp>
-      <p:sp>
-        <p:nvSpPr>
-          <p:cNvPr id="14" name="Shape 12"/>
-          <p:cNvSpPr/>
-          <p:nvPr/>
-        </p:nvSpPr>
-        <p:spPr>
-          <a:xfrm>
-            <a:off x="7863840" y="4937760"/>
-            <a:ext cx="3749040" cy="18288"/>
-          </a:xfrm>
-          <a:prstGeom prst="rect">
-            <a:avLst/>
-          </a:prstGeom>
-          <a:solidFill>
-            <a:srgbClr val="F09042"/>
-          </a:solidFill>
-          <a:ln/>
-        </p:spPr>
-      </p:sp>
-      <p:sp>
-        <p:nvSpPr>
-          <p:cNvPr id="15" name="Text 13"/>
-          <p:cNvSpPr/>
-          <p:nvPr/>
-        </p:nvSpPr>
-        <p:spPr>
-          <a:xfrm>
-            <a:off x="7863840" y="5029200"/>
-            <a:ext cx="3749040" cy="822960"/>
-          </a:xfrm>
-          <a:prstGeom prst="rect">
-            <a:avLst/>
-          </a:prstGeom>
-          <a:noFill/>
-          <a:ln/>
-        </p:spPr>
-        <p:txBody>
-          <a:bodyPr wrap="square" rtlCol="0" anchor="ctr"/>
-          <a:lstStyle/>
-          <a:p>
-            <a:pPr indent="0" marL="0">
-              <a:lnSpc>
-                <a:spcPct val="140000"/>
-              </a:lnSpc>
-              <a:buNone/>
-            </a:pPr>
-            <a:r>
-              <a:rPr lang="en-US" sz="1100" dirty="0">
-                <a:solidFill>
-                  <a:srgbClr val="FFFFFF"/>
-                </a:solidFill>
-                <a:latin typeface="Calibri" pitchFamily="34" charset="0"/>
-                <a:ea typeface="Calibri" pitchFamily="34" charset="-122"/>
-                <a:cs typeface="Calibri" pitchFamily="34" charset="-120"/>
-              </a:rPr>
-              <a:t>VIF max : 2,1 (OK)</a:t>
-            </a:r>
-            <a:endParaRPr lang="en-US" sz="1100" dirty="0"/>
-          </a:p>
-          <a:p>
-            <a:pPr indent="0" marL="0">
-              <a:lnSpc>
-                <a:spcPct val="140000"/>
-              </a:lnSpc>
-              <a:buNone/>
-            </a:pPr>
-            <a:r>
-              <a:rPr lang="en-US" sz="1100" dirty="0">
-                <a:solidFill>
-                  <a:srgbClr val="FFFFFF"/>
-                </a:solidFill>
-                <a:latin typeface="Calibri" pitchFamily="34" charset="0"/>
-                <a:ea typeface="Calibri" pitchFamily="34" charset="-122"/>
-                <a:cs typeface="Calibri" pitchFamily="34" charset="-120"/>
-              </a:rPr>
-              <a:t>AUC : 0,84 (bon)</a:t>
-            </a:r>
-            <a:endParaRPr lang="en-US" sz="1100" dirty="0"/>
-          </a:p>
-          <a:p>
-            <a:pPr indent="0" marL="0">
-              <a:lnSpc>
-                <a:spcPct val="140000"/>
-              </a:lnSpc>
-              <a:buNone/>
-            </a:pPr>
-            <a:r>
-              <a:rPr lang="en-US" sz="1100" dirty="0">
-                <a:solidFill>
-                  <a:srgbClr val="FFFFFF"/>
-                </a:solidFill>
-                <a:latin typeface="Calibri" pitchFamily="34" charset="0"/>
-                <a:ea typeface="Calibri" pitchFamily="34" charset="-122"/>
-                <a:cs typeface="Calibri" pitchFamily="34" charset="-120"/>
-              </a:rPr>
-              <a:t>Hosmer-Lemeshow : p = 0,42 (OK)</a:t>
-            </a:r>
-            <a:endParaRPr lang="en-US" sz="1100" dirty="0"/>
-          </a:p>
-        </p:txBody>
-      </p:sp>
-      <p:sp>
-        <p:nvSpPr>
-          <p:cNvPr id="16" name="Text 14"/>
-          <p:cNvSpPr/>
-          <p:nvPr/>
-        </p:nvSpPr>
-        <p:spPr>
-          <a:xfrm>
-            <a:off x="7863840" y="5897880"/>
-            <a:ext cx="3749040" cy="365760"/>
-          </a:xfrm>
-          <a:prstGeom prst="rect">
-            <a:avLst/>
-          </a:prstGeom>
-          <a:noFill/>
-          <a:ln/>
-        </p:spPr>
-        <p:txBody>
-          <a:bodyPr wrap="square" rtlCol="0" anchor="ctr"/>
-          <a:lstStyle/>
-          <a:p>
-            <a:pPr indent="0" marL="0">
-              <a:buNone/>
-            </a:pPr>
-            <a:r>
-              <a:rPr lang="en-US" sz="1000" i="1" dirty="0">
-                <a:solidFill>
-                  <a:srgbClr val="C9CFDC"/>
-                </a:solidFill>
-                <a:latin typeface="Calibri" pitchFamily="34" charset="0"/>
-                <a:ea typeface="Calibri" pitchFamily="34" charset="-122"/>
-                <a:cs typeface="Calibri" pitchFamily="34" charset="-120"/>
-              </a:rPr>
-              <a:t>Conclusion : HPV reste un facteur de risque fort après ajustement.</a:t>
-            </a:r>
-            <a:endParaRPr lang="en-US" sz="1000" dirty="0"/>
           </a:p>
         </p:txBody>
       </p:sp>
@@ -8007,7 +8726,7 @@
                 <a:ea typeface="Calibri" pitchFamily="34" charset="-122"/>
                 <a:cs typeface="Calibri" pitchFamily="34" charset="-120"/>
               </a:rPr>
-              <a:t>Le Module 4 entre dans le détail des outils spécifiques au biomédical : courbes ROC, sensibilité et spécificité, Kappa de Cohen pour la concordance, Kaplan-Meier et Cox pour la survie. C'est là que tu deviens autonome sur les méthodes d'évaluation diagnostique et de pronostic.</a:t>
+              <a:t>Le Module 4 entre dans le détail des outils spécifiques au biomédical : courbes ROC, sensibilité et spécificité, Kappa de Cohen pour la concordance, Kaplan-Meier et Cox pour la survie.</a:t>
             </a:r>
             <a:endParaRPr lang="en-US" sz="1400" dirty="0"/>
           </a:p>
@@ -8412,8 +9131,8 @@
         </p:nvSpPr>
         <p:spPr>
           <a:xfrm>
-            <a:off x="640080" y="1920240"/>
-            <a:ext cx="7040880" cy="1737360"/>
+            <a:off x="640080" y="1828800"/>
+            <a:ext cx="10972800" cy="1463040"/>
           </a:xfrm>
           <a:prstGeom prst="rect">
             <a:avLst/>
@@ -8440,7 +9159,7 @@
                 <a:ea typeface="Calibri" pitchFamily="34" charset="-122"/>
                 <a:cs typeface="Calibri" pitchFamily="34" charset="-120"/>
               </a:rPr>
-              <a:t>Une fois que tu as décrit ton échantillon et comparé tes groupes, ton jury voudra savoir : qu'est-ce qui explique quoi ? Quelles variables sont liées entre elles ? Quel facteur prédit la maladie une fois qu'on contrôle les autres ?</a:t>
+              <a:t>Une fois ton échantillon décrit et tes groupes comparés, ton jury voudra savoir : qu'est-ce qui explique quoi ? Quel facteur prédit la maladie une fois qu'on contrôle les autres ? C'est le passage du « combien » au « pourquoi ».</a:t>
             </a:r>
             <a:endParaRPr lang="en-US" sz="1400" dirty="0"/>
           </a:p>
@@ -8454,27 +9173,24 @@
         </p:nvSpPr>
         <p:spPr>
           <a:xfrm>
-            <a:off x="640080" y="3749040"/>
-            <a:ext cx="7040880" cy="2011680"/>
-          </a:xfrm>
-          <a:prstGeom prst="rect">
-            <a:avLst/>
-          </a:prstGeom>
-          <a:noFill/>
-          <a:ln/>
-        </p:spPr>
-        <p:txBody>
-          <a:bodyPr wrap="square" rtlCol="0" anchor="t"/>
-          <a:lstStyle/>
-          <a:p>
-            <a:pPr indent="0" marL="0">
-              <a:lnSpc>
-                <a:spcPct val="140000"/>
-              </a:lnSpc>
-              <a:buNone/>
-            </a:pPr>
-            <a:r>
-              <a:rPr lang="en-US" sz="1400" dirty="0">
+            <a:off x="640080" y="3474720"/>
+            <a:ext cx="11091672" cy="274320"/>
+          </a:xfrm>
+          <a:prstGeom prst="rect">
+            <a:avLst/>
+          </a:prstGeom>
+          <a:noFill/>
+          <a:ln/>
+        </p:spPr>
+        <p:txBody>
+          <a:bodyPr wrap="square" rtlCol="0" anchor="ctr"/>
+          <a:lstStyle/>
+          <a:p>
+            <a:pPr algn="ctr" indent="0" marL="0">
+              <a:buNone/>
+            </a:pPr>
+            <a:r>
+              <a:rPr lang="en-US" sz="1100" b="1" dirty="0">
                 <a:solidFill>
                   <a:srgbClr val="15233F"/>
                 </a:solidFill>
@@ -8482,9 +9198,9 @@
                 <a:ea typeface="Calibri" pitchFamily="34" charset="-122"/>
                 <a:cs typeface="Calibri" pitchFamily="34" charset="-120"/>
               </a:rPr>
-              <a:t>C'est le passage du « combien » au « pourquoi ». Et c'est là que les outils deviennent plus puissants — la régression logistique multivariée est sans doute LA méthode des thèses en santé publique. C'est aussi là que les pièges deviennent plus subtils.</a:t>
-            </a:r>
-            <a:endParaRPr lang="en-US" sz="1400" dirty="0"/>
+              <a:t>Trois temps en analyse</a:t>
+            </a:r>
+            <a:endParaRPr lang="en-US" sz="1100" dirty="0"/>
           </a:p>
         </p:txBody>
       </p:sp>
@@ -8496,18 +9212,23 @@
         </p:nvSpPr>
         <p:spPr>
           <a:xfrm>
-            <a:off x="7955280" y="1920240"/>
-            <a:ext cx="3794760" cy="4023360"/>
+            <a:off x="640080" y="3794760"/>
+            <a:ext cx="3514344" cy="1143000"/>
           </a:xfrm>
           <a:prstGeom prst="roundRect">
             <a:avLst>
-              <a:gd name="adj" fmla="val 2410"/>
+              <a:gd name="adj" fmla="val 6400"/>
             </a:avLst>
           </a:prstGeom>
           <a:solidFill>
-            <a:srgbClr val="0E1729"/>
+            <a:srgbClr val="FFFFFF"/>
           </a:solidFill>
-          <a:ln/>
+          <a:ln w="12700">
+            <a:solidFill>
+              <a:srgbClr val="D6CFB8"/>
+            </a:solidFill>
+            <a:prstDash val="solid"/>
+          </a:ln>
         </p:spPr>
       </p:sp>
       <p:sp>
@@ -8518,8 +9239,8 @@
         </p:nvSpPr>
         <p:spPr>
           <a:xfrm>
-            <a:off x="8138160" y="2103120"/>
-            <a:ext cx="3474720" cy="320040"/>
+            <a:off x="731520" y="3931920"/>
+            <a:ext cx="3331464" cy="457200"/>
           </a:xfrm>
           <a:prstGeom prst="rect">
             <a:avLst/>
@@ -8531,19 +9252,22 @@
           <a:bodyPr wrap="square" rtlCol="0" anchor="ctr"/>
           <a:lstStyle/>
           <a:p>
-            <a:pPr indent="0" marL="0">
-              <a:buNone/>
-            </a:pPr>
-            <a:r>
-              <a:rPr lang="en-US" sz="1100" b="1" spc="300" kern="0" dirty="0">
-                <a:solidFill>
-                  <a:srgbClr val="F09042"/>
+            <a:pPr algn="ctr" indent="0" marL="0">
+              <a:lnSpc>
+                <a:spcPct val="115000"/>
+              </a:lnSpc>
+              <a:buNone/>
+            </a:pPr>
+            <a:r>
+              <a:rPr lang="en-US" sz="1100" b="1" dirty="0">
+                <a:solidFill>
+                  <a:srgbClr val="15233F"/>
                 </a:solidFill>
                 <a:latin typeface="Calibri" pitchFamily="34" charset="0"/>
                 <a:ea typeface="Calibri" pitchFamily="34" charset="-122"/>
                 <a:cs typeface="Calibri" pitchFamily="34" charset="-120"/>
               </a:rPr>
-              <a:t>CE MODULE COUVRE</a:t>
+              <a:t>Descriptif</a:t>
             </a:r>
             <a:endParaRPr lang="en-US" sz="1100" dirty="0"/>
           </a:p>
@@ -8557,169 +9281,406 @@
         </p:nvSpPr>
         <p:spPr>
           <a:xfrm>
-            <a:off x="8138160" y="2514600"/>
-            <a:ext cx="3474720" cy="1005840"/>
-          </a:xfrm>
-          <a:prstGeom prst="rect">
-            <a:avLst/>
-          </a:prstGeom>
-          <a:noFill/>
-          <a:ln/>
-        </p:spPr>
-        <p:txBody>
-          <a:bodyPr wrap="square" rtlCol="0" anchor="ctr"/>
-          <a:lstStyle/>
-          <a:p>
-            <a:pPr indent="0" marL="0">
-              <a:buNone/>
-            </a:pPr>
-            <a:r>
-              <a:rPr lang="en-US" sz="9000" b="1" dirty="0">
-                <a:solidFill>
-                  <a:srgbClr val="F09042"/>
-                </a:solidFill>
-                <a:latin typeface="Consolas" pitchFamily="34" charset="0"/>
-                <a:ea typeface="Consolas" pitchFamily="34" charset="-122"/>
-                <a:cs typeface="Consolas" pitchFamily="34" charset="-120"/>
-              </a:rPr>
-              <a:t>5</a:t>
-            </a:r>
-            <a:endParaRPr lang="en-US" sz="9000" dirty="0"/>
-          </a:p>
-        </p:txBody>
-      </p:sp>
-      <p:sp>
-        <p:nvSpPr>
-          <p:cNvPr id="11" name="Text 9"/>
-          <p:cNvSpPr/>
-          <p:nvPr/>
-        </p:nvSpPr>
-        <p:spPr>
-          <a:xfrm>
-            <a:off x="8138160" y="3566160"/>
-            <a:ext cx="3474720" cy="1280160"/>
-          </a:xfrm>
-          <a:prstGeom prst="rect">
-            <a:avLst/>
-          </a:prstGeom>
-          <a:noFill/>
-          <a:ln/>
-        </p:spPr>
-        <p:txBody>
-          <a:bodyPr wrap="square" rtlCol="0" anchor="ctr"/>
-          <a:lstStyle/>
-          <a:p>
-            <a:pPr indent="0" marL="0">
-              <a:lnSpc>
-                <a:spcPct val="135000"/>
-              </a:lnSpc>
-              <a:buNone/>
-            </a:pPr>
-            <a:r>
-              <a:rPr lang="en-US" sz="1300" dirty="0">
-                <a:solidFill>
-                  <a:srgbClr val="FFFFFF"/>
+            <a:off x="731520" y="4434840"/>
+            <a:ext cx="3331464" cy="365760"/>
+          </a:xfrm>
+          <a:prstGeom prst="rect">
+            <a:avLst/>
+          </a:prstGeom>
+          <a:noFill/>
+          <a:ln/>
+        </p:spPr>
+        <p:txBody>
+          <a:bodyPr wrap="square" rtlCol="0" anchor="t"/>
+          <a:lstStyle/>
+          <a:p>
+            <a:pPr algn="ctr" indent="0" marL="0">
+              <a:lnSpc>
+                <a:spcPct val="130000"/>
+              </a:lnSpc>
+              <a:buNone/>
+            </a:pPr>
+            <a:r>
+              <a:rPr lang="en-US" sz="900" i="1" dirty="0">
+                <a:solidFill>
+                  <a:srgbClr val="15233F"/>
                 </a:solidFill>
                 <a:latin typeface="Calibri" pitchFamily="34" charset="0"/>
                 <a:ea typeface="Calibri" pitchFamily="34" charset="-122"/>
                 <a:cs typeface="Calibri" pitchFamily="34" charset="-120"/>
               </a:rPr>
-              <a:t>familles d'outils :</a:t>
-            </a:r>
-            <a:endParaRPr lang="en-US" sz="1300" dirty="0"/>
-          </a:p>
-          <a:p>
-            <a:pPr indent="0" marL="0">
-              <a:lnSpc>
-                <a:spcPct val="135000"/>
-              </a:lnSpc>
-              <a:buNone/>
-            </a:pPr>
-            <a:r>
-              <a:rPr lang="en-US" sz="1300" dirty="0">
-                <a:solidFill>
-                  <a:srgbClr val="FFFFFF"/>
+              <a:t>Moyennes</a:t>
+            </a:r>
+            <a:endParaRPr lang="en-US" sz="900" dirty="0"/>
+          </a:p>
+          <a:p>
+            <a:pPr algn="ctr" indent="0" marL="0">
+              <a:lnSpc>
+                <a:spcPct val="130000"/>
+              </a:lnSpc>
+              <a:buNone/>
+            </a:pPr>
+            <a:r>
+              <a:rPr lang="en-US" sz="900" i="1" dirty="0">
+                <a:solidFill>
+                  <a:srgbClr val="15233F"/>
                 </a:solidFill>
                 <a:latin typeface="Calibri" pitchFamily="34" charset="0"/>
                 <a:ea typeface="Calibri" pitchFamily="34" charset="-122"/>
                 <a:cs typeface="Calibri" pitchFamily="34" charset="-120"/>
               </a:rPr>
-              <a:t>corrélation, régression</a:t>
-            </a:r>
-            <a:endParaRPr lang="en-US" sz="1300" dirty="0"/>
-          </a:p>
-          <a:p>
-            <a:pPr indent="0" marL="0">
-              <a:lnSpc>
-                <a:spcPct val="135000"/>
-              </a:lnSpc>
-              <a:buNone/>
-            </a:pPr>
-            <a:r>
-              <a:rPr lang="en-US" sz="1300" dirty="0">
-                <a:solidFill>
-                  <a:srgbClr val="FFFFFF"/>
+              <a:t>Fréquences</a:t>
+            </a:r>
+            <a:endParaRPr lang="en-US" sz="900" dirty="0"/>
+          </a:p>
+          <a:p>
+            <a:pPr algn="ctr" indent="0" marL="0">
+              <a:lnSpc>
+                <a:spcPct val="130000"/>
+              </a:lnSpc>
+              <a:buNone/>
+            </a:pPr>
+            <a:r>
+              <a:rPr lang="en-US" sz="900" i="1" dirty="0">
+                <a:solidFill>
+                  <a:srgbClr val="15233F"/>
                 </a:solidFill>
                 <a:latin typeface="Calibri" pitchFamily="34" charset="0"/>
                 <a:ea typeface="Calibri" pitchFamily="34" charset="-122"/>
                 <a:cs typeface="Calibri" pitchFamily="34" charset="-120"/>
               </a:rPr>
-              <a:t>linéaire, logistique,</a:t>
-            </a:r>
-            <a:endParaRPr lang="en-US" sz="1300" dirty="0"/>
-          </a:p>
-          <a:p>
-            <a:pPr indent="0" marL="0">
-              <a:lnSpc>
-                <a:spcPct val="135000"/>
-              </a:lnSpc>
-              <a:buNone/>
-            </a:pPr>
-            <a:r>
-              <a:rPr lang="en-US" sz="1300" dirty="0">
-                <a:solidFill>
-                  <a:srgbClr val="FFFFFF"/>
+              <a:t>Distributions</a:t>
+            </a:r>
+            <a:endParaRPr lang="en-US" sz="900" dirty="0"/>
+          </a:p>
+        </p:txBody>
+      </p:sp>
+      <p:sp>
+        <p:nvSpPr>
+          <p:cNvPr id="11" name="Shape 9"/>
+          <p:cNvSpPr/>
+          <p:nvPr/>
+        </p:nvSpPr>
+        <p:spPr>
+          <a:xfrm>
+            <a:off x="4200144" y="4366260"/>
+            <a:ext cx="182880" cy="0"/>
+          </a:xfrm>
+          <a:prstGeom prst="line">
+            <a:avLst/>
+          </a:prstGeom>
+          <a:noFill/>
+          <a:ln w="19050">
+            <a:solidFill>
+              <a:srgbClr val="F09042"/>
+            </a:solidFill>
+            <a:prstDash val="solid"/>
+          </a:ln>
+        </p:spPr>
+      </p:sp>
+      <p:sp>
+        <p:nvSpPr>
+          <p:cNvPr id="12" name="Shape 10"/>
+          <p:cNvSpPr/>
+          <p:nvPr/>
+        </p:nvSpPr>
+        <p:spPr>
+          <a:xfrm>
+            <a:off x="4309872" y="4293108"/>
+            <a:ext cx="73152" cy="73152"/>
+          </a:xfrm>
+          <a:prstGeom prst="line">
+            <a:avLst/>
+          </a:prstGeom>
+          <a:noFill/>
+          <a:ln w="19050">
+            <a:solidFill>
+              <a:srgbClr val="F09042"/>
+            </a:solidFill>
+            <a:prstDash val="solid"/>
+          </a:ln>
+        </p:spPr>
+      </p:sp>
+      <p:sp>
+        <p:nvSpPr>
+          <p:cNvPr id="13" name="Shape 11"/>
+          <p:cNvSpPr/>
+          <p:nvPr/>
+        </p:nvSpPr>
+        <p:spPr>
+          <a:xfrm>
+            <a:off x="4309872" y="4439412"/>
+            <a:ext cx="73152" cy="-73152"/>
+          </a:xfrm>
+          <a:prstGeom prst="line">
+            <a:avLst/>
+          </a:prstGeom>
+          <a:noFill/>
+          <a:ln w="19050">
+            <a:solidFill>
+              <a:srgbClr val="F09042"/>
+            </a:solidFill>
+            <a:prstDash val="solid"/>
+          </a:ln>
+        </p:spPr>
+      </p:sp>
+      <p:sp>
+        <p:nvSpPr>
+          <p:cNvPr id="14" name="Shape 12"/>
+          <p:cNvSpPr/>
+          <p:nvPr/>
+        </p:nvSpPr>
+        <p:spPr>
+          <a:xfrm>
+            <a:off x="4428744" y="3794760"/>
+            <a:ext cx="3514344" cy="1143000"/>
+          </a:xfrm>
+          <a:prstGeom prst="roundRect">
+            <a:avLst>
+              <a:gd name="adj" fmla="val 6400"/>
+            </a:avLst>
+          </a:prstGeom>
+          <a:solidFill>
+            <a:srgbClr val="FFFFFF"/>
+          </a:solidFill>
+          <a:ln w="12700">
+            <a:solidFill>
+              <a:srgbClr val="D6CFB8"/>
+            </a:solidFill>
+            <a:prstDash val="solid"/>
+          </a:ln>
+        </p:spPr>
+      </p:sp>
+      <p:sp>
+        <p:nvSpPr>
+          <p:cNvPr id="15" name="Text 13"/>
+          <p:cNvSpPr/>
+          <p:nvPr/>
+        </p:nvSpPr>
+        <p:spPr>
+          <a:xfrm>
+            <a:off x="4520184" y="3931920"/>
+            <a:ext cx="3331464" cy="457200"/>
+          </a:xfrm>
+          <a:prstGeom prst="rect">
+            <a:avLst/>
+          </a:prstGeom>
+          <a:noFill/>
+          <a:ln/>
+        </p:spPr>
+        <p:txBody>
+          <a:bodyPr wrap="square" rtlCol="0" anchor="ctr"/>
+          <a:lstStyle/>
+          <a:p>
+            <a:pPr algn="ctr" indent="0" marL="0">
+              <a:lnSpc>
+                <a:spcPct val="115000"/>
+              </a:lnSpc>
+              <a:buNone/>
+            </a:pPr>
+            <a:r>
+              <a:rPr lang="en-US" sz="1100" b="1" dirty="0">
+                <a:solidFill>
+                  <a:srgbClr val="15233F"/>
                 </a:solidFill>
                 <a:latin typeface="Calibri" pitchFamily="34" charset="0"/>
                 <a:ea typeface="Calibri" pitchFamily="34" charset="-122"/>
                 <a:cs typeface="Calibri" pitchFamily="34" charset="-120"/>
               </a:rPr>
-              <a:t>ajustement, diagnostic.</a:t>
-            </a:r>
-            <a:endParaRPr lang="en-US" sz="1300" dirty="0"/>
-          </a:p>
-        </p:txBody>
-      </p:sp>
-      <p:sp>
-        <p:nvSpPr>
-          <p:cNvPr id="12" name="Shape 10"/>
-          <p:cNvSpPr/>
-          <p:nvPr/>
-        </p:nvSpPr>
-        <p:spPr>
-          <a:xfrm>
-            <a:off x="8138160" y="5029200"/>
-            <a:ext cx="3383280" cy="18288"/>
-          </a:xfrm>
-          <a:prstGeom prst="rect">
-            <a:avLst/>
+              <a:t>Comparatif</a:t>
+            </a:r>
+            <a:endParaRPr lang="en-US" sz="1100" dirty="0"/>
+          </a:p>
+        </p:txBody>
+      </p:sp>
+      <p:sp>
+        <p:nvSpPr>
+          <p:cNvPr id="16" name="Text 14"/>
+          <p:cNvSpPr/>
+          <p:nvPr/>
+        </p:nvSpPr>
+        <p:spPr>
+          <a:xfrm>
+            <a:off x="4520184" y="4434840"/>
+            <a:ext cx="3331464" cy="365760"/>
+          </a:xfrm>
+          <a:prstGeom prst="rect">
+            <a:avLst/>
+          </a:prstGeom>
+          <a:noFill/>
+          <a:ln/>
+        </p:spPr>
+        <p:txBody>
+          <a:bodyPr wrap="square" rtlCol="0" anchor="t"/>
+          <a:lstStyle/>
+          <a:p>
+            <a:pPr algn="ctr" indent="0" marL="0">
+              <a:lnSpc>
+                <a:spcPct val="130000"/>
+              </a:lnSpc>
+              <a:buNone/>
+            </a:pPr>
+            <a:r>
+              <a:rPr lang="en-US" sz="900" i="1" dirty="0">
+                <a:solidFill>
+                  <a:srgbClr val="15233F"/>
+                </a:solidFill>
+                <a:latin typeface="Calibri" pitchFamily="34" charset="0"/>
+                <a:ea typeface="Calibri" pitchFamily="34" charset="-122"/>
+                <a:cs typeface="Calibri" pitchFamily="34" charset="-120"/>
+              </a:rPr>
+              <a:t>Test selon</a:t>
+            </a:r>
+            <a:endParaRPr lang="en-US" sz="900" dirty="0"/>
+          </a:p>
+          <a:p>
+            <a:pPr algn="ctr" indent="0" marL="0">
+              <a:lnSpc>
+                <a:spcPct val="130000"/>
+              </a:lnSpc>
+              <a:buNone/>
+            </a:pPr>
+            <a:r>
+              <a:rPr lang="en-US" sz="900" i="1" dirty="0">
+                <a:solidFill>
+                  <a:srgbClr val="15233F"/>
+                </a:solidFill>
+                <a:latin typeface="Calibri" pitchFamily="34" charset="0"/>
+                <a:ea typeface="Calibri" pitchFamily="34" charset="-122"/>
+                <a:cs typeface="Calibri" pitchFamily="34" charset="-120"/>
+              </a:rPr>
+              <a:t>le plan</a:t>
+            </a:r>
+            <a:endParaRPr lang="en-US" sz="900" dirty="0"/>
+          </a:p>
+          <a:p>
+            <a:pPr algn="ctr" indent="0" marL="0">
+              <a:lnSpc>
+                <a:spcPct val="130000"/>
+              </a:lnSpc>
+              <a:buNone/>
+            </a:pPr>
+            <a:r>
+              <a:rPr lang="en-US" sz="900" i="1" dirty="0">
+                <a:solidFill>
+                  <a:srgbClr val="15233F"/>
+                </a:solidFill>
+                <a:latin typeface="Calibri" pitchFamily="34" charset="0"/>
+                <a:ea typeface="Calibri" pitchFamily="34" charset="-122"/>
+                <a:cs typeface="Calibri" pitchFamily="34" charset="-120"/>
+              </a:rPr>
+              <a:t>(Module 2)</a:t>
+            </a:r>
+            <a:endParaRPr lang="en-US" sz="900" dirty="0"/>
+          </a:p>
+        </p:txBody>
+      </p:sp>
+      <p:sp>
+        <p:nvSpPr>
+          <p:cNvPr id="17" name="Shape 15"/>
+          <p:cNvSpPr/>
+          <p:nvPr/>
+        </p:nvSpPr>
+        <p:spPr>
+          <a:xfrm>
+            <a:off x="7988808" y="4366260"/>
+            <a:ext cx="182880" cy="0"/>
+          </a:xfrm>
+          <a:prstGeom prst="line">
+            <a:avLst/>
+          </a:prstGeom>
+          <a:noFill/>
+          <a:ln w="19050">
+            <a:solidFill>
+              <a:srgbClr val="F09042"/>
+            </a:solidFill>
+            <a:prstDash val="solid"/>
+          </a:ln>
+        </p:spPr>
+      </p:sp>
+      <p:sp>
+        <p:nvSpPr>
+          <p:cNvPr id="18" name="Shape 16"/>
+          <p:cNvSpPr/>
+          <p:nvPr/>
+        </p:nvSpPr>
+        <p:spPr>
+          <a:xfrm>
+            <a:off x="8098536" y="4293108"/>
+            <a:ext cx="73152" cy="73152"/>
+          </a:xfrm>
+          <a:prstGeom prst="line">
+            <a:avLst/>
+          </a:prstGeom>
+          <a:noFill/>
+          <a:ln w="19050">
+            <a:solidFill>
+              <a:srgbClr val="F09042"/>
+            </a:solidFill>
+            <a:prstDash val="solid"/>
+          </a:ln>
+        </p:spPr>
+      </p:sp>
+      <p:sp>
+        <p:nvSpPr>
+          <p:cNvPr id="19" name="Shape 17"/>
+          <p:cNvSpPr/>
+          <p:nvPr/>
+        </p:nvSpPr>
+        <p:spPr>
+          <a:xfrm>
+            <a:off x="8098536" y="4439412"/>
+            <a:ext cx="73152" cy="-73152"/>
+          </a:xfrm>
+          <a:prstGeom prst="line">
+            <a:avLst/>
+          </a:prstGeom>
+          <a:noFill/>
+          <a:ln w="19050">
+            <a:solidFill>
+              <a:srgbClr val="F09042"/>
+            </a:solidFill>
+            <a:prstDash val="solid"/>
+          </a:ln>
+        </p:spPr>
+      </p:sp>
+      <p:sp>
+        <p:nvSpPr>
+          <p:cNvPr id="20" name="Shape 18"/>
+          <p:cNvSpPr/>
+          <p:nvPr/>
+        </p:nvSpPr>
+        <p:spPr>
+          <a:xfrm>
+            <a:off x="8217408" y="3794760"/>
+            <a:ext cx="3514344" cy="1143000"/>
+          </a:xfrm>
+          <a:prstGeom prst="roundRect">
+            <a:avLst>
+              <a:gd name="adj" fmla="val 6400"/>
+            </a:avLst>
           </a:prstGeom>
           <a:solidFill>
             <a:srgbClr val="F09042"/>
           </a:solidFill>
-          <a:ln/>
-        </p:spPr>
-      </p:sp>
-      <p:sp>
-        <p:nvSpPr>
-          <p:cNvPr id="13" name="Text 11"/>
-          <p:cNvSpPr/>
-          <p:nvPr/>
-        </p:nvSpPr>
-        <p:spPr>
-          <a:xfrm>
-            <a:off x="8138160" y="5166360"/>
-            <a:ext cx="3474720" cy="777240"/>
+          <a:ln w="12700">
+            <a:solidFill>
+              <a:srgbClr val="D9772B"/>
+            </a:solidFill>
+            <a:prstDash val="solid"/>
+          </a:ln>
+        </p:spPr>
+      </p:sp>
+      <p:sp>
+        <p:nvSpPr>
+          <p:cNvPr id="21" name="Text 19"/>
+          <p:cNvSpPr/>
+          <p:nvPr/>
+        </p:nvSpPr>
+        <p:spPr>
+          <a:xfrm>
+            <a:off x="8308848" y="3931920"/>
+            <a:ext cx="3331464" cy="457200"/>
           </a:xfrm>
           <a:prstGeom prst="rect">
             <a:avLst/>
@@ -8731,24 +9692,168 @@
           <a:bodyPr wrap="square" rtlCol="0" anchor="ctr"/>
           <a:lstStyle/>
           <a:p>
-            <a:pPr indent="0" marL="0">
-              <a:lnSpc>
-                <a:spcPct val="130000"/>
-              </a:lnSpc>
-              <a:buNone/>
-            </a:pPr>
-            <a:r>
-              <a:rPr lang="en-US" sz="1100" i="1" dirty="0">
-                <a:solidFill>
-                  <a:srgbClr val="C9CFDC"/>
+            <a:pPr algn="ctr" indent="0" marL="0">
+              <a:lnSpc>
+                <a:spcPct val="115000"/>
+              </a:lnSpc>
+              <a:buNone/>
+            </a:pPr>
+            <a:r>
+              <a:rPr lang="en-US" sz="1100" b="1" dirty="0">
+                <a:solidFill>
+                  <a:srgbClr val="0E1729"/>
                 </a:solidFill>
                 <a:latin typeface="Calibri" pitchFamily="34" charset="0"/>
                 <a:ea typeface="Calibri" pitchFamily="34" charset="-122"/>
                 <a:cs typeface="Calibri" pitchFamily="34" charset="-120"/>
               </a:rPr>
-              <a:t>Pour chaque : théorie courte, code R, sortie commentée, ce que le jury va creuser.</a:t>
+              <a:t>Explicatif</a:t>
             </a:r>
             <a:endParaRPr lang="en-US" sz="1100" dirty="0"/>
+          </a:p>
+        </p:txBody>
+      </p:sp>
+      <p:sp>
+        <p:nvSpPr>
+          <p:cNvPr id="22" name="Text 20"/>
+          <p:cNvSpPr/>
+          <p:nvPr/>
+        </p:nvSpPr>
+        <p:spPr>
+          <a:xfrm>
+            <a:off x="8308848" y="4434840"/>
+            <a:ext cx="3331464" cy="365760"/>
+          </a:xfrm>
+          <a:prstGeom prst="rect">
+            <a:avLst/>
+          </a:prstGeom>
+          <a:noFill/>
+          <a:ln/>
+        </p:spPr>
+        <p:txBody>
+          <a:bodyPr wrap="square" rtlCol="0" anchor="t"/>
+          <a:lstStyle/>
+          <a:p>
+            <a:pPr algn="ctr" indent="0" marL="0">
+              <a:lnSpc>
+                <a:spcPct val="130000"/>
+              </a:lnSpc>
+              <a:buNone/>
+            </a:pPr>
+            <a:r>
+              <a:rPr lang="en-US" sz="900" i="1" dirty="0">
+                <a:solidFill>
+                  <a:srgbClr val="0E1729"/>
+                </a:solidFill>
+                <a:latin typeface="Calibri" pitchFamily="34" charset="0"/>
+                <a:ea typeface="Calibri" pitchFamily="34" charset="-122"/>
+                <a:cs typeface="Calibri" pitchFamily="34" charset="-120"/>
+              </a:rPr>
+              <a:t>Régressions</a:t>
+            </a:r>
+            <a:endParaRPr lang="en-US" sz="900" dirty="0"/>
+          </a:p>
+          <a:p>
+            <a:pPr algn="ctr" indent="0" marL="0">
+              <a:lnSpc>
+                <a:spcPct val="130000"/>
+              </a:lnSpc>
+              <a:buNone/>
+            </a:pPr>
+            <a:r>
+              <a:rPr lang="en-US" sz="900" i="1" dirty="0">
+                <a:solidFill>
+                  <a:srgbClr val="0E1729"/>
+                </a:solidFill>
+                <a:latin typeface="Calibri" pitchFamily="34" charset="0"/>
+                <a:ea typeface="Calibri" pitchFamily="34" charset="-122"/>
+                <a:cs typeface="Calibri" pitchFamily="34" charset="-120"/>
+              </a:rPr>
+              <a:t>OR ajustés</a:t>
+            </a:r>
+            <a:endParaRPr lang="en-US" sz="900" dirty="0"/>
+          </a:p>
+          <a:p>
+            <a:pPr algn="ctr" indent="0" marL="0">
+              <a:lnSpc>
+                <a:spcPct val="130000"/>
+              </a:lnSpc>
+              <a:buNone/>
+            </a:pPr>
+            <a:r>
+              <a:rPr lang="en-US" sz="900" i="1" dirty="0">
+                <a:solidFill>
+                  <a:srgbClr val="0E1729"/>
+                </a:solidFill>
+                <a:latin typeface="Calibri" pitchFamily="34" charset="0"/>
+                <a:ea typeface="Calibri" pitchFamily="34" charset="-122"/>
+                <a:cs typeface="Calibri" pitchFamily="34" charset="-120"/>
+              </a:rPr>
+              <a:t>IC95%</a:t>
+            </a:r>
+            <a:endParaRPr lang="en-US" sz="900" dirty="0"/>
+          </a:p>
+        </p:txBody>
+      </p:sp>
+      <p:sp>
+        <p:nvSpPr>
+          <p:cNvPr id="23" name="Shape 21"/>
+          <p:cNvSpPr/>
+          <p:nvPr/>
+        </p:nvSpPr>
+        <p:spPr>
+          <a:xfrm>
+            <a:off x="640080" y="5212080"/>
+            <a:ext cx="54864" cy="1005840"/>
+          </a:xfrm>
+          <a:prstGeom prst="rect">
+            <a:avLst/>
+          </a:prstGeom>
+          <a:solidFill>
+            <a:srgbClr val="F09042"/>
+          </a:solidFill>
+          <a:ln/>
+        </p:spPr>
+      </p:sp>
+      <p:sp>
+        <p:nvSpPr>
+          <p:cNvPr id="24" name="Text 22"/>
+          <p:cNvSpPr/>
+          <p:nvPr/>
+        </p:nvSpPr>
+        <p:spPr>
+          <a:xfrm>
+            <a:off x="868680" y="5257800"/>
+            <a:ext cx="10972800" cy="1005840"/>
+          </a:xfrm>
+          <a:prstGeom prst="rect">
+            <a:avLst/>
+          </a:prstGeom>
+          <a:noFill/>
+          <a:ln/>
+        </p:spPr>
+        <p:txBody>
+          <a:bodyPr wrap="square" rtlCol="0" anchor="ctr"/>
+          <a:lstStyle/>
+          <a:p>
+            <a:pPr indent="0" marL="0">
+              <a:lnSpc>
+                <a:spcPct val="140000"/>
+              </a:lnSpc>
+              <a:buNone/>
+            </a:pPr>
+            <a:r>
+              <a:rPr lang="en-US" sz="1300" i="1" dirty="0">
+                <a:solidFill>
+                  <a:srgbClr val="15233F"/>
+                </a:solidFill>
+                <a:latin typeface="Calibri" pitchFamily="34" charset="0"/>
+                <a:ea typeface="Calibri" pitchFamily="34" charset="-122"/>
+                <a:cs typeface="Calibri" pitchFamily="34" charset="-120"/>
+              </a:rPr>
+              <a:t>Ce module couvre la régression — l'outil qui te permet de modéliser un lien tout en contrôlant les facteurs de confusion. La régression logistique multivariée est sans doute LA méthode des thèses en santé publique.</a:t>
+            </a:r>
+            <a:endParaRPr lang="en-US" sz="1300" dirty="0"/>
           </a:p>
         </p:txBody>
       </p:sp>
@@ -9323,7 +10428,7 @@
                 <a:ea typeface="Calibri" pitchFamily="34" charset="-122"/>
                 <a:cs typeface="Calibri" pitchFamily="34" charset="-120"/>
               </a:rPr>
-              <a:t>X qualitatives</a:t>
+              <a:t>Multicollinéarité</a:t>
             </a:r>
             <a:endParaRPr lang="en-US" sz="900" dirty="0"/>
           </a:p>
@@ -9365,27 +10470,7 @@
                 <a:ea typeface="Consolas" pitchFamily="34" charset="-122"/>
                 <a:cs typeface="Consolas" pitchFamily="34" charset="-120"/>
               </a:rPr>
-              <a:t>Codage dummy (8)</a:t>
-            </a:r>
-            <a:endParaRPr lang="en-US" sz="1100" dirty="0"/>
-          </a:p>
-          <a:p>
-            <a:pPr indent="0" marL="0">
-              <a:lnSpc>
-                <a:spcPct val="125000"/>
-              </a:lnSpc>
-              <a:buNone/>
-            </a:pPr>
-            <a:r>
-              <a:rPr lang="en-US" sz="1100" b="1" dirty="0">
-                <a:solidFill>
-                  <a:srgbClr val="15233F"/>
-                </a:solidFill>
-                <a:latin typeface="Consolas" pitchFamily="34" charset="0"/>
-                <a:ea typeface="Consolas" pitchFamily="34" charset="-122"/>
-                <a:cs typeface="Consolas" pitchFamily="34" charset="-120"/>
-              </a:rPr>
-              <a:t>VIF si plusieurs (7)</a:t>
+              <a:t>VIF (slide 7)</a:t>
             </a:r>
             <a:endParaRPr lang="en-US" sz="1100" dirty="0"/>
           </a:p>
@@ -9589,10 +10674,71 @@
                 <a:ea typeface="Consolas" pitchFamily="34" charset="-122"/>
                 <a:cs typeface="Consolas" pitchFamily="34" charset="-120"/>
               </a:rPr>
-              <a:t>Régression logistique</a:t>
+              <a:t>Logistique univariée (9)</a:t>
             </a:r>
             <a:endParaRPr lang="en-US" sz="1100" dirty="0"/>
           </a:p>
+        </p:txBody>
+      </p:sp>
+      <p:sp>
+        <p:nvSpPr>
+          <p:cNvPr id="23" name="Text 21"/>
+          <p:cNvSpPr/>
+          <p:nvPr/>
+        </p:nvSpPr>
+        <p:spPr>
+          <a:xfrm>
+            <a:off x="4489704" y="4462272"/>
+            <a:ext cx="3346704" cy="228600"/>
+          </a:xfrm>
+          <a:prstGeom prst="rect">
+            <a:avLst/>
+          </a:prstGeom>
+          <a:noFill/>
+          <a:ln/>
+        </p:spPr>
+        <p:txBody>
+          <a:bodyPr wrap="square" rtlCol="0" anchor="ctr"/>
+          <a:lstStyle/>
+          <a:p>
+            <a:pPr indent="0" marL="0">
+              <a:buNone/>
+            </a:pPr>
+            <a:r>
+              <a:rPr lang="en-US" sz="900" b="1" spc="200" kern="0" dirty="0">
+                <a:solidFill>
+                  <a:srgbClr val="6B7280"/>
+                </a:solidFill>
+                <a:latin typeface="Calibri" pitchFamily="34" charset="0"/>
+                <a:ea typeface="Calibri" pitchFamily="34" charset="-122"/>
+                <a:cs typeface="Calibri" pitchFamily="34" charset="-120"/>
+              </a:rPr>
+              <a:t>Plusieurs X (ajusté)</a:t>
+            </a:r>
+            <a:endParaRPr lang="en-US" sz="900" dirty="0"/>
+          </a:p>
+        </p:txBody>
+      </p:sp>
+      <p:sp>
+        <p:nvSpPr>
+          <p:cNvPr id="24" name="Text 22"/>
+          <p:cNvSpPr/>
+          <p:nvPr/>
+        </p:nvSpPr>
+        <p:spPr>
+          <a:xfrm>
+            <a:off x="4489704" y="4690872"/>
+            <a:ext cx="3346704" cy="548640"/>
+          </a:xfrm>
+          <a:prstGeom prst="rect">
+            <a:avLst/>
+          </a:prstGeom>
+          <a:noFill/>
+          <a:ln/>
+        </p:spPr>
+        <p:txBody>
+          <a:bodyPr wrap="square" rtlCol="0" anchor="ctr"/>
+          <a:lstStyle/>
           <a:p>
             <a:pPr indent="0" marL="0">
               <a:lnSpc>
@@ -9609,71 +10755,10 @@
                 <a:ea typeface="Consolas" pitchFamily="34" charset="-122"/>
                 <a:cs typeface="Consolas" pitchFamily="34" charset="-120"/>
               </a:rPr>
-              <a:t>univariée (9)</a:t>
+              <a:t>Logistique multivariée (10)</a:t>
             </a:r>
             <a:endParaRPr lang="en-US" sz="1100" dirty="0"/>
           </a:p>
-        </p:txBody>
-      </p:sp>
-      <p:sp>
-        <p:nvSpPr>
-          <p:cNvPr id="23" name="Text 21"/>
-          <p:cNvSpPr/>
-          <p:nvPr/>
-        </p:nvSpPr>
-        <p:spPr>
-          <a:xfrm>
-            <a:off x="4489704" y="4462272"/>
-            <a:ext cx="3346704" cy="228600"/>
-          </a:xfrm>
-          <a:prstGeom prst="rect">
-            <a:avLst/>
-          </a:prstGeom>
-          <a:noFill/>
-          <a:ln/>
-        </p:spPr>
-        <p:txBody>
-          <a:bodyPr wrap="square" rtlCol="0" anchor="ctr"/>
-          <a:lstStyle/>
-          <a:p>
-            <a:pPr indent="0" marL="0">
-              <a:buNone/>
-            </a:pPr>
-            <a:r>
-              <a:rPr lang="en-US" sz="900" b="1" spc="200" kern="0" dirty="0">
-                <a:solidFill>
-                  <a:srgbClr val="6B7280"/>
-                </a:solidFill>
-                <a:latin typeface="Calibri" pitchFamily="34" charset="0"/>
-                <a:ea typeface="Calibri" pitchFamily="34" charset="-122"/>
-                <a:cs typeface="Calibri" pitchFamily="34" charset="-120"/>
-              </a:rPr>
-              <a:t>Plusieurs X (ajusté)</a:t>
-            </a:r>
-            <a:endParaRPr lang="en-US" sz="900" dirty="0"/>
-          </a:p>
-        </p:txBody>
-      </p:sp>
-      <p:sp>
-        <p:nvSpPr>
-          <p:cNvPr id="24" name="Text 22"/>
-          <p:cNvSpPr/>
-          <p:nvPr/>
-        </p:nvSpPr>
-        <p:spPr>
-          <a:xfrm>
-            <a:off x="4489704" y="4690872"/>
-            <a:ext cx="3346704" cy="548640"/>
-          </a:xfrm>
-          <a:prstGeom prst="rect">
-            <a:avLst/>
-          </a:prstGeom>
-          <a:noFill/>
-          <a:ln/>
-        </p:spPr>
-        <p:txBody>
-          <a:bodyPr wrap="square" rtlCol="0" anchor="ctr"/>
-          <a:lstStyle/>
           <a:p>
             <a:pPr indent="0" marL="0">
               <a:lnSpc>
@@ -9690,27 +10775,7 @@
                 <a:ea typeface="Consolas" pitchFamily="34" charset="-122"/>
                 <a:cs typeface="Consolas" pitchFamily="34" charset="-120"/>
               </a:rPr>
-              <a:t>Logistique multivariée (10)</a:t>
-            </a:r>
-            <a:endParaRPr lang="en-US" sz="1100" dirty="0"/>
-          </a:p>
-          <a:p>
-            <a:pPr indent="0" marL="0">
-              <a:lnSpc>
-                <a:spcPct val="125000"/>
-              </a:lnSpc>
-              <a:buNone/>
-            </a:pPr>
-            <a:r>
-              <a:rPr lang="en-US" sz="1100" b="1" dirty="0">
-                <a:solidFill>
-                  <a:srgbClr val="15233F"/>
-                </a:solidFill>
-                <a:latin typeface="Consolas" pitchFamily="34" charset="0"/>
-                <a:ea typeface="Consolas" pitchFamily="34" charset="-122"/>
-                <a:cs typeface="Consolas" pitchFamily="34" charset="-120"/>
-              </a:rPr>
-              <a:t>aOR + IC95%</a:t>
+              <a:t>aOR + IC95% (11)</a:t>
             </a:r>
             <a:endParaRPr lang="en-US" sz="1100" dirty="0"/>
           </a:p>
@@ -10180,45 +11245,6 @@
               <a:t>individuelle HES</a:t>
             </a:r>
             <a:endParaRPr lang="en-US" sz="1100" dirty="0"/>
-          </a:p>
-        </p:txBody>
-      </p:sp>
-      <p:sp>
-        <p:nvSpPr>
-          <p:cNvPr id="37" name="Text 35"/>
-          <p:cNvSpPr/>
-          <p:nvPr/>
-        </p:nvSpPr>
-        <p:spPr>
-          <a:xfrm>
-            <a:off x="640080" y="6355080"/>
-            <a:ext cx="10972800" cy="274320"/>
-          </a:xfrm>
-          <a:prstGeom prst="rect">
-            <a:avLst/>
-          </a:prstGeom>
-          <a:noFill/>
-          <a:ln/>
-        </p:spPr>
-        <p:txBody>
-          <a:bodyPr wrap="square" rtlCol="0" anchor="ctr"/>
-          <a:lstStyle/>
-          <a:p>
-            <a:pPr algn="ctr" indent="0" marL="0">
-              <a:buNone/>
-            </a:pPr>
-            <a:r>
-              <a:rPr lang="en-US" sz="1000" i="1" dirty="0">
-                <a:solidFill>
-                  <a:srgbClr val="6B7280"/>
-                </a:solidFill>
-                <a:latin typeface="Calibri" pitchFamily="34" charset="0"/>
-                <a:ea typeface="Calibri" pitchFamily="34" charset="-122"/>
-                <a:cs typeface="Calibri" pitchFamily="34" charset="-120"/>
-              </a:rPr>
-              <a:t>Les numéros entre parenthèses pointent vers les slides où chaque méthode est détaillée.</a:t>
-            </a:r>
-            <a:endParaRPr lang="en-US" sz="1000" dirty="0"/>
           </a:p>
         </p:txBody>
       </p:sp>
@@ -10688,27 +11714,7 @@
                 <a:ea typeface="Consolas" pitchFamily="34" charset="-122"/>
                 <a:cs typeface="Consolas" pitchFamily="34" charset="-120"/>
               </a:rPr>
-              <a:t># Spearman (rangs,</a:t>
-            </a:r>
-            <a:endParaRPr lang="en-US" sz="1050" dirty="0"/>
-          </a:p>
-          <a:p>
-            <a:pPr indent="0" marL="0">
-              <a:lnSpc>
-                <a:spcPct val="140000"/>
-              </a:lnSpc>
-              <a:buNone/>
-            </a:pPr>
-            <a:r>
-              <a:rPr lang="en-US" sz="1050" dirty="0">
-                <a:solidFill>
-                  <a:srgbClr val="E8EAED"/>
-                </a:solidFill>
-                <a:latin typeface="Consolas" pitchFamily="34" charset="0"/>
-                <a:ea typeface="Consolas" pitchFamily="34" charset="-122"/>
-                <a:cs typeface="Consolas" pitchFamily="34" charset="-120"/>
-              </a:rPr>
-              <a:t># non-normales)</a:t>
+              <a:t># Spearman (rangs)</a:t>
             </a:r>
             <a:endParaRPr lang="en-US" sz="1050" dirty="0"/>
           </a:p>
@@ -13369,7 +14375,7 @@
         <p:spPr>
           <a:xfrm>
             <a:off x="640080" y="1828800"/>
-            <a:ext cx="10972800" cy="1280160"/>
+            <a:ext cx="10972800" cy="914400"/>
           </a:xfrm>
           <a:prstGeom prst="rect">
             <a:avLst/>
@@ -13410,12 +14416,12 @@
         </p:nvSpPr>
         <p:spPr>
           <a:xfrm>
-            <a:off x="640080" y="3246120"/>
-            <a:ext cx="5486400" cy="2606040"/>
+            <a:off x="640080" y="2926080"/>
+            <a:ext cx="3931920" cy="2926080"/>
           </a:xfrm>
           <a:prstGeom prst="roundRect">
             <a:avLst>
-              <a:gd name="adj" fmla="val 1754"/>
+              <a:gd name="adj" fmla="val 1563"/>
             </a:avLst>
           </a:prstGeom>
           <a:solidFill>
@@ -13437,7 +14443,7 @@
         </p:nvSpPr>
         <p:spPr>
           <a:xfrm>
-            <a:off x="777240" y="3355848"/>
+            <a:off x="777240" y="3035808"/>
             <a:ext cx="365760" cy="256032"/>
           </a:xfrm>
           <a:prstGeom prst="roundRect">
@@ -13459,7 +14465,7 @@
         </p:nvSpPr>
         <p:spPr>
           <a:xfrm>
-            <a:off x="777240" y="3355848"/>
+            <a:off x="777240" y="3035808"/>
             <a:ext cx="365760" cy="256032"/>
           </a:xfrm>
           <a:prstGeom prst="rect">
@@ -13498,8 +14504,8 @@
         </p:nvSpPr>
         <p:spPr>
           <a:xfrm>
-            <a:off x="822960" y="3703320"/>
-            <a:ext cx="5212080" cy="2057400"/>
+            <a:off x="822960" y="3383280"/>
+            <a:ext cx="3657600" cy="2377440"/>
           </a:xfrm>
           <a:prstGeom prst="rect">
             <a:avLst/>
@@ -13566,7 +14572,7 @@
                 <a:ea typeface="Consolas" pitchFamily="34" charset="-122"/>
                 <a:cs typeface="Consolas" pitchFamily="34" charset="-120"/>
               </a:rPr>
-              <a:t>  hba1c ~ age + sexe + bmi + region,</a:t>
+              <a:t>  hba1c ~ age + sexe</a:t>
             </a:r>
             <a:endParaRPr lang="en-US" sz="1050" dirty="0"/>
           </a:p>
@@ -13586,7 +14592,7 @@
                 <a:ea typeface="Consolas" pitchFamily="34" charset="-122"/>
                 <a:cs typeface="Consolas" pitchFamily="34" charset="-120"/>
               </a:rPr>
-              <a:t>  data = donnees</a:t>
+              <a:t>        + bmi + region,</a:t>
             </a:r>
             <a:endParaRPr lang="en-US" sz="1050" dirty="0"/>
           </a:p>
@@ -13606,7 +14612,7 @@
                 <a:ea typeface="Consolas" pitchFamily="34" charset="-122"/>
                 <a:cs typeface="Consolas" pitchFamily="34" charset="-120"/>
               </a:rPr>
-              <a:t>)</a:t>
+              <a:t>  data = donnees)</a:t>
             </a:r>
             <a:endParaRPr lang="en-US" sz="1050" dirty="0"/>
           </a:p>
@@ -13655,7 +14661,7 @@
                 <a:ea typeface="Consolas" pitchFamily="34" charset="-122"/>
                 <a:cs typeface="Consolas" pitchFamily="34" charset="-120"/>
               </a:rPr>
-              <a:t># Comparaison avec et sans</a:t>
+              <a:t># Comparaison modèles</a:t>
             </a:r>
             <a:endParaRPr lang="en-US" sz="1050" dirty="0"/>
           </a:p>
@@ -13675,10 +14681,30 @@
                 <a:ea typeface="Consolas" pitchFamily="34" charset="-122"/>
                 <a:cs typeface="Consolas" pitchFamily="34" charset="-120"/>
               </a:rPr>
-              <a:t>anova(modele_simple, modele)</a:t>
+              <a:t>anova(modele_simple,</a:t>
             </a:r>
             <a:endParaRPr lang="en-US" sz="1050" dirty="0"/>
           </a:p>
+          <a:p>
+            <a:pPr indent="0" marL="0">
+              <a:lnSpc>
+                <a:spcPct val="140000"/>
+              </a:lnSpc>
+              <a:buNone/>
+            </a:pPr>
+            <a:r>
+              <a:rPr lang="en-US" sz="1050" dirty="0">
+                <a:solidFill>
+                  <a:srgbClr val="E8EAED"/>
+                </a:solidFill>
+                <a:latin typeface="Consolas" pitchFamily="34" charset="0"/>
+                <a:ea typeface="Consolas" pitchFamily="34" charset="-122"/>
+                <a:cs typeface="Consolas" pitchFamily="34" charset="-120"/>
+              </a:rPr>
+              <a:t>      modele)</a:t>
+            </a:r>
+            <a:endParaRPr lang="en-US" sz="1050" dirty="0"/>
+          </a:p>
         </p:txBody>
       </p:sp>
       <p:sp>
@@ -13689,18 +14715,78 @@
         </p:nvSpPr>
         <p:spPr>
           <a:xfrm>
-            <a:off x="6400800" y="3246120"/>
-            <a:ext cx="5330952" cy="2606040"/>
-          </a:xfrm>
-          <a:prstGeom prst="roundRect">
-            <a:avLst>
-              <a:gd name="adj" fmla="val 1754"/>
-            </a:avLst>
+            <a:off x="4709160" y="2926080"/>
+            <a:ext cx="7022592" cy="2926080"/>
+          </a:xfrm>
+          <a:prstGeom prst="rect">
+            <a:avLst/>
           </a:prstGeom>
           <a:solidFill>
-            <a:srgbClr val="1A2541"/>
+            <a:srgbClr val="FFFFFF"/>
           </a:solidFill>
           <a:ln w="6350">
+            <a:solidFill>
+              <a:srgbClr val="D6CFB8"/>
+            </a:solidFill>
+            <a:prstDash val="solid"/>
+          </a:ln>
+        </p:spPr>
+      </p:sp>
+      <p:sp>
+        <p:nvSpPr>
+          <p:cNvPr id="12" name="Text 10"/>
+          <p:cNvSpPr/>
+          <p:nvPr/>
+        </p:nvSpPr>
+        <p:spPr>
+          <a:xfrm>
+            <a:off x="4800600" y="2971800"/>
+            <a:ext cx="6839712" cy="228600"/>
+          </a:xfrm>
+          <a:prstGeom prst="rect">
+            <a:avLst/>
+          </a:prstGeom>
+          <a:noFill/>
+          <a:ln/>
+        </p:spPr>
+        <p:txBody>
+          <a:bodyPr wrap="square" rtlCol="0" anchor="ctr"/>
+          <a:lstStyle/>
+          <a:p>
+            <a:pPr algn="ctr" indent="0" marL="0">
+              <a:buNone/>
+            </a:pPr>
+            <a:r>
+              <a:rPr lang="en-US" sz="900" b="1" dirty="0">
+                <a:solidFill>
+                  <a:srgbClr val="15233F"/>
+                </a:solidFill>
+                <a:latin typeface="Calibri" pitchFamily="34" charset="0"/>
+                <a:ea typeface="Calibri" pitchFamily="34" charset="-122"/>
+                <a:cs typeface="Calibri" pitchFamily="34" charset="-120"/>
+              </a:rPr>
+              <a:t>Coefficients ajustés · effet sur HbA1c</a:t>
+            </a:r>
+            <a:endParaRPr lang="en-US" sz="900" dirty="0"/>
+          </a:p>
+        </p:txBody>
+      </p:sp>
+      <p:sp>
+        <p:nvSpPr>
+          <p:cNvPr id="13" name="Shape 11"/>
+          <p:cNvSpPr/>
+          <p:nvPr/>
+        </p:nvSpPr>
+        <p:spPr>
+          <a:xfrm>
+            <a:off x="8752204" y="3246120"/>
+            <a:ext cx="0" cy="2240280"/>
+          </a:xfrm>
+          <a:prstGeom prst="line">
+            <a:avLst/>
+          </a:prstGeom>
+          <a:noFill/>
+          <a:ln w="12700">
             <a:solidFill>
               <a:srgbClr val="6B7280"/>
             </a:solidFill>
@@ -13710,14 +14796,14 @@
       </p:sp>
       <p:sp>
         <p:nvSpPr>
-          <p:cNvPr id="12" name="Text 10"/>
-          <p:cNvSpPr/>
-          <p:nvPr/>
-        </p:nvSpPr>
-        <p:spPr>
-          <a:xfrm>
-            <a:off x="6537960" y="3337560"/>
-            <a:ext cx="914400" cy="228600"/>
+          <p:cNvPr id="14" name="Text 12"/>
+          <p:cNvSpPr/>
+          <p:nvPr/>
+        </p:nvSpPr>
+        <p:spPr>
+          <a:xfrm>
+            <a:off x="4800600" y="3361563"/>
+            <a:ext cx="1371600" cy="329184"/>
           </a:xfrm>
           <a:prstGeom prst="rect">
             <a:avLst/>
@@ -13733,250 +14819,119 @@
               <a:buNone/>
             </a:pPr>
             <a:r>
-              <a:rPr lang="en-US" sz="900" b="1" spc="300" kern="0" dirty="0">
-                <a:solidFill>
-                  <a:srgbClr val="C9CFDC"/>
+              <a:rPr lang="en-US" sz="1000" b="1" dirty="0">
+                <a:solidFill>
+                  <a:srgbClr val="15233F"/>
                 </a:solidFill>
                 <a:latin typeface="Calibri" pitchFamily="34" charset="0"/>
                 <a:ea typeface="Calibri" pitchFamily="34" charset="-122"/>
                 <a:cs typeface="Calibri" pitchFamily="34" charset="-120"/>
               </a:rPr>
-              <a:t>SORTIE</a:t>
-            </a:r>
-            <a:endParaRPr lang="en-US" sz="900" dirty="0"/>
-          </a:p>
-        </p:txBody>
-      </p:sp>
-      <p:sp>
-        <p:nvSpPr>
-          <p:cNvPr id="13" name="Text 11"/>
-          <p:cNvSpPr/>
-          <p:nvPr/>
-        </p:nvSpPr>
-        <p:spPr>
-          <a:xfrm>
-            <a:off x="6583680" y="3611880"/>
-            <a:ext cx="5056632" cy="2148840"/>
-          </a:xfrm>
-          <a:prstGeom prst="rect">
-            <a:avLst/>
-          </a:prstGeom>
-          <a:noFill/>
-          <a:ln/>
-        </p:spPr>
-        <p:txBody>
-          <a:bodyPr wrap="square" rtlCol="0" anchor="t"/>
-          <a:lstStyle/>
-          <a:p>
-            <a:pPr indent="0" marL="0">
-              <a:lnSpc>
-                <a:spcPct val="130000"/>
-              </a:lnSpc>
-              <a:buNone/>
-            </a:pPr>
-            <a:r>
-              <a:rPr lang="en-US" sz="1050" dirty="0">
-                <a:solidFill>
-                  <a:srgbClr val="FFFFFF"/>
-                </a:solidFill>
-                <a:latin typeface="Consolas" pitchFamily="34" charset="0"/>
-                <a:ea typeface="Consolas" pitchFamily="34" charset="-122"/>
-                <a:cs typeface="Consolas" pitchFamily="34" charset="-120"/>
-              </a:rPr>
-              <a:t>Coefficients:</a:t>
-            </a:r>
-            <a:endParaRPr lang="en-US" sz="1050" dirty="0"/>
-          </a:p>
-          <a:p>
-            <a:pPr indent="0" marL="0">
-              <a:lnSpc>
-                <a:spcPct val="130000"/>
-              </a:lnSpc>
-              <a:buNone/>
-            </a:pPr>
-            <a:r>
-              <a:rPr lang="en-US" sz="1050" dirty="0">
-                <a:solidFill>
-                  <a:srgbClr val="FFFFFF"/>
-                </a:solidFill>
-                <a:latin typeface="Consolas" pitchFamily="34" charset="0"/>
-                <a:ea typeface="Consolas" pitchFamily="34" charset="-122"/>
-                <a:cs typeface="Consolas" pitchFamily="34" charset="-120"/>
-              </a:rPr>
-              <a:t>          Estimate  Pr(&gt;|t|)</a:t>
-            </a:r>
-            <a:endParaRPr lang="en-US" sz="1050" dirty="0"/>
-          </a:p>
-          <a:p>
-            <a:pPr indent="0" marL="0">
-              <a:lnSpc>
-                <a:spcPct val="130000"/>
-              </a:lnSpc>
-              <a:buNone/>
-            </a:pPr>
-            <a:r>
-              <a:rPr lang="en-US" sz="1050" dirty="0">
-                <a:solidFill>
-                  <a:srgbClr val="FFFFFF"/>
-                </a:solidFill>
-                <a:latin typeface="Consolas" pitchFamily="34" charset="0"/>
-                <a:ea typeface="Consolas" pitchFamily="34" charset="-122"/>
-                <a:cs typeface="Consolas" pitchFamily="34" charset="-120"/>
-              </a:rPr>
-              <a:t>age        0.038      0.001 **</a:t>
-            </a:r>
-            <a:endParaRPr lang="en-US" sz="1050" dirty="0"/>
-          </a:p>
-          <a:p>
-            <a:pPr indent="0" marL="0">
-              <a:lnSpc>
-                <a:spcPct val="130000"/>
-              </a:lnSpc>
-              <a:buNone/>
-            </a:pPr>
-            <a:r>
-              <a:rPr lang="en-US" sz="1050" dirty="0">
-                <a:solidFill>
-                  <a:srgbClr val="FFFFFF"/>
-                </a:solidFill>
-                <a:latin typeface="Consolas" pitchFamily="34" charset="0"/>
-                <a:ea typeface="Consolas" pitchFamily="34" charset="-122"/>
-                <a:cs typeface="Consolas" pitchFamily="34" charset="-120"/>
-              </a:rPr>
-              <a:t>sexeF     -0.21       0.18</a:t>
-            </a:r>
-            <a:endParaRPr lang="en-US" sz="1050" dirty="0"/>
-          </a:p>
-          <a:p>
-            <a:pPr indent="0" marL="0">
-              <a:lnSpc>
-                <a:spcPct val="130000"/>
-              </a:lnSpc>
-              <a:buNone/>
-            </a:pPr>
-            <a:r>
-              <a:rPr lang="en-US" sz="1050" dirty="0">
-                <a:solidFill>
-                  <a:srgbClr val="FFFFFF"/>
-                </a:solidFill>
-                <a:latin typeface="Consolas" pitchFamily="34" charset="0"/>
-                <a:ea typeface="Consolas" pitchFamily="34" charset="-122"/>
-                <a:cs typeface="Consolas" pitchFamily="34" charset="-120"/>
-              </a:rPr>
-              <a:t>bmi        0.045      0.003 **</a:t>
-            </a:r>
-            <a:endParaRPr lang="en-US" sz="1050" dirty="0"/>
-          </a:p>
-          <a:p>
-            <a:pPr indent="0" marL="0">
-              <a:lnSpc>
-                <a:spcPct val="130000"/>
-              </a:lnSpc>
-              <a:buNone/>
-            </a:pPr>
-            <a:r>
-              <a:rPr lang="en-US" sz="1050" dirty="0">
-                <a:solidFill>
-                  <a:srgbClr val="FFFFFF"/>
-                </a:solidFill>
-                <a:latin typeface="Consolas" pitchFamily="34" charset="0"/>
-                <a:ea typeface="Consolas" pitchFamily="34" charset="-122"/>
-                <a:cs typeface="Consolas" pitchFamily="34" charset="-120"/>
-              </a:rPr>
-              <a:t>regionB    0.31       0.04 *</a:t>
-            </a:r>
-            <a:endParaRPr lang="en-US" sz="1050" dirty="0"/>
-          </a:p>
-          <a:p>
-            <a:pPr indent="0" marL="0">
-              <a:lnSpc>
-                <a:spcPct val="130000"/>
-              </a:lnSpc>
-              <a:buNone/>
-            </a:pPr>
-            <a:endParaRPr lang="en-US" sz="1050" dirty="0"/>
-          </a:p>
-          <a:p>
-            <a:pPr indent="0" marL="0">
-              <a:lnSpc>
-                <a:spcPct val="130000"/>
-              </a:lnSpc>
-              <a:buNone/>
-            </a:pPr>
-            <a:r>
-              <a:rPr lang="en-US" sz="1050" dirty="0">
-                <a:solidFill>
-                  <a:srgbClr val="FFFFFF"/>
-                </a:solidFill>
-                <a:latin typeface="Consolas" pitchFamily="34" charset="0"/>
-                <a:ea typeface="Consolas" pitchFamily="34" charset="-122"/>
-                <a:cs typeface="Consolas" pitchFamily="34" charset="-120"/>
-              </a:rPr>
-              <a:t>R² = 0.42, F = 18.3, p &lt; 0.001</a:t>
-            </a:r>
-            <a:endParaRPr lang="en-US" sz="1050" dirty="0"/>
-          </a:p>
-          <a:p>
-            <a:pPr indent="0" marL="0">
-              <a:lnSpc>
-                <a:spcPct val="130000"/>
-              </a:lnSpc>
-              <a:buNone/>
-            </a:pPr>
-            <a:endParaRPr lang="en-US" sz="1050" dirty="0"/>
-          </a:p>
-          <a:p>
-            <a:pPr indent="0" marL="0">
-              <a:lnSpc>
-                <a:spcPct val="130000"/>
-              </a:lnSpc>
-              <a:buNone/>
-            </a:pPr>
-            <a:r>
-              <a:rPr lang="en-US" sz="1050" dirty="0">
-                <a:solidFill>
-                  <a:srgbClr val="FFFFFF"/>
-                </a:solidFill>
-                <a:latin typeface="Consolas" pitchFamily="34" charset="0"/>
-                <a:ea typeface="Consolas" pitchFamily="34" charset="-122"/>
-                <a:cs typeface="Consolas" pitchFamily="34" charset="-120"/>
-              </a:rPr>
-              <a:t>→ Effet de l'âge persiste après</a:t>
-            </a:r>
-            <a:endParaRPr lang="en-US" sz="1050" dirty="0"/>
-          </a:p>
-          <a:p>
-            <a:pPr indent="0" marL="0">
-              <a:lnSpc>
-                <a:spcPct val="130000"/>
-              </a:lnSpc>
-              <a:buNone/>
-            </a:pPr>
-            <a:r>
-              <a:rPr lang="en-US" sz="1050" dirty="0">
-                <a:solidFill>
-                  <a:srgbClr val="FFFFFF"/>
-                </a:solidFill>
-                <a:latin typeface="Consolas" pitchFamily="34" charset="0"/>
-                <a:ea typeface="Consolas" pitchFamily="34" charset="-122"/>
-                <a:cs typeface="Consolas" pitchFamily="34" charset="-120"/>
-              </a:rPr>
-              <a:t>  ajustement.</a:t>
-            </a:r>
-            <a:endParaRPr lang="en-US" sz="1050" dirty="0"/>
-          </a:p>
-        </p:txBody>
-      </p:sp>
-      <p:sp>
-        <p:nvSpPr>
-          <p:cNvPr id="14" name="Text 12"/>
-          <p:cNvSpPr/>
-          <p:nvPr/>
-        </p:nvSpPr>
-        <p:spPr>
-          <a:xfrm>
-            <a:off x="640080" y="5989320"/>
-            <a:ext cx="10972800" cy="365760"/>
+              <a:t>âge</a:t>
+            </a:r>
+            <a:endParaRPr lang="en-US" sz="1000" dirty="0"/>
+          </a:p>
+        </p:txBody>
+      </p:sp>
+      <p:sp>
+        <p:nvSpPr>
+          <p:cNvPr id="15" name="Shape 13"/>
+          <p:cNvSpPr/>
+          <p:nvPr/>
+        </p:nvSpPr>
+        <p:spPr>
+          <a:xfrm>
+            <a:off x="8811175" y="3526155"/>
+            <a:ext cx="180844" cy="0"/>
+          </a:xfrm>
+          <a:prstGeom prst="line">
+            <a:avLst/>
+          </a:prstGeom>
+          <a:noFill/>
+          <a:ln w="19050">
+            <a:solidFill>
+              <a:srgbClr val="F09042"/>
+            </a:solidFill>
+            <a:prstDash val="solid"/>
+          </a:ln>
+        </p:spPr>
+      </p:sp>
+      <p:sp>
+        <p:nvSpPr>
+          <p:cNvPr id="16" name="Shape 14"/>
+          <p:cNvSpPr/>
+          <p:nvPr/>
+        </p:nvSpPr>
+        <p:spPr>
+          <a:xfrm>
+            <a:off x="8811175" y="3471291"/>
+            <a:ext cx="0" cy="109728"/>
+          </a:xfrm>
+          <a:prstGeom prst="line">
+            <a:avLst/>
+          </a:prstGeom>
+          <a:noFill/>
+          <a:ln w="19050">
+            <a:solidFill>
+              <a:srgbClr val="F09042"/>
+            </a:solidFill>
+            <a:prstDash val="solid"/>
+          </a:ln>
+        </p:spPr>
+      </p:sp>
+      <p:sp>
+        <p:nvSpPr>
+          <p:cNvPr id="17" name="Shape 15"/>
+          <p:cNvSpPr/>
+          <p:nvPr/>
+        </p:nvSpPr>
+        <p:spPr>
+          <a:xfrm>
+            <a:off x="8992018" y="3471291"/>
+            <a:ext cx="0" cy="109728"/>
+          </a:xfrm>
+          <a:prstGeom prst="line">
+            <a:avLst/>
+          </a:prstGeom>
+          <a:noFill/>
+          <a:ln w="19050">
+            <a:solidFill>
+              <a:srgbClr val="F09042"/>
+            </a:solidFill>
+            <a:prstDash val="solid"/>
+          </a:ln>
+        </p:spPr>
+      </p:sp>
+      <p:sp>
+        <p:nvSpPr>
+          <p:cNvPr id="18" name="Shape 16"/>
+          <p:cNvSpPr/>
+          <p:nvPr/>
+        </p:nvSpPr>
+        <p:spPr>
+          <a:xfrm>
+            <a:off x="8837588" y="3462147"/>
+            <a:ext cx="128016" cy="128016"/>
+          </a:xfrm>
+          <a:prstGeom prst="rect">
+            <a:avLst/>
+          </a:prstGeom>
+          <a:solidFill>
+            <a:srgbClr val="F09042"/>
+          </a:solidFill>
+          <a:ln/>
+        </p:spPr>
+      </p:sp>
+      <p:sp>
+        <p:nvSpPr>
+          <p:cNvPr id="19" name="Text 17"/>
+          <p:cNvSpPr/>
+          <p:nvPr/>
+        </p:nvSpPr>
+        <p:spPr>
+          <a:xfrm>
+            <a:off x="4800600" y="3921633"/>
+            <a:ext cx="1371600" cy="329184"/>
           </a:xfrm>
           <a:prstGeom prst="rect">
             <a:avLst/>
@@ -13988,19 +14943,504 @@
           <a:bodyPr wrap="square" rtlCol="0" anchor="ctr"/>
           <a:lstStyle/>
           <a:p>
-            <a:pPr algn="ctr" indent="0" marL="0">
-              <a:buNone/>
-            </a:pPr>
-            <a:r>
-              <a:rPr lang="en-US" sz="1100" i="1" dirty="0">
-                <a:solidFill>
-                  <a:srgbClr val="6B7280"/>
+            <a:pPr indent="0" marL="0">
+              <a:buNone/>
+            </a:pPr>
+            <a:r>
+              <a:rPr lang="en-US" sz="1000" b="1" dirty="0">
+                <a:solidFill>
+                  <a:srgbClr val="15233F"/>
                 </a:solidFill>
                 <a:latin typeface="Calibri" pitchFamily="34" charset="0"/>
                 <a:ea typeface="Calibri" pitchFamily="34" charset="-122"/>
                 <a:cs typeface="Calibri" pitchFamily="34" charset="-120"/>
               </a:rPr>
-              <a:t>Une variable explicative dont la p-value &gt; 0.05 peut quand même rester dans le modèle si elle est un facteur de confusion connu. Justifier toujours.</a:t>
+              <a:t>sexe F</a:t>
+            </a:r>
+            <a:endParaRPr lang="en-US" sz="1000" dirty="0"/>
+          </a:p>
+        </p:txBody>
+      </p:sp>
+      <p:sp>
+        <p:nvSpPr>
+          <p:cNvPr id="20" name="Shape 18"/>
+          <p:cNvSpPr/>
+          <p:nvPr/>
+        </p:nvSpPr>
+        <p:spPr>
+          <a:xfrm>
+            <a:off x="6707886" y="4086225"/>
+            <a:ext cx="2437456" cy="0"/>
+          </a:xfrm>
+          <a:prstGeom prst="line">
+            <a:avLst/>
+          </a:prstGeom>
+          <a:noFill/>
+          <a:ln w="19050">
+            <a:solidFill>
+              <a:srgbClr val="0E1729"/>
+            </a:solidFill>
+            <a:prstDash val="solid"/>
+          </a:ln>
+        </p:spPr>
+      </p:sp>
+      <p:sp>
+        <p:nvSpPr>
+          <p:cNvPr id="21" name="Shape 19"/>
+          <p:cNvSpPr/>
+          <p:nvPr/>
+        </p:nvSpPr>
+        <p:spPr>
+          <a:xfrm>
+            <a:off x="6707886" y="4031361"/>
+            <a:ext cx="0" cy="109728"/>
+          </a:xfrm>
+          <a:prstGeom prst="line">
+            <a:avLst/>
+          </a:prstGeom>
+          <a:noFill/>
+          <a:ln w="19050">
+            <a:solidFill>
+              <a:srgbClr val="0E1729"/>
+            </a:solidFill>
+            <a:prstDash val="solid"/>
+          </a:ln>
+        </p:spPr>
+      </p:sp>
+      <p:sp>
+        <p:nvSpPr>
+          <p:cNvPr id="22" name="Shape 20"/>
+          <p:cNvSpPr/>
+          <p:nvPr/>
+        </p:nvSpPr>
+        <p:spPr>
+          <a:xfrm>
+            <a:off x="9145342" y="4031361"/>
+            <a:ext cx="0" cy="109728"/>
+          </a:xfrm>
+          <a:prstGeom prst="line">
+            <a:avLst/>
+          </a:prstGeom>
+          <a:noFill/>
+          <a:ln w="19050">
+            <a:solidFill>
+              <a:srgbClr val="0E1729"/>
+            </a:solidFill>
+            <a:prstDash val="solid"/>
+          </a:ln>
+        </p:spPr>
+      </p:sp>
+      <p:sp>
+        <p:nvSpPr>
+          <p:cNvPr id="23" name="Shape 21"/>
+          <p:cNvSpPr/>
+          <p:nvPr/>
+        </p:nvSpPr>
+        <p:spPr>
+          <a:xfrm>
+            <a:off x="7862606" y="4022217"/>
+            <a:ext cx="128016" cy="128016"/>
+          </a:xfrm>
+          <a:prstGeom prst="rect">
+            <a:avLst/>
+          </a:prstGeom>
+          <a:solidFill>
+            <a:srgbClr val="0E1729"/>
+          </a:solidFill>
+          <a:ln/>
+        </p:spPr>
+      </p:sp>
+      <p:sp>
+        <p:nvSpPr>
+          <p:cNvPr id="24" name="Text 22"/>
+          <p:cNvSpPr/>
+          <p:nvPr/>
+        </p:nvSpPr>
+        <p:spPr>
+          <a:xfrm>
+            <a:off x="4800600" y="4481703"/>
+            <a:ext cx="1371600" cy="329184"/>
+          </a:xfrm>
+          <a:prstGeom prst="rect">
+            <a:avLst/>
+          </a:prstGeom>
+          <a:noFill/>
+          <a:ln/>
+        </p:spPr>
+        <p:txBody>
+          <a:bodyPr wrap="square" rtlCol="0" anchor="ctr"/>
+          <a:lstStyle/>
+          <a:p>
+            <a:pPr indent="0" marL="0">
+              <a:buNone/>
+            </a:pPr>
+            <a:r>
+              <a:rPr lang="en-US" sz="1000" b="1" dirty="0">
+                <a:solidFill>
+                  <a:srgbClr val="15233F"/>
+                </a:solidFill>
+                <a:latin typeface="Calibri" pitchFamily="34" charset="0"/>
+                <a:ea typeface="Calibri" pitchFamily="34" charset="-122"/>
+                <a:cs typeface="Calibri" pitchFamily="34" charset="-120"/>
+              </a:rPr>
+              <a:t>BMI</a:t>
+            </a:r>
+            <a:endParaRPr lang="en-US" sz="1000" dirty="0"/>
+          </a:p>
+        </p:txBody>
+      </p:sp>
+      <p:sp>
+        <p:nvSpPr>
+          <p:cNvPr id="25" name="Shape 23"/>
+          <p:cNvSpPr/>
+          <p:nvPr/>
+        </p:nvSpPr>
+        <p:spPr>
+          <a:xfrm>
+            <a:off x="8811175" y="4646295"/>
+            <a:ext cx="235883" cy="0"/>
+          </a:xfrm>
+          <a:prstGeom prst="line">
+            <a:avLst/>
+          </a:prstGeom>
+          <a:noFill/>
+          <a:ln w="19050">
+            <a:solidFill>
+              <a:srgbClr val="F09042"/>
+            </a:solidFill>
+            <a:prstDash val="solid"/>
+          </a:ln>
+        </p:spPr>
+      </p:sp>
+      <p:sp>
+        <p:nvSpPr>
+          <p:cNvPr id="26" name="Shape 24"/>
+          <p:cNvSpPr/>
+          <p:nvPr/>
+        </p:nvSpPr>
+        <p:spPr>
+          <a:xfrm>
+            <a:off x="8811175" y="4591431"/>
+            <a:ext cx="0" cy="109728"/>
+          </a:xfrm>
+          <a:prstGeom prst="line">
+            <a:avLst/>
+          </a:prstGeom>
+          <a:noFill/>
+          <a:ln w="19050">
+            <a:solidFill>
+              <a:srgbClr val="F09042"/>
+            </a:solidFill>
+            <a:prstDash val="solid"/>
+          </a:ln>
+        </p:spPr>
+      </p:sp>
+      <p:sp>
+        <p:nvSpPr>
+          <p:cNvPr id="27" name="Shape 25"/>
+          <p:cNvSpPr/>
+          <p:nvPr/>
+        </p:nvSpPr>
+        <p:spPr>
+          <a:xfrm>
+            <a:off x="9047057" y="4591431"/>
+            <a:ext cx="0" cy="109728"/>
+          </a:xfrm>
+          <a:prstGeom prst="line">
+            <a:avLst/>
+          </a:prstGeom>
+          <a:noFill/>
+          <a:ln w="19050">
+            <a:solidFill>
+              <a:srgbClr val="F09042"/>
+            </a:solidFill>
+            <a:prstDash val="solid"/>
+          </a:ln>
+        </p:spPr>
+      </p:sp>
+      <p:sp>
+        <p:nvSpPr>
+          <p:cNvPr id="28" name="Shape 26"/>
+          <p:cNvSpPr/>
+          <p:nvPr/>
+        </p:nvSpPr>
+        <p:spPr>
+          <a:xfrm>
+            <a:off x="8865108" y="4582287"/>
+            <a:ext cx="128016" cy="128016"/>
+          </a:xfrm>
+          <a:prstGeom prst="rect">
+            <a:avLst/>
+          </a:prstGeom>
+          <a:solidFill>
+            <a:srgbClr val="F09042"/>
+          </a:solidFill>
+          <a:ln/>
+        </p:spPr>
+      </p:sp>
+      <p:sp>
+        <p:nvSpPr>
+          <p:cNvPr id="29" name="Text 27"/>
+          <p:cNvSpPr/>
+          <p:nvPr/>
+        </p:nvSpPr>
+        <p:spPr>
+          <a:xfrm>
+            <a:off x="4800600" y="5041773"/>
+            <a:ext cx="1371600" cy="329184"/>
+          </a:xfrm>
+          <a:prstGeom prst="rect">
+            <a:avLst/>
+          </a:prstGeom>
+          <a:noFill/>
+          <a:ln/>
+        </p:spPr>
+        <p:txBody>
+          <a:bodyPr wrap="square" rtlCol="0" anchor="ctr"/>
+          <a:lstStyle/>
+          <a:p>
+            <a:pPr indent="0" marL="0">
+              <a:buNone/>
+            </a:pPr>
+            <a:r>
+              <a:rPr lang="en-US" sz="1000" b="1" dirty="0">
+                <a:solidFill>
+                  <a:srgbClr val="15233F"/>
+                </a:solidFill>
+                <a:latin typeface="Calibri" pitchFamily="34" charset="0"/>
+                <a:ea typeface="Calibri" pitchFamily="34" charset="-122"/>
+                <a:cs typeface="Calibri" pitchFamily="34" charset="-120"/>
+              </a:rPr>
+              <a:t>région B</a:t>
+            </a:r>
+            <a:endParaRPr lang="en-US" sz="1000" dirty="0"/>
+          </a:p>
+        </p:txBody>
+      </p:sp>
+      <p:sp>
+        <p:nvSpPr>
+          <p:cNvPr id="30" name="Shape 28"/>
+          <p:cNvSpPr/>
+          <p:nvPr/>
+        </p:nvSpPr>
+        <p:spPr>
+          <a:xfrm>
+            <a:off x="8791518" y="5206365"/>
+            <a:ext cx="2358828" cy="0"/>
+          </a:xfrm>
+          <a:prstGeom prst="line">
+            <a:avLst/>
+          </a:prstGeom>
+          <a:noFill/>
+          <a:ln w="19050">
+            <a:solidFill>
+              <a:srgbClr val="F09042"/>
+            </a:solidFill>
+            <a:prstDash val="solid"/>
+          </a:ln>
+        </p:spPr>
+      </p:sp>
+      <p:sp>
+        <p:nvSpPr>
+          <p:cNvPr id="31" name="Shape 29"/>
+          <p:cNvSpPr/>
+          <p:nvPr/>
+        </p:nvSpPr>
+        <p:spPr>
+          <a:xfrm>
+            <a:off x="8791518" y="5151501"/>
+            <a:ext cx="0" cy="109728"/>
+          </a:xfrm>
+          <a:prstGeom prst="line">
+            <a:avLst/>
+          </a:prstGeom>
+          <a:noFill/>
+          <a:ln w="19050">
+            <a:solidFill>
+              <a:srgbClr val="F09042"/>
+            </a:solidFill>
+            <a:prstDash val="solid"/>
+          </a:ln>
+        </p:spPr>
+      </p:sp>
+      <p:sp>
+        <p:nvSpPr>
+          <p:cNvPr id="32" name="Shape 30"/>
+          <p:cNvSpPr/>
+          <p:nvPr/>
+        </p:nvSpPr>
+        <p:spPr>
+          <a:xfrm>
+            <a:off x="11150346" y="5151501"/>
+            <a:ext cx="0" cy="109728"/>
+          </a:xfrm>
+          <a:prstGeom prst="line">
+            <a:avLst/>
+          </a:prstGeom>
+          <a:noFill/>
+          <a:ln w="19050">
+            <a:solidFill>
+              <a:srgbClr val="F09042"/>
+            </a:solidFill>
+            <a:prstDash val="solid"/>
+          </a:ln>
+        </p:spPr>
+      </p:sp>
+      <p:sp>
+        <p:nvSpPr>
+          <p:cNvPr id="33" name="Shape 31"/>
+          <p:cNvSpPr/>
+          <p:nvPr/>
+        </p:nvSpPr>
+        <p:spPr>
+          <a:xfrm>
+            <a:off x="9906924" y="5142357"/>
+            <a:ext cx="128016" cy="128016"/>
+          </a:xfrm>
+          <a:prstGeom prst="rect">
+            <a:avLst/>
+          </a:prstGeom>
+          <a:solidFill>
+            <a:srgbClr val="F09042"/>
+          </a:solidFill>
+          <a:ln/>
+        </p:spPr>
+      </p:sp>
+      <p:sp>
+        <p:nvSpPr>
+          <p:cNvPr id="34" name="Shape 32"/>
+          <p:cNvSpPr/>
+          <p:nvPr/>
+        </p:nvSpPr>
+        <p:spPr>
+          <a:xfrm>
+            <a:off x="6263640" y="5532120"/>
+            <a:ext cx="5330952" cy="0"/>
+          </a:xfrm>
+          <a:prstGeom prst="line">
+            <a:avLst/>
+          </a:prstGeom>
+          <a:noFill/>
+          <a:ln w="6350">
+            <a:solidFill>
+              <a:srgbClr val="0E1729"/>
+            </a:solidFill>
+            <a:prstDash val="solid"/>
+          </a:ln>
+        </p:spPr>
+      </p:sp>
+      <p:sp>
+        <p:nvSpPr>
+          <p:cNvPr id="35" name="Text 33"/>
+          <p:cNvSpPr/>
+          <p:nvPr/>
+        </p:nvSpPr>
+        <p:spPr>
+          <a:xfrm>
+            <a:off x="8569324" y="5577840"/>
+            <a:ext cx="365760" cy="182880"/>
+          </a:xfrm>
+          <a:prstGeom prst="rect">
+            <a:avLst/>
+          </a:prstGeom>
+          <a:noFill/>
+          <a:ln/>
+        </p:spPr>
+        <p:txBody>
+          <a:bodyPr wrap="square" rtlCol="0" anchor="ctr"/>
+          <a:lstStyle/>
+          <a:p>
+            <a:pPr algn="ctr" indent="0" marL="0">
+              <a:buNone/>
+            </a:pPr>
+            <a:r>
+              <a:rPr lang="en-US" sz="800" dirty="0">
+                <a:solidFill>
+                  <a:srgbClr val="6B7280"/>
+                </a:solidFill>
+                <a:latin typeface="Calibri" pitchFamily="34" charset="0"/>
+                <a:ea typeface="Calibri" pitchFamily="34" charset="-122"/>
+                <a:cs typeface="Calibri" pitchFamily="34" charset="-120"/>
+              </a:rPr>
+              <a:t>0</a:t>
+            </a:r>
+            <a:endParaRPr lang="en-US" sz="800" dirty="0"/>
+          </a:p>
+        </p:txBody>
+      </p:sp>
+      <p:sp>
+        <p:nvSpPr>
+          <p:cNvPr id="36" name="Text 34"/>
+          <p:cNvSpPr/>
+          <p:nvPr/>
+        </p:nvSpPr>
+        <p:spPr>
+          <a:xfrm>
+            <a:off x="6263640" y="5715000"/>
+            <a:ext cx="5330952" cy="182880"/>
+          </a:xfrm>
+          <a:prstGeom prst="rect">
+            <a:avLst/>
+          </a:prstGeom>
+          <a:noFill/>
+          <a:ln/>
+        </p:spPr>
+        <p:txBody>
+          <a:bodyPr wrap="square" rtlCol="0" anchor="ctr"/>
+          <a:lstStyle/>
+          <a:p>
+            <a:pPr algn="ctr" indent="0" marL="0">
+              <a:buNone/>
+            </a:pPr>
+            <a:r>
+              <a:rPr lang="en-US" sz="800" i="1" dirty="0">
+                <a:solidFill>
+                  <a:srgbClr val="6B7280"/>
+                </a:solidFill>
+                <a:latin typeface="Calibri" pitchFamily="34" charset="0"/>
+                <a:ea typeface="Calibri" pitchFamily="34" charset="-122"/>
+                <a:cs typeface="Calibri" pitchFamily="34" charset="-120"/>
+              </a:rPr>
+              <a:t>Coefficient β (effet par unité)</a:t>
+            </a:r>
+            <a:endParaRPr lang="en-US" sz="800" dirty="0"/>
+          </a:p>
+        </p:txBody>
+      </p:sp>
+      <p:sp>
+        <p:nvSpPr>
+          <p:cNvPr id="37" name="Text 35"/>
+          <p:cNvSpPr/>
+          <p:nvPr/>
+        </p:nvSpPr>
+        <p:spPr>
+          <a:xfrm>
+            <a:off x="640080" y="5989320"/>
+            <a:ext cx="10972800" cy="365760"/>
+          </a:xfrm>
+          <a:prstGeom prst="rect">
+            <a:avLst/>
+          </a:prstGeom>
+          <a:noFill/>
+          <a:ln/>
+        </p:spPr>
+        <p:txBody>
+          <a:bodyPr wrap="square" rtlCol="0" anchor="ctr"/>
+          <a:lstStyle/>
+          <a:p>
+            <a:pPr algn="ctr" indent="0" marL="0">
+              <a:buNone/>
+            </a:pPr>
+            <a:r>
+              <a:rPr lang="en-US" sz="1100" i="1" dirty="0">
+                <a:solidFill>
+                  <a:srgbClr val="6B7280"/>
+                </a:solidFill>
+                <a:latin typeface="Calibri" pitchFamily="34" charset="0"/>
+                <a:ea typeface="Calibri" pitchFamily="34" charset="-122"/>
+                <a:cs typeface="Calibri" pitchFamily="34" charset="-120"/>
+              </a:rPr>
+              <a:t>Une variable explicative dont la p-value &gt; 0.05 peut quand même rester dans le modèle si elle est un facteur de confusion connu. Justifie toujours.</a:t>
             </a:r>
             <a:endParaRPr lang="en-US" sz="1100" dirty="0"/>
           </a:p>
@@ -14233,7 +15673,7 @@
                 <a:ea typeface="Calibri" pitchFamily="34" charset="-122"/>
                 <a:cs typeface="Calibri" pitchFamily="34" charset="-120"/>
               </a:rPr>
-              <a:t>Quand deux variables explicatives sont fortement corrélées (BMI et tour de taille, taille et poids), le modèle ne sait plus laquelle est responsable. Coefficients instables, IC très larges, p-values trompeuses. Le VIF (Variance Inflation Factor) le détecte.</a:t>
+              <a:t>Quand deux variables explicatives se chevauchent fortement (BMI et tour de taille, taille et poids), le modèle ne sait plus laquelle est responsable. Coefficients instables, IC très larges, p-values trompeuses. Le VIF le détecte.</a:t>
             </a:r>
             <a:endParaRPr lang="en-US" sz="1300" dirty="0"/>
           </a:p>
@@ -14247,12 +15687,12 @@
         </p:nvSpPr>
         <p:spPr>
           <a:xfrm>
-            <a:off x="640080" y="3246120"/>
-            <a:ext cx="5486400" cy="2606040"/>
+            <a:off x="640080" y="3291840"/>
+            <a:ext cx="5029200" cy="2743200"/>
           </a:xfrm>
           <a:prstGeom prst="roundRect">
             <a:avLst>
-              <a:gd name="adj" fmla="val 1754"/>
+              <a:gd name="adj" fmla="val 1667"/>
             </a:avLst>
           </a:prstGeom>
           <a:solidFill>
@@ -14274,7 +15714,7 @@
         </p:nvSpPr>
         <p:spPr>
           <a:xfrm>
-            <a:off x="777240" y="3355848"/>
+            <a:off x="777240" y="3401568"/>
             <a:ext cx="365760" cy="256032"/>
           </a:xfrm>
           <a:prstGeom prst="roundRect">
@@ -14296,7 +15736,7 @@
         </p:nvSpPr>
         <p:spPr>
           <a:xfrm>
-            <a:off x="777240" y="3355848"/>
+            <a:off x="777240" y="3401568"/>
             <a:ext cx="365760" cy="256032"/>
           </a:xfrm>
           <a:prstGeom prst="rect">
@@ -14335,8 +15775,8 @@
         </p:nvSpPr>
         <p:spPr>
           <a:xfrm>
-            <a:off x="822960" y="3703320"/>
-            <a:ext cx="5212080" cy="2057400"/>
+            <a:off x="822960" y="3749040"/>
+            <a:ext cx="4754880" cy="2194560"/>
           </a:xfrm>
           <a:prstGeom prst="rect">
             <a:avLst/>
@@ -14501,7 +15941,7 @@
                 <a:ea typeface="Consolas" pitchFamily="34" charset="-122"/>
                 <a:cs typeface="Consolas" pitchFamily="34" charset="-120"/>
               </a:rPr>
-              <a:t># Vérifier les corrélations</a:t>
+              <a:t># Vérifier corrélations</a:t>
             </a:r>
             <a:endParaRPr lang="en-US" sz="1050" dirty="0"/>
           </a:p>
@@ -14521,49 +15961,42 @@
                 <a:ea typeface="Consolas" pitchFamily="34" charset="-122"/>
                 <a:cs typeface="Consolas" pitchFamily="34" charset="-120"/>
               </a:rPr>
-              <a:t>cor(donnees[, c("age","bmi","poids")])</a:t>
+              <a:t>cor(donnees[, c("age",</a:t>
             </a:r>
             <a:endParaRPr lang="en-US" sz="1050" dirty="0"/>
           </a:p>
-        </p:txBody>
-      </p:sp>
-      <p:sp>
-        <p:nvSpPr>
-          <p:cNvPr id="11" name="Shape 9"/>
-          <p:cNvSpPr/>
-          <p:nvPr/>
-        </p:nvSpPr>
-        <p:spPr>
-          <a:xfrm>
-            <a:off x="6400800" y="3246120"/>
-            <a:ext cx="5330952" cy="2606040"/>
-          </a:xfrm>
-          <a:prstGeom prst="roundRect">
-            <a:avLst>
-              <a:gd name="adj" fmla="val 1754"/>
-            </a:avLst>
-          </a:prstGeom>
-          <a:solidFill>
-            <a:srgbClr val="1A2541"/>
-          </a:solidFill>
-          <a:ln w="6350">
-            <a:solidFill>
-              <a:srgbClr val="6B7280"/>
-            </a:solidFill>
-            <a:prstDash val="dash"/>
-          </a:ln>
-        </p:spPr>
-      </p:sp>
-      <p:sp>
-        <p:nvSpPr>
-          <p:cNvPr id="12" name="Text 10"/>
-          <p:cNvSpPr/>
-          <p:nvPr/>
-        </p:nvSpPr>
-        <p:spPr>
-          <a:xfrm>
-            <a:off x="6537960" y="3337560"/>
-            <a:ext cx="914400" cy="228600"/>
+          <a:p>
+            <a:pPr indent="0" marL="0">
+              <a:lnSpc>
+                <a:spcPct val="140000"/>
+              </a:lnSpc>
+              <a:buNone/>
+            </a:pPr>
+            <a:r>
+              <a:rPr lang="en-US" sz="1050" dirty="0">
+                <a:solidFill>
+                  <a:srgbClr val="E8EAED"/>
+                </a:solidFill>
+                <a:latin typeface="Consolas" pitchFamily="34" charset="0"/>
+                <a:ea typeface="Consolas" pitchFamily="34" charset="-122"/>
+                <a:cs typeface="Consolas" pitchFamily="34" charset="-120"/>
+              </a:rPr>
+              <a:t>              "bmi","poids")])</a:t>
+            </a:r>
+            <a:endParaRPr lang="en-US" sz="1050" dirty="0"/>
+          </a:p>
+        </p:txBody>
+      </p:sp>
+      <p:sp>
+        <p:nvSpPr>
+          <p:cNvPr id="11" name="Text 9"/>
+          <p:cNvSpPr/>
+          <p:nvPr/>
+        </p:nvSpPr>
+        <p:spPr>
+          <a:xfrm>
+            <a:off x="5852160" y="3337560"/>
+            <a:ext cx="5879592" cy="274320"/>
           </a:xfrm>
           <a:prstGeom prst="rect">
             <a:avLst/>
@@ -14575,214 +16008,77 @@
           <a:bodyPr wrap="square" rtlCol="0" anchor="ctr"/>
           <a:lstStyle/>
           <a:p>
-            <a:pPr indent="0" marL="0">
-              <a:buNone/>
-            </a:pPr>
-            <a:r>
-              <a:rPr lang="en-US" sz="900" b="1" spc="300" kern="0" dirty="0">
-                <a:solidFill>
-                  <a:srgbClr val="C9CFDC"/>
+            <a:pPr algn="ctr" indent="0" marL="0">
+              <a:buNone/>
+            </a:pPr>
+            <a:r>
+              <a:rPr lang="en-US" sz="1100" b="1" dirty="0">
+                <a:solidFill>
+                  <a:srgbClr val="15233F"/>
                 </a:solidFill>
                 <a:latin typeface="Calibri" pitchFamily="34" charset="0"/>
                 <a:ea typeface="Calibri" pitchFamily="34" charset="-122"/>
                 <a:cs typeface="Calibri" pitchFamily="34" charset="-120"/>
               </a:rPr>
-              <a:t>SORTIE</a:t>
-            </a:r>
-            <a:endParaRPr lang="en-US" sz="900" dirty="0"/>
-          </a:p>
-        </p:txBody>
-      </p:sp>
-      <p:sp>
-        <p:nvSpPr>
-          <p:cNvPr id="13" name="Text 11"/>
-          <p:cNvSpPr/>
-          <p:nvPr/>
-        </p:nvSpPr>
-        <p:spPr>
-          <a:xfrm>
-            <a:off x="6583680" y="3611880"/>
-            <a:ext cx="5056632" cy="2148840"/>
-          </a:xfrm>
-          <a:prstGeom prst="rect">
-            <a:avLst/>
-          </a:prstGeom>
-          <a:noFill/>
-          <a:ln/>
-        </p:spPr>
-        <p:txBody>
-          <a:bodyPr wrap="square" rtlCol="0" anchor="t"/>
-          <a:lstStyle/>
-          <a:p>
-            <a:pPr indent="0" marL="0">
-              <a:lnSpc>
-                <a:spcPct val="130000"/>
-              </a:lnSpc>
-              <a:buNone/>
-            </a:pPr>
-            <a:r>
-              <a:rPr lang="en-US" sz="1050" dirty="0">
-                <a:solidFill>
-                  <a:srgbClr val="FFFFFF"/>
-                </a:solidFill>
-                <a:latin typeface="Consolas" pitchFamily="34" charset="0"/>
-                <a:ea typeface="Consolas" pitchFamily="34" charset="-122"/>
-                <a:cs typeface="Consolas" pitchFamily="34" charset="-120"/>
-              </a:rPr>
-              <a:t>GVIF Df GVIF^(1/(2*Df))</a:t>
-            </a:r>
-            <a:endParaRPr lang="en-US" sz="1050" dirty="0"/>
-          </a:p>
-          <a:p>
-            <a:pPr indent="0" marL="0">
-              <a:lnSpc>
-                <a:spcPct val="130000"/>
-              </a:lnSpc>
-              <a:buNone/>
-            </a:pPr>
-            <a:r>
-              <a:rPr lang="en-US" sz="1050" dirty="0">
-                <a:solidFill>
-                  <a:srgbClr val="FFFFFF"/>
-                </a:solidFill>
-                <a:latin typeface="Consolas" pitchFamily="34" charset="0"/>
-                <a:ea typeface="Consolas" pitchFamily="34" charset="-122"/>
-                <a:cs typeface="Consolas" pitchFamily="34" charset="-120"/>
-              </a:rPr>
-              <a:t>age    1.12  1   1.06</a:t>
-            </a:r>
-            <a:endParaRPr lang="en-US" sz="1050" dirty="0"/>
-          </a:p>
-          <a:p>
-            <a:pPr indent="0" marL="0">
-              <a:lnSpc>
-                <a:spcPct val="130000"/>
-              </a:lnSpc>
-              <a:buNone/>
-            </a:pPr>
-            <a:r>
-              <a:rPr lang="en-US" sz="1050" dirty="0">
-                <a:solidFill>
-                  <a:srgbClr val="FFFFFF"/>
-                </a:solidFill>
-                <a:latin typeface="Consolas" pitchFamily="34" charset="0"/>
-                <a:ea typeface="Consolas" pitchFamily="34" charset="-122"/>
-                <a:cs typeface="Consolas" pitchFamily="34" charset="-120"/>
-              </a:rPr>
-              <a:t>sexe   1.05  1   1.02</a:t>
-            </a:r>
-            <a:endParaRPr lang="en-US" sz="1050" dirty="0"/>
-          </a:p>
-          <a:p>
-            <a:pPr indent="0" marL="0">
-              <a:lnSpc>
-                <a:spcPct val="130000"/>
-              </a:lnSpc>
-              <a:buNone/>
-            </a:pPr>
-            <a:r>
-              <a:rPr lang="en-US" sz="1050" dirty="0">
-                <a:solidFill>
-                  <a:srgbClr val="FFFFFF"/>
-                </a:solidFill>
-                <a:latin typeface="Consolas" pitchFamily="34" charset="0"/>
-                <a:ea typeface="Consolas" pitchFamily="34" charset="-122"/>
-                <a:cs typeface="Consolas" pitchFamily="34" charset="-120"/>
-              </a:rPr>
-              <a:t>bmi    8.74  1   2.96  ← suspect</a:t>
-            </a:r>
-            <a:endParaRPr lang="en-US" sz="1050" dirty="0"/>
-          </a:p>
-          <a:p>
-            <a:pPr indent="0" marL="0">
-              <a:lnSpc>
-                <a:spcPct val="130000"/>
-              </a:lnSpc>
-              <a:buNone/>
-            </a:pPr>
-            <a:r>
-              <a:rPr lang="en-US" sz="1050" dirty="0">
-                <a:solidFill>
-                  <a:srgbClr val="FFFFFF"/>
-                </a:solidFill>
-                <a:latin typeface="Consolas" pitchFamily="34" charset="0"/>
-                <a:ea typeface="Consolas" pitchFamily="34" charset="-122"/>
-                <a:cs typeface="Consolas" pitchFamily="34" charset="-120"/>
-              </a:rPr>
-              <a:t>poids  9.21  1   3.03  ← suspect</a:t>
-            </a:r>
-            <a:endParaRPr lang="en-US" sz="1050" dirty="0"/>
-          </a:p>
-          <a:p>
-            <a:pPr indent="0" marL="0">
-              <a:lnSpc>
-                <a:spcPct val="130000"/>
-              </a:lnSpc>
-              <a:buNone/>
-            </a:pPr>
-            <a:r>
-              <a:rPr lang="en-US" sz="1050" dirty="0">
-                <a:solidFill>
-                  <a:srgbClr val="FFFFFF"/>
-                </a:solidFill>
-                <a:latin typeface="Consolas" pitchFamily="34" charset="0"/>
-                <a:ea typeface="Consolas" pitchFamily="34" charset="-122"/>
-                <a:cs typeface="Consolas" pitchFamily="34" charset="-120"/>
-              </a:rPr>
-              <a:t>region 1.31  2   1.07</a:t>
-            </a:r>
-            <a:endParaRPr lang="en-US" sz="1050" dirty="0"/>
-          </a:p>
-          <a:p>
-            <a:pPr indent="0" marL="0">
-              <a:lnSpc>
-                <a:spcPct val="130000"/>
-              </a:lnSpc>
-              <a:buNone/>
-            </a:pPr>
-            <a:endParaRPr lang="en-US" sz="1050" dirty="0"/>
-          </a:p>
-          <a:p>
-            <a:pPr indent="0" marL="0">
-              <a:lnSpc>
-                <a:spcPct val="130000"/>
-              </a:lnSpc>
-              <a:buNone/>
-            </a:pPr>
-            <a:r>
-              <a:rPr lang="en-US" sz="1050" dirty="0">
-                <a:solidFill>
-                  <a:srgbClr val="FFFFFF"/>
-                </a:solidFill>
-                <a:latin typeface="Consolas" pitchFamily="34" charset="0"/>
-                <a:ea typeface="Consolas" pitchFamily="34" charset="-122"/>
-                <a:cs typeface="Consolas" pitchFamily="34" charset="-120"/>
-              </a:rPr>
-              <a:t>→ bmi et poids redondants.</a:t>
-            </a:r>
-            <a:endParaRPr lang="en-US" sz="1050" dirty="0"/>
-          </a:p>
-          <a:p>
-            <a:pPr indent="0" marL="0">
-              <a:lnSpc>
-                <a:spcPct val="130000"/>
-              </a:lnSpc>
-              <a:buNone/>
-            </a:pPr>
-            <a:r>
-              <a:rPr lang="en-US" sz="1050" dirty="0">
-                <a:solidFill>
-                  <a:srgbClr val="FFFFFF"/>
-                </a:solidFill>
-                <a:latin typeface="Consolas" pitchFamily="34" charset="0"/>
-                <a:ea typeface="Consolas" pitchFamily="34" charset="-122"/>
-                <a:cs typeface="Consolas" pitchFamily="34" charset="-120"/>
-              </a:rPr>
-              <a:t>→ Garder un seul.</a:t>
-            </a:r>
-            <a:endParaRPr lang="en-US" sz="1050" dirty="0"/>
-          </a:p>
-        </p:txBody>
+              <a:t>BMI et poids · forte multicollinéarité</a:t>
+            </a:r>
+            <a:endParaRPr lang="en-US" sz="1100" dirty="0"/>
+          </a:p>
+        </p:txBody>
+      </p:sp>
+      <p:sp>
+        <p:nvSpPr>
+          <p:cNvPr id="12" name="Shape 10"/>
+          <p:cNvSpPr/>
+          <p:nvPr/>
+        </p:nvSpPr>
+        <p:spPr>
+          <a:xfrm>
+            <a:off x="7473163" y="3968496"/>
+            <a:ext cx="1755648" cy="1755648"/>
+          </a:xfrm>
+          <a:prstGeom prst="ellipse">
+            <a:avLst/>
+          </a:prstGeom>
+          <a:solidFill>
+            <a:srgbClr val="F09042">
+              <a:alpha val="35000"/>
+            </a:srgbClr>
+          </a:solidFill>
+          <a:ln w="19050">
+            <a:solidFill>
+              <a:srgbClr val="D9772B"/>
+            </a:solidFill>
+            <a:prstDash val="solid"/>
+          </a:ln>
+        </p:spPr>
+      </p:sp>
+      <p:sp>
+        <p:nvSpPr>
+          <p:cNvPr id="13" name="Shape 11"/>
+          <p:cNvSpPr/>
+          <p:nvPr/>
+        </p:nvSpPr>
+        <p:spPr>
+          <a:xfrm>
+            <a:off x="8355101" y="3968496"/>
+            <a:ext cx="1755648" cy="1755648"/>
+          </a:xfrm>
+          <a:prstGeom prst="ellipse">
+            <a:avLst/>
+          </a:prstGeom>
+          <a:solidFill>
+            <a:srgbClr val="0E1729">
+              <a:alpha val="35000"/>
+            </a:srgbClr>
+          </a:solidFill>
+          <a:ln w="19050">
+            <a:solidFill>
+              <a:srgbClr val="1A2541"/>
+            </a:solidFill>
+            <a:prstDash val="solid"/>
+          </a:ln>
+        </p:spPr>
       </p:sp>
       <p:sp>
         <p:nvSpPr>
@@ -14792,8 +16088,86 @@
         </p:nvSpPr>
         <p:spPr>
           <a:xfrm>
-            <a:off x="640080" y="5989320"/>
-            <a:ext cx="10972800" cy="365760"/>
+            <a:off x="7015963" y="3511296"/>
+            <a:ext cx="1097280" cy="365760"/>
+          </a:xfrm>
+          <a:prstGeom prst="rect">
+            <a:avLst/>
+          </a:prstGeom>
+          <a:noFill/>
+          <a:ln/>
+        </p:spPr>
+        <p:txBody>
+          <a:bodyPr wrap="square" rtlCol="0" anchor="ctr"/>
+          <a:lstStyle/>
+          <a:p>
+            <a:pPr algn="ctr" indent="0" marL="0">
+              <a:buNone/>
+            </a:pPr>
+            <a:r>
+              <a:rPr lang="en-US" sz="1100" b="1" dirty="0">
+                <a:solidFill>
+                  <a:srgbClr val="D9772B"/>
+                </a:solidFill>
+                <a:latin typeface="Calibri" pitchFamily="34" charset="0"/>
+                <a:ea typeface="Calibri" pitchFamily="34" charset="-122"/>
+                <a:cs typeface="Calibri" pitchFamily="34" charset="-120"/>
+              </a:rPr>
+              <a:t>BMI</a:t>
+            </a:r>
+            <a:endParaRPr lang="en-US" sz="1100" dirty="0"/>
+          </a:p>
+        </p:txBody>
+      </p:sp>
+      <p:sp>
+        <p:nvSpPr>
+          <p:cNvPr id="15" name="Text 13"/>
+          <p:cNvSpPr/>
+          <p:nvPr/>
+        </p:nvSpPr>
+        <p:spPr>
+          <a:xfrm>
+            <a:off x="9470669" y="3511296"/>
+            <a:ext cx="1097280" cy="365760"/>
+          </a:xfrm>
+          <a:prstGeom prst="rect">
+            <a:avLst/>
+          </a:prstGeom>
+          <a:noFill/>
+          <a:ln/>
+        </p:spPr>
+        <p:txBody>
+          <a:bodyPr wrap="square" rtlCol="0" anchor="ctr"/>
+          <a:lstStyle/>
+          <a:p>
+            <a:pPr algn="ctr" indent="0" marL="0">
+              <a:buNone/>
+            </a:pPr>
+            <a:r>
+              <a:rPr lang="en-US" sz="1100" b="1" dirty="0">
+                <a:solidFill>
+                  <a:srgbClr val="0E1729"/>
+                </a:solidFill>
+                <a:latin typeface="Calibri" pitchFamily="34" charset="0"/>
+                <a:ea typeface="Calibri" pitchFamily="34" charset="-122"/>
+                <a:cs typeface="Calibri" pitchFamily="34" charset="-120"/>
+              </a:rPr>
+              <a:t>Poids</a:t>
+            </a:r>
+            <a:endParaRPr lang="en-US" sz="1100" dirty="0"/>
+          </a:p>
+        </p:txBody>
+      </p:sp>
+      <p:sp>
+        <p:nvSpPr>
+          <p:cNvPr id="16" name="Text 14"/>
+          <p:cNvSpPr/>
+          <p:nvPr/>
+        </p:nvSpPr>
+        <p:spPr>
+          <a:xfrm>
+            <a:off x="640080" y="6126480"/>
+            <a:ext cx="10972800" cy="320040"/>
           </a:xfrm>
           <a:prstGeom prst="rect">
             <a:avLst/>
@@ -15050,7 +16424,7 @@
                 <a:ea typeface="Calibri" pitchFamily="34" charset="-122"/>
                 <a:cs typeface="Calibri" pitchFamily="34" charset="-120"/>
               </a:rPr>
-              <a:t>Quand X est qualitative (région, profession), R crée automatiquement des variables binaires (« dummy »). Une modalité sert de référence — les autres sont comparées à elle. Ce choix de référence n'est PAS anodin : il change la lecture des coefficients.</a:t>
+              <a:t>Quand X est qualitative (région, profession), R crée automatiquement des variables binaires (« dummy »). Une modalité sert de référence — les autres sont comparées à elle. Ce choix de référence change la lecture des coefficients.</a:t>
             </a:r>
             <a:endParaRPr lang="en-US" sz="1300" dirty="0"/>
           </a:p>
@@ -15065,11 +16439,11 @@
         <p:spPr>
           <a:xfrm>
             <a:off x="640080" y="3246120"/>
-            <a:ext cx="5486400" cy="2606040"/>
+            <a:ext cx="5486400" cy="2743200"/>
           </a:xfrm>
           <a:prstGeom prst="roundRect">
             <a:avLst>
-              <a:gd name="adj" fmla="val 1754"/>
+              <a:gd name="adj" fmla="val 1667"/>
             </a:avLst>
           </a:prstGeom>
           <a:solidFill>
@@ -15153,7 +16527,7 @@
         <p:spPr>
           <a:xfrm>
             <a:off x="822960" y="3703320"/>
-            <a:ext cx="5212080" cy="2057400"/>
+            <a:ext cx="5212080" cy="2194560"/>
           </a:xfrm>
           <a:prstGeom prst="rect">
             <a:avLst/>
@@ -15402,11 +16776,11 @@
         <p:spPr>
           <a:xfrm>
             <a:off x="6400800" y="3246120"/>
-            <a:ext cx="5330952" cy="2606040"/>
+            <a:ext cx="5330952" cy="2743200"/>
           </a:xfrm>
           <a:prstGeom prst="roundRect">
             <a:avLst>
-              <a:gd name="adj" fmla="val 1754"/>
+              <a:gd name="adj" fmla="val 1667"/>
             </a:avLst>
           </a:prstGeom>
           <a:solidFill>
@@ -15468,7 +16842,7 @@
         <p:spPr>
           <a:xfrm>
             <a:off x="6583680" y="3611880"/>
-            <a:ext cx="5056632" cy="2148840"/>
+            <a:ext cx="5056632" cy="2286000"/>
           </a:xfrm>
           <a:prstGeom prst="rect">
             <a:avLst/>
@@ -15495,7 +16869,7 @@
                 <a:ea typeface="Consolas" pitchFamily="34" charset="-122"/>
                 <a:cs typeface="Consolas" pitchFamily="34" charset="-120"/>
               </a:rPr>
-              <a:t>Coefficients:</a:t>
+              <a:t>Coefficients (ref = B):</a:t>
             </a:r>
             <a:endParaRPr lang="en-US" sz="1050" dirty="0"/>
           </a:p>
@@ -15515,7 +16889,7 @@
                 <a:ea typeface="Consolas" pitchFamily="34" charset="-122"/>
                 <a:cs typeface="Consolas" pitchFamily="34" charset="-120"/>
               </a:rPr>
-              <a:t>              Estimate  Pr(&gt;|t|)</a:t>
+              <a:t>             Estimate  Pr(&gt;|t|)</a:t>
             </a:r>
             <a:endParaRPr lang="en-US" sz="1050" dirty="0"/>
           </a:p>
@@ -15535,7 +16909,7 @@
                 <a:ea typeface="Consolas" pitchFamily="34" charset="-122"/>
                 <a:cs typeface="Consolas" pitchFamily="34" charset="-120"/>
               </a:rPr>
-              <a:t>(Intercept)    7.45      &lt;2e-16</a:t>
+              <a:t>(Intercept)   7.45      &lt;2e-16</a:t>
             </a:r>
             <a:endParaRPr lang="en-US" sz="1050" dirty="0"/>
           </a:p>
@@ -15555,7 +16929,7 @@
                 <a:ea typeface="Consolas" pitchFamily="34" charset="-122"/>
                 <a:cs typeface="Consolas" pitchFamily="34" charset="-120"/>
               </a:rPr>
-              <a:t>regionA       -0.42       0.03 *</a:t>
+              <a:t>regionA      -0.42       0.03 *</a:t>
             </a:r>
             <a:endParaRPr lang="en-US" sz="1050" dirty="0"/>
           </a:p>
@@ -15575,7 +16949,7 @@
                 <a:ea typeface="Consolas" pitchFamily="34" charset="-122"/>
                 <a:cs typeface="Consolas" pitchFamily="34" charset="-120"/>
               </a:rPr>
-              <a:t>regionC        0.18       0.31</a:t>
+              <a:t>regionC       0.18       0.31</a:t>
             </a:r>
             <a:endParaRPr lang="en-US" sz="1050" dirty="0"/>
           </a:p>
@@ -15604,7 +16978,7 @@
                 <a:ea typeface="Consolas" pitchFamily="34" charset="-122"/>
                 <a:cs typeface="Consolas" pitchFamily="34" charset="-120"/>
               </a:rPr>
-              <a:t>→ B est la référence ici.</a:t>
+              <a:t>→ Région A a 0,42 d'HbA1c</a:t>
             </a:r>
             <a:endParaRPr lang="en-US" sz="1050" dirty="0"/>
           </a:p>
@@ -15624,7 +16998,7 @@
                 <a:ea typeface="Consolas" pitchFamily="34" charset="-122"/>
                 <a:cs typeface="Consolas" pitchFamily="34" charset="-120"/>
               </a:rPr>
-              <a:t>→ Région A a 0,42 d'HbA1c</a:t>
+              <a:t>  EN MOINS que B (p = 0,03).</a:t>
             </a:r>
             <a:endParaRPr lang="en-US" sz="1050" dirty="0"/>
           </a:p>
@@ -15644,7 +17018,7 @@
                 <a:ea typeface="Consolas" pitchFamily="34" charset="-122"/>
                 <a:cs typeface="Consolas" pitchFamily="34" charset="-120"/>
               </a:rPr>
-              <a:t>  EN MOINS que B (p = 0,03).</a:t>
+              <a:t>→ Région C ne diffère pas</a:t>
             </a:r>
             <a:endParaRPr lang="en-US" sz="1050" dirty="0"/>
           </a:p>
@@ -15664,30 +17038,10 @@
                 <a:ea typeface="Consolas" pitchFamily="34" charset="-122"/>
                 <a:cs typeface="Consolas" pitchFamily="34" charset="-120"/>
               </a:rPr>
-              <a:t>→ Région C ne diffère pas</a:t>
+              <a:t>  significativement de B.</a:t>
             </a:r>
             <a:endParaRPr lang="en-US" sz="1050" dirty="0"/>
           </a:p>
-          <a:p>
-            <a:pPr indent="0" marL="0">
-              <a:lnSpc>
-                <a:spcPct val="130000"/>
-              </a:lnSpc>
-              <a:buNone/>
-            </a:pPr>
-            <a:r>
-              <a:rPr lang="en-US" sz="1050" dirty="0">
-                <a:solidFill>
-                  <a:srgbClr val="FFFFFF"/>
-                </a:solidFill>
-                <a:latin typeface="Consolas" pitchFamily="34" charset="0"/>
-                <a:ea typeface="Consolas" pitchFamily="34" charset="-122"/>
-                <a:cs typeface="Consolas" pitchFamily="34" charset="-120"/>
-              </a:rPr>
-              <a:t>  significativement de B.</a:t>
-            </a:r>
-            <a:endParaRPr lang="en-US" sz="1050" dirty="0"/>
-          </a:p>
         </p:txBody>
       </p:sp>
       <p:sp>
@@ -15698,8 +17052,8 @@
         </p:nvSpPr>
         <p:spPr>
           <a:xfrm>
-            <a:off x="640080" y="5989320"/>
-            <a:ext cx="10972800" cy="365760"/>
+            <a:off x="640080" y="6126480"/>
+            <a:ext cx="10972800" cy="320040"/>
           </a:xfrm>
           <a:prstGeom prst="rect">
             <a:avLst/>
@@ -15929,7 +17283,7 @@
         <p:spPr>
           <a:xfrm>
             <a:off x="640080" y="1828800"/>
-            <a:ext cx="10972800" cy="1280160"/>
+            <a:ext cx="10972800" cy="914400"/>
           </a:xfrm>
           <a:prstGeom prst="rect">
             <a:avLst/>
@@ -15956,7 +17310,7 @@
                 <a:ea typeface="Calibri" pitchFamily="34" charset="-122"/>
                 <a:cs typeface="Calibri" pitchFamily="34" charset="-120"/>
               </a:rPr>
-              <a:t>Quand Y est binaire (malade/sain, décès/vie), tu utilises la régression logistique. Subtilité : R sort les coefficients en log-odds. Pour obtenir l'OR, il faut exponentier. Toujours.</a:t>
+              <a:t>Quand Y est binaire, tu utilises la régression logistique. Elle modélise la probabilité de Y = 1 via une fonction sigmoïde. Subtilité : R sort les coefficients en log-odds. Pour obtenir l'OR, il faut exponentier.</a:t>
             </a:r>
             <a:endParaRPr lang="en-US" sz="1300" dirty="0"/>
           </a:p>
@@ -15970,12 +17324,12 @@
         </p:nvSpPr>
         <p:spPr>
           <a:xfrm>
-            <a:off x="640080" y="3246120"/>
-            <a:ext cx="5486400" cy="2606040"/>
+            <a:off x="640080" y="2926080"/>
+            <a:ext cx="3931920" cy="2926080"/>
           </a:xfrm>
           <a:prstGeom prst="roundRect">
             <a:avLst>
-              <a:gd name="adj" fmla="val 1754"/>
+              <a:gd name="adj" fmla="val 1563"/>
             </a:avLst>
           </a:prstGeom>
           <a:solidFill>
@@ -15997,7 +17351,7 @@
         </p:nvSpPr>
         <p:spPr>
           <a:xfrm>
-            <a:off x="777240" y="3355848"/>
+            <a:off x="777240" y="3035808"/>
             <a:ext cx="365760" cy="256032"/>
           </a:xfrm>
           <a:prstGeom prst="roundRect">
@@ -16019,7 +17373,7 @@
         </p:nvSpPr>
         <p:spPr>
           <a:xfrm>
-            <a:off x="777240" y="3355848"/>
+            <a:off x="777240" y="3035808"/>
             <a:ext cx="365760" cy="256032"/>
           </a:xfrm>
           <a:prstGeom prst="rect">
@@ -16058,8 +17412,8 @@
         </p:nvSpPr>
         <p:spPr>
           <a:xfrm>
-            <a:off x="822960" y="3703320"/>
-            <a:ext cx="5212080" cy="2057400"/>
+            <a:off x="822960" y="3383280"/>
+            <a:ext cx="3657600" cy="2377440"/>
           </a:xfrm>
           <a:prstGeom prst="rect">
             <a:avLst/>
@@ -16166,8 +17520,17 @@
                 <a:ea typeface="Consolas" pitchFamily="34" charset="-122"/>
                 <a:cs typeface="Consolas" pitchFamily="34" charset="-120"/>
               </a:rPr>
-              <a:t>  family = binomial</a:t>
-            </a:r>
+              <a:t>  family = binomial)</a:t>
+            </a:r>
+            <a:endParaRPr lang="en-US" sz="1050" dirty="0"/>
+          </a:p>
+          <a:p>
+            <a:pPr indent="0" marL="0">
+              <a:lnSpc>
+                <a:spcPct val="140000"/>
+              </a:lnSpc>
+              <a:buNone/>
+            </a:pPr>
             <a:endParaRPr lang="en-US" sz="1050" dirty="0"/>
           </a:p>
           <a:p>
@@ -16186,8 +17549,17 @@
                 <a:ea typeface="Consolas" pitchFamily="34" charset="-122"/>
                 <a:cs typeface="Consolas" pitchFamily="34" charset="-120"/>
               </a:rPr>
-              <a:t>)</a:t>
-            </a:r>
+              <a:t>summary(modele)</a:t>
+            </a:r>
+            <a:endParaRPr lang="en-US" sz="1050" dirty="0"/>
+          </a:p>
+          <a:p>
+            <a:pPr indent="0" marL="0">
+              <a:lnSpc>
+                <a:spcPct val="140000"/>
+              </a:lnSpc>
+              <a:buNone/>
+            </a:pPr>
             <a:endParaRPr lang="en-US" sz="1050" dirty="0"/>
           </a:p>
           <a:p>
@@ -16206,17 +17578,8 @@
                 <a:ea typeface="Consolas" pitchFamily="34" charset="-122"/>
                 <a:cs typeface="Consolas" pitchFamily="34" charset="-120"/>
               </a:rPr>
-              <a:t>summary(modele)</a:t>
-            </a:r>
-            <a:endParaRPr lang="en-US" sz="1050" dirty="0"/>
-          </a:p>
-          <a:p>
-            <a:pPr indent="0" marL="0">
-              <a:lnSpc>
-                <a:spcPct val="140000"/>
-              </a:lnSpc>
-              <a:buNone/>
-            </a:pPr>
+              <a:t># Conversion en OR + IC95%</a:t>
+            </a:r>
             <a:endParaRPr lang="en-US" sz="1050" dirty="0"/>
           </a:p>
           <a:p>
@@ -16235,7 +17598,7 @@
                 <a:ea typeface="Consolas" pitchFamily="34" charset="-122"/>
                 <a:cs typeface="Consolas" pitchFamily="34" charset="-120"/>
               </a:rPr>
-              <a:t># Conversion en OR + IC95%</a:t>
+              <a:t>exp(coef(modele))</a:t>
             </a:r>
             <a:endParaRPr lang="en-US" sz="1050" dirty="0"/>
           </a:p>
@@ -16255,30 +17618,10 @@
                 <a:ea typeface="Consolas" pitchFamily="34" charset="-122"/>
                 <a:cs typeface="Consolas" pitchFamily="34" charset="-120"/>
               </a:rPr>
-              <a:t>exp(coef(modele))</a:t>
+              <a:t>exp(confint(modele))</a:t>
             </a:r>
             <a:endParaRPr lang="en-US" sz="1050" dirty="0"/>
           </a:p>
-          <a:p>
-            <a:pPr indent="0" marL="0">
-              <a:lnSpc>
-                <a:spcPct val="140000"/>
-              </a:lnSpc>
-              <a:buNone/>
-            </a:pPr>
-            <a:r>
-              <a:rPr lang="en-US" sz="1050" dirty="0">
-                <a:solidFill>
-                  <a:srgbClr val="E8EAED"/>
-                </a:solidFill>
-                <a:latin typeface="Consolas" pitchFamily="34" charset="0"/>
-                <a:ea typeface="Consolas" pitchFamily="34" charset="-122"/>
-                <a:cs typeface="Consolas" pitchFamily="34" charset="-120"/>
-              </a:rPr>
-              <a:t>exp(confint(modele))</a:t>
-            </a:r>
-            <a:endParaRPr lang="en-US" sz="1050" dirty="0"/>
-          </a:p>
         </p:txBody>
       </p:sp>
       <p:sp>
@@ -16289,12 +17632,12 @@
         </p:nvSpPr>
         <p:spPr>
           <a:xfrm>
-            <a:off x="6400800" y="3246120"/>
-            <a:ext cx="5330952" cy="2606040"/>
+            <a:off x="4709160" y="2926080"/>
+            <a:ext cx="2560320" cy="2926080"/>
           </a:xfrm>
           <a:prstGeom prst="roundRect">
             <a:avLst>
-              <a:gd name="adj" fmla="val 1754"/>
+              <a:gd name="adj" fmla="val 1786"/>
             </a:avLst>
           </a:prstGeom>
           <a:solidFill>
@@ -16316,7 +17659,7 @@
         </p:nvSpPr>
         <p:spPr>
           <a:xfrm>
-            <a:off x="6537960" y="3337560"/>
+            <a:off x="4846320" y="3017520"/>
             <a:ext cx="914400" cy="228600"/>
           </a:xfrm>
           <a:prstGeom prst="rect">
@@ -16355,8 +17698,8 @@
         </p:nvSpPr>
         <p:spPr>
           <a:xfrm>
-            <a:off x="6583680" y="3611880"/>
-            <a:ext cx="5056632" cy="2148840"/>
+            <a:off x="4892040" y="3291840"/>
+            <a:ext cx="2286000" cy="2468880"/>
           </a:xfrm>
           <a:prstGeom prst="rect">
             <a:avLst/>
@@ -16383,7 +17726,7 @@
                 <a:ea typeface="Consolas" pitchFamily="34" charset="-122"/>
                 <a:cs typeface="Consolas" pitchFamily="34" charset="-120"/>
               </a:rPr>
-              <a:t>Coefficients:</a:t>
+              <a:t>Coefficients</a:t>
             </a:r>
             <a:endParaRPr lang="en-US" sz="1050" dirty="0"/>
           </a:p>
@@ -16403,7 +17746,7 @@
                 <a:ea typeface="Consolas" pitchFamily="34" charset="-122"/>
                 <a:cs typeface="Consolas" pitchFamily="34" charset="-120"/>
               </a:rPr>
-              <a:t>            Estimate Pr(&gt;|z|)</a:t>
+              <a:t>age 0.062</a:t>
             </a:r>
             <a:endParaRPr lang="en-US" sz="1050" dirty="0"/>
           </a:p>
@@ -16423,8 +17766,17 @@
                 <a:ea typeface="Consolas" pitchFamily="34" charset="-122"/>
                 <a:cs typeface="Consolas" pitchFamily="34" charset="-120"/>
               </a:rPr>
-              <a:t>(Intercept) -4.21    1e-08</a:t>
-            </a:r>
+              <a:t>  Pr 0.0003</a:t>
+            </a:r>
+            <a:endParaRPr lang="en-US" sz="1050" dirty="0"/>
+          </a:p>
+          <a:p>
+            <a:pPr indent="0" marL="0">
+              <a:lnSpc>
+                <a:spcPct val="130000"/>
+              </a:lnSpc>
+              <a:buNone/>
+            </a:pPr>
             <a:endParaRPr lang="en-US" sz="1050" dirty="0"/>
           </a:p>
           <a:p>
@@ -16443,17 +17795,8 @@
                 <a:ea typeface="Consolas" pitchFamily="34" charset="-122"/>
                 <a:cs typeface="Consolas" pitchFamily="34" charset="-120"/>
               </a:rPr>
-              <a:t>age          0.062    0.0003 ***</a:t>
-            </a:r>
-            <a:endParaRPr lang="en-US" sz="1050" dirty="0"/>
-          </a:p>
-          <a:p>
-            <a:pPr indent="0" marL="0">
-              <a:lnSpc>
-                <a:spcPct val="130000"/>
-              </a:lnSpc>
-              <a:buNone/>
-            </a:pPr>
+              <a:t>Exponentiation:</a:t>
+            </a:r>
             <a:endParaRPr lang="en-US" sz="1050" dirty="0"/>
           </a:p>
           <a:p>
@@ -16472,7 +17815,7 @@
                 <a:ea typeface="Consolas" pitchFamily="34" charset="-122"/>
                 <a:cs typeface="Consolas" pitchFamily="34" charset="-120"/>
               </a:rPr>
-              <a:t># Exponentiation:</a:t>
+              <a:t>OR age = 1.064</a:t>
             </a:r>
             <a:endParaRPr lang="en-US" sz="1050" dirty="0"/>
           </a:p>
@@ -16492,7 +17835,7 @@
                 <a:ea typeface="Consolas" pitchFamily="34" charset="-122"/>
                 <a:cs typeface="Consolas" pitchFamily="34" charset="-120"/>
               </a:rPr>
-              <a:t>            OR</a:t>
+              <a:t>IC95%</a:t>
             </a:r>
             <a:endParaRPr lang="en-US" sz="1050" dirty="0"/>
           </a:p>
@@ -16512,8 +17855,17 @@
                 <a:ea typeface="Consolas" pitchFamily="34" charset="-122"/>
                 <a:cs typeface="Consolas" pitchFamily="34" charset="-120"/>
               </a:rPr>
-              <a:t>(Intercept) 0.015</a:t>
-            </a:r>
+              <a:t>[1.029, 1.101]</a:t>
+            </a:r>
+            <a:endParaRPr lang="en-US" sz="1050" dirty="0"/>
+          </a:p>
+          <a:p>
+            <a:pPr indent="0" marL="0">
+              <a:lnSpc>
+                <a:spcPct val="130000"/>
+              </a:lnSpc>
+              <a:buNone/>
+            </a:pPr>
             <a:endParaRPr lang="en-US" sz="1050" dirty="0"/>
           </a:p>
           <a:p>
@@ -16532,17 +17884,8 @@
                 <a:ea typeface="Consolas" pitchFamily="34" charset="-122"/>
                 <a:cs typeface="Consolas" pitchFamily="34" charset="-120"/>
               </a:rPr>
-              <a:t>age         1.064</a:t>
-            </a:r>
-            <a:endParaRPr lang="en-US" sz="1050" dirty="0"/>
-          </a:p>
-          <a:p>
-            <a:pPr indent="0" marL="0">
-              <a:lnSpc>
-                <a:spcPct val="130000"/>
-              </a:lnSpc>
-              <a:buNone/>
-            </a:pPr>
+              <a:t>→ +1 an = +6.4 %</a:t>
+            </a:r>
             <a:endParaRPr lang="en-US" sz="1050" dirty="0"/>
           </a:p>
           <a:p>
@@ -16561,64 +17904,1146 @@
                 <a:ea typeface="Consolas" pitchFamily="34" charset="-122"/>
                 <a:cs typeface="Consolas" pitchFamily="34" charset="-120"/>
               </a:rPr>
-              <a:t>IC95% age: [1.029, 1.101]</a:t>
+              <a:t>  d'odds.</a:t>
             </a:r>
             <a:endParaRPr lang="en-US" sz="1050" dirty="0"/>
           </a:p>
-          <a:p>
-            <a:pPr indent="0" marL="0">
-              <a:lnSpc>
-                <a:spcPct val="130000"/>
-              </a:lnSpc>
-              <a:buNone/>
-            </a:pPr>
-            <a:endParaRPr lang="en-US" sz="1050" dirty="0"/>
-          </a:p>
-          <a:p>
-            <a:pPr indent="0" marL="0">
-              <a:lnSpc>
-                <a:spcPct val="130000"/>
-              </a:lnSpc>
-              <a:buNone/>
-            </a:pPr>
-            <a:r>
-              <a:rPr lang="en-US" sz="1050" dirty="0">
-                <a:solidFill>
-                  <a:srgbClr val="FFFFFF"/>
-                </a:solidFill>
-                <a:latin typeface="Consolas" pitchFamily="34" charset="0"/>
-                <a:ea typeface="Consolas" pitchFamily="34" charset="-122"/>
-                <a:cs typeface="Consolas" pitchFamily="34" charset="-120"/>
-              </a:rPr>
-              <a:t>→ +1 an d'âge = OR 1,064</a:t>
-            </a:r>
-            <a:endParaRPr lang="en-US" sz="1050" dirty="0"/>
-          </a:p>
-          <a:p>
-            <a:pPr indent="0" marL="0">
-              <a:lnSpc>
-                <a:spcPct val="130000"/>
-              </a:lnSpc>
-              <a:buNone/>
-            </a:pPr>
-            <a:r>
-              <a:rPr lang="en-US" sz="1050" dirty="0">
-                <a:solidFill>
-                  <a:srgbClr val="FFFFFF"/>
-                </a:solidFill>
-                <a:latin typeface="Consolas" pitchFamily="34" charset="0"/>
-                <a:ea typeface="Consolas" pitchFamily="34" charset="-122"/>
-                <a:cs typeface="Consolas" pitchFamily="34" charset="-120"/>
-              </a:rPr>
-              <a:t>  (6,4 % d'odds supplémentaires).</a:t>
-            </a:r>
-            <a:endParaRPr lang="en-US" sz="1050" dirty="0"/>
-          </a:p>
-        </p:txBody>
-      </p:sp>
-      <p:sp>
-        <p:nvSpPr>
-          <p:cNvPr id="14" name="Text 12"/>
+        </p:txBody>
+      </p:sp>
+      <p:sp>
+        <p:nvSpPr>
+          <p:cNvPr id="14" name="Shape 12"/>
+          <p:cNvSpPr/>
+          <p:nvPr/>
+        </p:nvSpPr>
+        <p:spPr>
+          <a:xfrm>
+            <a:off x="7406640" y="2926080"/>
+            <a:ext cx="4325112" cy="2926080"/>
+          </a:xfrm>
+          <a:prstGeom prst="rect">
+            <a:avLst/>
+          </a:prstGeom>
+          <a:solidFill>
+            <a:srgbClr val="FFFFFF"/>
+          </a:solidFill>
+          <a:ln w="6350">
+            <a:solidFill>
+              <a:srgbClr val="D6CFB8"/>
+            </a:solidFill>
+            <a:prstDash val="solid"/>
+          </a:ln>
+        </p:spPr>
+      </p:sp>
+      <p:sp>
+        <p:nvSpPr>
+          <p:cNvPr id="15" name="Text 13"/>
+          <p:cNvSpPr/>
+          <p:nvPr/>
+        </p:nvSpPr>
+        <p:spPr>
+          <a:xfrm>
+            <a:off x="7498080" y="2962656"/>
+            <a:ext cx="4142232" cy="228600"/>
+          </a:xfrm>
+          <a:prstGeom prst="rect">
+            <a:avLst/>
+          </a:prstGeom>
+          <a:noFill/>
+          <a:ln/>
+        </p:spPr>
+        <p:txBody>
+          <a:bodyPr wrap="square" rtlCol="0" anchor="ctr"/>
+          <a:lstStyle/>
+          <a:p>
+            <a:pPr algn="ctr" indent="0" marL="0">
+              <a:buNone/>
+            </a:pPr>
+            <a:r>
+              <a:rPr lang="en-US" sz="900" b="1" dirty="0">
+                <a:solidFill>
+                  <a:srgbClr val="15233F"/>
+                </a:solidFill>
+                <a:latin typeface="Calibri" pitchFamily="34" charset="0"/>
+                <a:ea typeface="Calibri" pitchFamily="34" charset="-122"/>
+                <a:cs typeface="Calibri" pitchFamily="34" charset="-120"/>
+              </a:rPr>
+              <a:t>P(maladie) selon X · courbe sigmoïde</a:t>
+            </a:r>
+            <a:endParaRPr lang="en-US" sz="900" dirty="0"/>
+          </a:p>
+        </p:txBody>
+      </p:sp>
+      <p:sp>
+        <p:nvSpPr>
+          <p:cNvPr id="16" name="Shape 14"/>
+          <p:cNvSpPr/>
+          <p:nvPr/>
+        </p:nvSpPr>
+        <p:spPr>
+          <a:xfrm>
+            <a:off x="7818120" y="5486400"/>
+            <a:ext cx="3776472" cy="0"/>
+          </a:xfrm>
+          <a:prstGeom prst="line">
+            <a:avLst/>
+          </a:prstGeom>
+          <a:noFill/>
+          <a:ln w="9525">
+            <a:solidFill>
+              <a:srgbClr val="0E1729"/>
+            </a:solidFill>
+            <a:prstDash val="solid"/>
+          </a:ln>
+        </p:spPr>
+      </p:sp>
+      <p:sp>
+        <p:nvSpPr>
+          <p:cNvPr id="17" name="Shape 15"/>
+          <p:cNvSpPr/>
+          <p:nvPr/>
+        </p:nvSpPr>
+        <p:spPr>
+          <a:xfrm>
+            <a:off x="7818120" y="3246120"/>
+            <a:ext cx="0" cy="2240280"/>
+          </a:xfrm>
+          <a:prstGeom prst="line">
+            <a:avLst/>
+          </a:prstGeom>
+          <a:noFill/>
+          <a:ln w="9525">
+            <a:solidFill>
+              <a:srgbClr val="0E1729"/>
+            </a:solidFill>
+            <a:prstDash val="solid"/>
+          </a:ln>
+        </p:spPr>
+      </p:sp>
+      <p:sp>
+        <p:nvSpPr>
+          <p:cNvPr id="18" name="Text 16"/>
+          <p:cNvSpPr/>
+          <p:nvPr/>
+        </p:nvSpPr>
+        <p:spPr>
+          <a:xfrm>
+            <a:off x="7818120" y="5577840"/>
+            <a:ext cx="3776472" cy="201168"/>
+          </a:xfrm>
+          <a:prstGeom prst="rect">
+            <a:avLst/>
+          </a:prstGeom>
+          <a:noFill/>
+          <a:ln/>
+        </p:spPr>
+        <p:txBody>
+          <a:bodyPr wrap="square" rtlCol="0" anchor="ctr"/>
+          <a:lstStyle/>
+          <a:p>
+            <a:pPr algn="ctr" indent="0" marL="0">
+              <a:buNone/>
+            </a:pPr>
+            <a:r>
+              <a:rPr lang="en-US" sz="800" i="1" dirty="0">
+                <a:solidFill>
+                  <a:srgbClr val="6B7280"/>
+                </a:solidFill>
+                <a:latin typeface="Calibri" pitchFamily="34" charset="0"/>
+                <a:ea typeface="Calibri" pitchFamily="34" charset="-122"/>
+                <a:cs typeface="Calibri" pitchFamily="34" charset="-120"/>
+              </a:rPr>
+              <a:t>X (prédicteur)</a:t>
+            </a:r>
+            <a:endParaRPr lang="en-US" sz="800" dirty="0"/>
+          </a:p>
+        </p:txBody>
+      </p:sp>
+      <p:sp>
+        <p:nvSpPr>
+          <p:cNvPr id="19" name="Text 17"/>
+          <p:cNvSpPr/>
+          <p:nvPr/>
+        </p:nvSpPr>
+        <p:spPr>
+          <a:xfrm rot="-5400000">
+            <a:off x="7424928" y="3246120"/>
+            <a:ext cx="365760" cy="2240280"/>
+          </a:xfrm>
+          <a:prstGeom prst="rect">
+            <a:avLst/>
+          </a:prstGeom>
+          <a:noFill/>
+          <a:ln/>
+        </p:spPr>
+        <p:txBody>
+          <a:bodyPr wrap="square" rtlCol="0" anchor="ctr"/>
+          <a:lstStyle/>
+          <a:p>
+            <a:pPr algn="l" indent="0" marL="0">
+              <a:buNone/>
+            </a:pPr>
+            <a:r>
+              <a:rPr lang="en-US" sz="800" i="1" dirty="0">
+                <a:solidFill>
+                  <a:srgbClr val="6B7280"/>
+                </a:solidFill>
+                <a:latin typeface="Calibri" pitchFamily="34" charset="0"/>
+                <a:ea typeface="Calibri" pitchFamily="34" charset="-122"/>
+                <a:cs typeface="Calibri" pitchFamily="34" charset="-120"/>
+              </a:rPr>
+              <a:t>P(Y = 1)</a:t>
+            </a:r>
+            <a:endParaRPr lang="en-US" sz="800" dirty="0"/>
+          </a:p>
+        </p:txBody>
+      </p:sp>
+      <p:sp>
+        <p:nvSpPr>
+          <p:cNvPr id="20" name="Shape 18"/>
+          <p:cNvSpPr/>
+          <p:nvPr/>
+        </p:nvSpPr>
+        <p:spPr>
+          <a:xfrm>
+            <a:off x="7818120" y="4366260"/>
+            <a:ext cx="3776472" cy="0"/>
+          </a:xfrm>
+          <a:prstGeom prst="line">
+            <a:avLst/>
+          </a:prstGeom>
+          <a:noFill/>
+          <a:ln w="6350">
+            <a:solidFill>
+              <a:srgbClr val="6B7280"/>
+            </a:solidFill>
+            <a:prstDash val="dash"/>
+          </a:ln>
+        </p:spPr>
+      </p:sp>
+      <p:sp>
+        <p:nvSpPr>
+          <p:cNvPr id="21" name="Shape 19"/>
+          <p:cNvSpPr/>
+          <p:nvPr/>
+        </p:nvSpPr>
+        <p:spPr>
+          <a:xfrm>
+            <a:off x="7818120" y="5480861"/>
+            <a:ext cx="94412" cy="-1932"/>
+          </a:xfrm>
+          <a:prstGeom prst="line">
+            <a:avLst/>
+          </a:prstGeom>
+          <a:noFill/>
+          <a:ln w="25400">
+            <a:solidFill>
+              <a:srgbClr val="F09042"/>
+            </a:solidFill>
+            <a:prstDash val="solid"/>
+          </a:ln>
+        </p:spPr>
+      </p:sp>
+      <p:sp>
+        <p:nvSpPr>
+          <p:cNvPr id="22" name="Shape 20"/>
+          <p:cNvSpPr/>
+          <p:nvPr/>
+        </p:nvSpPr>
+        <p:spPr>
+          <a:xfrm>
+            <a:off x="7912532" y="5478929"/>
+            <a:ext cx="94412" cy="-2602"/>
+          </a:xfrm>
+          <a:prstGeom prst="line">
+            <a:avLst/>
+          </a:prstGeom>
+          <a:noFill/>
+          <a:ln w="25400">
+            <a:solidFill>
+              <a:srgbClr val="F09042"/>
+            </a:solidFill>
+            <a:prstDash val="solid"/>
+          </a:ln>
+        </p:spPr>
+      </p:sp>
+      <p:sp>
+        <p:nvSpPr>
+          <p:cNvPr id="23" name="Shape 21"/>
+          <p:cNvSpPr/>
+          <p:nvPr/>
+        </p:nvSpPr>
+        <p:spPr>
+          <a:xfrm>
+            <a:off x="8006944" y="5476327"/>
+            <a:ext cx="94412" cy="-3503"/>
+          </a:xfrm>
+          <a:prstGeom prst="line">
+            <a:avLst/>
+          </a:prstGeom>
+          <a:noFill/>
+          <a:ln w="25400">
+            <a:solidFill>
+              <a:srgbClr val="F09042"/>
+            </a:solidFill>
+            <a:prstDash val="solid"/>
+          </a:ln>
+        </p:spPr>
+      </p:sp>
+      <p:sp>
+        <p:nvSpPr>
+          <p:cNvPr id="24" name="Shape 22"/>
+          <p:cNvSpPr/>
+          <p:nvPr/>
+        </p:nvSpPr>
+        <p:spPr>
+          <a:xfrm>
+            <a:off x="8101355" y="5472824"/>
+            <a:ext cx="94412" cy="-4711"/>
+          </a:xfrm>
+          <a:prstGeom prst="line">
+            <a:avLst/>
+          </a:prstGeom>
+          <a:noFill/>
+          <a:ln w="25400">
+            <a:solidFill>
+              <a:srgbClr val="F09042"/>
+            </a:solidFill>
+            <a:prstDash val="solid"/>
+          </a:ln>
+        </p:spPr>
+      </p:sp>
+      <p:sp>
+        <p:nvSpPr>
+          <p:cNvPr id="25" name="Shape 23"/>
+          <p:cNvSpPr/>
+          <p:nvPr/>
+        </p:nvSpPr>
+        <p:spPr>
+          <a:xfrm>
+            <a:off x="8195767" y="5468114"/>
+            <a:ext cx="94412" cy="-6327"/>
+          </a:xfrm>
+          <a:prstGeom prst="line">
+            <a:avLst/>
+          </a:prstGeom>
+          <a:noFill/>
+          <a:ln w="25400">
+            <a:solidFill>
+              <a:srgbClr val="F09042"/>
+            </a:solidFill>
+            <a:prstDash val="solid"/>
+          </a:ln>
+        </p:spPr>
+      </p:sp>
+      <p:sp>
+        <p:nvSpPr>
+          <p:cNvPr id="26" name="Shape 24"/>
+          <p:cNvSpPr/>
+          <p:nvPr/>
+        </p:nvSpPr>
+        <p:spPr>
+          <a:xfrm>
+            <a:off x="8290179" y="5461786"/>
+            <a:ext cx="94412" cy="-8484"/>
+          </a:xfrm>
+          <a:prstGeom prst="line">
+            <a:avLst/>
+          </a:prstGeom>
+          <a:noFill/>
+          <a:ln w="25400">
+            <a:solidFill>
+              <a:srgbClr val="F09042"/>
+            </a:solidFill>
+            <a:prstDash val="solid"/>
+          </a:ln>
+        </p:spPr>
+      </p:sp>
+      <p:sp>
+        <p:nvSpPr>
+          <p:cNvPr id="27" name="Shape 25"/>
+          <p:cNvSpPr/>
+          <p:nvPr/>
+        </p:nvSpPr>
+        <p:spPr>
+          <a:xfrm>
+            <a:off x="8384591" y="5453302"/>
+            <a:ext cx="94412" cy="-11350"/>
+          </a:xfrm>
+          <a:prstGeom prst="line">
+            <a:avLst/>
+          </a:prstGeom>
+          <a:noFill/>
+          <a:ln w="25400">
+            <a:solidFill>
+              <a:srgbClr val="F09042"/>
+            </a:solidFill>
+            <a:prstDash val="solid"/>
+          </a:ln>
+        </p:spPr>
+      </p:sp>
+      <p:sp>
+        <p:nvSpPr>
+          <p:cNvPr id="28" name="Shape 26"/>
+          <p:cNvSpPr/>
+          <p:nvPr/>
+        </p:nvSpPr>
+        <p:spPr>
+          <a:xfrm>
+            <a:off x="8479003" y="5441952"/>
+            <a:ext cx="94412" cy="-15137"/>
+          </a:xfrm>
+          <a:prstGeom prst="line">
+            <a:avLst/>
+          </a:prstGeom>
+          <a:noFill/>
+          <a:ln w="25400">
+            <a:solidFill>
+              <a:srgbClr val="F09042"/>
+            </a:solidFill>
+            <a:prstDash val="solid"/>
+          </a:ln>
+        </p:spPr>
+      </p:sp>
+      <p:sp>
+        <p:nvSpPr>
+          <p:cNvPr id="29" name="Shape 27"/>
+          <p:cNvSpPr/>
+          <p:nvPr/>
+        </p:nvSpPr>
+        <p:spPr>
+          <a:xfrm>
+            <a:off x="8573414" y="5426815"/>
+            <a:ext cx="94412" cy="-20105"/>
+          </a:xfrm>
+          <a:prstGeom prst="line">
+            <a:avLst/>
+          </a:prstGeom>
+          <a:noFill/>
+          <a:ln w="25400">
+            <a:solidFill>
+              <a:srgbClr val="F09042"/>
+            </a:solidFill>
+            <a:prstDash val="solid"/>
+          </a:ln>
+        </p:spPr>
+      </p:sp>
+      <p:sp>
+        <p:nvSpPr>
+          <p:cNvPr id="30" name="Shape 28"/>
+          <p:cNvSpPr/>
+          <p:nvPr/>
+        </p:nvSpPr>
+        <p:spPr>
+          <a:xfrm>
+            <a:off x="8667826" y="5406711"/>
+            <a:ext cx="94412" cy="-26558"/>
+          </a:xfrm>
+          <a:prstGeom prst="line">
+            <a:avLst/>
+          </a:prstGeom>
+          <a:noFill/>
+          <a:ln w="25400">
+            <a:solidFill>
+              <a:srgbClr val="F09042"/>
+            </a:solidFill>
+            <a:prstDash val="solid"/>
+          </a:ln>
+        </p:spPr>
+      </p:sp>
+      <p:sp>
+        <p:nvSpPr>
+          <p:cNvPr id="31" name="Shape 29"/>
+          <p:cNvSpPr/>
+          <p:nvPr/>
+        </p:nvSpPr>
+        <p:spPr>
+          <a:xfrm>
+            <a:off x="8762238" y="5380153"/>
+            <a:ext cx="94412" cy="-34831"/>
+          </a:xfrm>
+          <a:prstGeom prst="line">
+            <a:avLst/>
+          </a:prstGeom>
+          <a:noFill/>
+          <a:ln w="25400">
+            <a:solidFill>
+              <a:srgbClr val="F09042"/>
+            </a:solidFill>
+            <a:prstDash val="solid"/>
+          </a:ln>
+        </p:spPr>
+      </p:sp>
+      <p:sp>
+        <p:nvSpPr>
+          <p:cNvPr id="32" name="Shape 30"/>
+          <p:cNvSpPr/>
+          <p:nvPr/>
+        </p:nvSpPr>
+        <p:spPr>
+          <a:xfrm>
+            <a:off x="8856650" y="5345322"/>
+            <a:ext cx="94412" cy="-45252"/>
+          </a:xfrm>
+          <a:prstGeom prst="line">
+            <a:avLst/>
+          </a:prstGeom>
+          <a:noFill/>
+          <a:ln w="25400">
+            <a:solidFill>
+              <a:srgbClr val="F09042"/>
+            </a:solidFill>
+            <a:prstDash val="solid"/>
+          </a:ln>
+        </p:spPr>
+      </p:sp>
+      <p:sp>
+        <p:nvSpPr>
+          <p:cNvPr id="33" name="Shape 31"/>
+          <p:cNvSpPr/>
+          <p:nvPr/>
+        </p:nvSpPr>
+        <p:spPr>
+          <a:xfrm>
+            <a:off x="8951062" y="5300070"/>
+            <a:ext cx="94412" cy="-58077"/>
+          </a:xfrm>
+          <a:prstGeom prst="line">
+            <a:avLst/>
+          </a:prstGeom>
+          <a:noFill/>
+          <a:ln w="25400">
+            <a:solidFill>
+              <a:srgbClr val="F09042"/>
+            </a:solidFill>
+            <a:prstDash val="solid"/>
+          </a:ln>
+        </p:spPr>
+      </p:sp>
+      <p:sp>
+        <p:nvSpPr>
+          <p:cNvPr id="34" name="Shape 32"/>
+          <p:cNvSpPr/>
+          <p:nvPr/>
+        </p:nvSpPr>
+        <p:spPr>
+          <a:xfrm>
+            <a:off x="9045473" y="5241993"/>
+            <a:ext cx="94412" cy="-73379"/>
+          </a:xfrm>
+          <a:prstGeom prst="line">
+            <a:avLst/>
+          </a:prstGeom>
+          <a:noFill/>
+          <a:ln w="25400">
+            <a:solidFill>
+              <a:srgbClr val="F09042"/>
+            </a:solidFill>
+            <a:prstDash val="solid"/>
+          </a:ln>
+        </p:spPr>
+      </p:sp>
+      <p:sp>
+        <p:nvSpPr>
+          <p:cNvPr id="35" name="Shape 33"/>
+          <p:cNvSpPr/>
+          <p:nvPr/>
+        </p:nvSpPr>
+        <p:spPr>
+          <a:xfrm>
+            <a:off x="9139885" y="5168614"/>
+            <a:ext cx="94412" cy="-90898"/>
+          </a:xfrm>
+          <a:prstGeom prst="line">
+            <a:avLst/>
+          </a:prstGeom>
+          <a:noFill/>
+          <a:ln w="25400">
+            <a:solidFill>
+              <a:srgbClr val="F09042"/>
+            </a:solidFill>
+            <a:prstDash val="solid"/>
+          </a:ln>
+        </p:spPr>
+      </p:sp>
+      <p:sp>
+        <p:nvSpPr>
+          <p:cNvPr id="36" name="Shape 34"/>
+          <p:cNvSpPr/>
+          <p:nvPr/>
+        </p:nvSpPr>
+        <p:spPr>
+          <a:xfrm>
+            <a:off x="9234297" y="5077716"/>
+            <a:ext cx="94412" cy="-109885"/>
+          </a:xfrm>
+          <a:prstGeom prst="line">
+            <a:avLst/>
+          </a:prstGeom>
+          <a:noFill/>
+          <a:ln w="25400">
+            <a:solidFill>
+              <a:srgbClr val="F09042"/>
+            </a:solidFill>
+            <a:prstDash val="solid"/>
+          </a:ln>
+        </p:spPr>
+      </p:sp>
+      <p:sp>
+        <p:nvSpPr>
+          <p:cNvPr id="37" name="Shape 35"/>
+          <p:cNvSpPr/>
+          <p:nvPr/>
+        </p:nvSpPr>
+        <p:spPr>
+          <a:xfrm>
+            <a:off x="9328709" y="4967831"/>
+            <a:ext cx="94412" cy="-128985"/>
+          </a:xfrm>
+          <a:prstGeom prst="line">
+            <a:avLst/>
+          </a:prstGeom>
+          <a:noFill/>
+          <a:ln w="25400">
+            <a:solidFill>
+              <a:srgbClr val="F09042"/>
+            </a:solidFill>
+            <a:prstDash val="solid"/>
+          </a:ln>
+        </p:spPr>
+      </p:sp>
+      <p:sp>
+        <p:nvSpPr>
+          <p:cNvPr id="38" name="Shape 36"/>
+          <p:cNvSpPr/>
+          <p:nvPr/>
+        </p:nvSpPr>
+        <p:spPr>
+          <a:xfrm>
+            <a:off x="9423121" y="4838846"/>
+            <a:ext cx="94412" cy="-146275"/>
+          </a:xfrm>
+          <a:prstGeom prst="line">
+            <a:avLst/>
+          </a:prstGeom>
+          <a:noFill/>
+          <a:ln w="25400">
+            <a:solidFill>
+              <a:srgbClr val="F09042"/>
+            </a:solidFill>
+            <a:prstDash val="solid"/>
+          </a:ln>
+        </p:spPr>
+      </p:sp>
+      <p:sp>
+        <p:nvSpPr>
+          <p:cNvPr id="39" name="Shape 37"/>
+          <p:cNvSpPr/>
+          <p:nvPr/>
+        </p:nvSpPr>
+        <p:spPr>
+          <a:xfrm>
+            <a:off x="9517532" y="4692571"/>
+            <a:ext cx="94412" cy="-159539"/>
+          </a:xfrm>
+          <a:prstGeom prst="line">
+            <a:avLst/>
+          </a:prstGeom>
+          <a:noFill/>
+          <a:ln w="25400">
+            <a:solidFill>
+              <a:srgbClr val="F09042"/>
+            </a:solidFill>
+            <a:prstDash val="solid"/>
+          </a:ln>
+        </p:spPr>
+      </p:sp>
+      <p:sp>
+        <p:nvSpPr>
+          <p:cNvPr id="40" name="Shape 38"/>
+          <p:cNvSpPr/>
+          <p:nvPr/>
+        </p:nvSpPr>
+        <p:spPr>
+          <a:xfrm>
+            <a:off x="9611944" y="4533032"/>
+            <a:ext cx="94412" cy="-166772"/>
+          </a:xfrm>
+          <a:prstGeom prst="line">
+            <a:avLst/>
+          </a:prstGeom>
+          <a:noFill/>
+          <a:ln w="25400">
+            <a:solidFill>
+              <a:srgbClr val="F09042"/>
+            </a:solidFill>
+            <a:prstDash val="solid"/>
+          </a:ln>
+        </p:spPr>
+      </p:sp>
+      <p:sp>
+        <p:nvSpPr>
+          <p:cNvPr id="41" name="Shape 39"/>
+          <p:cNvSpPr/>
+          <p:nvPr/>
+        </p:nvSpPr>
+        <p:spPr>
+          <a:xfrm>
+            <a:off x="9706356" y="4366260"/>
+            <a:ext cx="94412" cy="-166772"/>
+          </a:xfrm>
+          <a:prstGeom prst="line">
+            <a:avLst/>
+          </a:prstGeom>
+          <a:noFill/>
+          <a:ln w="25400">
+            <a:solidFill>
+              <a:srgbClr val="F09042"/>
+            </a:solidFill>
+            <a:prstDash val="solid"/>
+          </a:ln>
+        </p:spPr>
+      </p:sp>
+      <p:sp>
+        <p:nvSpPr>
+          <p:cNvPr id="42" name="Shape 40"/>
+          <p:cNvSpPr/>
+          <p:nvPr/>
+        </p:nvSpPr>
+        <p:spPr>
+          <a:xfrm>
+            <a:off x="9800768" y="4199488"/>
+            <a:ext cx="94412" cy="-159539"/>
+          </a:xfrm>
+          <a:prstGeom prst="line">
+            <a:avLst/>
+          </a:prstGeom>
+          <a:noFill/>
+          <a:ln w="25400">
+            <a:solidFill>
+              <a:srgbClr val="F09042"/>
+            </a:solidFill>
+            <a:prstDash val="solid"/>
+          </a:ln>
+        </p:spPr>
+      </p:sp>
+      <p:sp>
+        <p:nvSpPr>
+          <p:cNvPr id="43" name="Shape 41"/>
+          <p:cNvSpPr/>
+          <p:nvPr/>
+        </p:nvSpPr>
+        <p:spPr>
+          <a:xfrm>
+            <a:off x="9895180" y="4039949"/>
+            <a:ext cx="94412" cy="-146275"/>
+          </a:xfrm>
+          <a:prstGeom prst="line">
+            <a:avLst/>
+          </a:prstGeom>
+          <a:noFill/>
+          <a:ln w="25400">
+            <a:solidFill>
+              <a:srgbClr val="F09042"/>
+            </a:solidFill>
+            <a:prstDash val="solid"/>
+          </a:ln>
+        </p:spPr>
+      </p:sp>
+      <p:sp>
+        <p:nvSpPr>
+          <p:cNvPr id="44" name="Shape 42"/>
+          <p:cNvSpPr/>
+          <p:nvPr/>
+        </p:nvSpPr>
+        <p:spPr>
+          <a:xfrm>
+            <a:off x="9989591" y="3893674"/>
+            <a:ext cx="94412" cy="-128985"/>
+          </a:xfrm>
+          <a:prstGeom prst="line">
+            <a:avLst/>
+          </a:prstGeom>
+          <a:noFill/>
+          <a:ln w="25400">
+            <a:solidFill>
+              <a:srgbClr val="F09042"/>
+            </a:solidFill>
+            <a:prstDash val="solid"/>
+          </a:ln>
+        </p:spPr>
+      </p:sp>
+      <p:sp>
+        <p:nvSpPr>
+          <p:cNvPr id="45" name="Shape 43"/>
+          <p:cNvSpPr/>
+          <p:nvPr/>
+        </p:nvSpPr>
+        <p:spPr>
+          <a:xfrm>
+            <a:off x="10084003" y="3764689"/>
+            <a:ext cx="94412" cy="-109885"/>
+          </a:xfrm>
+          <a:prstGeom prst="line">
+            <a:avLst/>
+          </a:prstGeom>
+          <a:noFill/>
+          <a:ln w="25400">
+            <a:solidFill>
+              <a:srgbClr val="F09042"/>
+            </a:solidFill>
+            <a:prstDash val="solid"/>
+          </a:ln>
+        </p:spPr>
+      </p:sp>
+      <p:sp>
+        <p:nvSpPr>
+          <p:cNvPr id="46" name="Shape 44"/>
+          <p:cNvSpPr/>
+          <p:nvPr/>
+        </p:nvSpPr>
+        <p:spPr>
+          <a:xfrm>
+            <a:off x="10178415" y="3654804"/>
+            <a:ext cx="94412" cy="-90898"/>
+          </a:xfrm>
+          <a:prstGeom prst="line">
+            <a:avLst/>
+          </a:prstGeom>
+          <a:noFill/>
+          <a:ln w="25400">
+            <a:solidFill>
+              <a:srgbClr val="F09042"/>
+            </a:solidFill>
+            <a:prstDash val="solid"/>
+          </a:ln>
+        </p:spPr>
+      </p:sp>
+      <p:sp>
+        <p:nvSpPr>
+          <p:cNvPr id="47" name="Shape 45"/>
+          <p:cNvSpPr/>
+          <p:nvPr/>
+        </p:nvSpPr>
+        <p:spPr>
+          <a:xfrm>
+            <a:off x="10272827" y="3563906"/>
+            <a:ext cx="94412" cy="-73379"/>
+          </a:xfrm>
+          <a:prstGeom prst="line">
+            <a:avLst/>
+          </a:prstGeom>
+          <a:noFill/>
+          <a:ln w="25400">
+            <a:solidFill>
+              <a:srgbClr val="F09042"/>
+            </a:solidFill>
+            <a:prstDash val="solid"/>
+          </a:ln>
+        </p:spPr>
+      </p:sp>
+      <p:sp>
+        <p:nvSpPr>
+          <p:cNvPr id="48" name="Shape 46"/>
+          <p:cNvSpPr/>
+          <p:nvPr/>
+        </p:nvSpPr>
+        <p:spPr>
+          <a:xfrm>
+            <a:off x="10367239" y="3490527"/>
+            <a:ext cx="94412" cy="-58077"/>
+          </a:xfrm>
+          <a:prstGeom prst="line">
+            <a:avLst/>
+          </a:prstGeom>
+          <a:noFill/>
+          <a:ln w="25400">
+            <a:solidFill>
+              <a:srgbClr val="F09042"/>
+            </a:solidFill>
+            <a:prstDash val="solid"/>
+          </a:ln>
+        </p:spPr>
+      </p:sp>
+      <p:sp>
+        <p:nvSpPr>
+          <p:cNvPr id="49" name="Shape 47"/>
+          <p:cNvSpPr/>
+          <p:nvPr/>
+        </p:nvSpPr>
+        <p:spPr>
+          <a:xfrm>
+            <a:off x="10461650" y="3432450"/>
+            <a:ext cx="94412" cy="-45252"/>
+          </a:xfrm>
+          <a:prstGeom prst="line">
+            <a:avLst/>
+          </a:prstGeom>
+          <a:noFill/>
+          <a:ln w="25400">
+            <a:solidFill>
+              <a:srgbClr val="F09042"/>
+            </a:solidFill>
+            <a:prstDash val="solid"/>
+          </a:ln>
+        </p:spPr>
+      </p:sp>
+      <p:sp>
+        <p:nvSpPr>
+          <p:cNvPr id="50" name="Shape 48"/>
+          <p:cNvSpPr/>
+          <p:nvPr/>
+        </p:nvSpPr>
+        <p:spPr>
+          <a:xfrm>
+            <a:off x="10556062" y="3387198"/>
+            <a:ext cx="94412" cy="-34831"/>
+          </a:xfrm>
+          <a:prstGeom prst="line">
+            <a:avLst/>
+          </a:prstGeom>
+          <a:noFill/>
+          <a:ln w="25400">
+            <a:solidFill>
+              <a:srgbClr val="F09042"/>
+            </a:solidFill>
+            <a:prstDash val="solid"/>
+          </a:ln>
+        </p:spPr>
+      </p:sp>
+      <p:sp>
+        <p:nvSpPr>
+          <p:cNvPr id="51" name="Shape 49"/>
+          <p:cNvSpPr/>
+          <p:nvPr/>
+        </p:nvSpPr>
+        <p:spPr>
+          <a:xfrm>
+            <a:off x="10650474" y="3352367"/>
+            <a:ext cx="94412" cy="-26558"/>
+          </a:xfrm>
+          <a:prstGeom prst="line">
+            <a:avLst/>
+          </a:prstGeom>
+          <a:noFill/>
+          <a:ln w="25400">
+            <a:solidFill>
+              <a:srgbClr val="F09042"/>
+            </a:solidFill>
+            <a:prstDash val="solid"/>
+          </a:ln>
+        </p:spPr>
+      </p:sp>
+      <p:sp>
+        <p:nvSpPr>
+          <p:cNvPr id="52" name="Shape 50"/>
+          <p:cNvSpPr/>
+          <p:nvPr/>
+        </p:nvSpPr>
+        <p:spPr>
+          <a:xfrm>
+            <a:off x="10744886" y="3325809"/>
+            <a:ext cx="94412" cy="-20105"/>
+          </a:xfrm>
+          <a:prstGeom prst="line">
+            <a:avLst/>
+          </a:prstGeom>
+          <a:noFill/>
+          <a:ln w="25400">
+            <a:solidFill>
+              <a:srgbClr val="F09042"/>
+            </a:solidFill>
+            <a:prstDash val="solid"/>
+          </a:ln>
+        </p:spPr>
+      </p:sp>
+      <p:sp>
+        <p:nvSpPr>
+          <p:cNvPr id="53" name="Shape 51"/>
+          <p:cNvSpPr/>
+          <p:nvPr/>
+        </p:nvSpPr>
+        <p:spPr>
+          <a:xfrm>
+            <a:off x="10839298" y="3305705"/>
+            <a:ext cx="94412" cy="-15137"/>
+          </a:xfrm>
+          <a:prstGeom prst="line">
+            <a:avLst/>
+          </a:prstGeom>
+          <a:noFill/>
+          <a:ln w="25400">
+            <a:solidFill>
+              <a:srgbClr val="F09042"/>
+            </a:solidFill>
+            <a:prstDash val="solid"/>
+          </a:ln>
+        </p:spPr>
+      </p:sp>
+      <p:sp>
+        <p:nvSpPr>
+          <p:cNvPr id="54" name="Shape 52"/>
+          <p:cNvSpPr/>
+          <p:nvPr/>
+        </p:nvSpPr>
+        <p:spPr>
+          <a:xfrm>
+            <a:off x="10933709" y="3290568"/>
+            <a:ext cx="94412" cy="-11350"/>
+          </a:xfrm>
+          <a:prstGeom prst="line">
+            <a:avLst/>
+          </a:prstGeom>
+          <a:noFill/>
+          <a:ln w="25400">
+            <a:solidFill>
+              <a:srgbClr val="F09042"/>
+            </a:solidFill>
+            <a:prstDash val="solid"/>
+          </a:ln>
+        </p:spPr>
+      </p:sp>
+      <p:sp>
+        <p:nvSpPr>
+          <p:cNvPr id="55" name="Shape 53"/>
+          <p:cNvSpPr/>
+          <p:nvPr/>
+        </p:nvSpPr>
+        <p:spPr>
+          <a:xfrm>
+            <a:off x="11028121" y="3279218"/>
+            <a:ext cx="94412" cy="-8484"/>
+          </a:xfrm>
+          <a:prstGeom prst="line">
+            <a:avLst/>
+          </a:prstGeom>
+          <a:noFill/>
+          <a:ln w="25400">
+            <a:solidFill>
+              <a:srgbClr val="F09042"/>
+            </a:solidFill>
+            <a:prstDash val="solid"/>
+          </a:ln>
+        </p:spPr>
+      </p:sp>
+      <p:sp>
+        <p:nvSpPr>
+          <p:cNvPr id="56" name="Shape 54"/>
+          <p:cNvSpPr/>
+          <p:nvPr/>
+        </p:nvSpPr>
+        <p:spPr>
+          <a:xfrm>
+            <a:off x="11122533" y="3270734"/>
+            <a:ext cx="94412" cy="-6327"/>
+          </a:xfrm>
+          <a:prstGeom prst="line">
+            <a:avLst/>
+          </a:prstGeom>
+          <a:noFill/>
+          <a:ln w="25400">
+            <a:solidFill>
+              <a:srgbClr val="F09042"/>
+            </a:solidFill>
+            <a:prstDash val="solid"/>
+          </a:ln>
+        </p:spPr>
+      </p:sp>
+      <p:sp>
+        <p:nvSpPr>
+          <p:cNvPr id="57" name="Shape 55"/>
+          <p:cNvSpPr/>
+          <p:nvPr/>
+        </p:nvSpPr>
+        <p:spPr>
+          <a:xfrm>
+            <a:off x="11216945" y="3264406"/>
+            <a:ext cx="94412" cy="-4711"/>
+          </a:xfrm>
+          <a:prstGeom prst="line">
+            <a:avLst/>
+          </a:prstGeom>
+          <a:noFill/>
+          <a:ln w="25400">
+            <a:solidFill>
+              <a:srgbClr val="F09042"/>
+            </a:solidFill>
+            <a:prstDash val="solid"/>
+          </a:ln>
+        </p:spPr>
+      </p:sp>
+      <p:sp>
+        <p:nvSpPr>
+          <p:cNvPr id="58" name="Shape 56"/>
+          <p:cNvSpPr/>
+          <p:nvPr/>
+        </p:nvSpPr>
+        <p:spPr>
+          <a:xfrm>
+            <a:off x="11311357" y="3259696"/>
+            <a:ext cx="94412" cy="-3503"/>
+          </a:xfrm>
+          <a:prstGeom prst="line">
+            <a:avLst/>
+          </a:prstGeom>
+          <a:noFill/>
+          <a:ln w="25400">
+            <a:solidFill>
+              <a:srgbClr val="F09042"/>
+            </a:solidFill>
+            <a:prstDash val="solid"/>
+          </a:ln>
+        </p:spPr>
+      </p:sp>
+      <p:sp>
+        <p:nvSpPr>
+          <p:cNvPr id="59" name="Shape 57"/>
+          <p:cNvSpPr/>
+          <p:nvPr/>
+        </p:nvSpPr>
+        <p:spPr>
+          <a:xfrm>
+            <a:off x="11405768" y="3256193"/>
+            <a:ext cx="94412" cy="-2602"/>
+          </a:xfrm>
+          <a:prstGeom prst="line">
+            <a:avLst/>
+          </a:prstGeom>
+          <a:noFill/>
+          <a:ln w="25400">
+            <a:solidFill>
+              <a:srgbClr val="F09042"/>
+            </a:solidFill>
+            <a:prstDash val="solid"/>
+          </a:ln>
+        </p:spPr>
+      </p:sp>
+      <p:sp>
+        <p:nvSpPr>
+          <p:cNvPr id="60" name="Shape 58"/>
+          <p:cNvSpPr/>
+          <p:nvPr/>
+        </p:nvSpPr>
+        <p:spPr>
+          <a:xfrm>
+            <a:off x="11500180" y="3253591"/>
+            <a:ext cx="94412" cy="-1932"/>
+          </a:xfrm>
+          <a:prstGeom prst="line">
+            <a:avLst/>
+          </a:prstGeom>
+          <a:noFill/>
+          <a:ln w="25400">
+            <a:solidFill>
+              <a:srgbClr val="F09042"/>
+            </a:solidFill>
+            <a:prstDash val="solid"/>
+          </a:ln>
+        </p:spPr>
+      </p:sp>
+      <p:sp>
+        <p:nvSpPr>
+          <p:cNvPr id="61" name="Text 59"/>
           <p:cNvSpPr/>
           <p:nvPr/>
         </p:nvSpPr>

--- a/formations/output/biostat-module-3-associations.pptx
+++ b/formations/output/biostat-module-3-associations.pptx
@@ -3012,7 +3012,7 @@
         <p:spPr>
           <a:xfrm>
             <a:off x="8134811" y="3429000"/>
-            <a:ext cx="0" cy="2240280"/>
+            <a:ext cx="4572" cy="2240280"/>
           </a:xfrm>
           <a:prstGeom prst="line">
             <a:avLst/>
@@ -3074,7 +3074,7 @@
         <p:spPr>
           <a:xfrm>
             <a:off x="8529463" y="3709035"/>
-            <a:ext cx="1903615" cy="0"/>
+            <a:ext cx="1903615" cy="4572"/>
           </a:xfrm>
           <a:prstGeom prst="line">
             <a:avLst/>
@@ -3097,7 +3097,7 @@
         <p:spPr>
           <a:xfrm>
             <a:off x="8529463" y="3654171"/>
-            <a:ext cx="0" cy="109728"/>
+            <a:ext cx="4572" cy="109728"/>
           </a:xfrm>
           <a:prstGeom prst="line">
             <a:avLst/>
@@ -3120,7 +3120,7 @@
         <p:spPr>
           <a:xfrm>
             <a:off x="10433078" y="3654171"/>
-            <a:ext cx="0" cy="109728"/>
+            <a:ext cx="4572" cy="109728"/>
           </a:xfrm>
           <a:prstGeom prst="line">
             <a:avLst/>
@@ -3202,7 +3202,7 @@
         <p:spPr>
           <a:xfrm>
             <a:off x="8150288" y="4269105"/>
-            <a:ext cx="30953" cy="0"/>
+            <a:ext cx="30953" cy="4572"/>
           </a:xfrm>
           <a:prstGeom prst="line">
             <a:avLst/>
@@ -3225,7 +3225,7 @@
         <p:spPr>
           <a:xfrm>
             <a:off x="8150288" y="4214241"/>
-            <a:ext cx="0" cy="109728"/>
+            <a:ext cx="4572" cy="109728"/>
           </a:xfrm>
           <a:prstGeom prst="line">
             <a:avLst/>
@@ -3248,7 +3248,7 @@
         <p:spPr>
           <a:xfrm>
             <a:off x="8181241" y="4214241"/>
-            <a:ext cx="0" cy="109728"/>
+            <a:ext cx="4572" cy="109728"/>
           </a:xfrm>
           <a:prstGeom prst="line">
             <a:avLst/>
@@ -3330,7 +3330,7 @@
         <p:spPr>
           <a:xfrm>
             <a:off x="7755636" y="4829175"/>
-            <a:ext cx="518464" cy="0"/>
+            <a:ext cx="518464" cy="4572"/>
           </a:xfrm>
           <a:prstGeom prst="line">
             <a:avLst/>
@@ -3353,7 +3353,7 @@
         <p:spPr>
           <a:xfrm>
             <a:off x="7755636" y="4774311"/>
-            <a:ext cx="0" cy="109728"/>
+            <a:ext cx="4572" cy="109728"/>
           </a:xfrm>
           <a:prstGeom prst="line">
             <a:avLst/>
@@ -3376,7 +3376,7 @@
         <p:spPr>
           <a:xfrm>
             <a:off x="8274100" y="4774311"/>
-            <a:ext cx="0" cy="109728"/>
+            <a:ext cx="4572" cy="109728"/>
           </a:xfrm>
           <a:prstGeom prst="line">
             <a:avLst/>
@@ -3458,7 +3458,7 @@
         <p:spPr>
           <a:xfrm>
             <a:off x="8869947" y="5389245"/>
-            <a:ext cx="2375649" cy="0"/>
+            <a:ext cx="2375649" cy="4572"/>
           </a:xfrm>
           <a:prstGeom prst="line">
             <a:avLst/>
@@ -3481,7 +3481,7 @@
         <p:spPr>
           <a:xfrm>
             <a:off x="8869947" y="5334381"/>
-            <a:ext cx="0" cy="109728"/>
+            <a:ext cx="4572" cy="109728"/>
           </a:xfrm>
           <a:prstGeom prst="line">
             <a:avLst/>
@@ -3504,7 +3504,7 @@
         <p:spPr>
           <a:xfrm>
             <a:off x="11245596" y="5334381"/>
-            <a:ext cx="0" cy="109728"/>
+            <a:ext cx="4572" cy="109728"/>
           </a:xfrm>
           <a:prstGeom prst="line">
             <a:avLst/>
@@ -3547,7 +3547,7 @@
         <p:spPr>
           <a:xfrm>
             <a:off x="7406640" y="5715000"/>
-            <a:ext cx="4187952" cy="0"/>
+            <a:ext cx="4187952" cy="4572"/>
           </a:xfrm>
           <a:prstGeom prst="line">
             <a:avLst/>
@@ -5593,9 +5593,9 @@
           <p:nvPr/>
         </p:nvSpPr>
         <p:spPr>
-          <a:xfrm>
-            <a:off x="7818120" y="5486400"/>
-            <a:ext cx="3776472" cy="-2240280"/>
+          <a:xfrm flipV="1">
+            <a:off x="7818120" y="3246120"/>
+            <a:ext cx="3776472" cy="2240280"/>
           </a:xfrm>
           <a:prstGeom prst="line">
             <a:avLst/>
@@ -5616,9 +5616,9 @@
           <p:nvPr/>
         </p:nvSpPr>
         <p:spPr>
-          <a:xfrm>
-            <a:off x="7818120" y="5486400"/>
-            <a:ext cx="151059" cy="-403250"/>
+          <a:xfrm flipV="1">
+            <a:off x="7818120" y="5083150"/>
+            <a:ext cx="151059" cy="403250"/>
           </a:xfrm>
           <a:prstGeom prst="line">
             <a:avLst/>
@@ -5639,9 +5639,9 @@
           <p:nvPr/>
         </p:nvSpPr>
         <p:spPr>
-          <a:xfrm>
-            <a:off x="7969179" y="5083150"/>
-            <a:ext cx="151059" cy="-313639"/>
+          <a:xfrm flipV="1">
+            <a:off x="7969179" y="4769510"/>
+            <a:ext cx="151059" cy="313639"/>
           </a:xfrm>
           <a:prstGeom prst="line">
             <a:avLst/>
@@ -5662,9 +5662,9 @@
           <p:nvPr/>
         </p:nvSpPr>
         <p:spPr>
-          <a:xfrm>
-            <a:off x="8120238" y="4769510"/>
-            <a:ext cx="151059" cy="-291236"/>
+          <a:xfrm flipV="1">
+            <a:off x="8120238" y="4478274"/>
+            <a:ext cx="151059" cy="291236"/>
           </a:xfrm>
           <a:prstGeom prst="line">
             <a:avLst/>
@@ -5685,9 +5685,9 @@
           <p:nvPr/>
         </p:nvSpPr>
         <p:spPr>
-          <a:xfrm>
-            <a:off x="8271297" y="4478274"/>
-            <a:ext cx="226588" cy="-291236"/>
+          <a:xfrm flipV="1">
+            <a:off x="8271297" y="4187038"/>
+            <a:ext cx="226588" cy="291236"/>
           </a:xfrm>
           <a:prstGeom prst="line">
             <a:avLst/>
@@ -5708,9 +5708,9 @@
           <p:nvPr/>
         </p:nvSpPr>
         <p:spPr>
-          <a:xfrm>
-            <a:off x="8497885" y="4187038"/>
-            <a:ext cx="264353" cy="-224028"/>
+          <a:xfrm flipV="1">
+            <a:off x="8497885" y="3963010"/>
+            <a:ext cx="264353" cy="224028"/>
           </a:xfrm>
           <a:prstGeom prst="line">
             <a:avLst/>
@@ -5731,9 +5731,9 @@
           <p:nvPr/>
         </p:nvSpPr>
         <p:spPr>
-          <a:xfrm>
-            <a:off x="8762238" y="3963010"/>
-            <a:ext cx="302118" cy="-179222"/>
+          <a:xfrm flipV="1">
+            <a:off x="8762238" y="3783787"/>
+            <a:ext cx="302118" cy="179222"/>
           </a:xfrm>
           <a:prstGeom prst="line">
             <a:avLst/>
@@ -5754,9 +5754,9 @@
           <p:nvPr/>
         </p:nvSpPr>
         <p:spPr>
-          <a:xfrm>
-            <a:off x="9064356" y="3783787"/>
-            <a:ext cx="339882" cy="-134417"/>
+          <a:xfrm flipV="1">
+            <a:off x="9064356" y="3649370"/>
+            <a:ext cx="339882" cy="134417"/>
           </a:xfrm>
           <a:prstGeom prst="line">
             <a:avLst/>
@@ -5777,9 +5777,9 @@
           <p:nvPr/>
         </p:nvSpPr>
         <p:spPr>
-          <a:xfrm>
-            <a:off x="9404238" y="3649370"/>
-            <a:ext cx="377647" cy="-112014"/>
+          <a:xfrm flipV="1">
+            <a:off x="9404238" y="3537356"/>
+            <a:ext cx="377647" cy="112014"/>
           </a:xfrm>
           <a:prstGeom prst="line">
             <a:avLst/>
@@ -5800,9 +5800,9 @@
           <p:nvPr/>
         </p:nvSpPr>
         <p:spPr>
-          <a:xfrm>
-            <a:off x="9781885" y="3537356"/>
-            <a:ext cx="377647" cy="-89611"/>
+          <a:xfrm flipV="1">
+            <a:off x="9781885" y="3447745"/>
+            <a:ext cx="377647" cy="89611"/>
           </a:xfrm>
           <a:prstGeom prst="line">
             <a:avLst/>
@@ -5823,9 +5823,9 @@
           <p:nvPr/>
         </p:nvSpPr>
         <p:spPr>
-          <a:xfrm>
-            <a:off x="10159533" y="3447745"/>
-            <a:ext cx="377647" cy="-67208"/>
+          <a:xfrm flipV="1">
+            <a:off x="10159533" y="3380537"/>
+            <a:ext cx="377647" cy="67208"/>
           </a:xfrm>
           <a:prstGeom prst="line">
             <a:avLst/>
@@ -5846,9 +5846,9 @@
           <p:nvPr/>
         </p:nvSpPr>
         <p:spPr>
-          <a:xfrm>
-            <a:off x="10537180" y="3380537"/>
-            <a:ext cx="377647" cy="-44806"/>
+          <a:xfrm flipV="1">
+            <a:off x="10537180" y="3335731"/>
+            <a:ext cx="377647" cy="44806"/>
           </a:xfrm>
           <a:prstGeom prst="line">
             <a:avLst/>
@@ -5869,9 +5869,9 @@
           <p:nvPr/>
         </p:nvSpPr>
         <p:spPr>
-          <a:xfrm>
-            <a:off x="10914827" y="3335731"/>
-            <a:ext cx="302118" cy="-44806"/>
+          <a:xfrm flipV="1">
+            <a:off x="10914827" y="3290926"/>
+            <a:ext cx="302118" cy="44806"/>
           </a:xfrm>
           <a:prstGeom prst="line">
             <a:avLst/>
@@ -5892,9 +5892,9 @@
           <p:nvPr/>
         </p:nvSpPr>
         <p:spPr>
-          <a:xfrm>
-            <a:off x="11216945" y="3290926"/>
-            <a:ext cx="377647" cy="-44806"/>
+          <a:xfrm flipV="1">
+            <a:off x="11216945" y="3246120"/>
+            <a:ext cx="377647" cy="44806"/>
           </a:xfrm>
           <a:prstGeom prst="line">
             <a:avLst/>
@@ -6611,7 +6611,7 @@
         <p:spPr>
           <a:xfrm>
             <a:off x="7607066" y="3246120"/>
-            <a:ext cx="0" cy="2423160"/>
+            <a:ext cx="4572" cy="2423160"/>
           </a:xfrm>
           <a:prstGeom prst="line">
             <a:avLst/>
@@ -6673,7 +6673,7 @@
         <p:spPr>
           <a:xfrm>
             <a:off x="8713123" y="3488436"/>
-            <a:ext cx="2517233" cy="0"/>
+            <a:ext cx="2517233" cy="4572"/>
           </a:xfrm>
           <a:prstGeom prst="line">
             <a:avLst/>
@@ -6696,7 +6696,7 @@
         <p:spPr>
           <a:xfrm>
             <a:off x="8713123" y="3433572"/>
-            <a:ext cx="0" cy="109728"/>
+            <a:ext cx="4572" cy="109728"/>
           </a:xfrm>
           <a:prstGeom prst="line">
             <a:avLst/>
@@ -6719,7 +6719,7 @@
         <p:spPr>
           <a:xfrm>
             <a:off x="11230356" y="3433572"/>
-            <a:ext cx="0" cy="109728"/>
+            <a:ext cx="4572" cy="109728"/>
           </a:xfrm>
           <a:prstGeom prst="line">
             <a:avLst/>
@@ -6801,7 +6801,7 @@
         <p:spPr>
           <a:xfrm>
             <a:off x="7610880" y="3973068"/>
-            <a:ext cx="15256" cy="0"/>
+            <a:ext cx="15256" cy="4572"/>
           </a:xfrm>
           <a:prstGeom prst="line">
             <a:avLst/>
@@ -6824,7 +6824,7 @@
         <p:spPr>
           <a:xfrm>
             <a:off x="7610880" y="3918204"/>
-            <a:ext cx="0" cy="109728"/>
+            <a:ext cx="4572" cy="109728"/>
           </a:xfrm>
           <a:prstGeom prst="line">
             <a:avLst/>
@@ -6847,7 +6847,7 @@
         <p:spPr>
           <a:xfrm>
             <a:off x="7626136" y="3918204"/>
-            <a:ext cx="0" cy="109728"/>
+            <a:ext cx="4572" cy="109728"/>
           </a:xfrm>
           <a:prstGeom prst="line">
             <a:avLst/>
@@ -6929,7 +6929,7 @@
         <p:spPr>
           <a:xfrm>
             <a:off x="7683346" y="4457700"/>
-            <a:ext cx="629308" cy="0"/>
+            <a:ext cx="629308" cy="4572"/>
           </a:xfrm>
           <a:prstGeom prst="line">
             <a:avLst/>
@@ -6952,7 +6952,7 @@
         <p:spPr>
           <a:xfrm>
             <a:off x="7683346" y="4402836"/>
-            <a:ext cx="0" cy="109728"/>
+            <a:ext cx="4572" cy="109728"/>
           </a:xfrm>
           <a:prstGeom prst="line">
             <a:avLst/>
@@ -6975,7 +6975,7 @@
         <p:spPr>
           <a:xfrm>
             <a:off x="8312654" y="4402836"/>
-            <a:ext cx="0" cy="109728"/>
+            <a:ext cx="4572" cy="109728"/>
           </a:xfrm>
           <a:prstGeom prst="line">
             <a:avLst/>
@@ -7057,7 +7057,7 @@
         <p:spPr>
           <a:xfrm>
             <a:off x="7587996" y="4942332"/>
-            <a:ext cx="450051" cy="0"/>
+            <a:ext cx="450051" cy="4572"/>
           </a:xfrm>
           <a:prstGeom prst="line">
             <a:avLst/>
@@ -7080,7 +7080,7 @@
         <p:spPr>
           <a:xfrm>
             <a:off x="7587996" y="4887468"/>
-            <a:ext cx="0" cy="109728"/>
+            <a:ext cx="4572" cy="109728"/>
           </a:xfrm>
           <a:prstGeom prst="line">
             <a:avLst/>
@@ -7103,7 +7103,7 @@
         <p:spPr>
           <a:xfrm>
             <a:off x="8038047" y="4887468"/>
-            <a:ext cx="0" cy="109728"/>
+            <a:ext cx="4572" cy="109728"/>
           </a:xfrm>
           <a:prstGeom prst="line">
             <a:avLst/>
@@ -7185,7 +7185,7 @@
         <p:spPr>
           <a:xfrm>
             <a:off x="7626136" y="5426964"/>
-            <a:ext cx="587354" cy="0"/>
+            <a:ext cx="587354" cy="4572"/>
           </a:xfrm>
           <a:prstGeom prst="line">
             <a:avLst/>
@@ -7208,7 +7208,7 @@
         <p:spPr>
           <a:xfrm>
             <a:off x="7626136" y="5372100"/>
-            <a:ext cx="0" cy="109728"/>
+            <a:ext cx="4572" cy="109728"/>
           </a:xfrm>
           <a:prstGeom prst="line">
             <a:avLst/>
@@ -7231,7 +7231,7 @@
         <p:spPr>
           <a:xfrm>
             <a:off x="8213490" y="5372100"/>
-            <a:ext cx="0" cy="109728"/>
+            <a:ext cx="4572" cy="109728"/>
           </a:xfrm>
           <a:prstGeom prst="line">
             <a:avLst/>
@@ -7274,7 +7274,7 @@
         <p:spPr>
           <a:xfrm>
             <a:off x="7223760" y="5715000"/>
-            <a:ext cx="4370832" cy="0"/>
+            <a:ext cx="4370832" cy="4572"/>
           </a:xfrm>
           <a:prstGeom prst="line">
             <a:avLst/>
@@ -9364,7 +9364,7 @@
         <p:spPr>
           <a:xfrm>
             <a:off x="4200144" y="4366260"/>
-            <a:ext cx="182880" cy="0"/>
+            <a:ext cx="182880" cy="4572"/>
           </a:xfrm>
           <a:prstGeom prst="line">
             <a:avLst/>
@@ -9408,9 +9408,9 @@
           <p:nvPr/>
         </p:nvSpPr>
         <p:spPr>
-          <a:xfrm>
-            <a:off x="4309872" y="4439412"/>
-            <a:ext cx="73152" cy="-73152"/>
+          <a:xfrm flipV="1">
+            <a:off x="4309872" y="4366260"/>
+            <a:ext cx="73152" cy="73152"/>
           </a:xfrm>
           <a:prstGeom prst="line">
             <a:avLst/>
@@ -9584,7 +9584,7 @@
         <p:spPr>
           <a:xfrm>
             <a:off x="7988808" y="4366260"/>
-            <a:ext cx="182880" cy="0"/>
+            <a:ext cx="182880" cy="4572"/>
           </a:xfrm>
           <a:prstGeom prst="line">
             <a:avLst/>
@@ -9628,9 +9628,9 @@
           <p:nvPr/>
         </p:nvSpPr>
         <p:spPr>
-          <a:xfrm>
-            <a:off x="8098536" y="4439412"/>
-            <a:ext cx="73152" cy="-73152"/>
+          <a:xfrm flipV="1">
+            <a:off x="8098536" y="4366260"/>
+            <a:ext cx="73152" cy="73152"/>
           </a:xfrm>
           <a:prstGeom prst="line">
             <a:avLst/>
@@ -12672,9 +12672,9 @@
           <p:nvPr/>
         </p:nvSpPr>
         <p:spPr>
-          <a:xfrm>
-            <a:off x="7818120" y="5217566"/>
-            <a:ext cx="3776472" cy="-1568196"/>
+          <a:xfrm flipV="1">
+            <a:off x="7818120" y="3649370"/>
+            <a:ext cx="3776472" cy="1568196"/>
           </a:xfrm>
           <a:prstGeom prst="line">
             <a:avLst/>
@@ -14120,9 +14120,9 @@
           <p:nvPr/>
         </p:nvSpPr>
         <p:spPr>
-          <a:xfrm>
-            <a:off x="7818120" y="5150358"/>
-            <a:ext cx="3776472" cy="-1232154"/>
+          <a:xfrm flipV="1">
+            <a:off x="7818120" y="3918204"/>
+            <a:ext cx="3776472" cy="1232154"/>
           </a:xfrm>
           <a:prstGeom prst="line">
             <a:avLst/>
@@ -14780,7 +14780,7 @@
         <p:spPr>
           <a:xfrm>
             <a:off x="8752204" y="3246120"/>
-            <a:ext cx="0" cy="2240280"/>
+            <a:ext cx="4572" cy="2240280"/>
           </a:xfrm>
           <a:prstGeom prst="line">
             <a:avLst/>
@@ -14842,7 +14842,7 @@
         <p:spPr>
           <a:xfrm>
             <a:off x="8811175" y="3526155"/>
-            <a:ext cx="180844" cy="0"/>
+            <a:ext cx="180844" cy="4572"/>
           </a:xfrm>
           <a:prstGeom prst="line">
             <a:avLst/>
@@ -14865,7 +14865,7 @@
         <p:spPr>
           <a:xfrm>
             <a:off x="8811175" y="3471291"/>
-            <a:ext cx="0" cy="109728"/>
+            <a:ext cx="4572" cy="109728"/>
           </a:xfrm>
           <a:prstGeom prst="line">
             <a:avLst/>
@@ -14888,7 +14888,7 @@
         <p:spPr>
           <a:xfrm>
             <a:off x="8992018" y="3471291"/>
-            <a:ext cx="0" cy="109728"/>
+            <a:ext cx="4572" cy="109728"/>
           </a:xfrm>
           <a:prstGeom prst="line">
             <a:avLst/>
@@ -14970,7 +14970,7 @@
         <p:spPr>
           <a:xfrm>
             <a:off x="6707886" y="4086225"/>
-            <a:ext cx="2437456" cy="0"/>
+            <a:ext cx="2437456" cy="4572"/>
           </a:xfrm>
           <a:prstGeom prst="line">
             <a:avLst/>
@@ -14993,7 +14993,7 @@
         <p:spPr>
           <a:xfrm>
             <a:off x="6707886" y="4031361"/>
-            <a:ext cx="0" cy="109728"/>
+            <a:ext cx="4572" cy="109728"/>
           </a:xfrm>
           <a:prstGeom prst="line">
             <a:avLst/>
@@ -15016,7 +15016,7 @@
         <p:spPr>
           <a:xfrm>
             <a:off x="9145342" y="4031361"/>
-            <a:ext cx="0" cy="109728"/>
+            <a:ext cx="4572" cy="109728"/>
           </a:xfrm>
           <a:prstGeom prst="line">
             <a:avLst/>
@@ -15098,7 +15098,7 @@
         <p:spPr>
           <a:xfrm>
             <a:off x="8811175" y="4646295"/>
-            <a:ext cx="235883" cy="0"/>
+            <a:ext cx="235883" cy="4572"/>
           </a:xfrm>
           <a:prstGeom prst="line">
             <a:avLst/>
@@ -15121,7 +15121,7 @@
         <p:spPr>
           <a:xfrm>
             <a:off x="8811175" y="4591431"/>
-            <a:ext cx="0" cy="109728"/>
+            <a:ext cx="4572" cy="109728"/>
           </a:xfrm>
           <a:prstGeom prst="line">
             <a:avLst/>
@@ -15144,7 +15144,7 @@
         <p:spPr>
           <a:xfrm>
             <a:off x="9047057" y="4591431"/>
-            <a:ext cx="0" cy="109728"/>
+            <a:ext cx="4572" cy="109728"/>
           </a:xfrm>
           <a:prstGeom prst="line">
             <a:avLst/>
@@ -15226,7 +15226,7 @@
         <p:spPr>
           <a:xfrm>
             <a:off x="8791518" y="5206365"/>
-            <a:ext cx="2358828" cy="0"/>
+            <a:ext cx="2358828" cy="4572"/>
           </a:xfrm>
           <a:prstGeom prst="line">
             <a:avLst/>
@@ -15249,7 +15249,7 @@
         <p:spPr>
           <a:xfrm>
             <a:off x="8791518" y="5151501"/>
-            <a:ext cx="0" cy="109728"/>
+            <a:ext cx="4572" cy="109728"/>
           </a:xfrm>
           <a:prstGeom prst="line">
             <a:avLst/>
@@ -15272,7 +15272,7 @@
         <p:spPr>
           <a:xfrm>
             <a:off x="11150346" y="5151501"/>
-            <a:ext cx="0" cy="109728"/>
+            <a:ext cx="4572" cy="109728"/>
           </a:xfrm>
           <a:prstGeom prst="line">
             <a:avLst/>
@@ -15315,7 +15315,7 @@
         <p:spPr>
           <a:xfrm>
             <a:off x="6263640" y="5532120"/>
-            <a:ext cx="5330952" cy="0"/>
+            <a:ext cx="5330952" cy="4572"/>
           </a:xfrm>
           <a:prstGeom prst="line">
             <a:avLst/>
@@ -18107,7 +18107,7 @@
         <p:spPr>
           <a:xfrm>
             <a:off x="7818120" y="4366260"/>
-            <a:ext cx="3776472" cy="0"/>
+            <a:ext cx="3776472" cy="4572"/>
           </a:xfrm>
           <a:prstGeom prst="line">
             <a:avLst/>
@@ -18128,9 +18128,9 @@
           <p:nvPr/>
         </p:nvSpPr>
         <p:spPr>
-          <a:xfrm>
-            <a:off x="7818120" y="5480861"/>
-            <a:ext cx="94412" cy="-1932"/>
+          <a:xfrm flipV="1">
+            <a:off x="7818120" y="5478929"/>
+            <a:ext cx="94412" cy="4572"/>
           </a:xfrm>
           <a:prstGeom prst="line">
             <a:avLst/>
@@ -18151,9 +18151,9 @@
           <p:nvPr/>
         </p:nvSpPr>
         <p:spPr>
-          <a:xfrm>
-            <a:off x="7912532" y="5478929"/>
-            <a:ext cx="94412" cy="-2602"/>
+          <a:xfrm flipV="1">
+            <a:off x="7912532" y="5476327"/>
+            <a:ext cx="94412" cy="4572"/>
           </a:xfrm>
           <a:prstGeom prst="line">
             <a:avLst/>
@@ -18174,9 +18174,9 @@
           <p:nvPr/>
         </p:nvSpPr>
         <p:spPr>
-          <a:xfrm>
-            <a:off x="8006944" y="5476327"/>
-            <a:ext cx="94412" cy="-3503"/>
+          <a:xfrm flipV="1">
+            <a:off x="8006944" y="5472824"/>
+            <a:ext cx="94412" cy="4572"/>
           </a:xfrm>
           <a:prstGeom prst="line">
             <a:avLst/>
@@ -18197,9 +18197,9 @@
           <p:nvPr/>
         </p:nvSpPr>
         <p:spPr>
-          <a:xfrm>
-            <a:off x="8101355" y="5472824"/>
-            <a:ext cx="94412" cy="-4711"/>
+          <a:xfrm flipV="1">
+            <a:off x="8101355" y="5468114"/>
+            <a:ext cx="94412" cy="4711"/>
           </a:xfrm>
           <a:prstGeom prst="line">
             <a:avLst/>
@@ -18220,9 +18220,9 @@
           <p:nvPr/>
         </p:nvSpPr>
         <p:spPr>
-          <a:xfrm>
-            <a:off x="8195767" y="5468114"/>
-            <a:ext cx="94412" cy="-6327"/>
+          <a:xfrm flipV="1">
+            <a:off x="8195767" y="5461786"/>
+            <a:ext cx="94412" cy="6327"/>
           </a:xfrm>
           <a:prstGeom prst="line">
             <a:avLst/>
@@ -18243,9 +18243,9 @@
           <p:nvPr/>
         </p:nvSpPr>
         <p:spPr>
-          <a:xfrm>
-            <a:off x="8290179" y="5461786"/>
-            <a:ext cx="94412" cy="-8484"/>
+          <a:xfrm flipV="1">
+            <a:off x="8290179" y="5453302"/>
+            <a:ext cx="94412" cy="8484"/>
           </a:xfrm>
           <a:prstGeom prst="line">
             <a:avLst/>
@@ -18266,9 +18266,9 @@
           <p:nvPr/>
         </p:nvSpPr>
         <p:spPr>
-          <a:xfrm>
-            <a:off x="8384591" y="5453302"/>
-            <a:ext cx="94412" cy="-11350"/>
+          <a:xfrm flipV="1">
+            <a:off x="8384591" y="5441952"/>
+            <a:ext cx="94412" cy="11350"/>
           </a:xfrm>
           <a:prstGeom prst="line">
             <a:avLst/>
@@ -18289,9 +18289,9 @@
           <p:nvPr/>
         </p:nvSpPr>
         <p:spPr>
-          <a:xfrm>
-            <a:off x="8479003" y="5441952"/>
-            <a:ext cx="94412" cy="-15137"/>
+          <a:xfrm flipV="1">
+            <a:off x="8479003" y="5426815"/>
+            <a:ext cx="94412" cy="15137"/>
           </a:xfrm>
           <a:prstGeom prst="line">
             <a:avLst/>
@@ -18312,9 +18312,9 @@
           <p:nvPr/>
         </p:nvSpPr>
         <p:spPr>
-          <a:xfrm>
-            <a:off x="8573414" y="5426815"/>
-            <a:ext cx="94412" cy="-20105"/>
+          <a:xfrm flipV="1">
+            <a:off x="8573414" y="5406711"/>
+            <a:ext cx="94412" cy="20105"/>
           </a:xfrm>
           <a:prstGeom prst="line">
             <a:avLst/>
@@ -18335,9 +18335,9 @@
           <p:nvPr/>
         </p:nvSpPr>
         <p:spPr>
-          <a:xfrm>
-            <a:off x="8667826" y="5406711"/>
-            <a:ext cx="94412" cy="-26558"/>
+          <a:xfrm flipV="1">
+            <a:off x="8667826" y="5380153"/>
+            <a:ext cx="94412" cy="26558"/>
           </a:xfrm>
           <a:prstGeom prst="line">
             <a:avLst/>
@@ -18358,9 +18358,9 @@
           <p:nvPr/>
         </p:nvSpPr>
         <p:spPr>
-          <a:xfrm>
-            <a:off x="8762238" y="5380153"/>
-            <a:ext cx="94412" cy="-34831"/>
+          <a:xfrm flipV="1">
+            <a:off x="8762238" y="5345322"/>
+            <a:ext cx="94412" cy="34831"/>
           </a:xfrm>
           <a:prstGeom prst="line">
             <a:avLst/>
@@ -18381,9 +18381,9 @@
           <p:nvPr/>
         </p:nvSpPr>
         <p:spPr>
-          <a:xfrm>
-            <a:off x="8856650" y="5345322"/>
-            <a:ext cx="94412" cy="-45252"/>
+          <a:xfrm flipV="1">
+            <a:off x="8856650" y="5300070"/>
+            <a:ext cx="94412" cy="45252"/>
           </a:xfrm>
           <a:prstGeom prst="line">
             <a:avLst/>
@@ -18404,9 +18404,9 @@
           <p:nvPr/>
         </p:nvSpPr>
         <p:spPr>
-          <a:xfrm>
-            <a:off x="8951062" y="5300070"/>
-            <a:ext cx="94412" cy="-58077"/>
+          <a:xfrm flipV="1">
+            <a:off x="8951062" y="5241993"/>
+            <a:ext cx="94412" cy="58077"/>
           </a:xfrm>
           <a:prstGeom prst="line">
             <a:avLst/>
@@ -18427,9 +18427,9 @@
           <p:nvPr/>
         </p:nvSpPr>
         <p:spPr>
-          <a:xfrm>
-            <a:off x="9045473" y="5241993"/>
-            <a:ext cx="94412" cy="-73379"/>
+          <a:xfrm flipV="1">
+            <a:off x="9045473" y="5168614"/>
+            <a:ext cx="94412" cy="73379"/>
           </a:xfrm>
           <a:prstGeom prst="line">
             <a:avLst/>
@@ -18450,9 +18450,9 @@
           <p:nvPr/>
         </p:nvSpPr>
         <p:spPr>
-          <a:xfrm>
-            <a:off x="9139885" y="5168614"/>
-            <a:ext cx="94412" cy="-90898"/>
+          <a:xfrm flipV="1">
+            <a:off x="9139885" y="5077716"/>
+            <a:ext cx="94412" cy="90898"/>
           </a:xfrm>
           <a:prstGeom prst="line">
             <a:avLst/>
@@ -18473,9 +18473,9 @@
           <p:nvPr/>
         </p:nvSpPr>
         <p:spPr>
-          <a:xfrm>
-            <a:off x="9234297" y="5077716"/>
-            <a:ext cx="94412" cy="-109885"/>
+          <a:xfrm flipV="1">
+            <a:off x="9234297" y="4967831"/>
+            <a:ext cx="94412" cy="109885"/>
           </a:xfrm>
           <a:prstGeom prst="line">
             <a:avLst/>
@@ -18496,9 +18496,9 @@
           <p:nvPr/>
         </p:nvSpPr>
         <p:spPr>
-          <a:xfrm>
-            <a:off x="9328709" y="4967831"/>
-            <a:ext cx="94412" cy="-128985"/>
+          <a:xfrm flipV="1">
+            <a:off x="9328709" y="4838846"/>
+            <a:ext cx="94412" cy="128985"/>
           </a:xfrm>
           <a:prstGeom prst="line">
             <a:avLst/>
@@ -18519,9 +18519,9 @@
           <p:nvPr/>
         </p:nvSpPr>
         <p:spPr>
-          <a:xfrm>
-            <a:off x="9423121" y="4838846"/>
-            <a:ext cx="94412" cy="-146275"/>
+          <a:xfrm flipV="1">
+            <a:off x="9423121" y="4692571"/>
+            <a:ext cx="94412" cy="146275"/>
           </a:xfrm>
           <a:prstGeom prst="line">
             <a:avLst/>
@@ -18542,9 +18542,9 @@
           <p:nvPr/>
         </p:nvSpPr>
         <p:spPr>
-          <a:xfrm>
-            <a:off x="9517532" y="4692571"/>
-            <a:ext cx="94412" cy="-159539"/>
+          <a:xfrm flipV="1">
+            <a:off x="9517532" y="4533032"/>
+            <a:ext cx="94412" cy="159539"/>
           </a:xfrm>
           <a:prstGeom prst="line">
             <a:avLst/>
@@ -18565,9 +18565,9 @@
           <p:nvPr/>
         </p:nvSpPr>
         <p:spPr>
-          <a:xfrm>
-            <a:off x="9611944" y="4533032"/>
-            <a:ext cx="94412" cy="-166772"/>
+          <a:xfrm flipV="1">
+            <a:off x="9611944" y="4366260"/>
+            <a:ext cx="94412" cy="166772"/>
           </a:xfrm>
           <a:prstGeom prst="line">
             <a:avLst/>
@@ -18588,9 +18588,9 @@
           <p:nvPr/>
         </p:nvSpPr>
         <p:spPr>
-          <a:xfrm>
-            <a:off x="9706356" y="4366260"/>
-            <a:ext cx="94412" cy="-166772"/>
+          <a:xfrm flipV="1">
+            <a:off x="9706356" y="4199488"/>
+            <a:ext cx="94412" cy="166772"/>
           </a:xfrm>
           <a:prstGeom prst="line">
             <a:avLst/>
@@ -18611,9 +18611,9 @@
           <p:nvPr/>
         </p:nvSpPr>
         <p:spPr>
-          <a:xfrm>
-            <a:off x="9800768" y="4199488"/>
-            <a:ext cx="94412" cy="-159539"/>
+          <a:xfrm flipV="1">
+            <a:off x="9800768" y="4039949"/>
+            <a:ext cx="94412" cy="159539"/>
           </a:xfrm>
           <a:prstGeom prst="line">
             <a:avLst/>
@@ -18634,9 +18634,9 @@
           <p:nvPr/>
         </p:nvSpPr>
         <p:spPr>
-          <a:xfrm>
-            <a:off x="9895180" y="4039949"/>
-            <a:ext cx="94412" cy="-146275"/>
+          <a:xfrm flipV="1">
+            <a:off x="9895180" y="3893674"/>
+            <a:ext cx="94412" cy="146275"/>
           </a:xfrm>
           <a:prstGeom prst="line">
             <a:avLst/>
@@ -18657,9 +18657,9 @@
           <p:nvPr/>
         </p:nvSpPr>
         <p:spPr>
-          <a:xfrm>
-            <a:off x="9989591" y="3893674"/>
-            <a:ext cx="94412" cy="-128985"/>
+          <a:xfrm flipV="1">
+            <a:off x="9989591" y="3764689"/>
+            <a:ext cx="94412" cy="128985"/>
           </a:xfrm>
           <a:prstGeom prst="line">
             <a:avLst/>
@@ -18680,9 +18680,9 @@
           <p:nvPr/>
         </p:nvSpPr>
         <p:spPr>
-          <a:xfrm>
-            <a:off x="10084003" y="3764689"/>
-            <a:ext cx="94412" cy="-109885"/>
+          <a:xfrm flipV="1">
+            <a:off x="10084003" y="3654804"/>
+            <a:ext cx="94412" cy="109885"/>
           </a:xfrm>
           <a:prstGeom prst="line">
             <a:avLst/>
@@ -18703,9 +18703,9 @@
           <p:nvPr/>
         </p:nvSpPr>
         <p:spPr>
-          <a:xfrm>
-            <a:off x="10178415" y="3654804"/>
-            <a:ext cx="94412" cy="-90898"/>
+          <a:xfrm flipV="1">
+            <a:off x="10178415" y="3563906"/>
+            <a:ext cx="94412" cy="90898"/>
           </a:xfrm>
           <a:prstGeom prst="line">
             <a:avLst/>
@@ -18726,9 +18726,9 @@
           <p:nvPr/>
         </p:nvSpPr>
         <p:spPr>
-          <a:xfrm>
-            <a:off x="10272827" y="3563906"/>
-            <a:ext cx="94412" cy="-73379"/>
+          <a:xfrm flipV="1">
+            <a:off x="10272827" y="3490527"/>
+            <a:ext cx="94412" cy="73379"/>
           </a:xfrm>
           <a:prstGeom prst="line">
             <a:avLst/>
@@ -18749,9 +18749,9 @@
           <p:nvPr/>
         </p:nvSpPr>
         <p:spPr>
-          <a:xfrm>
-            <a:off x="10367239" y="3490527"/>
-            <a:ext cx="94412" cy="-58077"/>
+          <a:xfrm flipV="1">
+            <a:off x="10367239" y="3432450"/>
+            <a:ext cx="94412" cy="58077"/>
           </a:xfrm>
           <a:prstGeom prst="line">
             <a:avLst/>
@@ -18772,9 +18772,9 @@
           <p:nvPr/>
         </p:nvSpPr>
         <p:spPr>
-          <a:xfrm>
-            <a:off x="10461650" y="3432450"/>
-            <a:ext cx="94412" cy="-45252"/>
+          <a:xfrm flipV="1">
+            <a:off x="10461650" y="3387198"/>
+            <a:ext cx="94412" cy="45252"/>
           </a:xfrm>
           <a:prstGeom prst="line">
             <a:avLst/>
@@ -18795,9 +18795,9 @@
           <p:nvPr/>
         </p:nvSpPr>
         <p:spPr>
-          <a:xfrm>
-            <a:off x="10556062" y="3387198"/>
-            <a:ext cx="94412" cy="-34831"/>
+          <a:xfrm flipV="1">
+            <a:off x="10556062" y="3352367"/>
+            <a:ext cx="94412" cy="34831"/>
           </a:xfrm>
           <a:prstGeom prst="line">
             <a:avLst/>
@@ -18818,9 +18818,9 @@
           <p:nvPr/>
         </p:nvSpPr>
         <p:spPr>
-          <a:xfrm>
-            <a:off x="10650474" y="3352367"/>
-            <a:ext cx="94412" cy="-26558"/>
+          <a:xfrm flipV="1">
+            <a:off x="10650474" y="3325809"/>
+            <a:ext cx="94412" cy="26558"/>
           </a:xfrm>
           <a:prstGeom prst="line">
             <a:avLst/>
@@ -18841,9 +18841,9 @@
           <p:nvPr/>
         </p:nvSpPr>
         <p:spPr>
-          <a:xfrm>
-            <a:off x="10744886" y="3325809"/>
-            <a:ext cx="94412" cy="-20105"/>
+          <a:xfrm flipV="1">
+            <a:off x="10744886" y="3305705"/>
+            <a:ext cx="94412" cy="20105"/>
           </a:xfrm>
           <a:prstGeom prst="line">
             <a:avLst/>
@@ -18864,9 +18864,9 @@
           <p:nvPr/>
         </p:nvSpPr>
         <p:spPr>
-          <a:xfrm>
-            <a:off x="10839298" y="3305705"/>
-            <a:ext cx="94412" cy="-15137"/>
+          <a:xfrm flipV="1">
+            <a:off x="10839298" y="3290568"/>
+            <a:ext cx="94412" cy="15137"/>
           </a:xfrm>
           <a:prstGeom prst="line">
             <a:avLst/>
@@ -18887,9 +18887,9 @@
           <p:nvPr/>
         </p:nvSpPr>
         <p:spPr>
-          <a:xfrm>
-            <a:off x="10933709" y="3290568"/>
-            <a:ext cx="94412" cy="-11350"/>
+          <a:xfrm flipV="1">
+            <a:off x="10933709" y="3279218"/>
+            <a:ext cx="94412" cy="11350"/>
           </a:xfrm>
           <a:prstGeom prst="line">
             <a:avLst/>
@@ -18910,9 +18910,9 @@
           <p:nvPr/>
         </p:nvSpPr>
         <p:spPr>
-          <a:xfrm>
-            <a:off x="11028121" y="3279218"/>
-            <a:ext cx="94412" cy="-8484"/>
+          <a:xfrm flipV="1">
+            <a:off x="11028121" y="3270734"/>
+            <a:ext cx="94412" cy="8484"/>
           </a:xfrm>
           <a:prstGeom prst="line">
             <a:avLst/>
@@ -18933,9 +18933,9 @@
           <p:nvPr/>
         </p:nvSpPr>
         <p:spPr>
-          <a:xfrm>
-            <a:off x="11122533" y="3270734"/>
-            <a:ext cx="94412" cy="-6327"/>
+          <a:xfrm flipV="1">
+            <a:off x="11122533" y="3264406"/>
+            <a:ext cx="94412" cy="6327"/>
           </a:xfrm>
           <a:prstGeom prst="line">
             <a:avLst/>
@@ -18956,9 +18956,9 @@
           <p:nvPr/>
         </p:nvSpPr>
         <p:spPr>
-          <a:xfrm>
-            <a:off x="11216945" y="3264406"/>
-            <a:ext cx="94412" cy="-4711"/>
+          <a:xfrm flipV="1">
+            <a:off x="11216945" y="3259696"/>
+            <a:ext cx="94412" cy="4711"/>
           </a:xfrm>
           <a:prstGeom prst="line">
             <a:avLst/>
@@ -18979,9 +18979,9 @@
           <p:nvPr/>
         </p:nvSpPr>
         <p:spPr>
-          <a:xfrm>
-            <a:off x="11311357" y="3259696"/>
-            <a:ext cx="94412" cy="-3503"/>
+          <a:xfrm flipV="1">
+            <a:off x="11311357" y="3256193"/>
+            <a:ext cx="94412" cy="4572"/>
           </a:xfrm>
           <a:prstGeom prst="line">
             <a:avLst/>
@@ -19002,9 +19002,9 @@
           <p:nvPr/>
         </p:nvSpPr>
         <p:spPr>
-          <a:xfrm>
-            <a:off x="11405768" y="3256193"/>
-            <a:ext cx="94412" cy="-2602"/>
+          <a:xfrm flipV="1">
+            <a:off x="11405768" y="3253591"/>
+            <a:ext cx="94412" cy="4572"/>
           </a:xfrm>
           <a:prstGeom prst="line">
             <a:avLst/>
@@ -19025,9 +19025,9 @@
           <p:nvPr/>
         </p:nvSpPr>
         <p:spPr>
-          <a:xfrm>
-            <a:off x="11500180" y="3253591"/>
-            <a:ext cx="94412" cy="-1932"/>
+          <a:xfrm flipV="1">
+            <a:off x="11500180" y="3251659"/>
+            <a:ext cx="94412" cy="4572"/>
           </a:xfrm>
           <a:prstGeom prst="line">
             <a:avLst/>

--- a/formations/output/biostat-module-3-associations.pptx
+++ b/formations/output/biostat-module-3-associations.pptx
@@ -3012,7 +3012,7 @@
         <p:spPr>
           <a:xfrm>
             <a:off x="8134811" y="3429000"/>
-            <a:ext cx="4572" cy="2240280"/>
+            <a:ext cx="9144" cy="2240280"/>
           </a:xfrm>
           <a:prstGeom prst="line">
             <a:avLst/>
@@ -3074,7 +3074,7 @@
         <p:spPr>
           <a:xfrm>
             <a:off x="8529463" y="3709035"/>
-            <a:ext cx="1903615" cy="4572"/>
+            <a:ext cx="1903615" cy="9144"/>
           </a:xfrm>
           <a:prstGeom prst="line">
             <a:avLst/>
@@ -3097,7 +3097,7 @@
         <p:spPr>
           <a:xfrm>
             <a:off x="8529463" y="3654171"/>
-            <a:ext cx="4572" cy="109728"/>
+            <a:ext cx="9144" cy="109728"/>
           </a:xfrm>
           <a:prstGeom prst="line">
             <a:avLst/>
@@ -3120,7 +3120,7 @@
         <p:spPr>
           <a:xfrm>
             <a:off x="10433078" y="3654171"/>
-            <a:ext cx="4572" cy="109728"/>
+            <a:ext cx="9144" cy="109728"/>
           </a:xfrm>
           <a:prstGeom prst="line">
             <a:avLst/>
@@ -3202,7 +3202,7 @@
         <p:spPr>
           <a:xfrm>
             <a:off x="8150288" y="4269105"/>
-            <a:ext cx="30953" cy="4572"/>
+            <a:ext cx="30953" cy="9144"/>
           </a:xfrm>
           <a:prstGeom prst="line">
             <a:avLst/>
@@ -3225,7 +3225,7 @@
         <p:spPr>
           <a:xfrm>
             <a:off x="8150288" y="4214241"/>
-            <a:ext cx="4572" cy="109728"/>
+            <a:ext cx="9144" cy="109728"/>
           </a:xfrm>
           <a:prstGeom prst="line">
             <a:avLst/>
@@ -3248,7 +3248,7 @@
         <p:spPr>
           <a:xfrm>
             <a:off x="8181241" y="4214241"/>
-            <a:ext cx="4572" cy="109728"/>
+            <a:ext cx="9144" cy="109728"/>
           </a:xfrm>
           <a:prstGeom prst="line">
             <a:avLst/>
@@ -3330,7 +3330,7 @@
         <p:spPr>
           <a:xfrm>
             <a:off x="7755636" y="4829175"/>
-            <a:ext cx="518464" cy="4572"/>
+            <a:ext cx="518464" cy="9144"/>
           </a:xfrm>
           <a:prstGeom prst="line">
             <a:avLst/>
@@ -3353,7 +3353,7 @@
         <p:spPr>
           <a:xfrm>
             <a:off x="7755636" y="4774311"/>
-            <a:ext cx="4572" cy="109728"/>
+            <a:ext cx="9144" cy="109728"/>
           </a:xfrm>
           <a:prstGeom prst="line">
             <a:avLst/>
@@ -3376,7 +3376,7 @@
         <p:spPr>
           <a:xfrm>
             <a:off x="8274100" y="4774311"/>
-            <a:ext cx="4572" cy="109728"/>
+            <a:ext cx="9144" cy="109728"/>
           </a:xfrm>
           <a:prstGeom prst="line">
             <a:avLst/>
@@ -3458,7 +3458,7 @@
         <p:spPr>
           <a:xfrm>
             <a:off x="8869947" y="5389245"/>
-            <a:ext cx="2375649" cy="4572"/>
+            <a:ext cx="2375649" cy="9144"/>
           </a:xfrm>
           <a:prstGeom prst="line">
             <a:avLst/>
@@ -3481,7 +3481,7 @@
         <p:spPr>
           <a:xfrm>
             <a:off x="8869947" y="5334381"/>
-            <a:ext cx="4572" cy="109728"/>
+            <a:ext cx="9144" cy="109728"/>
           </a:xfrm>
           <a:prstGeom prst="line">
             <a:avLst/>
@@ -3504,7 +3504,7 @@
         <p:spPr>
           <a:xfrm>
             <a:off x="11245596" y="5334381"/>
-            <a:ext cx="4572" cy="109728"/>
+            <a:ext cx="9144" cy="109728"/>
           </a:xfrm>
           <a:prstGeom prst="line">
             <a:avLst/>
@@ -3547,7 +3547,7 @@
         <p:spPr>
           <a:xfrm>
             <a:off x="7406640" y="5715000"/>
-            <a:ext cx="4187952" cy="4572"/>
+            <a:ext cx="4187952" cy="9144"/>
           </a:xfrm>
           <a:prstGeom prst="line">
             <a:avLst/>
@@ -5471,7 +5471,7 @@
         <p:spPr>
           <a:xfrm>
             <a:off x="7818120" y="5486400"/>
-            <a:ext cx="3776472" cy="0"/>
+            <a:ext cx="3776472" cy="9144"/>
           </a:xfrm>
           <a:prstGeom prst="line">
             <a:avLst/>
@@ -5494,7 +5494,7 @@
         <p:spPr>
           <a:xfrm>
             <a:off x="7818120" y="3246120"/>
-            <a:ext cx="0" cy="2240280"/>
+            <a:ext cx="9144" cy="2240280"/>
           </a:xfrm>
           <a:prstGeom prst="line">
             <a:avLst/>
@@ -6611,7 +6611,7 @@
         <p:spPr>
           <a:xfrm>
             <a:off x="7607066" y="3246120"/>
-            <a:ext cx="4572" cy="2423160"/>
+            <a:ext cx="9144" cy="2423160"/>
           </a:xfrm>
           <a:prstGeom prst="line">
             <a:avLst/>
@@ -6673,7 +6673,7 @@
         <p:spPr>
           <a:xfrm>
             <a:off x="8713123" y="3488436"/>
-            <a:ext cx="2517233" cy="4572"/>
+            <a:ext cx="2517233" cy="9144"/>
           </a:xfrm>
           <a:prstGeom prst="line">
             <a:avLst/>
@@ -6696,7 +6696,7 @@
         <p:spPr>
           <a:xfrm>
             <a:off x="8713123" y="3433572"/>
-            <a:ext cx="4572" cy="109728"/>
+            <a:ext cx="9144" cy="109728"/>
           </a:xfrm>
           <a:prstGeom prst="line">
             <a:avLst/>
@@ -6719,7 +6719,7 @@
         <p:spPr>
           <a:xfrm>
             <a:off x="11230356" y="3433572"/>
-            <a:ext cx="4572" cy="109728"/>
+            <a:ext cx="9144" cy="109728"/>
           </a:xfrm>
           <a:prstGeom prst="line">
             <a:avLst/>
@@ -6801,7 +6801,7 @@
         <p:spPr>
           <a:xfrm>
             <a:off x="7610880" y="3973068"/>
-            <a:ext cx="15256" cy="4572"/>
+            <a:ext cx="15256" cy="9144"/>
           </a:xfrm>
           <a:prstGeom prst="line">
             <a:avLst/>
@@ -6824,7 +6824,7 @@
         <p:spPr>
           <a:xfrm>
             <a:off x="7610880" y="3918204"/>
-            <a:ext cx="4572" cy="109728"/>
+            <a:ext cx="9144" cy="109728"/>
           </a:xfrm>
           <a:prstGeom prst="line">
             <a:avLst/>
@@ -6847,7 +6847,7 @@
         <p:spPr>
           <a:xfrm>
             <a:off x="7626136" y="3918204"/>
-            <a:ext cx="4572" cy="109728"/>
+            <a:ext cx="9144" cy="109728"/>
           </a:xfrm>
           <a:prstGeom prst="line">
             <a:avLst/>
@@ -6929,7 +6929,7 @@
         <p:spPr>
           <a:xfrm>
             <a:off x="7683346" y="4457700"/>
-            <a:ext cx="629308" cy="4572"/>
+            <a:ext cx="629308" cy="9144"/>
           </a:xfrm>
           <a:prstGeom prst="line">
             <a:avLst/>
@@ -6952,7 +6952,7 @@
         <p:spPr>
           <a:xfrm>
             <a:off x="7683346" y="4402836"/>
-            <a:ext cx="4572" cy="109728"/>
+            <a:ext cx="9144" cy="109728"/>
           </a:xfrm>
           <a:prstGeom prst="line">
             <a:avLst/>
@@ -6975,7 +6975,7 @@
         <p:spPr>
           <a:xfrm>
             <a:off x="8312654" y="4402836"/>
-            <a:ext cx="4572" cy="109728"/>
+            <a:ext cx="9144" cy="109728"/>
           </a:xfrm>
           <a:prstGeom prst="line">
             <a:avLst/>
@@ -7057,7 +7057,7 @@
         <p:spPr>
           <a:xfrm>
             <a:off x="7587996" y="4942332"/>
-            <a:ext cx="450051" cy="4572"/>
+            <a:ext cx="450051" cy="9144"/>
           </a:xfrm>
           <a:prstGeom prst="line">
             <a:avLst/>
@@ -7080,7 +7080,7 @@
         <p:spPr>
           <a:xfrm>
             <a:off x="7587996" y="4887468"/>
-            <a:ext cx="4572" cy="109728"/>
+            <a:ext cx="9144" cy="109728"/>
           </a:xfrm>
           <a:prstGeom prst="line">
             <a:avLst/>
@@ -7103,7 +7103,7 @@
         <p:spPr>
           <a:xfrm>
             <a:off x="8038047" y="4887468"/>
-            <a:ext cx="4572" cy="109728"/>
+            <a:ext cx="9144" cy="109728"/>
           </a:xfrm>
           <a:prstGeom prst="line">
             <a:avLst/>
@@ -7185,7 +7185,7 @@
         <p:spPr>
           <a:xfrm>
             <a:off x="7626136" y="5426964"/>
-            <a:ext cx="587354" cy="4572"/>
+            <a:ext cx="587354" cy="9144"/>
           </a:xfrm>
           <a:prstGeom prst="line">
             <a:avLst/>
@@ -7208,7 +7208,7 @@
         <p:spPr>
           <a:xfrm>
             <a:off x="7626136" y="5372100"/>
-            <a:ext cx="4572" cy="109728"/>
+            <a:ext cx="9144" cy="109728"/>
           </a:xfrm>
           <a:prstGeom prst="line">
             <a:avLst/>
@@ -7231,7 +7231,7 @@
         <p:spPr>
           <a:xfrm>
             <a:off x="8213490" y="5372100"/>
-            <a:ext cx="4572" cy="109728"/>
+            <a:ext cx="9144" cy="109728"/>
           </a:xfrm>
           <a:prstGeom prst="line">
             <a:avLst/>
@@ -7274,7 +7274,7 @@
         <p:spPr>
           <a:xfrm>
             <a:off x="7223760" y="5715000"/>
-            <a:ext cx="4370832" cy="4572"/>
+            <a:ext cx="4370832" cy="9144"/>
           </a:xfrm>
           <a:prstGeom prst="line">
             <a:avLst/>
@@ -9364,7 +9364,7 @@
         <p:spPr>
           <a:xfrm>
             <a:off x="4200144" y="4366260"/>
-            <a:ext cx="182880" cy="4572"/>
+            <a:ext cx="182880" cy="9144"/>
           </a:xfrm>
           <a:prstGeom prst="line">
             <a:avLst/>
@@ -9584,7 +9584,7 @@
         <p:spPr>
           <a:xfrm>
             <a:off x="7988808" y="4366260"/>
-            <a:ext cx="182880" cy="4572"/>
+            <a:ext cx="182880" cy="9144"/>
           </a:xfrm>
           <a:prstGeom prst="line">
             <a:avLst/>
@@ -12110,7 +12110,7 @@
         <p:spPr>
           <a:xfrm>
             <a:off x="7818120" y="5486400"/>
-            <a:ext cx="3776472" cy="0"/>
+            <a:ext cx="3776472" cy="9144"/>
           </a:xfrm>
           <a:prstGeom prst="line">
             <a:avLst/>
@@ -12133,7 +12133,7 @@
         <p:spPr>
           <a:xfrm>
             <a:off x="7818120" y="3246120"/>
-            <a:ext cx="0" cy="2240280"/>
+            <a:ext cx="9144" cy="2240280"/>
           </a:xfrm>
           <a:prstGeom prst="line">
             <a:avLst/>
@@ -13558,7 +13558,7 @@
         <p:spPr>
           <a:xfrm>
             <a:off x="7818120" y="5486400"/>
-            <a:ext cx="3776472" cy="0"/>
+            <a:ext cx="3776472" cy="9144"/>
           </a:xfrm>
           <a:prstGeom prst="line">
             <a:avLst/>
@@ -13581,7 +13581,7 @@
         <p:spPr>
           <a:xfrm>
             <a:off x="7818120" y="3246120"/>
-            <a:ext cx="0" cy="2240280"/>
+            <a:ext cx="9144" cy="2240280"/>
           </a:xfrm>
           <a:prstGeom prst="line">
             <a:avLst/>
@@ -14780,7 +14780,7 @@
         <p:spPr>
           <a:xfrm>
             <a:off x="8752204" y="3246120"/>
-            <a:ext cx="4572" cy="2240280"/>
+            <a:ext cx="9144" cy="2240280"/>
           </a:xfrm>
           <a:prstGeom prst="line">
             <a:avLst/>
@@ -14842,7 +14842,7 @@
         <p:spPr>
           <a:xfrm>
             <a:off x="8811175" y="3526155"/>
-            <a:ext cx="180844" cy="4572"/>
+            <a:ext cx="180844" cy="9144"/>
           </a:xfrm>
           <a:prstGeom prst="line">
             <a:avLst/>
@@ -14865,7 +14865,7 @@
         <p:spPr>
           <a:xfrm>
             <a:off x="8811175" y="3471291"/>
-            <a:ext cx="4572" cy="109728"/>
+            <a:ext cx="9144" cy="109728"/>
           </a:xfrm>
           <a:prstGeom prst="line">
             <a:avLst/>
@@ -14888,7 +14888,7 @@
         <p:spPr>
           <a:xfrm>
             <a:off x="8992018" y="3471291"/>
-            <a:ext cx="4572" cy="109728"/>
+            <a:ext cx="9144" cy="109728"/>
           </a:xfrm>
           <a:prstGeom prst="line">
             <a:avLst/>
@@ -14970,7 +14970,7 @@
         <p:spPr>
           <a:xfrm>
             <a:off x="6707886" y="4086225"/>
-            <a:ext cx="2437456" cy="4572"/>
+            <a:ext cx="2437456" cy="9144"/>
           </a:xfrm>
           <a:prstGeom prst="line">
             <a:avLst/>
@@ -14993,7 +14993,7 @@
         <p:spPr>
           <a:xfrm>
             <a:off x="6707886" y="4031361"/>
-            <a:ext cx="4572" cy="109728"/>
+            <a:ext cx="9144" cy="109728"/>
           </a:xfrm>
           <a:prstGeom prst="line">
             <a:avLst/>
@@ -15016,7 +15016,7 @@
         <p:spPr>
           <a:xfrm>
             <a:off x="9145342" y="4031361"/>
-            <a:ext cx="4572" cy="109728"/>
+            <a:ext cx="9144" cy="109728"/>
           </a:xfrm>
           <a:prstGeom prst="line">
             <a:avLst/>
@@ -15098,7 +15098,7 @@
         <p:spPr>
           <a:xfrm>
             <a:off x="8811175" y="4646295"/>
-            <a:ext cx="235883" cy="4572"/>
+            <a:ext cx="235883" cy="9144"/>
           </a:xfrm>
           <a:prstGeom prst="line">
             <a:avLst/>
@@ -15121,7 +15121,7 @@
         <p:spPr>
           <a:xfrm>
             <a:off x="8811175" y="4591431"/>
-            <a:ext cx="4572" cy="109728"/>
+            <a:ext cx="9144" cy="109728"/>
           </a:xfrm>
           <a:prstGeom prst="line">
             <a:avLst/>
@@ -15144,7 +15144,7 @@
         <p:spPr>
           <a:xfrm>
             <a:off x="9047057" y="4591431"/>
-            <a:ext cx="4572" cy="109728"/>
+            <a:ext cx="9144" cy="109728"/>
           </a:xfrm>
           <a:prstGeom prst="line">
             <a:avLst/>
@@ -15226,7 +15226,7 @@
         <p:spPr>
           <a:xfrm>
             <a:off x="8791518" y="5206365"/>
-            <a:ext cx="2358828" cy="4572"/>
+            <a:ext cx="2358828" cy="9144"/>
           </a:xfrm>
           <a:prstGeom prst="line">
             <a:avLst/>
@@ -15249,7 +15249,7 @@
         <p:spPr>
           <a:xfrm>
             <a:off x="8791518" y="5151501"/>
-            <a:ext cx="4572" cy="109728"/>
+            <a:ext cx="9144" cy="109728"/>
           </a:xfrm>
           <a:prstGeom prst="line">
             <a:avLst/>
@@ -15272,7 +15272,7 @@
         <p:spPr>
           <a:xfrm>
             <a:off x="11150346" y="5151501"/>
-            <a:ext cx="4572" cy="109728"/>
+            <a:ext cx="9144" cy="109728"/>
           </a:xfrm>
           <a:prstGeom prst="line">
             <a:avLst/>
@@ -15315,7 +15315,7 @@
         <p:spPr>
           <a:xfrm>
             <a:off x="6263640" y="5532120"/>
-            <a:ext cx="5330952" cy="4572"/>
+            <a:ext cx="5330952" cy="9144"/>
           </a:xfrm>
           <a:prstGeom prst="line">
             <a:avLst/>
@@ -17983,7 +17983,7 @@
         <p:spPr>
           <a:xfrm>
             <a:off x="7818120" y="5486400"/>
-            <a:ext cx="3776472" cy="0"/>
+            <a:ext cx="3776472" cy="9144"/>
           </a:xfrm>
           <a:prstGeom prst="line">
             <a:avLst/>
@@ -18006,7 +18006,7 @@
         <p:spPr>
           <a:xfrm>
             <a:off x="7818120" y="3246120"/>
-            <a:ext cx="0" cy="2240280"/>
+            <a:ext cx="9144" cy="2240280"/>
           </a:xfrm>
           <a:prstGeom prst="line">
             <a:avLst/>
@@ -18107,7 +18107,7 @@
         <p:spPr>
           <a:xfrm>
             <a:off x="7818120" y="4366260"/>
-            <a:ext cx="3776472" cy="4572"/>
+            <a:ext cx="3776472" cy="9144"/>
           </a:xfrm>
           <a:prstGeom prst="line">
             <a:avLst/>
@@ -18130,7 +18130,7 @@
         <p:spPr>
           <a:xfrm flipV="1">
             <a:off x="7818120" y="5478929"/>
-            <a:ext cx="94412" cy="4572"/>
+            <a:ext cx="94412" cy="9144"/>
           </a:xfrm>
           <a:prstGeom prst="line">
             <a:avLst/>
@@ -18153,7 +18153,7 @@
         <p:spPr>
           <a:xfrm flipV="1">
             <a:off x="7912532" y="5476327"/>
-            <a:ext cx="94412" cy="4572"/>
+            <a:ext cx="94412" cy="9144"/>
           </a:xfrm>
           <a:prstGeom prst="line">
             <a:avLst/>
@@ -18176,7 +18176,7 @@
         <p:spPr>
           <a:xfrm flipV="1">
             <a:off x="8006944" y="5472824"/>
-            <a:ext cx="94412" cy="4572"/>
+            <a:ext cx="94412" cy="9144"/>
           </a:xfrm>
           <a:prstGeom prst="line">
             <a:avLst/>
@@ -18199,7 +18199,7 @@
         <p:spPr>
           <a:xfrm flipV="1">
             <a:off x="8101355" y="5468114"/>
-            <a:ext cx="94412" cy="4711"/>
+            <a:ext cx="94412" cy="9144"/>
           </a:xfrm>
           <a:prstGeom prst="line">
             <a:avLst/>
@@ -18222,7 +18222,7 @@
         <p:spPr>
           <a:xfrm flipV="1">
             <a:off x="8195767" y="5461786"/>
-            <a:ext cx="94412" cy="6327"/>
+            <a:ext cx="94412" cy="9144"/>
           </a:xfrm>
           <a:prstGeom prst="line">
             <a:avLst/>
@@ -18245,7 +18245,7 @@
         <p:spPr>
           <a:xfrm flipV="1">
             <a:off x="8290179" y="5453302"/>
-            <a:ext cx="94412" cy="8484"/>
+            <a:ext cx="94412" cy="9144"/>
           </a:xfrm>
           <a:prstGeom prst="line">
             <a:avLst/>
@@ -18912,7 +18912,7 @@
         <p:spPr>
           <a:xfrm flipV="1">
             <a:off x="11028121" y="3270734"/>
-            <a:ext cx="94412" cy="8484"/>
+            <a:ext cx="94412" cy="9144"/>
           </a:xfrm>
           <a:prstGeom prst="line">
             <a:avLst/>
@@ -18935,7 +18935,7 @@
         <p:spPr>
           <a:xfrm flipV="1">
             <a:off x="11122533" y="3264406"/>
-            <a:ext cx="94412" cy="6327"/>
+            <a:ext cx="94412" cy="9144"/>
           </a:xfrm>
           <a:prstGeom prst="line">
             <a:avLst/>
@@ -18958,7 +18958,7 @@
         <p:spPr>
           <a:xfrm flipV="1">
             <a:off x="11216945" y="3259696"/>
-            <a:ext cx="94412" cy="4711"/>
+            <a:ext cx="94412" cy="9144"/>
           </a:xfrm>
           <a:prstGeom prst="line">
             <a:avLst/>
@@ -18981,7 +18981,7 @@
         <p:spPr>
           <a:xfrm flipV="1">
             <a:off x="11311357" y="3256193"/>
-            <a:ext cx="94412" cy="4572"/>
+            <a:ext cx="94412" cy="9144"/>
           </a:xfrm>
           <a:prstGeom prst="line">
             <a:avLst/>
@@ -19004,7 +19004,7 @@
         <p:spPr>
           <a:xfrm flipV="1">
             <a:off x="11405768" y="3253591"/>
-            <a:ext cx="94412" cy="4572"/>
+            <a:ext cx="94412" cy="9144"/>
           </a:xfrm>
           <a:prstGeom prst="line">
             <a:avLst/>
@@ -19027,7 +19027,7 @@
         <p:spPr>
           <a:xfrm flipV="1">
             <a:off x="11500180" y="3251659"/>
-            <a:ext cx="94412" cy="4572"/>
+            <a:ext cx="94412" cy="9144"/>
           </a:xfrm>
           <a:prstGeom prst="line">
             <a:avLst/>
